--- a/Criptografia Avanzada/sse_cifrado_asimetrico.pptx
+++ b/Criptografia Avanzada/sse_cifrado_asimetrico.pptx
@@ -4,6 +4,9 @@
   <p:sldMasterIdLst>
     <p:sldMasterId id="2147483648" r:id="rId1"/>
   </p:sldMasterIdLst>
+  <p:notesMasterIdLst>
+    <p:notesMasterId r:id="rId14"/>
+  </p:notesMasterIdLst>
   <p:sldIdLst>
     <p:sldId id="256" r:id="rId2"/>
     <p:sldId id="257" r:id="rId3"/>
@@ -18,9 +21,6 @@
     <p:sldId id="266" r:id="rId12"/>
     <p:sldId id="267" r:id="rId13"/>
   </p:sldIdLst>
-  <p:notesMasterIdLst>
-    <p:notesMasterId r:id="rId14"/>
-  </p:notesMasterIdLst>
   <p:sldSz cx="12192000" cy="6858000"/>
   <p:notesSz cx="6858000" cy="12192000"/>
   <p:defaultTextStyle>
@@ -115,7 +115,335 @@
       </a:defRPr>
     </a:lvl9pPr>
   </p:defaultTextStyle>
+  <p:extLst>
+    <p:ext uri="{EFAFB233-063F-42B5-8137-9DF3F51BA10A}">
+      <p15:sldGuideLst xmlns:p15="http://schemas.microsoft.com/office/powerpoint/2012/main"/>
+    </p:ext>
+  </p:extLst>
 </p:presentation>
+</file>
+
+<file path=ppt/changesInfos/changesInfo1.xml><?xml version="1.0" encoding="utf-8"?>
+<pc:chgInfo xmlns:a="http://schemas.openxmlformats.org/drawingml/2006/main" xmlns:r="http://schemas.openxmlformats.org/officeDocument/2006/relationships" xmlns:ac="http://schemas.microsoft.com/office/drawing/2013/main/command" xmlns:pc="http://schemas.microsoft.com/office/powerpoint/2013/main/command">
+  <pc:docChgLst>
+    <pc:chgData name="Hernan Herrera" userId="5f310cd8fb8e5f50" providerId="LiveId" clId="{62BC83D4-BD5F-4BA6-AC28-329178406771}"/>
+    <pc:docChg chg="undo custSel modSld">
+      <pc:chgData name="Hernan Herrera" userId="5f310cd8fb8e5f50" providerId="LiveId" clId="{62BC83D4-BD5F-4BA6-AC28-329178406771}" dt="2026-09-03T15:18:55.117" v="72" actId="20577"/>
+      <pc:docMkLst>
+        <pc:docMk/>
+      </pc:docMkLst>
+      <pc:sldChg chg="delSp modSp mod">
+        <pc:chgData name="Hernan Herrera" userId="5f310cd8fb8e5f50" providerId="LiveId" clId="{62BC83D4-BD5F-4BA6-AC28-329178406771}" dt="2026-09-03T13:59:24.987" v="36" actId="478"/>
+        <pc:sldMkLst>
+          <pc:docMk/>
+          <pc:sldMk cId="0" sldId="256"/>
+        </pc:sldMkLst>
+        <pc:spChg chg="del">
+          <ac:chgData name="Hernan Herrera" userId="5f310cd8fb8e5f50" providerId="LiveId" clId="{62BC83D4-BD5F-4BA6-AC28-329178406771}" dt="2026-09-03T11:40:28.656" v="0" actId="478"/>
+          <ac:spMkLst>
+            <pc:docMk/>
+            <pc:sldMk cId="0" sldId="256"/>
+            <ac:spMk id="2" creationId="{00000000-0000-0000-0000-000000000000}"/>
+          </ac:spMkLst>
+        </pc:spChg>
+        <pc:spChg chg="del">
+          <ac:chgData name="Hernan Herrera" userId="5f310cd8fb8e5f50" providerId="LiveId" clId="{62BC83D4-BD5F-4BA6-AC28-329178406771}" dt="2026-09-03T11:40:30.495" v="1" actId="478"/>
+          <ac:spMkLst>
+            <pc:docMk/>
+            <pc:sldMk cId="0" sldId="256"/>
+            <ac:spMk id="3" creationId="{00000000-0000-0000-0000-000000000000}"/>
+          </ac:spMkLst>
+        </pc:spChg>
+        <pc:spChg chg="mod">
+          <ac:chgData name="Hernan Herrera" userId="5f310cd8fb8e5f50" providerId="LiveId" clId="{62BC83D4-BD5F-4BA6-AC28-329178406771}" dt="2026-09-03T13:58:31.044" v="8" actId="20577"/>
+          <ac:spMkLst>
+            <pc:docMk/>
+            <pc:sldMk cId="0" sldId="256"/>
+            <ac:spMk id="6" creationId="{00000000-0000-0000-0000-000000000000}"/>
+          </ac:spMkLst>
+        </pc:spChg>
+        <pc:spChg chg="mod">
+          <ac:chgData name="Hernan Herrera" userId="5f310cd8fb8e5f50" providerId="LiveId" clId="{62BC83D4-BD5F-4BA6-AC28-329178406771}" dt="2026-09-03T13:58:52.735" v="9" actId="20577"/>
+          <ac:spMkLst>
+            <pc:docMk/>
+            <pc:sldMk cId="0" sldId="256"/>
+            <ac:spMk id="8" creationId="{00000000-0000-0000-0000-000000000000}"/>
+          </ac:spMkLst>
+        </pc:spChg>
+        <pc:spChg chg="mod">
+          <ac:chgData name="Hernan Herrera" userId="5f310cd8fb8e5f50" providerId="LiveId" clId="{62BC83D4-BD5F-4BA6-AC28-329178406771}" dt="2026-09-03T13:59:17.586" v="35" actId="20577"/>
+          <ac:spMkLst>
+            <pc:docMk/>
+            <pc:sldMk cId="0" sldId="256"/>
+            <ac:spMk id="10" creationId="{00000000-0000-0000-0000-000000000000}"/>
+          </ac:spMkLst>
+        </pc:spChg>
+        <pc:spChg chg="del">
+          <ac:chgData name="Hernan Herrera" userId="5f310cd8fb8e5f50" providerId="LiveId" clId="{62BC83D4-BD5F-4BA6-AC28-329178406771}" dt="2026-09-03T13:59:24.987" v="36" actId="478"/>
+          <ac:spMkLst>
+            <pc:docMk/>
+            <pc:sldMk cId="0" sldId="256"/>
+            <ac:spMk id="11" creationId="{00000000-0000-0000-0000-000000000000}"/>
+          </ac:spMkLst>
+        </pc:spChg>
+      </pc:sldChg>
+      <pc:sldChg chg="delSp modSp mod">
+        <pc:chgData name="Hernan Herrera" userId="5f310cd8fb8e5f50" providerId="LiveId" clId="{62BC83D4-BD5F-4BA6-AC28-329178406771}" dt="2026-09-03T14:14:00.287" v="41" actId="478"/>
+        <pc:sldMkLst>
+          <pc:docMk/>
+          <pc:sldMk cId="0" sldId="257"/>
+        </pc:sldMkLst>
+        <pc:spChg chg="mod">
+          <ac:chgData name="Hernan Herrera" userId="5f310cd8fb8e5f50" providerId="LiveId" clId="{62BC83D4-BD5F-4BA6-AC28-329178406771}" dt="2026-09-03T11:40:36.997" v="2" actId="14100"/>
+          <ac:spMkLst>
+            <pc:docMk/>
+            <pc:sldMk cId="0" sldId="257"/>
+            <ac:spMk id="4" creationId="{00000000-0000-0000-0000-000000000000}"/>
+          </ac:spMkLst>
+        </pc:spChg>
+        <pc:spChg chg="mod">
+          <ac:chgData name="Hernan Herrera" userId="5f310cd8fb8e5f50" providerId="LiveId" clId="{62BC83D4-BD5F-4BA6-AC28-329178406771}" dt="2026-09-03T11:40:41.008" v="3" actId="14100"/>
+          <ac:spMkLst>
+            <pc:docMk/>
+            <pc:sldMk cId="0" sldId="257"/>
+            <ac:spMk id="9" creationId="{00000000-0000-0000-0000-000000000000}"/>
+          </ac:spMkLst>
+        </pc:spChg>
+        <pc:spChg chg="mod">
+          <ac:chgData name="Hernan Herrera" userId="5f310cd8fb8e5f50" providerId="LiveId" clId="{62BC83D4-BD5F-4BA6-AC28-329178406771}" dt="2026-09-03T14:00:31.925" v="39" actId="6549"/>
+          <ac:spMkLst>
+            <pc:docMk/>
+            <pc:sldMk cId="0" sldId="257"/>
+            <ac:spMk id="13" creationId="{00000000-0000-0000-0000-000000000000}"/>
+          </ac:spMkLst>
+        </pc:spChg>
+        <pc:spChg chg="del">
+          <ac:chgData name="Hernan Herrera" userId="5f310cd8fb8e5f50" providerId="LiveId" clId="{62BC83D4-BD5F-4BA6-AC28-329178406771}" dt="2026-09-03T14:14:00.287" v="41" actId="478"/>
+          <ac:spMkLst>
+            <pc:docMk/>
+            <pc:sldMk cId="0" sldId="257"/>
+            <ac:spMk id="16" creationId="{00000000-0000-0000-0000-000000000000}"/>
+          </ac:spMkLst>
+        </pc:spChg>
+      </pc:sldChg>
+      <pc:sldChg chg="modSp mod">
+        <pc:chgData name="Hernan Herrera" userId="5f310cd8fb8e5f50" providerId="LiveId" clId="{62BC83D4-BD5F-4BA6-AC28-329178406771}" dt="2026-09-03T14:00:52.762" v="40" actId="20577"/>
+        <pc:sldMkLst>
+          <pc:docMk/>
+          <pc:sldMk cId="0" sldId="258"/>
+        </pc:sldMkLst>
+        <pc:spChg chg="mod">
+          <ac:chgData name="Hernan Herrera" userId="5f310cd8fb8e5f50" providerId="LiveId" clId="{62BC83D4-BD5F-4BA6-AC28-329178406771}" dt="2026-09-03T14:00:52.762" v="40" actId="20577"/>
+          <ac:spMkLst>
+            <pc:docMk/>
+            <pc:sldMk cId="0" sldId="258"/>
+            <ac:spMk id="22" creationId="{00000000-0000-0000-0000-000000000000}"/>
+          </ac:spMkLst>
+        </pc:spChg>
+      </pc:sldChg>
+      <pc:sldChg chg="delSp mod">
+        <pc:chgData name="Hernan Herrera" userId="5f310cd8fb8e5f50" providerId="LiveId" clId="{62BC83D4-BD5F-4BA6-AC28-329178406771}" dt="2026-09-03T14:14:06.493" v="42" actId="478"/>
+        <pc:sldMkLst>
+          <pc:docMk/>
+          <pc:sldMk cId="0" sldId="259"/>
+        </pc:sldMkLst>
+        <pc:spChg chg="del">
+          <ac:chgData name="Hernan Herrera" userId="5f310cd8fb8e5f50" providerId="LiveId" clId="{62BC83D4-BD5F-4BA6-AC28-329178406771}" dt="2026-09-03T14:14:06.493" v="42" actId="478"/>
+          <ac:spMkLst>
+            <pc:docMk/>
+            <pc:sldMk cId="0" sldId="259"/>
+            <ac:spMk id="29" creationId="{00000000-0000-0000-0000-000000000000}"/>
+          </ac:spMkLst>
+        </pc:spChg>
+      </pc:sldChg>
+      <pc:sldChg chg="delSp mod">
+        <pc:chgData name="Hernan Herrera" userId="5f310cd8fb8e5f50" providerId="LiveId" clId="{62BC83D4-BD5F-4BA6-AC28-329178406771}" dt="2026-09-03T14:15:17.322" v="43" actId="478"/>
+        <pc:sldMkLst>
+          <pc:docMk/>
+          <pc:sldMk cId="0" sldId="260"/>
+        </pc:sldMkLst>
+        <pc:spChg chg="del">
+          <ac:chgData name="Hernan Herrera" userId="5f310cd8fb8e5f50" providerId="LiveId" clId="{62BC83D4-BD5F-4BA6-AC28-329178406771}" dt="2026-09-03T14:15:17.322" v="43" actId="478"/>
+          <ac:spMkLst>
+            <pc:docMk/>
+            <pc:sldMk cId="0" sldId="260"/>
+            <ac:spMk id="18" creationId="{00000000-0000-0000-0000-000000000000}"/>
+          </ac:spMkLst>
+        </pc:spChg>
+      </pc:sldChg>
+      <pc:sldChg chg="delSp mod">
+        <pc:chgData name="Hernan Herrera" userId="5f310cd8fb8e5f50" providerId="LiveId" clId="{62BC83D4-BD5F-4BA6-AC28-329178406771}" dt="2026-09-03T14:16:22.396" v="44" actId="478"/>
+        <pc:sldMkLst>
+          <pc:docMk/>
+          <pc:sldMk cId="0" sldId="261"/>
+        </pc:sldMkLst>
+        <pc:spChg chg="del">
+          <ac:chgData name="Hernan Herrera" userId="5f310cd8fb8e5f50" providerId="LiveId" clId="{62BC83D4-BD5F-4BA6-AC28-329178406771}" dt="2026-09-03T14:16:22.396" v="44" actId="478"/>
+          <ac:spMkLst>
+            <pc:docMk/>
+            <pc:sldMk cId="0" sldId="261"/>
+            <ac:spMk id="34" creationId="{00000000-0000-0000-0000-000000000000}"/>
+          </ac:spMkLst>
+        </pc:spChg>
+      </pc:sldChg>
+      <pc:sldChg chg="modSp mod">
+        <pc:chgData name="Hernan Herrera" userId="5f310cd8fb8e5f50" providerId="LiveId" clId="{62BC83D4-BD5F-4BA6-AC28-329178406771}" dt="2026-09-03T14:19:59.116" v="51" actId="20577"/>
+        <pc:sldMkLst>
+          <pc:docMk/>
+          <pc:sldMk cId="0" sldId="263"/>
+        </pc:sldMkLst>
+        <pc:spChg chg="mod">
+          <ac:chgData name="Hernan Herrera" userId="5f310cd8fb8e5f50" providerId="LiveId" clId="{62BC83D4-BD5F-4BA6-AC28-329178406771}" dt="2026-09-03T14:19:41.316" v="45" actId="6549"/>
+          <ac:spMkLst>
+            <pc:docMk/>
+            <pc:sldMk cId="0" sldId="263"/>
+            <ac:spMk id="3" creationId="{00000000-0000-0000-0000-000000000000}"/>
+          </ac:spMkLst>
+        </pc:spChg>
+        <pc:spChg chg="mod">
+          <ac:chgData name="Hernan Herrera" userId="5f310cd8fb8e5f50" providerId="LiveId" clId="{62BC83D4-BD5F-4BA6-AC28-329178406771}" dt="2026-09-03T14:19:50.268" v="48" actId="20577"/>
+          <ac:spMkLst>
+            <pc:docMk/>
+            <pc:sldMk cId="0" sldId="263"/>
+            <ac:spMk id="7" creationId="{00000000-0000-0000-0000-000000000000}"/>
+          </ac:spMkLst>
+        </pc:spChg>
+        <pc:spChg chg="mod">
+          <ac:chgData name="Hernan Herrera" userId="5f310cd8fb8e5f50" providerId="LiveId" clId="{62BC83D4-BD5F-4BA6-AC28-329178406771}" dt="2026-09-03T14:19:59.116" v="51" actId="20577"/>
+          <ac:spMkLst>
+            <pc:docMk/>
+            <pc:sldMk cId="0" sldId="263"/>
+            <ac:spMk id="8" creationId="{00000000-0000-0000-0000-000000000000}"/>
+          </ac:spMkLst>
+        </pc:spChg>
+      </pc:sldChg>
+      <pc:sldChg chg="delSp modSp mod">
+        <pc:chgData name="Hernan Herrera" userId="5f310cd8fb8e5f50" providerId="LiveId" clId="{62BC83D4-BD5F-4BA6-AC28-329178406771}" dt="2026-09-03T14:21:16.712" v="56" actId="478"/>
+        <pc:sldMkLst>
+          <pc:docMk/>
+          <pc:sldMk cId="0" sldId="264"/>
+        </pc:sldMkLst>
+        <pc:spChg chg="mod">
+          <ac:chgData name="Hernan Herrera" userId="5f310cd8fb8e5f50" providerId="LiveId" clId="{62BC83D4-BD5F-4BA6-AC28-329178406771}" dt="2026-09-03T14:21:09.924" v="55" actId="6549"/>
+          <ac:spMkLst>
+            <pc:docMk/>
+            <pc:sldMk cId="0" sldId="264"/>
+            <ac:spMk id="3" creationId="{00000000-0000-0000-0000-000000000000}"/>
+          </ac:spMkLst>
+        </pc:spChg>
+        <pc:spChg chg="del">
+          <ac:chgData name="Hernan Herrera" userId="5f310cd8fb8e5f50" providerId="LiveId" clId="{62BC83D4-BD5F-4BA6-AC28-329178406771}" dt="2026-09-03T14:21:16.712" v="56" actId="478"/>
+          <ac:spMkLst>
+            <pc:docMk/>
+            <pc:sldMk cId="0" sldId="264"/>
+            <ac:spMk id="41" creationId="{00000000-0000-0000-0000-000000000000}"/>
+          </ac:spMkLst>
+        </pc:spChg>
+      </pc:sldChg>
+      <pc:sldChg chg="delSp modSp mod">
+        <pc:chgData name="Hernan Herrera" userId="5f310cd8fb8e5f50" providerId="LiveId" clId="{62BC83D4-BD5F-4BA6-AC28-329178406771}" dt="2026-09-03T15:15:45.978" v="60" actId="478"/>
+        <pc:sldMkLst>
+          <pc:docMk/>
+          <pc:sldMk cId="0" sldId="265"/>
+        </pc:sldMkLst>
+        <pc:spChg chg="mod">
+          <ac:chgData name="Hernan Herrera" userId="5f310cd8fb8e5f50" providerId="LiveId" clId="{62BC83D4-BD5F-4BA6-AC28-329178406771}" dt="2026-09-03T15:14:50.716" v="57" actId="6549"/>
+          <ac:spMkLst>
+            <pc:docMk/>
+            <pc:sldMk cId="0" sldId="265"/>
+            <ac:spMk id="12" creationId="{00000000-0000-0000-0000-000000000000}"/>
+          </ac:spMkLst>
+        </pc:spChg>
+        <pc:spChg chg="del">
+          <ac:chgData name="Hernan Herrera" userId="5f310cd8fb8e5f50" providerId="LiveId" clId="{62BC83D4-BD5F-4BA6-AC28-329178406771}" dt="2026-09-03T15:15:42.654" v="59" actId="478"/>
+          <ac:spMkLst>
+            <pc:docMk/>
+            <pc:sldMk cId="0" sldId="265"/>
+            <ac:spMk id="28" creationId="{00000000-0000-0000-0000-000000000000}"/>
+          </ac:spMkLst>
+        </pc:spChg>
+        <pc:spChg chg="del">
+          <ac:chgData name="Hernan Herrera" userId="5f310cd8fb8e5f50" providerId="LiveId" clId="{62BC83D4-BD5F-4BA6-AC28-329178406771}" dt="2026-09-03T15:15:45.978" v="60" actId="478"/>
+          <ac:spMkLst>
+            <pc:docMk/>
+            <pc:sldMk cId="0" sldId="265"/>
+            <ac:spMk id="29" creationId="{00000000-0000-0000-0000-000000000000}"/>
+          </ac:spMkLst>
+        </pc:spChg>
+        <pc:spChg chg="del">
+          <ac:chgData name="Hernan Herrera" userId="5f310cd8fb8e5f50" providerId="LiveId" clId="{62BC83D4-BD5F-4BA6-AC28-329178406771}" dt="2026-09-03T15:14:53.600" v="58" actId="478"/>
+          <ac:spMkLst>
+            <pc:docMk/>
+            <pc:sldMk cId="0" sldId="265"/>
+            <ac:spMk id="30" creationId="{00000000-0000-0000-0000-000000000000}"/>
+          </ac:spMkLst>
+        </pc:spChg>
+      </pc:sldChg>
+      <pc:sldChg chg="delSp mod">
+        <pc:chgData name="Hernan Herrera" userId="5f310cd8fb8e5f50" providerId="LiveId" clId="{62BC83D4-BD5F-4BA6-AC28-329178406771}" dt="2026-09-03T15:15:51.979" v="61" actId="478"/>
+        <pc:sldMkLst>
+          <pc:docMk/>
+          <pc:sldMk cId="0" sldId="266"/>
+        </pc:sldMkLst>
+        <pc:spChg chg="del">
+          <ac:chgData name="Hernan Herrera" userId="5f310cd8fb8e5f50" providerId="LiveId" clId="{62BC83D4-BD5F-4BA6-AC28-329178406771}" dt="2026-09-03T15:15:51.979" v="61" actId="478"/>
+          <ac:spMkLst>
+            <pc:docMk/>
+            <pc:sldMk cId="0" sldId="266"/>
+            <ac:spMk id="25" creationId="{00000000-0000-0000-0000-000000000000}"/>
+          </ac:spMkLst>
+        </pc:spChg>
+      </pc:sldChg>
+      <pc:sldChg chg="delSp modSp mod">
+        <pc:chgData name="Hernan Herrera" userId="5f310cd8fb8e5f50" providerId="LiveId" clId="{62BC83D4-BD5F-4BA6-AC28-329178406771}" dt="2026-09-03T15:18:55.117" v="72" actId="20577"/>
+        <pc:sldMkLst>
+          <pc:docMk/>
+          <pc:sldMk cId="0" sldId="267"/>
+        </pc:sldMkLst>
+        <pc:spChg chg="mod">
+          <ac:chgData name="Hernan Herrera" userId="5f310cd8fb8e5f50" providerId="LiveId" clId="{62BC83D4-BD5F-4BA6-AC28-329178406771}" dt="2026-09-03T15:18:06.056" v="71" actId="1076"/>
+          <ac:spMkLst>
+            <pc:docMk/>
+            <pc:sldMk cId="0" sldId="267"/>
+            <ac:spMk id="6" creationId="{00000000-0000-0000-0000-000000000000}"/>
+          </ac:spMkLst>
+        </pc:spChg>
+        <pc:spChg chg="mod">
+          <ac:chgData name="Hernan Herrera" userId="5f310cd8fb8e5f50" providerId="LiveId" clId="{62BC83D4-BD5F-4BA6-AC28-329178406771}" dt="2026-09-03T15:17:59.601" v="69" actId="1076"/>
+          <ac:spMkLst>
+            <pc:docMk/>
+            <pc:sldMk cId="0" sldId="267"/>
+            <ac:spMk id="9" creationId="{00000000-0000-0000-0000-000000000000}"/>
+          </ac:spMkLst>
+        </pc:spChg>
+        <pc:spChg chg="mod">
+          <ac:chgData name="Hernan Herrera" userId="5f310cd8fb8e5f50" providerId="LiveId" clId="{62BC83D4-BD5F-4BA6-AC28-329178406771}" dt="2026-09-03T15:17:51.469" v="68" actId="1076"/>
+          <ac:spMkLst>
+            <pc:docMk/>
+            <pc:sldMk cId="0" sldId="267"/>
+            <ac:spMk id="12" creationId="{00000000-0000-0000-0000-000000000000}"/>
+          </ac:spMkLst>
+        </pc:spChg>
+        <pc:spChg chg="mod">
+          <ac:chgData name="Hernan Herrera" userId="5f310cd8fb8e5f50" providerId="LiveId" clId="{62BC83D4-BD5F-4BA6-AC28-329178406771}" dt="2026-09-03T15:18:55.117" v="72" actId="20577"/>
+          <ac:spMkLst>
+            <pc:docMk/>
+            <pc:sldMk cId="0" sldId="267"/>
+            <ac:spMk id="15" creationId="{00000000-0000-0000-0000-000000000000}"/>
+          </ac:spMkLst>
+        </pc:spChg>
+        <pc:spChg chg="del">
+          <ac:chgData name="Hernan Herrera" userId="5f310cd8fb8e5f50" providerId="LiveId" clId="{62BC83D4-BD5F-4BA6-AC28-329178406771}" dt="2026-09-03T15:17:19.042" v="66" actId="478"/>
+          <ac:spMkLst>
+            <pc:docMk/>
+            <pc:sldMk cId="0" sldId="267"/>
+            <ac:spMk id="18" creationId="{00000000-0000-0000-0000-000000000000}"/>
+          </ac:spMkLst>
+        </pc:spChg>
+      </pc:sldChg>
+    </pc:docChg>
+  </pc:docChgLst>
+</pc:chgInfo>
 </file>
 
 <file path=ppt/notesMasters/notesMaster1.xml><?xml version="1.0" encoding="utf-8"?>
@@ -140,234 +468,10 @@
           <a:chExt cx="0" cy="0"/>
         </a:xfrm>
       </p:grpSpPr>
-      <p:sp>
-        <p:nvSpPr>
-          <p:cNvPr id="2" name="Header Placeholder 1"/>
-          <p:cNvSpPr>
-            <a:spLocks noGrp="1"/>
-          </p:cNvSpPr>
-          <p:nvPr>
-            <p:ph type="hdr" sz="quarter"/>
-          </p:nvPr>
-        </p:nvSpPr>
-        <p:spPr>
-          <a:xfrm>
-            <a:off x="0" y="0"/>
-            <a:ext cx="2971800" cy="458788"/>
-          </a:xfrm>
-          <a:prstGeom prst="rect">
-            <a:avLst/>
-          </a:prstGeom>
-        </p:spPr>
-        <p:txBody>
-          <a:bodyPr vert="horz" lIns="91440" tIns="45720" rIns="91440" bIns="45720" rtlCol="0"/>
-          <a:lstStyle>
-            <a:lvl1pPr algn="l">
-              <a:defRPr sz="1200"/>
-            </a:lvl1pPr>
-          </a:lstStyle>
-          <a:p>
-            <a:endParaRPr lang="en-US"/>
-          </a:p>
-        </p:txBody>
-      </p:sp>
-      <p:sp>
-        <p:nvSpPr>
-          <p:cNvPr id="3" name="Date Placeholder 2"/>
-          <p:cNvSpPr>
-            <a:spLocks noGrp="1"/>
-          </p:cNvSpPr>
-          <p:nvPr>
-            <p:ph type="dt" idx="1"/>
-          </p:nvPr>
-        </p:nvSpPr>
-        <p:spPr>
-          <a:xfrm>
-            <a:off x="3884613" y="0"/>
-            <a:ext cx="2971800" cy="458788"/>
-          </a:xfrm>
-          <a:prstGeom prst="rect">
-            <a:avLst/>
-          </a:prstGeom>
-        </p:spPr>
-        <p:txBody>
-          <a:bodyPr vert="horz" lIns="91440" tIns="45720" rIns="91440" bIns="45720" rtlCol="0"/>
-          <a:lstStyle>
-            <a:lvl1pPr algn="r">
-              <a:defRPr sz="1200"/>
-            </a:lvl1pPr>
-          </a:lstStyle>
-          <a:p>
-            <a:fld id="{5282F153-3F37-0F45-9E97-73ACFA13230C}" type="datetimeFigureOut">
-              <a:rPr lang="en-US"/>
-              <a:t>7/23/19</a:t>
-            </a:fld>
-            <a:endParaRPr lang="en-US"/>
-          </a:p>
-        </p:txBody>
-      </p:sp>
-      <p:sp>
-        <p:nvSpPr>
-          <p:cNvPr id="4" name="Slide Image Placeholder 3"/>
-          <p:cNvSpPr>
-            <a:spLocks noGrp="1" noRot="1" noChangeAspect="1"/>
-          </p:cNvSpPr>
-          <p:nvPr>
-            <p:ph type="sldImg" idx="2"/>
-          </p:nvPr>
-        </p:nvSpPr>
-        <p:spPr>
-          <a:xfrm>
-            <a:off x="685800" y="1143000"/>
-            <a:ext cx="5486400" cy="3086100"/>
-          </a:xfrm>
-          <a:prstGeom prst="rect">
-            <a:avLst/>
-          </a:prstGeom>
-          <a:noFill/>
-          <a:ln w="12700">
-            <a:solidFill>
-              <a:prstClr val="black"/>
-            </a:solidFill>
-          </a:ln>
-        </p:spPr>
-        <p:txBody>
-          <a:bodyPr vert="horz" lIns="91440" tIns="45720" rIns="91440" bIns="45720" rtlCol="0" anchor="ctr"/>
-          <a:lstStyle/>
-          <a:p>
-            <a:endParaRPr lang="en-US"/>
-          </a:p>
-        </p:txBody>
-      </p:sp>
-      <p:sp>
-        <p:nvSpPr>
-          <p:cNvPr id="5" name="Notes Placeholder 4"/>
-          <p:cNvSpPr>
-            <a:spLocks noGrp="1"/>
-          </p:cNvSpPr>
-          <p:nvPr>
-            <p:ph type="body" sz="quarter" idx="3"/>
-          </p:nvPr>
-        </p:nvSpPr>
-        <p:spPr>
-          <a:xfrm>
-            <a:off x="685800" y="4400550"/>
-            <a:ext cx="5486400" cy="3600450"/>
-          </a:xfrm>
-          <a:prstGeom prst="rect">
-            <a:avLst/>
-          </a:prstGeom>
-        </p:spPr>
-        <p:txBody>
-          <a:bodyPr vert="horz" lIns="91440" tIns="45720" rIns="91440" bIns="45720" rtlCol="0"/>
-          <a:lstStyle/>
-          <a:p>
-            <a:pPr lvl="0"/>
-            <a:r>
-              <a:rPr lang="en-US"/>
-              <a:t>Click to edit Master text styles</a:t>
-            </a:r>
-          </a:p>
-          <a:p>
-            <a:pPr lvl="1"/>
-            <a:r>
-              <a:rPr lang="en-US"/>
-              <a:t>Second level</a:t>
-            </a:r>
-          </a:p>
-          <a:p>
-            <a:pPr lvl="2"/>
-            <a:r>
-              <a:rPr lang="en-US"/>
-              <a:t>Third level</a:t>
-            </a:r>
-          </a:p>
-          <a:p>
-            <a:pPr lvl="3"/>
-            <a:r>
-              <a:rPr lang="en-US"/>
-              <a:t>Fourth level</a:t>
-            </a:r>
-          </a:p>
-          <a:p>
-            <a:pPr lvl="4"/>
-            <a:r>
-              <a:rPr lang="en-US"/>
-              <a:t>Fifth level</a:t>
-            </a:r>
-          </a:p>
-        </p:txBody>
-      </p:sp>
-      <p:sp>
-        <p:nvSpPr>
-          <p:cNvPr id="6" name="Footer Placeholder 5"/>
-          <p:cNvSpPr>
-            <a:spLocks noGrp="1"/>
-          </p:cNvSpPr>
-          <p:nvPr>
-            <p:ph type="ftr" sz="quarter" idx="4"/>
-          </p:nvPr>
-        </p:nvSpPr>
-        <p:spPr>
-          <a:xfrm>
-            <a:off x="0" y="8685213"/>
-            <a:ext cx="2971800" cy="458787"/>
-          </a:xfrm>
-          <a:prstGeom prst="rect">
-            <a:avLst/>
-          </a:prstGeom>
-        </p:spPr>
-        <p:txBody>
-          <a:bodyPr vert="horz" lIns="91440" tIns="45720" rIns="91440" bIns="45720" rtlCol="0" anchor="b"/>
-          <a:lstStyle>
-            <a:lvl1pPr algn="l">
-              <a:defRPr sz="1200"/>
-            </a:lvl1pPr>
-          </a:lstStyle>
-          <a:p>
-            <a:endParaRPr lang="en-US"/>
-          </a:p>
-        </p:txBody>
-      </p:sp>
-      <p:sp>
-        <p:nvSpPr>
-          <p:cNvPr id="7" name="Slide Number Placeholder 6"/>
-          <p:cNvSpPr>
-            <a:spLocks noGrp="1"/>
-          </p:cNvSpPr>
-          <p:nvPr>
-            <p:ph type="sldNum" sz="quarter" idx="5"/>
-          </p:nvPr>
-        </p:nvSpPr>
-        <p:spPr>
-          <a:xfrm>
-            <a:off x="3884613" y="8685213"/>
-            <a:ext cx="2971800" cy="458787"/>
-          </a:xfrm>
-          <a:prstGeom prst="rect">
-            <a:avLst/>
-          </a:prstGeom>
-        </p:spPr>
-        <p:txBody>
-          <a:bodyPr vert="horz" lIns="91440" tIns="45720" rIns="91440" bIns="45720" rtlCol="0" anchor="b"/>
-          <a:lstStyle>
-            <a:lvl1pPr algn="r">
-              <a:defRPr sz="1200"/>
-            </a:lvl1pPr>
-          </a:lstStyle>
-          <a:p>
-            <a:fld id="{CE5E9CC1-C706-0F49-92D6-E571CC5EEA8F}" type="slidenum">
-              <a:rPr lang="en-US"/>
-              <a:t>‹#›</a:t>
-            </a:fld>
-            <a:endParaRPr lang="en-US"/>
-          </a:p>
-        </p:txBody>
-      </p:sp>
     </p:spTree>
     <p:extLst>
       <p:ext uri="{BB962C8B-B14F-4D97-AF65-F5344CB8AC3E}">
-        <p14:creationId xmlns:p14="http://schemas.microsoft.com/office/powerpoint/2010/main" val="1024086991"/>
+        <p14:creationId xmlns:p14="http://schemas.microsoft.com/office/powerpoint/2010/main" val="1987426182"/>
       </p:ext>
     </p:extLst>
   </p:cSld>
@@ -515,7 +619,6 @@
               <a:rPr lang="en-US" dirty="0"/>
               <a:t>Buenas. Esta presentación retoma el trabajo que hicimos sobre SSE en la materia de Criptografía, pero ahora desde Criptografía Avanzada y con foco en la parte asimétrica: qué problema resuelve, dónde falla, y cómo terminamos usándola en una aplicación real que además construimos como MVP.</a:t>
             </a:r>
-            <a:endParaRPr lang="en-US" dirty="0"/>
           </a:p>
         </p:txBody>
       </p:sp>
@@ -603,7 +706,6 @@
               <a:rPr lang="en-US" dirty="0"/>
               <a:t>Ed25519 aporta lo que ECIES por sí solo no da: no repudio. El paciente firma el ticket completo — no repudio, y cualquiera puede verificar con su clave pública que fue efectivamente el paciente quien autorizó esa delegación con ese alcance y ese vencimiento. El servidor valida la firma y el TTL, pero el contenido cifrado (las claves de búsqueda y descifrado) permanece opaco para él en todo momento. El callout de abajo es uno de los bugs reales que documentamos al implementar esto: el pseudocódigo original sólo envolvía la clave del documento para la clave pública del paciente, así que un médico con una delegación activa podía ejecutar búsquedas SSE-2 y encontrar coincidencias, pero nunca tenía la clave privada del paciente para abrir el documento en sí.</a:t>
             </a:r>
-            <a:endParaRPr lang="en-US" dirty="0"/>
           </a:p>
         </p:txBody>
       </p:sp>
@@ -691,7 +793,6 @@
               <a:rPr lang="en-US" dirty="0"/>
               <a:t>Estos tres son, para mí, los bugs más interesantes de toda la implementación — documentados con detalle en la adenda de seguridad del proyecto, junto con otras 17 correcciones. Ninguno es un error de sintaxis: los tres son fallas de diseño zero-knowledge que sólo aparecen cuando el pseudocódigo de la especificación se convierte en un sistema real con un test de integración de punta a punta corriendo contra Postgres.</a:t>
             </a:r>
-            <a:endParaRPr lang="en-US" dirty="0"/>
           </a:p>
         </p:txBody>
       </p:sp>
@@ -779,7 +880,6 @@
               <a:rPr lang="en-US" dirty="0"/>
               <a:t>Para cerrar: la parte asimétrica de SSE no reemplaza a la simétrica, la complementa exactamente donde la simétrica no puede llegar sola — repartir capacidades entre partes que no comparten un secreto de antemano. PEKS es la prueba de que esto es posible en teoría; el diseño híbrido KEM/DEM es la forma en que se usa en la práctica; y OSA es la evidencia de que, incluso con la teoría clara, hacerlo sin romper el modelo zero-knowledge requiere una revisión de seguridad tan rigurosa como el diseño criptográfico en sí. Muchas gracias, quedo a disposición para preguntas.</a:t>
             </a:r>
-            <a:endParaRPr lang="en-US" dirty="0"/>
           </a:p>
         </p:txBody>
       </p:sp>
@@ -867,7 +967,6 @@
               <a:rPr lang="en-US" dirty="0"/>
               <a:t>El trabajo anterior mostró que SSE resuelve búsqueda sobre datos cifrados con primitivas simétricas: PRF y PRP, un índice invertido cifrado y una jerarquía de seguridad CKA1 a CKA2. Hoy tomamos ese mismo problema y le agregamos una restricción real: múltiples partes que no comparten una clave secreta de antemano. Ahí es donde entra la parte asimétrica.</a:t>
             </a:r>
-            <a:endParaRPr lang="en-US" dirty="0"/>
           </a:p>
         </p:txBody>
       </p:sp>
@@ -955,7 +1054,6 @@
               <a:rPr lang="en-US" dirty="0"/>
               <a:t>En el modelo original, Setup y Encrypt corren una sola vez del lado del dueño de los datos. Pero un historial clínico tiene, por diseño, más de un escritor legítimo: el propio paciente y los médicos que lo atienden. Ninguno de ellos puede recibir K_idx o K_enc del paciente por un canal casual — eso anularía todo el modelo zero-knowledge. El problema deja de ser 'cómo cifro para buscar' y pasa a ser 'cómo distribuyo capacidades criptográficas entre partes que no se conocían'.</a:t>
             </a:r>
-            <a:endParaRPr lang="en-US" dirty="0"/>
           </a:p>
         </p:txBody>
       </p:sp>
@@ -1043,7 +1141,6 @@
               <a:rPr lang="en-US" dirty="0"/>
               <a:t>PEKS invierte el modelo de SSE: en vez de una clave simétrica compartida, hay un par público/privado. Cualquiera con la clave pública puede cifrar una palabra; sólo el dueño de la clave privada puede emitir el permiso de búsqueda (el 'trapdoor'). El servidor sólo compara: no aprende la palabra, sólo si coincide con el permiso recibido. La construcción original de Boneh y coautores usa matemática de curvas elípticas más pesada (emparejamientos bilineales); no hace falta entrar en ese detalle salvo que lo pidan — alcanza con la idea de 'operación de clave pública, más cara que un HMAC'.</a:t>
             </a:r>
-            <a:endParaRPr lang="en-US" dirty="0"/>
           </a:p>
         </p:txBody>
       </p:sp>
@@ -1131,7 +1228,6 @@
               <a:rPr lang="en-US" dirty="0"/>
               <a:t>Esto es lo interesante: PEKS tiene una prueba de seguridad formal y aun así es explotable en la práctica. La prueba protege contra distinguir cifrados cuando NO tenés el permiso de búsqueda. Pero no dice nada sobre qué pasa cuando el atacante SÍ tiene un permiso — porque puede probar palabras candidatas usando la clave pública, que por definición es de acceso libre. En SSE simétrico esto no es posible directamente, porque no existe una clave pública contra la cual probar candidatos sin conocer el secreto.</a:t>
             </a:r>
-            <a:endParaRPr lang="en-US" dirty="0"/>
           </a:p>
         </p:txBody>
       </p:sp>
@@ -1219,7 +1315,6 @@
               <a:rPr lang="en-US" dirty="0"/>
               <a:t>Esta tabla amplía la comparación que ya habíamos hecho en el trabajo de cripto simétrica, pero ahora explicando el motivo estructural de cada fila: PEKS no es 'SSE pero más lento' — resuelve un problema distinto (multi-escritor sin canal secreto) y paga un costo distinto (una vulnerabilidad de diseño, no sólo de rendimiento).</a:t>
             </a:r>
-            <a:endParaRPr lang="en-US" dirty="0"/>
           </a:p>
         </p:txBody>
       </p:sp>
@@ -1307,7 +1402,6 @@
               <a:rPr lang="en-US" dirty="0"/>
               <a:t>El paradigma KEM/DEM es la respuesta estándar de la industria a 'necesito clave pública pero no quiero pagar su costo por cada byte de datos'. La clave pública sólo transporta una clave simétrica efímera; toda la carga real —cifrar documentos, indexar, buscar con SSE-2— sigue siendo simétrica y rápida. Esto es literalmente lo que decidimos construir en la aplicación, en vez de implementar PEKS puro con emparejamientos.</a:t>
             </a:r>
-            <a:endParaRPr lang="en-US" dirty="0"/>
           </a:p>
         </p:txBody>
       </p:sp>
@@ -1395,7 +1489,6 @@
               <a:rPr lang="en-US" dirty="0"/>
               <a:t>OSA es la aplicación que construimos para bajar todo esto a tierra. La contraseña del paciente nunca sale del navegador: Argon2id deriva una semilla, y de esa semilla se ramifican cuatro cosas — un par asimétrico de identidad (X25519 para intercambio de claves, Ed25519 para firmar), una clave simétrica de documentos, una clave de índice SSE-2 y una clave de enmascaramiento. El servidor Go persiste todo cifrado y jamás ve ninguna de estas claves.</a:t>
             </a:r>
-            <a:endParaRPr lang="en-US" dirty="0"/>
           </a:p>
         </p:txBody>
       </p:sp>
@@ -1483,7 +1576,6 @@
               <a:rPr lang="en-US" dirty="0"/>
               <a:t>Esta función es el KEM+DEM de la filmina anterior, tal cual corre en el navegador del médico y del paciente. Genera un par X25519 efímero por cada sobre, deriva el secreto ECDH, lo pasa por HKDF con un 'info' que separa dominios de uso — así el mismo secreto compartido nunca se reutiliza entre, por ejemplo, el sobre de K_doc y el sobre de una delegación — y cifra con AES-256-GCM. La corrección documentada en la adenda de seguridad fue justamente reemplazar el ECDH con P-256 de WebCrypto del pseudocódigo original por esta implementación consistente en X25519.</a:t>
             </a:r>
-            <a:endParaRPr lang="en-US" dirty="0"/>
           </a:p>
         </p:txBody>
       </p:sp>
@@ -1561,6 +1653,7 @@
         <a:solidFill>
           <a:srgbClr val="F7F8FC"/>
         </a:solidFill>
+        <a:effectLst/>
       </p:bgPr>
     </p:bg>
     <p:spTree>
@@ -1588,6 +1681,11 @@
 <file path=ppt/slideMasters/slideMaster1.xml><?xml version="1.0" encoding="utf-8"?>
 <p:sldMaster xmlns:a="http://schemas.openxmlformats.org/drawingml/2006/main" xmlns:r="http://schemas.openxmlformats.org/officeDocument/2006/relationships" xmlns:p="http://schemas.openxmlformats.org/presentationml/2006/main">
   <p:cSld>
+    <p:bg>
+      <p:bgRef idx="1001">
+        <a:schemeClr val="bg1"/>
+      </p:bgRef>
+    </p:bg>
     <p:spTree>
       <p:nvGrpSpPr>
         <p:cNvPr id="1" name=""/>
@@ -1871,6 +1969,7 @@
         <a:solidFill>
           <a:srgbClr val="15213E"/>
         </a:solidFill>
+        <a:effectLst/>
       </p:bgPr>
     </p:bg>
     <p:spTree>
@@ -1889,46 +1988,6 @@
       </p:grpSpPr>
       <p:sp>
         <p:nvSpPr>
-          <p:cNvPr id="2" name="Shape 0"/>
-          <p:cNvSpPr/>
-          <p:nvPr/>
-        </p:nvSpPr>
-        <p:spPr>
-          <a:xfrm>
-            <a:off x="9052560" y="-1463040"/>
-            <a:ext cx="4937760" cy="4937760"/>
-          </a:xfrm>
-          <a:prstGeom prst="ellipse">
-            <a:avLst/>
-          </a:prstGeom>
-          <a:solidFill>
-            <a:srgbClr val="1E2E56"/>
-          </a:solidFill>
-          <a:ln/>
-        </p:spPr>
-      </p:sp>
-      <p:sp>
-        <p:nvSpPr>
-          <p:cNvPr id="3" name="Shape 1"/>
-          <p:cNvSpPr/>
-          <p:nvPr/>
-        </p:nvSpPr>
-        <p:spPr>
-          <a:xfrm>
-            <a:off x="10607040" y="3291840"/>
-            <a:ext cx="2926080" cy="2926080"/>
-          </a:xfrm>
-          <a:prstGeom prst="ellipse">
-            <a:avLst/>
-          </a:prstGeom>
-          <a:solidFill>
-            <a:srgbClr val="1E2E56"/>
-          </a:solidFill>
-          <a:ln/>
-        </p:spPr>
-      </p:sp>
-      <p:sp>
-        <p:nvSpPr>
           <p:cNvPr id="4" name="Shape 2"/>
           <p:cNvSpPr/>
           <p:nvPr/>
@@ -1946,17 +2005,24 @@
           </a:solidFill>
           <a:ln/>
         </p:spPr>
+        <p:txBody>
+          <a:bodyPr/>
+          <a:lstStyle/>
+          <a:p>
+            <a:endParaRPr lang="en-US"/>
+          </a:p>
+        </p:txBody>
       </p:sp>
       <p:pic>
         <p:nvPicPr>
-          <p:cNvPr id="5" name="Image 0" descr="/tmp/osa_pres/icons/key_navy.png">    </p:cNvPr>
+          <p:cNvPr id="5" name="Image 0" descr="/tmp/osa_pres/icons/key_navy.png"/>
           <p:cNvPicPr>
             <a:picLocks noChangeAspect="1"/>
           </p:cNvPicPr>
           <p:nvPr/>
         </p:nvPicPr>
         <p:blipFill>
-          <a:blip r:embed="rId1"/>
+          <a:blip r:embed="rId3"/>
           <a:stretch>
             <a:fillRect/>
           </a:stretch>
@@ -1992,11 +2058,11 @@
           <a:bodyPr wrap="square" lIns="0" tIns="0" rIns="0" bIns="0" rtlCol="0" anchor="ctr"/>
           <a:lstStyle/>
           <a:p>
-            <a:pPr indent="0" marL="0">
-              <a:buNone/>
-            </a:pPr>
-            <a:r>
-              <a:rPr lang="en-US" sz="1300" b="1" spc="200" kern="0" dirty="0">
+            <a:pPr marL="0" indent="0">
+              <a:buNone/>
+            </a:pPr>
+            <a:r>
+              <a:rPr lang="en-US" sz="1300" b="1" kern="0" spc="200" dirty="0">
                 <a:solidFill>
                   <a:srgbClr val="17B8A6"/>
                 </a:solidFill>
@@ -2004,7 +2070,7 @@
                 <a:ea typeface="Calibri" pitchFamily="34" charset="-122"/>
                 <a:cs typeface="Calibri" pitchFamily="34" charset="-120"/>
               </a:rPr>
-              <a:t>CRIPTOGRAFÍA AVANZADA — MAESTRÍA EN CIBERDEFENSA</a:t>
+              <a:t>CRIPTOGRAFÍA AVANZADA</a:t>
             </a:r>
             <a:endParaRPr lang="en-US" sz="1300" dirty="0"/>
           </a:p>
@@ -2031,7 +2097,7 @@
           <a:bodyPr wrap="square" lIns="0" tIns="0" rIns="0" bIns="0" rtlCol="0" anchor="ctr"/>
           <a:lstStyle/>
           <a:p>
-            <a:pPr indent="0" marL="0">
+            <a:pPr marL="0" indent="0">
               <a:lnSpc>
                 <a:spcPct val="105000"/>
               </a:lnSpc>
@@ -2051,7 +2117,7 @@
             <a:endParaRPr lang="en-US" sz="4600" dirty="0"/>
           </a:p>
           <a:p>
-            <a:pPr indent="0" marL="0">
+            <a:pPr marL="0" indent="0">
               <a:lnSpc>
                 <a:spcPct val="105000"/>
               </a:lnSpc>
@@ -2093,7 +2159,7 @@
           <a:bodyPr wrap="square" lIns="0" tIns="0" rIns="0" bIns="0" rtlCol="0" anchor="ctr"/>
           <a:lstStyle/>
           <a:p>
-            <a:pPr indent="0" marL="0">
+            <a:pPr marL="0" indent="0">
               <a:lnSpc>
                 <a:spcPct val="120000"/>
               </a:lnSpc>
@@ -2108,7 +2174,29 @@
                 <a:ea typeface="Calibri" pitchFamily="34" charset="-122"/>
                 <a:cs typeface="Calibri" pitchFamily="34" charset="-120"/>
               </a:rPr>
-              <a:t>De la búsqueda simétrica cifrada al intercambio de claves de clave pública: PEKS, ECIES sobre X25519, firmas Ed25519 y el caso de estudio OSA.</a:t>
+              <a:t>De la búsqueda simétrica cifrada al intercambio de claves de clave pública: PEKS, ECIES sobre X25519, </a:t>
+            </a:r>
+            <a:r>
+              <a:rPr lang="en-US" sz="1600" dirty="0" err="1">
+                <a:solidFill>
+                  <a:srgbClr val="AEB6D6"/>
+                </a:solidFill>
+                <a:latin typeface="Calibri" pitchFamily="34" charset="0"/>
+                <a:ea typeface="Calibri" pitchFamily="34" charset="-122"/>
+                <a:cs typeface="Calibri" pitchFamily="34" charset="-120"/>
+              </a:rPr>
+              <a:t>firmas</a:t>
+            </a:r>
+            <a:r>
+              <a:rPr lang="en-US" sz="1600" dirty="0">
+                <a:solidFill>
+                  <a:srgbClr val="AEB6D6"/>
+                </a:solidFill>
+                <a:latin typeface="Calibri" pitchFamily="34" charset="0"/>
+                <a:ea typeface="Calibri" pitchFamily="34" charset="-122"/>
+                <a:cs typeface="Calibri" pitchFamily="34" charset="-120"/>
+              </a:rPr>
+              <a:t> Ed25519.</a:t>
             </a:r>
             <a:endParaRPr lang="en-US" sz="1600" dirty="0"/>
           </a:p>
@@ -2135,6 +2223,13 @@
           </a:solidFill>
           <a:ln/>
         </p:spPr>
+        <p:txBody>
+          <a:bodyPr/>
+          <a:lstStyle/>
+          <a:p>
+            <a:endParaRPr lang="en-US"/>
+          </a:p>
+        </p:txBody>
       </p:sp>
       <p:sp>
         <p:nvSpPr>
@@ -2157,7 +2252,7 @@
           <a:bodyPr wrap="square" lIns="0" tIns="0" rIns="0" bIns="0" rtlCol="0" anchor="ctr"/>
           <a:lstStyle/>
           <a:p>
-            <a:pPr indent="0" marL="0">
+            <a:pPr marL="0" indent="0">
               <a:buNone/>
             </a:pPr>
             <a:r>
@@ -2169,48 +2264,9 @@
                 <a:ea typeface="Calibri" pitchFamily="34" charset="-122"/>
                 <a:cs typeface="Calibri" pitchFamily="34" charset="-120"/>
               </a:rPr>
-              <a:t>Continuación de: “SSE — Cifrado Simétrico”</a:t>
+              <a:t>Lic. Hernan Herrera</a:t>
             </a:r>
             <a:endParaRPr lang="en-US" sz="1250" dirty="0"/>
-          </a:p>
-        </p:txBody>
-      </p:sp>
-      <p:sp>
-        <p:nvSpPr>
-          <p:cNvPr id="11" name="Text 8"/>
-          <p:cNvSpPr/>
-          <p:nvPr/>
-        </p:nvSpPr>
-        <p:spPr>
-          <a:xfrm>
-            <a:off x="548640" y="6437376"/>
-            <a:ext cx="7315200" cy="274320"/>
-          </a:xfrm>
-          <a:prstGeom prst="rect">
-            <a:avLst/>
-          </a:prstGeom>
-          <a:noFill/>
-          <a:ln/>
-        </p:spPr>
-        <p:txBody>
-          <a:bodyPr wrap="square" rtlCol="0" anchor="ctr"/>
-          <a:lstStyle/>
-          <a:p>
-            <a:pPr algn="l" indent="0" marL="0">
-              <a:buNone/>
-            </a:pPr>
-            <a:r>
-              <a:rPr lang="en-US" sz="1050" dirty="0">
-                <a:solidFill>
-                  <a:srgbClr val="AEB6D6"/>
-                </a:solidFill>
-                <a:latin typeface="Calibri" pitchFamily="34" charset="0"/>
-                <a:ea typeface="Calibri" pitchFamily="34" charset="-122"/>
-                <a:cs typeface="Calibri" pitchFamily="34" charset="-120"/>
-              </a:rPr>
-              <a:t>Hernán · Trabajo final — Criptografía Avanzada</a:t>
-            </a:r>
-            <a:endParaRPr lang="en-US" sz="1050" dirty="0"/>
           </a:p>
         </p:txBody>
       </p:sp>
@@ -2235,7 +2291,7 @@
           <a:bodyPr wrap="square" rtlCol="0" anchor="ctr"/>
           <a:lstStyle/>
           <a:p>
-            <a:pPr algn="r" indent="0" marL="0">
+            <a:pPr marL="0" indent="0" algn="r">
               <a:buNone/>
             </a:pPr>
             <a:r>
@@ -2299,11 +2355,11 @@
           <a:bodyPr wrap="square" lIns="0" tIns="0" rIns="0" bIns="0" rtlCol="0" anchor="ctr"/>
           <a:lstStyle/>
           <a:p>
-            <a:pPr indent="0" marL="0">
-              <a:buNone/>
-            </a:pPr>
-            <a:r>
-              <a:rPr lang="en-US" sz="1250" b="1" spc="200" kern="0" dirty="0">
+            <a:pPr marL="0" indent="0">
+              <a:buNone/>
+            </a:pPr>
+            <a:r>
+              <a:rPr lang="en-US" sz="1250" b="1" kern="0" spc="200" dirty="0">
                 <a:solidFill>
                   <a:srgbClr val="6C6FD9"/>
                 </a:solidFill>
@@ -2338,7 +2394,7 @@
           <a:bodyPr wrap="square" lIns="0" tIns="0" rIns="0" bIns="0" rtlCol="0" anchor="ctr"/>
           <a:lstStyle/>
           <a:p>
-            <a:pPr indent="0" marL="0">
+            <a:pPr marL="0" indent="0">
               <a:buNone/>
             </a:pPr>
             <a:r>
@@ -2377,6 +2433,13 @@
           </a:solidFill>
           <a:ln/>
         </p:spPr>
+        <p:txBody>
+          <a:bodyPr/>
+          <a:lstStyle/>
+          <a:p>
+            <a:endParaRPr lang="en-US"/>
+          </a:p>
+        </p:txBody>
       </p:sp>
       <p:sp>
         <p:nvSpPr>
@@ -2397,266 +2460,17 @@
           </a:solidFill>
           <a:ln/>
         </p:spPr>
+        <p:txBody>
+          <a:bodyPr/>
+          <a:lstStyle/>
+          <a:p>
+            <a:endParaRPr lang="en-US"/>
+          </a:p>
+        </p:txBody>
       </p:sp>
       <p:pic>
         <p:nvPicPr>
-          <p:cNvPr id="6" name="Image 0" descr="/tmp/osa_pres/icons/user_navy.png">    </p:cNvPr>
-          <p:cNvPicPr>
-            <a:picLocks noChangeAspect="1"/>
-          </p:cNvPicPr>
-          <p:nvPr/>
-        </p:nvPicPr>
-        <p:blipFill>
-          <a:blip r:embed="rId1"/>
-          <a:stretch>
-            <a:fillRect/>
-          </a:stretch>
-        </p:blipFill>
-        <p:spPr>
-          <a:xfrm>
-            <a:off x="690006" y="1522110"/>
-            <a:ext cx="284196" cy="284196"/>
-          </a:xfrm>
-          <a:prstGeom prst="rect">
-            <a:avLst/>
-          </a:prstGeom>
-        </p:spPr>
-      </p:pic>
-      <p:sp>
-        <p:nvSpPr>
-          <p:cNvPr id="7" name="Text 4"/>
-          <p:cNvSpPr txBox="1"/>
-          <p:nvPr/>
-        </p:nvSpPr>
-        <p:spPr>
-          <a:xfrm>
-            <a:off x="1097280" y="1417320"/>
-            <a:ext cx="2880360" cy="502920"/>
-          </a:xfrm>
-          <a:prstGeom prst="rect">
-            <a:avLst/>
-          </a:prstGeom>
-          <a:noFill/>
-          <a:ln/>
-        </p:spPr>
-        <p:txBody>
-          <a:bodyPr wrap="square" lIns="0" tIns="0" rIns="0" bIns="0" rtlCol="0" anchor="ctr"/>
-          <a:lstStyle/>
-          <a:p>
-            <a:pPr indent="0" marL="0">
-              <a:buNone/>
-            </a:pPr>
-            <a:r>
-              <a:rPr lang="en-US" sz="1250" b="1" dirty="0">
-                <a:solidFill>
-                  <a:srgbClr val="FFFFFF"/>
-                </a:solidFill>
-                <a:latin typeface="Calibri" pitchFamily="34" charset="0"/>
-                <a:ea typeface="Calibri" pitchFamily="34" charset="-122"/>
-                <a:cs typeface="Calibri" pitchFamily="34" charset="-120"/>
-              </a:rPr>
-              <a:t>Paciente</a:t>
-            </a:r>
-            <a:endParaRPr lang="en-US" sz="1250" dirty="0"/>
-          </a:p>
-        </p:txBody>
-      </p:sp>
-      <p:sp>
-        <p:nvSpPr>
-          <p:cNvPr id="8" name="Shape 5"/>
-          <p:cNvSpPr/>
-          <p:nvPr/>
-        </p:nvSpPr>
-        <p:spPr>
-          <a:xfrm>
-            <a:off x="2308860" y="1920240"/>
-            <a:ext cx="0" cy="3977640"/>
-          </a:xfrm>
-          <a:prstGeom prst="line">
-            <a:avLst/>
-          </a:prstGeom>
-          <a:noFill/>
-          <a:ln w="12700">
-            <a:solidFill>
-              <a:srgbClr val="E2E5F0"/>
-            </a:solidFill>
-            <a:prstDash val="dash"/>
-          </a:ln>
-        </p:spPr>
-      </p:sp>
-      <p:sp>
-        <p:nvSpPr>
-          <p:cNvPr id="9" name="Shape 6"/>
-          <p:cNvSpPr/>
-          <p:nvPr/>
-        </p:nvSpPr>
-        <p:spPr>
-          <a:xfrm>
-            <a:off x="4334256" y="1417320"/>
-            <a:ext cx="3520440" cy="502920"/>
-          </a:xfrm>
-          <a:prstGeom prst="roundRect">
-            <a:avLst>
-              <a:gd name="adj" fmla="val 14545"/>
-            </a:avLst>
-          </a:prstGeom>
-          <a:solidFill>
-            <a:srgbClr val="15213E"/>
-          </a:solidFill>
-          <a:ln/>
-        </p:spPr>
-      </p:sp>
-      <p:sp>
-        <p:nvSpPr>
-          <p:cNvPr id="10" name="Shape 7"/>
-          <p:cNvSpPr/>
-          <p:nvPr/>
-        </p:nvSpPr>
-        <p:spPr>
-          <a:xfrm>
-            <a:off x="4425696" y="1472184"/>
-            <a:ext cx="384048" cy="384048"/>
-          </a:xfrm>
-          <a:prstGeom prst="ellipse">
-            <a:avLst/>
-          </a:prstGeom>
-          <a:solidFill>
-            <a:srgbClr val="17B8A6"/>
-          </a:solidFill>
-          <a:ln/>
-        </p:spPr>
-      </p:sp>
-      <p:pic>
-        <p:nvPicPr>
-          <p:cNvPr id="11" name="Image 1" descr="/tmp/osa_pres/icons/database_navy.png">    </p:cNvPr>
-          <p:cNvPicPr>
-            <a:picLocks noChangeAspect="1"/>
-          </p:cNvPicPr>
-          <p:nvPr/>
-        </p:nvPicPr>
-        <p:blipFill>
-          <a:blip r:embed="rId2"/>
-          <a:stretch>
-            <a:fillRect/>
-          </a:stretch>
-        </p:blipFill>
-        <p:spPr>
-          <a:xfrm>
-            <a:off x="4475622" y="1522110"/>
-            <a:ext cx="284196" cy="284196"/>
-          </a:xfrm>
-          <a:prstGeom prst="rect">
-            <a:avLst/>
-          </a:prstGeom>
-        </p:spPr>
-      </p:pic>
-      <p:sp>
-        <p:nvSpPr>
-          <p:cNvPr id="12" name="Text 8"/>
-          <p:cNvSpPr txBox="1"/>
-          <p:nvPr/>
-        </p:nvSpPr>
-        <p:spPr>
-          <a:xfrm>
-            <a:off x="4882896" y="1417320"/>
-            <a:ext cx="2880360" cy="502920"/>
-          </a:xfrm>
-          <a:prstGeom prst="rect">
-            <a:avLst/>
-          </a:prstGeom>
-          <a:noFill/>
-          <a:ln/>
-        </p:spPr>
-        <p:txBody>
-          <a:bodyPr wrap="square" lIns="0" tIns="0" rIns="0" bIns="0" rtlCol="0" anchor="ctr"/>
-          <a:lstStyle/>
-          <a:p>
-            <a:pPr indent="0" marL="0">
-              <a:buNone/>
-            </a:pPr>
-            <a:r>
-              <a:rPr lang="en-US" sz="1250" b="1" dirty="0">
-                <a:solidFill>
-                  <a:srgbClr val="FFFFFF"/>
-                </a:solidFill>
-                <a:latin typeface="Calibri" pitchFamily="34" charset="0"/>
-                <a:ea typeface="Calibri" pitchFamily="34" charset="-122"/>
-                <a:cs typeface="Calibri" pitchFamily="34" charset="-120"/>
-              </a:rPr>
-              <a:t>Servidor Go (custodio ciego)</a:t>
-            </a:r>
-            <a:endParaRPr lang="en-US" sz="1250" dirty="0"/>
-          </a:p>
-        </p:txBody>
-      </p:sp>
-      <p:sp>
-        <p:nvSpPr>
-          <p:cNvPr id="13" name="Shape 9"/>
-          <p:cNvSpPr/>
-          <p:nvPr/>
-        </p:nvSpPr>
-        <p:spPr>
-          <a:xfrm>
-            <a:off x="6094476" y="1920240"/>
-            <a:ext cx="0" cy="3977640"/>
-          </a:xfrm>
-          <a:prstGeom prst="line">
-            <a:avLst/>
-          </a:prstGeom>
-          <a:noFill/>
-          <a:ln w="12700">
-            <a:solidFill>
-              <a:srgbClr val="E2E5F0"/>
-            </a:solidFill>
-            <a:prstDash val="dash"/>
-          </a:ln>
-        </p:spPr>
-      </p:sp>
-      <p:sp>
-        <p:nvSpPr>
-          <p:cNvPr id="14" name="Shape 10"/>
-          <p:cNvSpPr/>
-          <p:nvPr/>
-        </p:nvSpPr>
-        <p:spPr>
-          <a:xfrm>
-            <a:off x="8119872" y="1417320"/>
-            <a:ext cx="3520440" cy="502920"/>
-          </a:xfrm>
-          <a:prstGeom prst="roundRect">
-            <a:avLst>
-              <a:gd name="adj" fmla="val 14545"/>
-            </a:avLst>
-          </a:prstGeom>
-          <a:solidFill>
-            <a:srgbClr val="15213E"/>
-          </a:solidFill>
-          <a:ln/>
-        </p:spPr>
-      </p:sp>
-      <p:sp>
-        <p:nvSpPr>
-          <p:cNvPr id="15" name="Shape 11"/>
-          <p:cNvSpPr/>
-          <p:nvPr/>
-        </p:nvSpPr>
-        <p:spPr>
-          <a:xfrm>
-            <a:off x="8211312" y="1472184"/>
-            <a:ext cx="384048" cy="384048"/>
-          </a:xfrm>
-          <a:prstGeom prst="ellipse">
-            <a:avLst/>
-          </a:prstGeom>
-          <a:solidFill>
-            <a:srgbClr val="17B8A6"/>
-          </a:solidFill>
-          <a:ln/>
-        </p:spPr>
-      </p:sp>
-      <p:pic>
-        <p:nvPicPr>
-          <p:cNvPr id="16" name="Image 2" descr="/tmp/osa_pres/icons/userMd_navy.png">    </p:cNvPr>
+          <p:cNvPr id="6" name="Image 0" descr="/tmp/osa_pres/icons/user_navy.png"/>
           <p:cNvPicPr>
             <a:picLocks noChangeAspect="1"/>
           </p:cNvPicPr>
@@ -2670,7 +2484,7 @@
         </p:blipFill>
         <p:spPr>
           <a:xfrm>
-            <a:off x="8261238" y="1522110"/>
+            <a:off x="690006" y="1522110"/>
             <a:ext cx="284196" cy="284196"/>
           </a:xfrm>
           <a:prstGeom prst="rect">
@@ -2680,13 +2494,13 @@
       </p:pic>
       <p:sp>
         <p:nvSpPr>
-          <p:cNvPr id="17" name="Text 12"/>
-          <p:cNvSpPr txBox="1"/>
-          <p:nvPr/>
-        </p:nvSpPr>
-        <p:spPr>
-          <a:xfrm>
-            <a:off x="8668512" y="1417320"/>
+          <p:cNvPr id="7" name="Text 4"/>
+          <p:cNvSpPr txBox="1"/>
+          <p:nvPr/>
+        </p:nvSpPr>
+        <p:spPr>
+          <a:xfrm>
+            <a:off x="1097280" y="1417320"/>
             <a:ext cx="2880360" cy="502920"/>
           </a:xfrm>
           <a:prstGeom prst="rect">
@@ -2699,7 +2513,7 @@
           <a:bodyPr wrap="square" lIns="0" tIns="0" rIns="0" bIns="0" rtlCol="0" anchor="ctr"/>
           <a:lstStyle/>
           <a:p>
-            <a:pPr indent="0" marL="0">
+            <a:pPr marL="0" indent="0">
               <a:buNone/>
             </a:pPr>
             <a:r>
@@ -2711,7 +2525,7 @@
                 <a:ea typeface="Calibri" pitchFamily="34" charset="-122"/>
                 <a:cs typeface="Calibri" pitchFamily="34" charset="-120"/>
               </a:rPr>
-              <a:t>Médico</a:t>
+              <a:t>Paciente</a:t>
             </a:r>
             <a:endParaRPr lang="en-US" sz="1250" dirty="0"/>
           </a:p>
@@ -2719,13 +2533,13 @@
       </p:sp>
       <p:sp>
         <p:nvSpPr>
-          <p:cNvPr id="18" name="Shape 13"/>
+          <p:cNvPr id="8" name="Shape 5"/>
           <p:cNvSpPr/>
           <p:nvPr/>
         </p:nvSpPr>
         <p:spPr>
           <a:xfrm>
-            <a:off x="9880092" y="1920240"/>
+            <a:off x="2308860" y="1920240"/>
             <a:ext cx="0" cy="3977640"/>
           </a:xfrm>
           <a:prstGeom prst="line">
@@ -2739,6 +2553,322 @@
             <a:prstDash val="dash"/>
           </a:ln>
         </p:spPr>
+        <p:txBody>
+          <a:bodyPr/>
+          <a:lstStyle/>
+          <a:p>
+            <a:endParaRPr lang="en-US"/>
+          </a:p>
+        </p:txBody>
+      </p:sp>
+      <p:sp>
+        <p:nvSpPr>
+          <p:cNvPr id="9" name="Shape 6"/>
+          <p:cNvSpPr/>
+          <p:nvPr/>
+        </p:nvSpPr>
+        <p:spPr>
+          <a:xfrm>
+            <a:off x="4334256" y="1417320"/>
+            <a:ext cx="3520440" cy="502920"/>
+          </a:xfrm>
+          <a:prstGeom prst="roundRect">
+            <a:avLst>
+              <a:gd name="adj" fmla="val 14545"/>
+            </a:avLst>
+          </a:prstGeom>
+          <a:solidFill>
+            <a:srgbClr val="15213E"/>
+          </a:solidFill>
+          <a:ln/>
+        </p:spPr>
+        <p:txBody>
+          <a:bodyPr/>
+          <a:lstStyle/>
+          <a:p>
+            <a:endParaRPr lang="en-US"/>
+          </a:p>
+        </p:txBody>
+      </p:sp>
+      <p:sp>
+        <p:nvSpPr>
+          <p:cNvPr id="10" name="Shape 7"/>
+          <p:cNvSpPr/>
+          <p:nvPr/>
+        </p:nvSpPr>
+        <p:spPr>
+          <a:xfrm>
+            <a:off x="4425696" y="1472184"/>
+            <a:ext cx="384048" cy="384048"/>
+          </a:xfrm>
+          <a:prstGeom prst="ellipse">
+            <a:avLst/>
+          </a:prstGeom>
+          <a:solidFill>
+            <a:srgbClr val="17B8A6"/>
+          </a:solidFill>
+          <a:ln/>
+        </p:spPr>
+        <p:txBody>
+          <a:bodyPr/>
+          <a:lstStyle/>
+          <a:p>
+            <a:endParaRPr lang="en-US"/>
+          </a:p>
+        </p:txBody>
+      </p:sp>
+      <p:pic>
+        <p:nvPicPr>
+          <p:cNvPr id="11" name="Image 1" descr="/tmp/osa_pres/icons/database_navy.png"/>
+          <p:cNvPicPr>
+            <a:picLocks noChangeAspect="1"/>
+          </p:cNvPicPr>
+          <p:nvPr/>
+        </p:nvPicPr>
+        <p:blipFill>
+          <a:blip r:embed="rId4"/>
+          <a:stretch>
+            <a:fillRect/>
+          </a:stretch>
+        </p:blipFill>
+        <p:spPr>
+          <a:xfrm>
+            <a:off x="4475622" y="1522110"/>
+            <a:ext cx="284196" cy="284196"/>
+          </a:xfrm>
+          <a:prstGeom prst="rect">
+            <a:avLst/>
+          </a:prstGeom>
+        </p:spPr>
+      </p:pic>
+      <p:sp>
+        <p:nvSpPr>
+          <p:cNvPr id="12" name="Text 8"/>
+          <p:cNvSpPr txBox="1"/>
+          <p:nvPr/>
+        </p:nvSpPr>
+        <p:spPr>
+          <a:xfrm>
+            <a:off x="4882896" y="1417320"/>
+            <a:ext cx="2880360" cy="502920"/>
+          </a:xfrm>
+          <a:prstGeom prst="rect">
+            <a:avLst/>
+          </a:prstGeom>
+          <a:noFill/>
+          <a:ln/>
+        </p:spPr>
+        <p:txBody>
+          <a:bodyPr wrap="square" lIns="0" tIns="0" rIns="0" bIns="0" rtlCol="0" anchor="ctr"/>
+          <a:lstStyle/>
+          <a:p>
+            <a:pPr marL="0" indent="0">
+              <a:buNone/>
+            </a:pPr>
+            <a:r>
+              <a:rPr lang="en-US" sz="1250" b="1" dirty="0" err="1">
+                <a:solidFill>
+                  <a:srgbClr val="FFFFFF"/>
+                </a:solidFill>
+                <a:latin typeface="Calibri" pitchFamily="34" charset="0"/>
+                <a:ea typeface="Calibri" pitchFamily="34" charset="-122"/>
+                <a:cs typeface="Calibri" pitchFamily="34" charset="-120"/>
+              </a:rPr>
+              <a:t>Servidor</a:t>
+            </a:r>
+            <a:r>
+              <a:rPr lang="en-US" sz="1250" b="1" dirty="0">
+                <a:solidFill>
+                  <a:srgbClr val="FFFFFF"/>
+                </a:solidFill>
+                <a:latin typeface="Calibri" pitchFamily="34" charset="0"/>
+                <a:ea typeface="Calibri" pitchFamily="34" charset="-122"/>
+                <a:cs typeface="Calibri" pitchFamily="34" charset="-120"/>
+              </a:rPr>
+              <a:t> (custodio ciego)</a:t>
+            </a:r>
+            <a:endParaRPr lang="en-US" sz="1250" dirty="0"/>
+          </a:p>
+        </p:txBody>
+      </p:sp>
+      <p:sp>
+        <p:nvSpPr>
+          <p:cNvPr id="13" name="Shape 9"/>
+          <p:cNvSpPr/>
+          <p:nvPr/>
+        </p:nvSpPr>
+        <p:spPr>
+          <a:xfrm>
+            <a:off x="6094476" y="1920240"/>
+            <a:ext cx="0" cy="3977640"/>
+          </a:xfrm>
+          <a:prstGeom prst="line">
+            <a:avLst/>
+          </a:prstGeom>
+          <a:noFill/>
+          <a:ln w="12700">
+            <a:solidFill>
+              <a:srgbClr val="E2E5F0"/>
+            </a:solidFill>
+            <a:prstDash val="dash"/>
+          </a:ln>
+        </p:spPr>
+        <p:txBody>
+          <a:bodyPr/>
+          <a:lstStyle/>
+          <a:p>
+            <a:endParaRPr lang="en-US"/>
+          </a:p>
+        </p:txBody>
+      </p:sp>
+      <p:sp>
+        <p:nvSpPr>
+          <p:cNvPr id="14" name="Shape 10"/>
+          <p:cNvSpPr/>
+          <p:nvPr/>
+        </p:nvSpPr>
+        <p:spPr>
+          <a:xfrm>
+            <a:off x="8119872" y="1417320"/>
+            <a:ext cx="3520440" cy="502920"/>
+          </a:xfrm>
+          <a:prstGeom prst="roundRect">
+            <a:avLst>
+              <a:gd name="adj" fmla="val 14545"/>
+            </a:avLst>
+          </a:prstGeom>
+          <a:solidFill>
+            <a:srgbClr val="15213E"/>
+          </a:solidFill>
+          <a:ln/>
+        </p:spPr>
+        <p:txBody>
+          <a:bodyPr/>
+          <a:lstStyle/>
+          <a:p>
+            <a:endParaRPr lang="en-US"/>
+          </a:p>
+        </p:txBody>
+      </p:sp>
+      <p:sp>
+        <p:nvSpPr>
+          <p:cNvPr id="15" name="Shape 11"/>
+          <p:cNvSpPr/>
+          <p:nvPr/>
+        </p:nvSpPr>
+        <p:spPr>
+          <a:xfrm>
+            <a:off x="8211312" y="1472184"/>
+            <a:ext cx="384048" cy="384048"/>
+          </a:xfrm>
+          <a:prstGeom prst="ellipse">
+            <a:avLst/>
+          </a:prstGeom>
+          <a:solidFill>
+            <a:srgbClr val="17B8A6"/>
+          </a:solidFill>
+          <a:ln/>
+        </p:spPr>
+        <p:txBody>
+          <a:bodyPr/>
+          <a:lstStyle/>
+          <a:p>
+            <a:endParaRPr lang="en-US"/>
+          </a:p>
+        </p:txBody>
+      </p:sp>
+      <p:pic>
+        <p:nvPicPr>
+          <p:cNvPr id="16" name="Image 2" descr="/tmp/osa_pres/icons/userMd_navy.png"/>
+          <p:cNvPicPr>
+            <a:picLocks noChangeAspect="1"/>
+          </p:cNvPicPr>
+          <p:nvPr/>
+        </p:nvPicPr>
+        <p:blipFill>
+          <a:blip r:embed="rId5"/>
+          <a:stretch>
+            <a:fillRect/>
+          </a:stretch>
+        </p:blipFill>
+        <p:spPr>
+          <a:xfrm>
+            <a:off x="8261238" y="1522110"/>
+            <a:ext cx="284196" cy="284196"/>
+          </a:xfrm>
+          <a:prstGeom prst="rect">
+            <a:avLst/>
+          </a:prstGeom>
+        </p:spPr>
+      </p:pic>
+      <p:sp>
+        <p:nvSpPr>
+          <p:cNvPr id="17" name="Text 12"/>
+          <p:cNvSpPr txBox="1"/>
+          <p:nvPr/>
+        </p:nvSpPr>
+        <p:spPr>
+          <a:xfrm>
+            <a:off x="8668512" y="1417320"/>
+            <a:ext cx="2880360" cy="502920"/>
+          </a:xfrm>
+          <a:prstGeom prst="rect">
+            <a:avLst/>
+          </a:prstGeom>
+          <a:noFill/>
+          <a:ln/>
+        </p:spPr>
+        <p:txBody>
+          <a:bodyPr wrap="square" lIns="0" tIns="0" rIns="0" bIns="0" rtlCol="0" anchor="ctr"/>
+          <a:lstStyle/>
+          <a:p>
+            <a:pPr marL="0" indent="0">
+              <a:buNone/>
+            </a:pPr>
+            <a:r>
+              <a:rPr lang="en-US" sz="1250" b="1" dirty="0">
+                <a:solidFill>
+                  <a:srgbClr val="FFFFFF"/>
+                </a:solidFill>
+                <a:latin typeface="Calibri" pitchFamily="34" charset="0"/>
+                <a:ea typeface="Calibri" pitchFamily="34" charset="-122"/>
+                <a:cs typeface="Calibri" pitchFamily="34" charset="-120"/>
+              </a:rPr>
+              <a:t>Médico</a:t>
+            </a:r>
+            <a:endParaRPr lang="en-US" sz="1250" dirty="0"/>
+          </a:p>
+        </p:txBody>
+      </p:sp>
+      <p:sp>
+        <p:nvSpPr>
+          <p:cNvPr id="18" name="Shape 13"/>
+          <p:cNvSpPr/>
+          <p:nvPr/>
+        </p:nvSpPr>
+        <p:spPr>
+          <a:xfrm>
+            <a:off x="9880092" y="1920240"/>
+            <a:ext cx="0" cy="3977640"/>
+          </a:xfrm>
+          <a:prstGeom prst="line">
+            <a:avLst/>
+          </a:prstGeom>
+          <a:noFill/>
+          <a:ln w="12700">
+            <a:solidFill>
+              <a:srgbClr val="E2E5F0"/>
+            </a:solidFill>
+            <a:prstDash val="dash"/>
+          </a:ln>
+        </p:spPr>
+        <p:txBody>
+          <a:bodyPr/>
+          <a:lstStyle/>
+          <a:p>
+            <a:endParaRPr lang="en-US"/>
+          </a:p>
+        </p:txBody>
       </p:sp>
       <p:sp>
         <p:nvSpPr>
@@ -2764,6 +2894,13 @@
             <a:prstDash val="solid"/>
           </a:ln>
         </p:spPr>
+        <p:txBody>
+          <a:bodyPr/>
+          <a:lstStyle/>
+          <a:p>
+            <a:endParaRPr lang="en-US"/>
+          </a:p>
+        </p:txBody>
       </p:sp>
       <p:sp>
         <p:nvSpPr>
@@ -2791,13 +2928,20 @@
             <a:prstDash val="solid"/>
           </a:ln>
           <a:effectLst>
-            <a:outerShdw sx="100000" sy="100000" kx="0" ky="0" algn="bl" rotWithShape="0" blurRad="101600" dist="38100" dir="5400000">
+            <a:outerShdw blurRad="101600" dist="38100" dir="5400000" algn="bl" rotWithShape="0">
               <a:srgbClr val="1B2340">
                 <a:alpha val="12000"/>
               </a:srgbClr>
             </a:outerShdw>
           </a:effectLst>
         </p:spPr>
+        <p:txBody>
+          <a:bodyPr/>
+          <a:lstStyle/>
+          <a:p>
+            <a:endParaRPr lang="en-US"/>
+          </a:p>
+        </p:txBody>
       </p:sp>
       <p:sp>
         <p:nvSpPr>
@@ -2820,7 +2964,7 @@
           <a:bodyPr wrap="square" lIns="0" tIns="0" rIns="0" bIns="0" rtlCol="0" anchor="ctr"/>
           <a:lstStyle/>
           <a:p>
-            <a:pPr indent="0" marL="0">
+            <a:pPr marL="0" indent="0">
               <a:lnSpc>
                 <a:spcPct val="115000"/>
               </a:lnSpc>
@@ -2865,6 +3009,13 @@
             <a:prstDash val="solid"/>
           </a:ln>
         </p:spPr>
+        <p:txBody>
+          <a:bodyPr/>
+          <a:lstStyle/>
+          <a:p>
+            <a:endParaRPr lang="en-US"/>
+          </a:p>
+        </p:txBody>
       </p:sp>
       <p:sp>
         <p:nvSpPr>
@@ -2892,13 +3043,20 @@
             <a:prstDash val="solid"/>
           </a:ln>
           <a:effectLst>
-            <a:outerShdw sx="100000" sy="100000" kx="0" ky="0" algn="bl" rotWithShape="0" blurRad="101600" dist="38100" dir="5400000">
+            <a:outerShdw blurRad="101600" dist="38100" dir="5400000" algn="bl" rotWithShape="0">
               <a:srgbClr val="1B2340">
                 <a:alpha val="12000"/>
               </a:srgbClr>
             </a:outerShdw>
           </a:effectLst>
         </p:spPr>
+        <p:txBody>
+          <a:bodyPr/>
+          <a:lstStyle/>
+          <a:p>
+            <a:endParaRPr lang="en-US"/>
+          </a:p>
+        </p:txBody>
       </p:sp>
       <p:sp>
         <p:nvSpPr>
@@ -2921,7 +3079,7 @@
           <a:bodyPr wrap="square" lIns="0" tIns="0" rIns="0" bIns="0" rtlCol="0" anchor="ctr"/>
           <a:lstStyle/>
           <a:p>
-            <a:pPr indent="0" marL="0">
+            <a:pPr marL="0" indent="0">
               <a:lnSpc>
                 <a:spcPct val="115000"/>
               </a:lnSpc>
@@ -2966,6 +3124,13 @@
             <a:prstDash val="solid"/>
           </a:ln>
         </p:spPr>
+        <p:txBody>
+          <a:bodyPr/>
+          <a:lstStyle/>
+          <a:p>
+            <a:endParaRPr lang="en-US"/>
+          </a:p>
+        </p:txBody>
       </p:sp>
       <p:sp>
         <p:nvSpPr>
@@ -2993,13 +3158,20 @@
             <a:prstDash val="solid"/>
           </a:ln>
           <a:effectLst>
-            <a:outerShdw sx="100000" sy="100000" kx="0" ky="0" algn="bl" rotWithShape="0" blurRad="101600" dist="38100" dir="5400000">
+            <a:outerShdw blurRad="101600" dist="38100" dir="5400000" algn="bl" rotWithShape="0">
               <a:srgbClr val="1B2340">
                 <a:alpha val="12000"/>
               </a:srgbClr>
             </a:outerShdw>
           </a:effectLst>
         </p:spPr>
+        <p:txBody>
+          <a:bodyPr/>
+          <a:lstStyle/>
+          <a:p>
+            <a:endParaRPr lang="en-US"/>
+          </a:p>
+        </p:txBody>
       </p:sp>
       <p:sp>
         <p:nvSpPr>
@@ -3022,7 +3194,7 @@
           <a:bodyPr wrap="square" lIns="0" tIns="0" rIns="0" bIns="0" rtlCol="0" anchor="ctr"/>
           <a:lstStyle/>
           <a:p>
-            <a:pPr indent="0" marL="0">
+            <a:pPr marL="0" indent="0">
               <a:lnSpc>
                 <a:spcPct val="115000"/>
               </a:lnSpc>
@@ -3045,111 +3217,6 @@
       </p:sp>
       <p:sp>
         <p:nvSpPr>
-          <p:cNvPr id="28" name="Shape 23"/>
-          <p:cNvSpPr/>
-          <p:nvPr/>
-        </p:nvSpPr>
-        <p:spPr>
-          <a:xfrm>
-            <a:off x="548640" y="5532120"/>
-            <a:ext cx="11091672" cy="777240"/>
-          </a:xfrm>
-          <a:prstGeom prst="roundRect">
-            <a:avLst>
-              <a:gd name="adj" fmla="val 9412"/>
-            </a:avLst>
-          </a:prstGeom>
-          <a:solidFill>
-            <a:srgbClr val="FFF6E9"/>
-          </a:solidFill>
-          <a:ln w="12700">
-            <a:solidFill>
-              <a:srgbClr val="E8A33D"/>
-            </a:solidFill>
-            <a:prstDash val="solid"/>
-          </a:ln>
-        </p:spPr>
-      </p:sp>
-      <p:sp>
-        <p:nvSpPr>
-          <p:cNvPr id="29" name="Text 24"/>
-          <p:cNvSpPr txBox="1"/>
-          <p:nvPr/>
-        </p:nvSpPr>
-        <p:spPr>
-          <a:xfrm>
-            <a:off x="868680" y="5532120"/>
-            <a:ext cx="10424160" cy="777240"/>
-          </a:xfrm>
-          <a:prstGeom prst="rect">
-            <a:avLst/>
-          </a:prstGeom>
-          <a:noFill/>
-          <a:ln/>
-        </p:spPr>
-        <p:txBody>
-          <a:bodyPr wrap="square" lIns="0" tIns="0" rIns="0" bIns="0" rtlCol="0" anchor="ctr"/>
-          <a:lstStyle/>
-          <a:p>
-            <a:pPr indent="0" marL="0">
-              <a:buNone/>
-            </a:pPr>
-            <a:r>
-              <a:rPr lang="en-US" sz="1300" b="1" dirty="0">
-                <a:solidFill>
-                  <a:srgbClr val="5C3A00"/>
-                </a:solidFill>
-                <a:latin typeface="Calibri" pitchFamily="34" charset="0"/>
-                <a:ea typeface="Calibri" pitchFamily="34" charset="-122"/>
-                <a:cs typeface="Calibri" pitchFamily="34" charset="-120"/>
-              </a:rPr>
-              <a:t>Corrección real que encontramos: sin un paquete extra, un médico autorizado podía ENCONTRAR un documento pero nunca ABRIRLO.</a:t>
-            </a:r>
-            <a:endParaRPr lang="en-US" sz="1300" dirty="0"/>
-          </a:p>
-        </p:txBody>
-      </p:sp>
-      <p:sp>
-        <p:nvSpPr>
-          <p:cNvPr id="30" name="Text 25"/>
-          <p:cNvSpPr/>
-          <p:nvPr/>
-        </p:nvSpPr>
-        <p:spPr>
-          <a:xfrm>
-            <a:off x="548640" y="6437376"/>
-            <a:ext cx="7315200" cy="274320"/>
-          </a:xfrm>
-          <a:prstGeom prst="rect">
-            <a:avLst/>
-          </a:prstGeom>
-          <a:noFill/>
-          <a:ln/>
-        </p:spPr>
-        <p:txBody>
-          <a:bodyPr wrap="square" rtlCol="0" anchor="ctr"/>
-          <a:lstStyle/>
-          <a:p>
-            <a:pPr algn="l" indent="0" marL="0">
-              <a:buNone/>
-            </a:pPr>
-            <a:r>
-              <a:rPr lang="en-US" sz="1050" dirty="0">
-                <a:solidFill>
-                  <a:srgbClr val="5B6485"/>
-                </a:solidFill>
-                <a:latin typeface="Calibri" pitchFamily="34" charset="0"/>
-                <a:ea typeface="Calibri" pitchFamily="34" charset="-122"/>
-                <a:cs typeface="Calibri" pitchFamily="34" charset="-120"/>
-              </a:rPr>
-              <a:t>Criptografía Avanzada — SSE asimétrico</a:t>
-            </a:r>
-            <a:endParaRPr lang="en-US" sz="1050" dirty="0"/>
-          </a:p>
-        </p:txBody>
-      </p:sp>
-      <p:sp>
-        <p:nvSpPr>
           <p:cNvPr id="31" name="Text 26"/>
           <p:cNvSpPr/>
           <p:nvPr/>
@@ -3169,7 +3236,7 @@
           <a:bodyPr wrap="square" rtlCol="0" anchor="ctr"/>
           <a:lstStyle/>
           <a:p>
-            <a:pPr algn="r" indent="0" marL="0">
+            <a:pPr marL="0" indent="0" algn="r">
               <a:buNone/>
             </a:pPr>
             <a:r>
@@ -3233,11 +3300,11 @@
           <a:bodyPr wrap="square" lIns="0" tIns="0" rIns="0" bIns="0" rtlCol="0" anchor="ctr"/>
           <a:lstStyle/>
           <a:p>
-            <a:pPr indent="0" marL="0">
-              <a:buNone/>
-            </a:pPr>
-            <a:r>
-              <a:rPr lang="en-US" sz="1250" b="1" spc="200" kern="0" dirty="0">
+            <a:pPr marL="0" indent="0">
+              <a:buNone/>
+            </a:pPr>
+            <a:r>
+              <a:rPr lang="en-US" sz="1250" b="1" kern="0" spc="200" dirty="0">
                 <a:solidFill>
                   <a:srgbClr val="6C6FD9"/>
                 </a:solidFill>
@@ -3272,7 +3339,7 @@
           <a:bodyPr wrap="square" lIns="0" tIns="0" rIns="0" bIns="0" rtlCol="0" anchor="ctr"/>
           <a:lstStyle/>
           <a:p>
-            <a:pPr indent="0" marL="0">
+            <a:pPr marL="0" indent="0">
               <a:buNone/>
             </a:pPr>
             <a:r>
@@ -3316,13 +3383,20 @@
             <a:prstDash val="solid"/>
           </a:ln>
           <a:effectLst>
-            <a:outerShdw sx="100000" sy="100000" kx="0" ky="0" algn="bl" rotWithShape="0" blurRad="101600" dist="38100" dir="5400000">
+            <a:outerShdw blurRad="101600" dist="38100" dir="5400000" algn="bl" rotWithShape="0">
               <a:srgbClr val="1B2340">
                 <a:alpha val="12000"/>
               </a:srgbClr>
             </a:outerShdw>
           </a:effectLst>
         </p:spPr>
+        <p:txBody>
+          <a:bodyPr/>
+          <a:lstStyle/>
+          <a:p>
+            <a:endParaRPr lang="en-US"/>
+          </a:p>
+        </p:txBody>
       </p:sp>
       <p:sp>
         <p:nvSpPr>
@@ -3343,17 +3417,24 @@
           </a:solidFill>
           <a:ln/>
         </p:spPr>
+        <p:txBody>
+          <a:bodyPr/>
+          <a:lstStyle/>
+          <a:p>
+            <a:endParaRPr lang="en-US"/>
+          </a:p>
+        </p:txBody>
       </p:sp>
       <p:pic>
         <p:nvPicPr>
-          <p:cNvPr id="6" name="Image 0" descr="/tmp/osa_pres/icons/eyeSlash_teal.png">    </p:cNvPr>
+          <p:cNvPr id="6" name="Image 0" descr="/tmp/osa_pres/icons/eyeSlash_teal.png"/>
           <p:cNvPicPr>
             <a:picLocks noChangeAspect="1"/>
           </p:cNvPicPr>
           <p:nvPr/>
         </p:nvPicPr>
         <p:blipFill>
-          <a:blip r:embed="rId1"/>
+          <a:blip r:embed="rId3"/>
           <a:stretch>
             <a:fillRect/>
           </a:stretch>
@@ -3389,7 +3470,7 @@
           <a:bodyPr wrap="square" lIns="0" tIns="0" rIns="0" bIns="0" rtlCol="0" anchor="ctr"/>
           <a:lstStyle/>
           <a:p>
-            <a:pPr algn="ctr" indent="0" marL="0">
+            <a:pPr marL="0" indent="0" algn="ctr">
               <a:buNone/>
             </a:pPr>
             <a:r>
@@ -3428,7 +3509,7 @@
           <a:bodyPr wrap="square" lIns="0" tIns="0" rIns="0" bIns="0" rtlCol="0" anchor="ctr"/>
           <a:lstStyle/>
           <a:p>
-            <a:pPr indent="0" marL="0">
+            <a:pPr marL="0" indent="0">
               <a:lnSpc>
                 <a:spcPct val="110000"/>
               </a:lnSpc>
@@ -3470,7 +3551,7 @@
           <a:bodyPr wrap="square" lIns="0" tIns="0" rIns="0" bIns="0" rtlCol="0" anchor="ctr"/>
           <a:lstStyle/>
           <a:p>
-            <a:pPr indent="0" marL="0">
+            <a:pPr marL="0" indent="0">
               <a:lnSpc>
                 <a:spcPct val="118000"/>
               </a:lnSpc>
@@ -3517,13 +3598,20 @@
             <a:prstDash val="solid"/>
           </a:ln>
           <a:effectLst>
-            <a:outerShdw sx="100000" sy="100000" kx="0" ky="0" algn="bl" rotWithShape="0" blurRad="101600" dist="38100" dir="5400000">
+            <a:outerShdw blurRad="101600" dist="38100" dir="5400000" algn="bl" rotWithShape="0">
               <a:srgbClr val="1B2340">
                 <a:alpha val="12000"/>
               </a:srgbClr>
             </a:outerShdw>
           </a:effectLst>
         </p:spPr>
+        <p:txBody>
+          <a:bodyPr/>
+          <a:lstStyle/>
+          <a:p>
+            <a:endParaRPr lang="en-US"/>
+          </a:p>
+        </p:txBody>
       </p:sp>
       <p:sp>
         <p:nvSpPr>
@@ -3544,17 +3632,24 @@
           </a:solidFill>
           <a:ln/>
         </p:spPr>
+        <p:txBody>
+          <a:bodyPr/>
+          <a:lstStyle/>
+          <a:p>
+            <a:endParaRPr lang="en-US"/>
+          </a:p>
+        </p:txBody>
       </p:sp>
       <p:pic>
         <p:nvPicPr>
-          <p:cNvPr id="12" name="Image 1" descr="/tmp/osa_pres/icons/unlock_teal.png">    </p:cNvPr>
+          <p:cNvPr id="12" name="Image 1" descr="/tmp/osa_pres/icons/unlock_teal.png"/>
           <p:cNvPicPr>
             <a:picLocks noChangeAspect="1"/>
           </p:cNvPicPr>
           <p:nvPr/>
         </p:nvPicPr>
         <p:blipFill>
-          <a:blip r:embed="rId2"/>
+          <a:blip r:embed="rId4"/>
           <a:stretch>
             <a:fillRect/>
           </a:stretch>
@@ -3590,7 +3685,7 @@
           <a:bodyPr wrap="square" lIns="0" tIns="0" rIns="0" bIns="0" rtlCol="0" anchor="ctr"/>
           <a:lstStyle/>
           <a:p>
-            <a:pPr algn="ctr" indent="0" marL="0">
+            <a:pPr marL="0" indent="0" algn="ctr">
               <a:buNone/>
             </a:pPr>
             <a:r>
@@ -3629,7 +3724,7 @@
           <a:bodyPr wrap="square" lIns="0" tIns="0" rIns="0" bIns="0" rtlCol="0" anchor="ctr"/>
           <a:lstStyle/>
           <a:p>
-            <a:pPr indent="0" marL="0">
+            <a:pPr marL="0" indent="0">
               <a:lnSpc>
                 <a:spcPct val="110000"/>
               </a:lnSpc>
@@ -3671,7 +3766,7 @@
           <a:bodyPr wrap="square" lIns="0" tIns="0" rIns="0" bIns="0" rtlCol="0" anchor="ctr"/>
           <a:lstStyle/>
           <a:p>
-            <a:pPr indent="0" marL="0">
+            <a:pPr marL="0" indent="0">
               <a:lnSpc>
                 <a:spcPct val="118000"/>
               </a:lnSpc>
@@ -3718,13 +3813,20 @@
             <a:prstDash val="solid"/>
           </a:ln>
           <a:effectLst>
-            <a:outerShdw sx="100000" sy="100000" kx="0" ky="0" algn="bl" rotWithShape="0" blurRad="101600" dist="38100" dir="5400000">
+            <a:outerShdw blurRad="101600" dist="38100" dir="5400000" algn="bl" rotWithShape="0">
               <a:srgbClr val="1B2340">
                 <a:alpha val="12000"/>
               </a:srgbClr>
             </a:outerShdw>
           </a:effectLst>
         </p:spPr>
+        <p:txBody>
+          <a:bodyPr/>
+          <a:lstStyle/>
+          <a:p>
+            <a:endParaRPr lang="en-US"/>
+          </a:p>
+        </p:txBody>
       </p:sp>
       <p:sp>
         <p:nvSpPr>
@@ -3745,17 +3847,24 @@
           </a:solidFill>
           <a:ln/>
         </p:spPr>
+        <p:txBody>
+          <a:bodyPr/>
+          <a:lstStyle/>
+          <a:p>
+            <a:endParaRPr lang="en-US"/>
+          </a:p>
+        </p:txBody>
       </p:sp>
       <p:pic>
         <p:nvPicPr>
-          <p:cNvPr id="18" name="Image 2" descr="/tmp/osa_pres/icons/lock_teal.png">    </p:cNvPr>
+          <p:cNvPr id="18" name="Image 2" descr="/tmp/osa_pres/icons/lock_teal.png"/>
           <p:cNvPicPr>
             <a:picLocks noChangeAspect="1"/>
           </p:cNvPicPr>
           <p:nvPr/>
         </p:nvPicPr>
         <p:blipFill>
-          <a:blip r:embed="rId3"/>
+          <a:blip r:embed="rId5"/>
           <a:stretch>
             <a:fillRect/>
           </a:stretch>
@@ -3791,7 +3900,7 @@
           <a:bodyPr wrap="square" lIns="0" tIns="0" rIns="0" bIns="0" rtlCol="0" anchor="ctr"/>
           <a:lstStyle/>
           <a:p>
-            <a:pPr algn="ctr" indent="0" marL="0">
+            <a:pPr marL="0" indent="0" algn="ctr">
               <a:buNone/>
             </a:pPr>
             <a:r>
@@ -3830,7 +3939,7 @@
           <a:bodyPr wrap="square" lIns="0" tIns="0" rIns="0" bIns="0" rtlCol="0" anchor="ctr"/>
           <a:lstStyle/>
           <a:p>
-            <a:pPr indent="0" marL="0">
+            <a:pPr marL="0" indent="0">
               <a:lnSpc>
                 <a:spcPct val="110000"/>
               </a:lnSpc>
@@ -3872,7 +3981,7 @@
           <a:bodyPr wrap="square" lIns="0" tIns="0" rIns="0" bIns="0" rtlCol="0" anchor="ctr"/>
           <a:lstStyle/>
           <a:p>
-            <a:pPr indent="0" marL="0">
+            <a:pPr marL="0" indent="0">
               <a:lnSpc>
                 <a:spcPct val="118000"/>
               </a:lnSpc>
@@ -3919,6 +4028,13 @@
             <a:prstDash val="solid"/>
           </a:ln>
         </p:spPr>
+        <p:txBody>
+          <a:bodyPr/>
+          <a:lstStyle/>
+          <a:p>
+            <a:endParaRPr lang="en-US"/>
+          </a:p>
+        </p:txBody>
       </p:sp>
       <p:sp>
         <p:nvSpPr>
@@ -3941,7 +4057,7 @@
           <a:bodyPr wrap="square" lIns="0" tIns="0" rIns="0" bIns="0" rtlCol="0" anchor="ctr"/>
           <a:lstStyle/>
           <a:p>
-            <a:pPr indent="0" marL="0">
+            <a:pPr marL="0" indent="0">
               <a:buNone/>
             </a:pPr>
             <a:r>
@@ -3980,7 +4096,7 @@
           <a:bodyPr wrap="square" lIns="0" tIns="0" rIns="0" bIns="0" rtlCol="0" anchor="ctr"/>
           <a:lstStyle/>
           <a:p>
-            <a:pPr indent="0" marL="0">
+            <a:pPr marL="0" indent="0">
               <a:lnSpc>
                 <a:spcPct val="125000"/>
               </a:lnSpc>
@@ -4003,45 +4119,6 @@
       </p:sp>
       <p:sp>
         <p:nvSpPr>
-          <p:cNvPr id="25" name="Text 20"/>
-          <p:cNvSpPr/>
-          <p:nvPr/>
-        </p:nvSpPr>
-        <p:spPr>
-          <a:xfrm>
-            <a:off x="548640" y="6437376"/>
-            <a:ext cx="7315200" cy="274320"/>
-          </a:xfrm>
-          <a:prstGeom prst="rect">
-            <a:avLst/>
-          </a:prstGeom>
-          <a:noFill/>
-          <a:ln/>
-        </p:spPr>
-        <p:txBody>
-          <a:bodyPr wrap="square" rtlCol="0" anchor="ctr"/>
-          <a:lstStyle/>
-          <a:p>
-            <a:pPr algn="l" indent="0" marL="0">
-              <a:buNone/>
-            </a:pPr>
-            <a:r>
-              <a:rPr lang="en-US" sz="1050" dirty="0">
-                <a:solidFill>
-                  <a:srgbClr val="5B6485"/>
-                </a:solidFill>
-                <a:latin typeface="Calibri" pitchFamily="34" charset="0"/>
-                <a:ea typeface="Calibri" pitchFamily="34" charset="-122"/>
-                <a:cs typeface="Calibri" pitchFamily="34" charset="-120"/>
-              </a:rPr>
-              <a:t>Criptografía Avanzada — SSE asimétrico</a:t>
-            </a:r>
-            <a:endParaRPr lang="en-US" sz="1050" dirty="0"/>
-          </a:p>
-        </p:txBody>
-      </p:sp>
-      <p:sp>
-        <p:nvSpPr>
           <p:cNvPr id="26" name="Text 21"/>
           <p:cNvSpPr/>
           <p:nvPr/>
@@ -4061,7 +4138,7 @@
           <a:bodyPr wrap="square" rtlCol="0" anchor="ctr"/>
           <a:lstStyle/>
           <a:p>
-            <a:pPr algn="r" indent="0" marL="0">
+            <a:pPr marL="0" indent="0" algn="r">
               <a:buNone/>
             </a:pPr>
             <a:r>
@@ -4095,6 +4172,7 @@
         <a:solidFill>
           <a:srgbClr val="15213E"/>
         </a:solidFill>
+        <a:effectLst/>
       </p:bgPr>
     </p:bg>
     <p:spTree>
@@ -4132,11 +4210,11 @@
           <a:bodyPr wrap="square" lIns="0" tIns="0" rIns="0" bIns="0" rtlCol="0" anchor="ctr"/>
           <a:lstStyle/>
           <a:p>
-            <a:pPr indent="0" marL="0">
-              <a:buNone/>
-            </a:pPr>
-            <a:r>
-              <a:rPr lang="en-US" sz="1250" b="1" spc="200" kern="0" dirty="0">
+            <a:pPr marL="0" indent="0">
+              <a:buNone/>
+            </a:pPr>
+            <a:r>
+              <a:rPr lang="en-US" sz="1250" b="1" kern="0" spc="200" dirty="0">
                 <a:solidFill>
                   <a:srgbClr val="17B8A6"/>
                 </a:solidFill>
@@ -4171,7 +4249,7 @@
           <a:bodyPr wrap="square" lIns="0" tIns="0" rIns="0" bIns="0" rtlCol="0" anchor="ctr"/>
           <a:lstStyle/>
           <a:p>
-            <a:pPr indent="0" marL="0">
+            <a:pPr marL="0" indent="0">
               <a:buNone/>
             </a:pPr>
             <a:r>
@@ -4208,6 +4286,13 @@
           </a:solidFill>
           <a:ln/>
         </p:spPr>
+        <p:txBody>
+          <a:bodyPr/>
+          <a:lstStyle/>
+          <a:p>
+            <a:endParaRPr lang="en-US"/>
+          </a:p>
+        </p:txBody>
       </p:sp>
       <p:sp>
         <p:nvSpPr>
@@ -4230,7 +4315,7 @@
           <a:bodyPr wrap="square" lIns="0" tIns="0" rIns="0" bIns="0" rtlCol="0" anchor="ctr"/>
           <a:lstStyle/>
           <a:p>
-            <a:pPr algn="ctr" indent="0" marL="0">
+            <a:pPr marL="0" indent="0" algn="ctr">
               <a:buNone/>
             </a:pPr>
             <a:r>
@@ -4256,7 +4341,7 @@
         </p:nvSpPr>
         <p:spPr>
           <a:xfrm>
-            <a:off x="1234440" y="1463040"/>
+            <a:off x="1234440" y="1307592"/>
             <a:ext cx="10241280" cy="914400"/>
           </a:xfrm>
           <a:prstGeom prst="rect">
@@ -4269,7 +4354,7 @@
           <a:bodyPr wrap="square" lIns="0" tIns="0" rIns="0" bIns="0" rtlCol="0" anchor="ctr"/>
           <a:lstStyle/>
           <a:p>
-            <a:pPr indent="0" marL="0">
+            <a:pPr marL="0" indent="0">
               <a:lnSpc>
                 <a:spcPct val="120000"/>
               </a:lnSpc>
@@ -4286,13 +4371,126 @@
               </a:rPr>
               <a:t>El límite real no es la primitiva — </a:t>
             </a:r>
-            <a:pPr indent="0" marL="0">
+            <a:r>
+              <a:rPr lang="en-US" sz="1500" dirty="0">
+                <a:solidFill>
+                  <a:srgbClr val="AEB6D6"/>
+                </a:solidFill>
+                <a:latin typeface="Calibri" pitchFamily="34" charset="0"/>
+                <a:ea typeface="Calibri" pitchFamily="34" charset="-122"/>
+                <a:cs typeface="Calibri" pitchFamily="34" charset="-120"/>
+              </a:rPr>
+              <a:t>es la distribución de claves entre partes que nunca compartieron un canal seguro.</a:t>
+            </a:r>
+            <a:endParaRPr lang="en-US" sz="1500" dirty="0"/>
+          </a:p>
+        </p:txBody>
+      </p:sp>
+      <p:sp>
+        <p:nvSpPr>
+          <p:cNvPr id="7" name="Shape 5"/>
+          <p:cNvSpPr/>
+          <p:nvPr/>
+        </p:nvSpPr>
+        <p:spPr>
+          <a:xfrm>
+            <a:off x="548640" y="2560320"/>
+            <a:ext cx="502920" cy="502920"/>
+          </a:xfrm>
+          <a:prstGeom prst="ellipse">
+            <a:avLst/>
+          </a:prstGeom>
+          <a:solidFill>
+            <a:srgbClr val="17B8A6"/>
+          </a:solidFill>
+          <a:ln/>
+        </p:spPr>
+        <p:txBody>
+          <a:bodyPr/>
+          <a:lstStyle/>
+          <a:p>
+            <a:endParaRPr lang="en-US"/>
+          </a:p>
+        </p:txBody>
+      </p:sp>
+      <p:sp>
+        <p:nvSpPr>
+          <p:cNvPr id="8" name="Text 6"/>
+          <p:cNvSpPr txBox="1"/>
+          <p:nvPr/>
+        </p:nvSpPr>
+        <p:spPr>
+          <a:xfrm>
+            <a:off x="548640" y="2560320"/>
+            <a:ext cx="502920" cy="502920"/>
+          </a:xfrm>
+          <a:prstGeom prst="rect">
+            <a:avLst/>
+          </a:prstGeom>
+          <a:noFill/>
+          <a:ln/>
+        </p:spPr>
+        <p:txBody>
+          <a:bodyPr wrap="square" lIns="0" tIns="0" rIns="0" bIns="0" rtlCol="0" anchor="ctr"/>
+          <a:lstStyle/>
+          <a:p>
+            <a:pPr marL="0" indent="0" algn="ctr">
+              <a:buNone/>
+            </a:pPr>
+            <a:r>
+              <a:rPr lang="en-US" sz="1800" b="1" dirty="0">
+                <a:solidFill>
+                  <a:srgbClr val="15213E"/>
+                </a:solidFill>
+                <a:latin typeface="Cambria" pitchFamily="34" charset="0"/>
+                <a:ea typeface="Cambria" pitchFamily="34" charset="-122"/>
+                <a:cs typeface="Cambria" pitchFamily="34" charset="-120"/>
+              </a:rPr>
+              <a:t>2</a:t>
+            </a:r>
+            <a:endParaRPr lang="en-US" sz="1800" dirty="0"/>
+          </a:p>
+        </p:txBody>
+      </p:sp>
+      <p:sp>
+        <p:nvSpPr>
+          <p:cNvPr id="9" name="Text 7"/>
+          <p:cNvSpPr txBox="1"/>
+          <p:nvPr/>
+        </p:nvSpPr>
+        <p:spPr>
+          <a:xfrm>
+            <a:off x="1234440" y="2354580"/>
+            <a:ext cx="10241280" cy="914400"/>
+          </a:xfrm>
+          <a:prstGeom prst="rect">
+            <a:avLst/>
+          </a:prstGeom>
+          <a:noFill/>
+          <a:ln/>
+        </p:spPr>
+        <p:txBody>
+          <a:bodyPr wrap="square" lIns="0" tIns="0" rIns="0" bIns="0" rtlCol="0" anchor="ctr"/>
+          <a:lstStyle/>
+          <a:p>
+            <a:pPr marL="0" indent="0">
               <a:lnSpc>
                 <a:spcPct val="120000"/>
               </a:lnSpc>
               <a:buNone/>
             </a:pPr>
             <a:r>
+              <a:rPr lang="en-US" sz="1500" b="1" dirty="0">
+                <a:solidFill>
+                  <a:srgbClr val="FFFFFF"/>
+                </a:solidFill>
+                <a:latin typeface="Calibri" pitchFamily="34" charset="0"/>
+                <a:ea typeface="Calibri" pitchFamily="34" charset="-122"/>
+                <a:cs typeface="Calibri" pitchFamily="34" charset="-120"/>
+              </a:rPr>
+              <a:t>PEKS resuelve la teoría, no la práctica — </a:t>
+            </a:r>
+            <a:r>
               <a:rPr lang="en-US" sz="1500" dirty="0">
                 <a:solidFill>
                   <a:srgbClr val="AEB6D6"/>
@@ -4301,7 +4499,7 @@
                 <a:ea typeface="Calibri" pitchFamily="34" charset="-122"/>
                 <a:cs typeface="Calibri" pitchFamily="34" charset="-120"/>
               </a:rPr>
-              <a:t>es la distribución de claves entre partes que nunca compartieron un canal seguro.</a:t>
+              <a:t>paga con el Keyword Guessing Attack y con emparejamientos costosos.</a:t>
             </a:r>
             <a:endParaRPr lang="en-US" sz="1500" dirty="0"/>
           </a:p>
@@ -4309,13 +4507,13 @@
       </p:sp>
       <p:sp>
         <p:nvSpPr>
-          <p:cNvPr id="7" name="Shape 5"/>
+          <p:cNvPr id="10" name="Shape 8"/>
           <p:cNvSpPr/>
           <p:nvPr/>
         </p:nvSpPr>
         <p:spPr>
           <a:xfrm>
-            <a:off x="548640" y="2560320"/>
+            <a:off x="548640" y="3611880"/>
             <a:ext cx="502920" cy="502920"/>
           </a:xfrm>
           <a:prstGeom prst="ellipse">
@@ -4326,16 +4524,23 @@
           </a:solidFill>
           <a:ln/>
         </p:spPr>
-      </p:sp>
-      <p:sp>
-        <p:nvSpPr>
-          <p:cNvPr id="8" name="Text 6"/>
-          <p:cNvSpPr txBox="1"/>
-          <p:nvPr/>
-        </p:nvSpPr>
-        <p:spPr>
-          <a:xfrm>
-            <a:off x="548640" y="2560320"/>
+        <p:txBody>
+          <a:bodyPr/>
+          <a:lstStyle/>
+          <a:p>
+            <a:endParaRPr lang="en-US"/>
+          </a:p>
+        </p:txBody>
+      </p:sp>
+      <p:sp>
+        <p:nvSpPr>
+          <p:cNvPr id="11" name="Text 9"/>
+          <p:cNvSpPr txBox="1"/>
+          <p:nvPr/>
+        </p:nvSpPr>
+        <p:spPr>
+          <a:xfrm>
+            <a:off x="548640" y="3611880"/>
             <a:ext cx="502920" cy="502920"/>
           </a:xfrm>
           <a:prstGeom prst="rect">
@@ -4348,7 +4553,7 @@
           <a:bodyPr wrap="square" lIns="0" tIns="0" rIns="0" bIns="0" rtlCol="0" anchor="ctr"/>
           <a:lstStyle/>
           <a:p>
-            <a:pPr algn="ctr" indent="0" marL="0">
+            <a:pPr marL="0" indent="0" algn="ctr">
               <a:buNone/>
             </a:pPr>
             <a:r>
@@ -4360,7 +4565,7 @@
                 <a:ea typeface="Cambria" pitchFamily="34" charset="-122"/>
                 <a:cs typeface="Cambria" pitchFamily="34" charset="-120"/>
               </a:rPr>
-              <a:t>2</a:t>
+              <a:t>3</a:t>
             </a:r>
             <a:endParaRPr lang="en-US" sz="1800" dirty="0"/>
           </a:p>
@@ -4368,13 +4573,13 @@
       </p:sp>
       <p:sp>
         <p:nvSpPr>
-          <p:cNvPr id="9" name="Text 7"/>
-          <p:cNvSpPr txBox="1"/>
-          <p:nvPr/>
-        </p:nvSpPr>
-        <p:spPr>
-          <a:xfrm>
-            <a:off x="1234440" y="2514600"/>
+          <p:cNvPr id="12" name="Text 10"/>
+          <p:cNvSpPr txBox="1"/>
+          <p:nvPr/>
+        </p:nvSpPr>
+        <p:spPr>
+          <a:xfrm>
+            <a:off x="1234440" y="3401568"/>
             <a:ext cx="10241280" cy="914400"/>
           </a:xfrm>
           <a:prstGeom prst="rect">
@@ -4387,7 +4592,7 @@
           <a:bodyPr wrap="square" lIns="0" tIns="0" rIns="0" bIns="0" rtlCol="0" anchor="ctr"/>
           <a:lstStyle/>
           <a:p>
-            <a:pPr indent="0" marL="0">
+            <a:pPr marL="0" indent="0">
               <a:lnSpc>
                 <a:spcPct val="120000"/>
               </a:lnSpc>
@@ -4402,15 +4607,128 @@
                 <a:ea typeface="Calibri" pitchFamily="34" charset="-122"/>
                 <a:cs typeface="Calibri" pitchFamily="34" charset="-120"/>
               </a:rPr>
-              <a:t>PEKS resuelve la teoría, no la práctica — </a:t>
-            </a:r>
-            <a:pPr indent="0" marL="0">
+              <a:t>La respuesta de producción es híbrida — </a:t>
+            </a:r>
+            <a:r>
+              <a:rPr lang="en-US" sz="1500" dirty="0">
+                <a:solidFill>
+                  <a:srgbClr val="AEB6D6"/>
+                </a:solidFill>
+                <a:latin typeface="Calibri" pitchFamily="34" charset="0"/>
+                <a:ea typeface="Calibri" pitchFamily="34" charset="-122"/>
+                <a:cs typeface="Calibri" pitchFamily="34" charset="-120"/>
+              </a:rPr>
+              <a:t>asimétrico para transportar claves y firmar; simétrico para todo el volumen — KEM/DEM.</a:t>
+            </a:r>
+            <a:endParaRPr lang="en-US" sz="1500" dirty="0"/>
+          </a:p>
+        </p:txBody>
+      </p:sp>
+      <p:sp>
+        <p:nvSpPr>
+          <p:cNvPr id="13" name="Shape 11"/>
+          <p:cNvSpPr/>
+          <p:nvPr/>
+        </p:nvSpPr>
+        <p:spPr>
+          <a:xfrm>
+            <a:off x="548640" y="4663440"/>
+            <a:ext cx="502920" cy="502920"/>
+          </a:xfrm>
+          <a:prstGeom prst="ellipse">
+            <a:avLst/>
+          </a:prstGeom>
+          <a:solidFill>
+            <a:srgbClr val="17B8A6"/>
+          </a:solidFill>
+          <a:ln/>
+        </p:spPr>
+        <p:txBody>
+          <a:bodyPr/>
+          <a:lstStyle/>
+          <a:p>
+            <a:endParaRPr lang="en-US"/>
+          </a:p>
+        </p:txBody>
+      </p:sp>
+      <p:sp>
+        <p:nvSpPr>
+          <p:cNvPr id="14" name="Text 12"/>
+          <p:cNvSpPr txBox="1"/>
+          <p:nvPr/>
+        </p:nvSpPr>
+        <p:spPr>
+          <a:xfrm>
+            <a:off x="548640" y="4663440"/>
+            <a:ext cx="502920" cy="502920"/>
+          </a:xfrm>
+          <a:prstGeom prst="rect">
+            <a:avLst/>
+          </a:prstGeom>
+          <a:noFill/>
+          <a:ln/>
+        </p:spPr>
+        <p:txBody>
+          <a:bodyPr wrap="square" lIns="0" tIns="0" rIns="0" bIns="0" rtlCol="0" anchor="ctr"/>
+          <a:lstStyle/>
+          <a:p>
+            <a:pPr marL="0" indent="0" algn="ctr">
+              <a:buNone/>
+            </a:pPr>
+            <a:r>
+              <a:rPr lang="en-US" sz="1800" b="1" dirty="0">
+                <a:solidFill>
+                  <a:srgbClr val="15213E"/>
+                </a:solidFill>
+                <a:latin typeface="Cambria" pitchFamily="34" charset="0"/>
+                <a:ea typeface="Cambria" pitchFamily="34" charset="-122"/>
+                <a:cs typeface="Cambria" pitchFamily="34" charset="-120"/>
+              </a:rPr>
+              <a:t>4</a:t>
+            </a:r>
+            <a:endParaRPr lang="en-US" sz="1800" dirty="0"/>
+          </a:p>
+        </p:txBody>
+      </p:sp>
+      <p:sp>
+        <p:nvSpPr>
+          <p:cNvPr id="15" name="Text 13"/>
+          <p:cNvSpPr txBox="1"/>
+          <p:nvPr/>
+        </p:nvSpPr>
+        <p:spPr>
+          <a:xfrm>
+            <a:off x="1234440" y="4457700"/>
+            <a:ext cx="10241280" cy="914400"/>
+          </a:xfrm>
+          <a:prstGeom prst="rect">
+            <a:avLst/>
+          </a:prstGeom>
+          <a:noFill/>
+          <a:ln/>
+        </p:spPr>
+        <p:txBody>
+          <a:bodyPr wrap="square" lIns="0" tIns="0" rIns="0" bIns="0" rtlCol="0" anchor="ctr"/>
+          <a:lstStyle/>
+          <a:p>
+            <a:pPr marL="0" indent="0">
               <a:lnSpc>
                 <a:spcPct val="120000"/>
               </a:lnSpc>
               <a:buNone/>
             </a:pPr>
             <a:r>
+              <a:rPr lang="en-US" sz="1500" b="1" dirty="0">
+                <a:solidFill>
+                  <a:srgbClr val="FFFFFF"/>
+                </a:solidFill>
+                <a:latin typeface="Calibri" pitchFamily="34" charset="0"/>
+                <a:ea typeface="Calibri" pitchFamily="34" charset="-122"/>
+                <a:cs typeface="Calibri" pitchFamily="34" charset="-120"/>
+              </a:rPr>
+              <a:t>Implementarlo en serio expone bugs invisibles en el pseudocódigo — </a:t>
+            </a:r>
+            <a:r>
               <a:rPr lang="en-US" sz="1500" dirty="0">
                 <a:solidFill>
                   <a:srgbClr val="AEB6D6"/>
@@ -4419,115 +4737,19 @@
                 <a:ea typeface="Calibri" pitchFamily="34" charset="-122"/>
                 <a:cs typeface="Calibri" pitchFamily="34" charset="-120"/>
               </a:rPr>
-              <a:t>paga con el Keyword Guessing Attack y con emparejamientos costosos.</a:t>
-            </a:r>
-            <a:endParaRPr lang="en-US" sz="1500" dirty="0"/>
-          </a:p>
-        </p:txBody>
-      </p:sp>
-      <p:sp>
-        <p:nvSpPr>
-          <p:cNvPr id="10" name="Shape 8"/>
-          <p:cNvSpPr/>
-          <p:nvPr/>
-        </p:nvSpPr>
-        <p:spPr>
-          <a:xfrm>
-            <a:off x="548640" y="3611880"/>
-            <a:ext cx="502920" cy="502920"/>
-          </a:xfrm>
-          <a:prstGeom prst="ellipse">
-            <a:avLst/>
-          </a:prstGeom>
-          <a:solidFill>
-            <a:srgbClr val="17B8A6"/>
-          </a:solidFill>
-          <a:ln/>
-        </p:spPr>
-      </p:sp>
-      <p:sp>
-        <p:nvSpPr>
-          <p:cNvPr id="11" name="Text 9"/>
-          <p:cNvSpPr txBox="1"/>
-          <p:nvPr/>
-        </p:nvSpPr>
-        <p:spPr>
-          <a:xfrm>
-            <a:off x="548640" y="3611880"/>
-            <a:ext cx="502920" cy="502920"/>
-          </a:xfrm>
-          <a:prstGeom prst="rect">
-            <a:avLst/>
-          </a:prstGeom>
-          <a:noFill/>
-          <a:ln/>
-        </p:spPr>
-        <p:txBody>
-          <a:bodyPr wrap="square" lIns="0" tIns="0" rIns="0" bIns="0" rtlCol="0" anchor="ctr"/>
-          <a:lstStyle/>
-          <a:p>
-            <a:pPr algn="ctr" indent="0" marL="0">
-              <a:buNone/>
-            </a:pPr>
-            <a:r>
-              <a:rPr lang="en-US" sz="1800" b="1" dirty="0">
-                <a:solidFill>
-                  <a:srgbClr val="15213E"/>
-                </a:solidFill>
-                <a:latin typeface="Cambria" pitchFamily="34" charset="0"/>
-                <a:ea typeface="Cambria" pitchFamily="34" charset="-122"/>
-                <a:cs typeface="Cambria" pitchFamily="34" charset="-120"/>
-              </a:rPr>
-              <a:t>3</a:t>
-            </a:r>
-            <a:endParaRPr lang="en-US" sz="1800" dirty="0"/>
-          </a:p>
-        </p:txBody>
-      </p:sp>
-      <p:sp>
-        <p:nvSpPr>
-          <p:cNvPr id="12" name="Text 10"/>
-          <p:cNvSpPr txBox="1"/>
-          <p:nvPr/>
-        </p:nvSpPr>
-        <p:spPr>
-          <a:xfrm>
-            <a:off x="1234440" y="3566160"/>
-            <a:ext cx="10241280" cy="914400"/>
-          </a:xfrm>
-          <a:prstGeom prst="rect">
-            <a:avLst/>
-          </a:prstGeom>
-          <a:noFill/>
-          <a:ln/>
-        </p:spPr>
-        <p:txBody>
-          <a:bodyPr wrap="square" lIns="0" tIns="0" rIns="0" bIns="0" rtlCol="0" anchor="ctr"/>
-          <a:lstStyle/>
-          <a:p>
-            <a:pPr indent="0" marL="0">
-              <a:lnSpc>
-                <a:spcPct val="120000"/>
-              </a:lnSpc>
-              <a:buNone/>
-            </a:pPr>
-            <a:r>
-              <a:rPr lang="en-US" sz="1500" b="1" dirty="0">
-                <a:solidFill>
-                  <a:srgbClr val="FFFFFF"/>
-                </a:solidFill>
-                <a:latin typeface="Calibri" pitchFamily="34" charset="0"/>
-                <a:ea typeface="Calibri" pitchFamily="34" charset="-122"/>
-                <a:cs typeface="Calibri" pitchFamily="34" charset="-120"/>
-              </a:rPr>
-              <a:t>La respuesta de producción es híbrida — </a:t>
-            </a:r>
-            <a:pPr indent="0" marL="0">
-              <a:lnSpc>
-                <a:spcPct val="120000"/>
-              </a:lnSpc>
-              <a:buNone/>
-            </a:pPr>
+              <a:t>20 correcciones de </a:t>
+            </a:r>
+            <a:r>
+              <a:rPr lang="en-US" sz="1500" dirty="0" err="1">
+                <a:solidFill>
+                  <a:srgbClr val="AEB6D6"/>
+                </a:solidFill>
+                <a:latin typeface="Calibri" pitchFamily="34" charset="0"/>
+                <a:ea typeface="Calibri" pitchFamily="34" charset="-122"/>
+                <a:cs typeface="Calibri" pitchFamily="34" charset="-120"/>
+              </a:rPr>
+              <a:t>seguridad</a:t>
+            </a:r>
             <a:r>
               <a:rPr lang="en-US" sz="1500" dirty="0">
                 <a:solidFill>
@@ -4537,115 +4759,19 @@
                 <a:ea typeface="Calibri" pitchFamily="34" charset="-122"/>
                 <a:cs typeface="Calibri" pitchFamily="34" charset="-120"/>
               </a:rPr>
-              <a:t>asimétrico para transportar claves y firmar; simétrico para todo el volumen — KEM/DEM.</a:t>
-            </a:r>
-            <a:endParaRPr lang="en-US" sz="1500" dirty="0"/>
-          </a:p>
-        </p:txBody>
-      </p:sp>
-      <p:sp>
-        <p:nvSpPr>
-          <p:cNvPr id="13" name="Shape 11"/>
-          <p:cNvSpPr/>
-          <p:nvPr/>
-        </p:nvSpPr>
-        <p:spPr>
-          <a:xfrm>
-            <a:off x="548640" y="4663440"/>
-            <a:ext cx="502920" cy="502920"/>
-          </a:xfrm>
-          <a:prstGeom prst="ellipse">
-            <a:avLst/>
-          </a:prstGeom>
-          <a:solidFill>
-            <a:srgbClr val="17B8A6"/>
-          </a:solidFill>
-          <a:ln/>
-        </p:spPr>
-      </p:sp>
-      <p:sp>
-        <p:nvSpPr>
-          <p:cNvPr id="14" name="Text 12"/>
-          <p:cNvSpPr txBox="1"/>
-          <p:nvPr/>
-        </p:nvSpPr>
-        <p:spPr>
-          <a:xfrm>
-            <a:off x="548640" y="4663440"/>
-            <a:ext cx="502920" cy="502920"/>
-          </a:xfrm>
-          <a:prstGeom prst="rect">
-            <a:avLst/>
-          </a:prstGeom>
-          <a:noFill/>
-          <a:ln/>
-        </p:spPr>
-        <p:txBody>
-          <a:bodyPr wrap="square" lIns="0" tIns="0" rIns="0" bIns="0" rtlCol="0" anchor="ctr"/>
-          <a:lstStyle/>
-          <a:p>
-            <a:pPr algn="ctr" indent="0" marL="0">
-              <a:buNone/>
-            </a:pPr>
-            <a:r>
-              <a:rPr lang="en-US" sz="1800" b="1" dirty="0">
-                <a:solidFill>
-                  <a:srgbClr val="15213E"/>
-                </a:solidFill>
-                <a:latin typeface="Cambria" pitchFamily="34" charset="0"/>
-                <a:ea typeface="Cambria" pitchFamily="34" charset="-122"/>
-                <a:cs typeface="Cambria" pitchFamily="34" charset="-120"/>
-              </a:rPr>
-              <a:t>4</a:t>
-            </a:r>
-            <a:endParaRPr lang="en-US" sz="1800" dirty="0"/>
-          </a:p>
-        </p:txBody>
-      </p:sp>
-      <p:sp>
-        <p:nvSpPr>
-          <p:cNvPr id="15" name="Text 13"/>
-          <p:cNvSpPr txBox="1"/>
-          <p:nvPr/>
-        </p:nvSpPr>
-        <p:spPr>
-          <a:xfrm>
-            <a:off x="1234440" y="4617720"/>
-            <a:ext cx="10241280" cy="914400"/>
-          </a:xfrm>
-          <a:prstGeom prst="rect">
-            <a:avLst/>
-          </a:prstGeom>
-          <a:noFill/>
-          <a:ln/>
-        </p:spPr>
-        <p:txBody>
-          <a:bodyPr wrap="square" lIns="0" tIns="0" rIns="0" bIns="0" rtlCol="0" anchor="ctr"/>
-          <a:lstStyle/>
-          <a:p>
-            <a:pPr indent="0" marL="0">
-              <a:lnSpc>
-                <a:spcPct val="120000"/>
-              </a:lnSpc>
-              <a:buNone/>
-            </a:pPr>
-            <a:r>
-              <a:rPr lang="en-US" sz="1500" b="1" dirty="0">
-                <a:solidFill>
-                  <a:srgbClr val="FFFFFF"/>
-                </a:solidFill>
-                <a:latin typeface="Calibri" pitchFamily="34" charset="0"/>
-                <a:ea typeface="Calibri" pitchFamily="34" charset="-122"/>
-                <a:cs typeface="Calibri" pitchFamily="34" charset="-120"/>
-              </a:rPr>
-              <a:t>Implementarlo en serio expone bugs invisibles en el pseudocódigo — </a:t>
-            </a:r>
-            <a:pPr indent="0" marL="0">
-              <a:lnSpc>
-                <a:spcPct val="120000"/>
-              </a:lnSpc>
-              <a:buNone/>
-            </a:pPr>
+              <a:t> </a:t>
+            </a:r>
+            <a:r>
+              <a:rPr lang="en-US" sz="1500" dirty="0" err="1">
+                <a:solidFill>
+                  <a:srgbClr val="AEB6D6"/>
+                </a:solidFill>
+                <a:latin typeface="Calibri" pitchFamily="34" charset="0"/>
+                <a:ea typeface="Calibri" pitchFamily="34" charset="-122"/>
+                <a:cs typeface="Calibri" pitchFamily="34" charset="-120"/>
+              </a:rPr>
+              <a:t>documentadas</a:t>
+            </a:r>
             <a:r>
               <a:rPr lang="en-US" sz="1500" dirty="0">
                 <a:solidFill>
@@ -4655,7 +4781,7 @@
                 <a:ea typeface="Calibri" pitchFamily="34" charset="-122"/>
                 <a:cs typeface="Calibri" pitchFamily="34" charset="-120"/>
               </a:rPr>
-              <a:t>20 correcciones de seguridad documentadas en OSA.</a:t>
+              <a:t>.</a:t>
             </a:r>
             <a:endParaRPr lang="en-US" sz="1500" dirty="0"/>
           </a:p>
@@ -4687,6 +4813,13 @@
             <a:prstDash val="solid"/>
           </a:ln>
         </p:spPr>
+        <p:txBody>
+          <a:bodyPr/>
+          <a:lstStyle/>
+          <a:p>
+            <a:endParaRPr lang="en-US"/>
+          </a:p>
+        </p:txBody>
       </p:sp>
       <p:sp>
         <p:nvSpPr>
@@ -4709,7 +4842,7 @@
           <a:bodyPr wrap="square" lIns="0" tIns="0" rIns="0" bIns="0" rtlCol="0" anchor="ctr"/>
           <a:lstStyle/>
           <a:p>
-            <a:pPr indent="0" marL="0">
+            <a:pPr marL="0" indent="0">
               <a:lnSpc>
                 <a:spcPct val="120000"/>
               </a:lnSpc>
@@ -4732,45 +4865,6 @@
       </p:sp>
       <p:sp>
         <p:nvSpPr>
-          <p:cNvPr id="18" name="Text 16"/>
-          <p:cNvSpPr/>
-          <p:nvPr/>
-        </p:nvSpPr>
-        <p:spPr>
-          <a:xfrm>
-            <a:off x="548640" y="6437376"/>
-            <a:ext cx="7315200" cy="274320"/>
-          </a:xfrm>
-          <a:prstGeom prst="rect">
-            <a:avLst/>
-          </a:prstGeom>
-          <a:noFill/>
-          <a:ln/>
-        </p:spPr>
-        <p:txBody>
-          <a:bodyPr wrap="square" rtlCol="0" anchor="ctr"/>
-          <a:lstStyle/>
-          <a:p>
-            <a:pPr algn="l" indent="0" marL="0">
-              <a:buNone/>
-            </a:pPr>
-            <a:r>
-              <a:rPr lang="en-US" sz="1050" dirty="0">
-                <a:solidFill>
-                  <a:srgbClr val="AEB6D6"/>
-                </a:solidFill>
-                <a:latin typeface="Calibri" pitchFamily="34" charset="0"/>
-                <a:ea typeface="Calibri" pitchFamily="34" charset="-122"/>
-                <a:cs typeface="Calibri" pitchFamily="34" charset="-120"/>
-              </a:rPr>
-              <a:t>Gracias — quedo a disposición para preguntas</a:t>
-            </a:r>
-            <a:endParaRPr lang="en-US" sz="1050" dirty="0"/>
-          </a:p>
-        </p:txBody>
-      </p:sp>
-      <p:sp>
-        <p:nvSpPr>
           <p:cNvPr id="19" name="Text 17"/>
           <p:cNvSpPr/>
           <p:nvPr/>
@@ -4790,7 +4884,7 @@
           <a:bodyPr wrap="square" rtlCol="0" anchor="ctr"/>
           <a:lstStyle/>
           <a:p>
-            <a:pPr algn="r" indent="0" marL="0">
+            <a:pPr marL="0" indent="0" algn="r">
               <a:buNone/>
             </a:pPr>
             <a:r>
@@ -4854,11 +4948,11 @@
           <a:bodyPr wrap="square" lIns="0" tIns="0" rIns="0" bIns="0" rtlCol="0" anchor="ctr"/>
           <a:lstStyle/>
           <a:p>
-            <a:pPr indent="0" marL="0">
-              <a:buNone/>
-            </a:pPr>
-            <a:r>
-              <a:rPr lang="en-US" sz="1250" b="1" spc="200" kern="0" dirty="0">
+            <a:pPr marL="0" indent="0">
+              <a:buNone/>
+            </a:pPr>
+            <a:r>
+              <a:rPr lang="en-US" sz="1250" b="1" kern="0" spc="200" dirty="0">
                 <a:solidFill>
                   <a:srgbClr val="6C6FD9"/>
                 </a:solidFill>
@@ -4893,7 +4987,7 @@
           <a:bodyPr wrap="square" lIns="0" tIns="0" rIns="0" bIns="0" rtlCol="0" anchor="ctr"/>
           <a:lstStyle/>
           <a:p>
-            <a:pPr indent="0" marL="0">
+            <a:pPr marL="0" indent="0">
               <a:buNone/>
             </a:pPr>
             <a:r>
@@ -4920,7 +5014,7 @@
         <p:spPr>
           <a:xfrm>
             <a:off x="548640" y="1417320"/>
-            <a:ext cx="5212080" cy="4846320"/>
+            <a:ext cx="5042916" cy="4846320"/>
           </a:xfrm>
           <a:prstGeom prst="roundRect">
             <a:avLst>
@@ -4937,13 +5031,20 @@
             <a:prstDash val="solid"/>
           </a:ln>
           <a:effectLst>
-            <a:outerShdw sx="100000" sy="100000" kx="0" ky="0" algn="bl" rotWithShape="0" blurRad="101600" dist="38100" dir="5400000">
+            <a:outerShdw blurRad="101600" dist="38100" dir="5400000" algn="bl" rotWithShape="0">
               <a:srgbClr val="1B2340">
                 <a:alpha val="12000"/>
               </a:srgbClr>
             </a:outerShdw>
           </a:effectLst>
         </p:spPr>
+        <p:txBody>
+          <a:bodyPr/>
+          <a:lstStyle/>
+          <a:p>
+            <a:endParaRPr lang="en-US"/>
+          </a:p>
+        </p:txBody>
       </p:sp>
       <p:sp>
         <p:nvSpPr>
@@ -4964,17 +5065,24 @@
           </a:solidFill>
           <a:ln/>
         </p:spPr>
+        <p:txBody>
+          <a:bodyPr/>
+          <a:lstStyle/>
+          <a:p>
+            <a:endParaRPr lang="en-US"/>
+          </a:p>
+        </p:txBody>
       </p:sp>
       <p:pic>
         <p:nvPicPr>
-          <p:cNvPr id="6" name="Image 0" descr="/tmp/osa_pres/icons/lock_teal.png">    </p:cNvPr>
+          <p:cNvPr id="6" name="Image 0" descr="/tmp/osa_pres/icons/lock_teal.png"/>
           <p:cNvPicPr>
             <a:picLocks noChangeAspect="1"/>
           </p:cNvPicPr>
           <p:nvPr/>
         </p:nvPicPr>
         <p:blipFill>
-          <a:blip r:embed="rId1"/>
+          <a:blip r:embed="rId3"/>
           <a:stretch>
             <a:fillRect/>
           </a:stretch>
@@ -5010,7 +5118,7 @@
           <a:bodyPr wrap="square" lIns="0" tIns="0" rIns="0" bIns="0" rtlCol="0" anchor="ctr"/>
           <a:lstStyle/>
           <a:p>
-            <a:pPr indent="0" marL="0">
+            <a:pPr marL="0" indent="0">
               <a:buNone/>
             </a:pPr>
             <a:r>
@@ -5178,8 +5286,8 @@
         </p:nvSpPr>
         <p:spPr>
           <a:xfrm>
-            <a:off x="6245352" y="1417320"/>
-            <a:ext cx="5212080" cy="4846320"/>
+            <a:off x="6414514" y="1417320"/>
+            <a:ext cx="5042917" cy="4846320"/>
           </a:xfrm>
           <a:prstGeom prst="roundRect">
             <a:avLst>
@@ -5196,13 +5304,20 @@
             <a:prstDash val="solid"/>
           </a:ln>
           <a:effectLst>
-            <a:outerShdw sx="100000" sy="100000" kx="0" ky="0" algn="bl" rotWithShape="0" blurRad="101600" dist="38100" dir="5400000">
+            <a:outerShdw blurRad="101600" dist="38100" dir="5400000" algn="bl" rotWithShape="0">
               <a:srgbClr val="1B2340">
                 <a:alpha val="12000"/>
               </a:srgbClr>
             </a:outerShdw>
           </a:effectLst>
         </p:spPr>
+        <p:txBody>
+          <a:bodyPr/>
+          <a:lstStyle/>
+          <a:p>
+            <a:endParaRPr lang="en-US"/>
+          </a:p>
+        </p:txBody>
       </p:sp>
       <p:sp>
         <p:nvSpPr>
@@ -5223,17 +5338,24 @@
           </a:solidFill>
           <a:ln/>
         </p:spPr>
+        <p:txBody>
+          <a:bodyPr/>
+          <a:lstStyle/>
+          <a:p>
+            <a:endParaRPr lang="en-US"/>
+          </a:p>
+        </p:txBody>
       </p:sp>
       <p:pic>
         <p:nvPicPr>
-          <p:cNvPr id="11" name="Image 1" descr="/tmp/osa_pres/icons/key_navy.png">    </p:cNvPr>
+          <p:cNvPr id="11" name="Image 1" descr="/tmp/osa_pres/icons/key_navy.png"/>
           <p:cNvPicPr>
             <a:picLocks noChangeAspect="1"/>
           </p:cNvPicPr>
           <p:nvPr/>
         </p:nvPicPr>
         <p:blipFill>
-          <a:blip r:embed="rId2"/>
+          <a:blip r:embed="rId4"/>
           <a:stretch>
             <a:fillRect/>
           </a:stretch>
@@ -5269,7 +5391,7 @@
           <a:bodyPr wrap="square" lIns="0" tIns="0" rIns="0" bIns="0" rtlCol="0" anchor="ctr"/>
           <a:lstStyle/>
           <a:p>
-            <a:pPr indent="0" marL="0">
+            <a:pPr marL="0" indent="0">
               <a:buNone/>
             </a:pPr>
             <a:r>
@@ -5423,7 +5545,29 @@
                 <a:ea typeface="Calibri" pitchFamily="34" charset="-122"/>
                 <a:cs typeface="Calibri" pitchFamily="34" charset="-120"/>
               </a:rPr>
-              <a:t>Caso de estudio propio: OSA, una historia clínica “a ciegas”</a:t>
+              <a:t>Caso de estudio </a:t>
+            </a:r>
+            <a:r>
+              <a:rPr lang="en-US" sz="1450" dirty="0" err="1">
+                <a:solidFill>
+                  <a:srgbClr val="AEB6D6"/>
+                </a:solidFill>
+                <a:latin typeface="Calibri" pitchFamily="34" charset="0"/>
+                <a:ea typeface="Calibri" pitchFamily="34" charset="-122"/>
+                <a:cs typeface="Calibri" pitchFamily="34" charset="-120"/>
+              </a:rPr>
+              <a:t>propio:una</a:t>
+            </a:r>
+            <a:r>
+              <a:rPr lang="en-US" sz="1450" dirty="0">
+                <a:solidFill>
+                  <a:srgbClr val="AEB6D6"/>
+                </a:solidFill>
+                <a:latin typeface="Calibri" pitchFamily="34" charset="0"/>
+                <a:ea typeface="Calibri" pitchFamily="34" charset="-122"/>
+                <a:cs typeface="Calibri" pitchFamily="34" charset="-120"/>
+              </a:rPr>
+              <a:t> historia clínica “a ciegas”</a:t>
             </a:r>
             <a:endParaRPr lang="en-US" sz="1450" dirty="0"/>
           </a:p>
@@ -5448,17 +5592,24 @@
           </a:solidFill>
           <a:ln/>
         </p:spPr>
+        <p:txBody>
+          <a:bodyPr/>
+          <a:lstStyle/>
+          <a:p>
+            <a:endParaRPr lang="en-US"/>
+          </a:p>
+        </p:txBody>
       </p:sp>
       <p:pic>
         <p:nvPicPr>
-          <p:cNvPr id="15" name="Image 2" descr="/tmp/osa_pres/icons/arrowRight_navy.png">    </p:cNvPr>
+          <p:cNvPr id="15" name="Image 2" descr="/tmp/osa_pres/icons/arrowRight_navy.png"/>
           <p:cNvPicPr>
             <a:picLocks noChangeAspect="1"/>
           </p:cNvPicPr>
           <p:nvPr/>
         </p:nvPicPr>
         <p:blipFill>
-          <a:blip r:embed="rId3"/>
+          <a:blip r:embed="rId5"/>
           <a:stretch>
             <a:fillRect/>
           </a:stretch>
@@ -5475,45 +5626,6 @@
       </p:pic>
       <p:sp>
         <p:nvSpPr>
-          <p:cNvPr id="16" name="Text 11"/>
-          <p:cNvSpPr/>
-          <p:nvPr/>
-        </p:nvSpPr>
-        <p:spPr>
-          <a:xfrm>
-            <a:off x="548640" y="6437376"/>
-            <a:ext cx="7315200" cy="274320"/>
-          </a:xfrm>
-          <a:prstGeom prst="rect">
-            <a:avLst/>
-          </a:prstGeom>
-          <a:noFill/>
-          <a:ln/>
-        </p:spPr>
-        <p:txBody>
-          <a:bodyPr wrap="square" rtlCol="0" anchor="ctr"/>
-          <a:lstStyle/>
-          <a:p>
-            <a:pPr algn="l" indent="0" marL="0">
-              <a:buNone/>
-            </a:pPr>
-            <a:r>
-              <a:rPr lang="en-US" sz="1050" dirty="0">
-                <a:solidFill>
-                  <a:srgbClr val="5B6485"/>
-                </a:solidFill>
-                <a:latin typeface="Calibri" pitchFamily="34" charset="0"/>
-                <a:ea typeface="Calibri" pitchFamily="34" charset="-122"/>
-                <a:cs typeface="Calibri" pitchFamily="34" charset="-120"/>
-              </a:rPr>
-              <a:t>Criptografía Avanzada — SSE asimétrico</a:t>
-            </a:r>
-            <a:endParaRPr lang="en-US" sz="1050" dirty="0"/>
-          </a:p>
-        </p:txBody>
-      </p:sp>
-      <p:sp>
-        <p:nvSpPr>
           <p:cNvPr id="17" name="Text 12"/>
           <p:cNvSpPr/>
           <p:nvPr/>
@@ -5533,7 +5645,7 @@
           <a:bodyPr wrap="square" rtlCol="0" anchor="ctr"/>
           <a:lstStyle/>
           <a:p>
-            <a:pPr algn="r" indent="0" marL="0">
+            <a:pPr marL="0" indent="0" algn="r">
               <a:buNone/>
             </a:pPr>
             <a:r>
@@ -5597,11 +5709,11 @@
           <a:bodyPr wrap="square" lIns="0" tIns="0" rIns="0" bIns="0" rtlCol="0" anchor="ctr"/>
           <a:lstStyle/>
           <a:p>
-            <a:pPr indent="0" marL="0">
-              <a:buNone/>
-            </a:pPr>
-            <a:r>
-              <a:rPr lang="en-US" sz="1250" b="1" spc="200" kern="0" dirty="0">
+            <a:pPr marL="0" indent="0">
+              <a:buNone/>
+            </a:pPr>
+            <a:r>
+              <a:rPr lang="en-US" sz="1250" b="1" kern="0" spc="200" dirty="0">
                 <a:solidFill>
                   <a:srgbClr val="6C6FD9"/>
                 </a:solidFill>
@@ -5636,7 +5748,7 @@
           <a:bodyPr wrap="square" lIns="0" tIns="0" rIns="0" bIns="0" rtlCol="0" anchor="ctr"/>
           <a:lstStyle/>
           <a:p>
-            <a:pPr indent="0" marL="0">
+            <a:pPr marL="0" indent="0">
               <a:buNone/>
             </a:pPr>
             <a:r>
@@ -5675,7 +5787,7 @@
           <a:bodyPr wrap="square" lIns="0" tIns="0" rIns="0" bIns="0" rtlCol="0" anchor="ctr"/>
           <a:lstStyle/>
           <a:p>
-            <a:pPr indent="0" marL="0">
+            <a:pPr marL="0" indent="0">
               <a:buNone/>
             </a:pPr>
             <a:r>
@@ -5719,13 +5831,20 @@
             <a:prstDash val="solid"/>
           </a:ln>
           <a:effectLst>
-            <a:outerShdw sx="100000" sy="100000" kx="0" ky="0" algn="bl" rotWithShape="0" blurRad="101600" dist="38100" dir="5400000">
+            <a:outerShdw blurRad="101600" dist="38100" dir="5400000" algn="bl" rotWithShape="0">
               <a:srgbClr val="1B2340">
                 <a:alpha val="12000"/>
               </a:srgbClr>
             </a:outerShdw>
           </a:effectLst>
         </p:spPr>
+        <p:txBody>
+          <a:bodyPr/>
+          <a:lstStyle/>
+          <a:p>
+            <a:endParaRPr lang="en-US"/>
+          </a:p>
+        </p:txBody>
       </p:sp>
       <p:sp>
         <p:nvSpPr>
@@ -5746,17 +5865,24 @@
           </a:solidFill>
           <a:ln/>
         </p:spPr>
+        <p:txBody>
+          <a:bodyPr/>
+          <a:lstStyle/>
+          <a:p>
+            <a:endParaRPr lang="en-US"/>
+          </a:p>
+        </p:txBody>
       </p:sp>
       <p:pic>
         <p:nvPicPr>
-          <p:cNvPr id="7" name="Image 0" descr="/tmp/osa_pres/icons/userMd_teal.png">    </p:cNvPr>
+          <p:cNvPr id="7" name="Image 0" descr="/tmp/osa_pres/icons/userMd_teal.png"/>
           <p:cNvPicPr>
             <a:picLocks noChangeAspect="1"/>
           </p:cNvPicPr>
           <p:nvPr/>
         </p:nvPicPr>
         <p:blipFill>
-          <a:blip r:embed="rId1"/>
+          <a:blip r:embed="rId3"/>
           <a:stretch>
             <a:fillRect/>
           </a:stretch>
@@ -5792,7 +5918,7 @@
           <a:bodyPr wrap="square" lIns="0" tIns="0" rIns="0" bIns="0" rtlCol="0" anchor="ctr"/>
           <a:lstStyle/>
           <a:p>
-            <a:pPr algn="ctr" indent="0" marL="0">
+            <a:pPr marL="0" indent="0" algn="ctr">
               <a:buNone/>
             </a:pPr>
             <a:r>
@@ -5831,7 +5957,7 @@
           <a:bodyPr wrap="square" lIns="0" tIns="0" rIns="0" bIns="0" rtlCol="0" anchor="ctr"/>
           <a:lstStyle/>
           <a:p>
-            <a:pPr algn="ctr" indent="0" marL="0">
+            <a:pPr marL="0" indent="0" algn="ctr">
               <a:lnSpc>
                 <a:spcPct val="115000"/>
               </a:lnSpc>
@@ -5878,13 +6004,20 @@
             <a:prstDash val="solid"/>
           </a:ln>
           <a:effectLst>
-            <a:outerShdw sx="100000" sy="100000" kx="0" ky="0" algn="bl" rotWithShape="0" blurRad="101600" dist="38100" dir="5400000">
+            <a:outerShdw blurRad="101600" dist="38100" dir="5400000" algn="bl" rotWithShape="0">
               <a:srgbClr val="1B2340">
                 <a:alpha val="12000"/>
               </a:srgbClr>
             </a:outerShdw>
           </a:effectLst>
         </p:spPr>
+        <p:txBody>
+          <a:bodyPr/>
+          <a:lstStyle/>
+          <a:p>
+            <a:endParaRPr lang="en-US"/>
+          </a:p>
+        </p:txBody>
       </p:sp>
       <p:sp>
         <p:nvSpPr>
@@ -5905,17 +6038,24 @@
           </a:solidFill>
           <a:ln/>
         </p:spPr>
+        <p:txBody>
+          <a:bodyPr/>
+          <a:lstStyle/>
+          <a:p>
+            <a:endParaRPr lang="en-US"/>
+          </a:p>
+        </p:txBody>
       </p:sp>
       <p:pic>
         <p:nvPicPr>
-          <p:cNvPr id="12" name="Image 1" descr="/tmp/osa_pres/icons/clock_teal.png">    </p:cNvPr>
+          <p:cNvPr id="12" name="Image 1" descr="/tmp/osa_pres/icons/clock_teal.png"/>
           <p:cNvPicPr>
             <a:picLocks noChangeAspect="1"/>
           </p:cNvPicPr>
           <p:nvPr/>
         </p:nvPicPr>
         <p:blipFill>
-          <a:blip r:embed="rId2"/>
+          <a:blip r:embed="rId4"/>
           <a:stretch>
             <a:fillRect/>
           </a:stretch>
@@ -5951,7 +6091,7 @@
           <a:bodyPr wrap="square" lIns="0" tIns="0" rIns="0" bIns="0" rtlCol="0" anchor="ctr"/>
           <a:lstStyle/>
           <a:p>
-            <a:pPr algn="ctr" indent="0" marL="0">
+            <a:pPr marL="0" indent="0" algn="ctr">
               <a:buNone/>
             </a:pPr>
             <a:r>
@@ -5990,7 +6130,7 @@
           <a:bodyPr wrap="square" lIns="0" tIns="0" rIns="0" bIns="0" rtlCol="0" anchor="ctr"/>
           <a:lstStyle/>
           <a:p>
-            <a:pPr algn="ctr" indent="0" marL="0">
+            <a:pPr marL="0" indent="0" algn="ctr">
               <a:lnSpc>
                 <a:spcPct val="115000"/>
               </a:lnSpc>
@@ -6037,13 +6177,20 @@
             <a:prstDash val="solid"/>
           </a:ln>
           <a:effectLst>
-            <a:outerShdw sx="100000" sy="100000" kx="0" ky="0" algn="bl" rotWithShape="0" blurRad="101600" dist="38100" dir="5400000">
+            <a:outerShdw blurRad="101600" dist="38100" dir="5400000" algn="bl" rotWithShape="0">
               <a:srgbClr val="1B2340">
                 <a:alpha val="12000"/>
               </a:srgbClr>
             </a:outerShdw>
           </a:effectLst>
         </p:spPr>
+        <p:txBody>
+          <a:bodyPr/>
+          <a:lstStyle/>
+          <a:p>
+            <a:endParaRPr lang="en-US"/>
+          </a:p>
+        </p:txBody>
       </p:sp>
       <p:sp>
         <p:nvSpPr>
@@ -6064,17 +6211,24 @@
           </a:solidFill>
           <a:ln/>
         </p:spPr>
+        <p:txBody>
+          <a:bodyPr/>
+          <a:lstStyle/>
+          <a:p>
+            <a:endParaRPr lang="en-US"/>
+          </a:p>
+        </p:txBody>
       </p:sp>
       <p:pic>
         <p:nvPicPr>
-          <p:cNvPr id="17" name="Image 2" descr="/tmp/osa_pres/icons/question_teal.png">    </p:cNvPr>
+          <p:cNvPr id="17" name="Image 2" descr="/tmp/osa_pres/icons/question_teal.png"/>
           <p:cNvPicPr>
             <a:picLocks noChangeAspect="1"/>
           </p:cNvPicPr>
           <p:nvPr/>
         </p:nvPicPr>
         <p:blipFill>
-          <a:blip r:embed="rId3"/>
+          <a:blip r:embed="rId5"/>
           <a:stretch>
             <a:fillRect/>
           </a:stretch>
@@ -6110,7 +6264,7 @@
           <a:bodyPr wrap="square" lIns="0" tIns="0" rIns="0" bIns="0" rtlCol="0" anchor="ctr"/>
           <a:lstStyle/>
           <a:p>
-            <a:pPr algn="ctr" indent="0" marL="0">
+            <a:pPr marL="0" indent="0" algn="ctr">
               <a:buNone/>
             </a:pPr>
             <a:r>
@@ -6149,7 +6303,7 @@
           <a:bodyPr wrap="square" lIns="0" tIns="0" rIns="0" bIns="0" rtlCol="0" anchor="ctr"/>
           <a:lstStyle/>
           <a:p>
-            <a:pPr algn="ctr" indent="0" marL="0">
+            <a:pPr marL="0" indent="0" algn="ctr">
               <a:lnSpc>
                 <a:spcPct val="115000"/>
               </a:lnSpc>
@@ -6196,6 +6350,13 @@
             <a:prstDash val="solid"/>
           </a:ln>
         </p:spPr>
+        <p:txBody>
+          <a:bodyPr/>
+          <a:lstStyle/>
+          <a:p>
+            <a:endParaRPr lang="en-US"/>
+          </a:p>
+        </p:txBody>
       </p:sp>
       <p:sp>
         <p:nvSpPr>
@@ -6218,7 +6379,7 @@
           <a:bodyPr wrap="square" lIns="0" tIns="0" rIns="0" bIns="0" rtlCol="0" anchor="ctr"/>
           <a:lstStyle/>
           <a:p>
-            <a:pPr indent="0" marL="0">
+            <a:pPr marL="0" indent="0">
               <a:buNone/>
             </a:pPr>
             <a:r>
@@ -6257,20 +6418,9 @@
           <a:bodyPr wrap="square" rtlCol="0" anchor="ctr"/>
           <a:lstStyle/>
           <a:p>
-            <a:pPr algn="l" indent="0" marL="0">
-              <a:buNone/>
-            </a:pPr>
-            <a:r>
-              <a:rPr lang="en-US" sz="1050" dirty="0">
-                <a:solidFill>
-                  <a:srgbClr val="5B6485"/>
-                </a:solidFill>
-                <a:latin typeface="Calibri" pitchFamily="34" charset="0"/>
-                <a:ea typeface="Calibri" pitchFamily="34" charset="-122"/>
-                <a:cs typeface="Calibri" pitchFamily="34" charset="-120"/>
-              </a:rPr>
-              <a:t>Criptografía Avanzada — SSE asimétrico</a:t>
-            </a:r>
+            <a:pPr marL="0" indent="0" algn="l">
+              <a:buNone/>
+            </a:pPr>
             <a:endParaRPr lang="en-US" sz="1050" dirty="0"/>
           </a:p>
         </p:txBody>
@@ -6296,7 +6446,7 @@
           <a:bodyPr wrap="square" rtlCol="0" anchor="ctr"/>
           <a:lstStyle/>
           <a:p>
-            <a:pPr algn="r" indent="0" marL="0">
+            <a:pPr marL="0" indent="0" algn="r">
               <a:buNone/>
             </a:pPr>
             <a:r>
@@ -6360,11 +6510,11 @@
           <a:bodyPr wrap="square" lIns="0" tIns="0" rIns="0" bIns="0" rtlCol="0" anchor="ctr"/>
           <a:lstStyle/>
           <a:p>
-            <a:pPr indent="0" marL="0">
-              <a:buNone/>
-            </a:pPr>
-            <a:r>
-              <a:rPr lang="en-US" sz="1250" b="1" spc="200" kern="0" dirty="0">
+            <a:pPr marL="0" indent="0">
+              <a:buNone/>
+            </a:pPr>
+            <a:r>
+              <a:rPr lang="en-US" sz="1250" b="1" kern="0" spc="200" dirty="0">
                 <a:solidFill>
                   <a:srgbClr val="6C6FD9"/>
                 </a:solidFill>
@@ -6399,7 +6549,7 @@
           <a:bodyPr wrap="square" lIns="0" tIns="0" rIns="0" bIns="0" rtlCol="0" anchor="ctr"/>
           <a:lstStyle/>
           <a:p>
-            <a:pPr indent="0" marL="0">
+            <a:pPr marL="0" indent="0">
               <a:buNone/>
             </a:pPr>
             <a:r>
@@ -6443,13 +6593,20 @@
             <a:prstDash val="solid"/>
           </a:ln>
           <a:effectLst>
-            <a:outerShdw sx="100000" sy="100000" kx="0" ky="0" algn="bl" rotWithShape="0" blurRad="101600" dist="38100" dir="5400000">
+            <a:outerShdw blurRad="101600" dist="38100" dir="5400000" algn="bl" rotWithShape="0">
               <a:srgbClr val="1B2340">
                 <a:alpha val="12000"/>
               </a:srgbClr>
             </a:outerShdw>
           </a:effectLst>
         </p:spPr>
+        <p:txBody>
+          <a:bodyPr/>
+          <a:lstStyle/>
+          <a:p>
+            <a:endParaRPr lang="en-US"/>
+          </a:p>
+        </p:txBody>
       </p:sp>
       <p:sp>
         <p:nvSpPr>
@@ -6470,17 +6627,24 @@
           </a:solidFill>
           <a:ln/>
         </p:spPr>
+        <p:txBody>
+          <a:bodyPr/>
+          <a:lstStyle/>
+          <a:p>
+            <a:endParaRPr lang="en-US"/>
+          </a:p>
+        </p:txBody>
       </p:sp>
       <p:pic>
         <p:nvPicPr>
-          <p:cNvPr id="6" name="Image 0" descr="/tmp/osa_pres/icons/envelope_teal.png">    </p:cNvPr>
+          <p:cNvPr id="6" name="Image 0" descr="/tmp/osa_pres/icons/envelope_teal.png"/>
           <p:cNvPicPr>
             <a:picLocks noChangeAspect="1"/>
           </p:cNvPicPr>
           <p:nvPr/>
         </p:nvPicPr>
         <p:blipFill>
-          <a:blip r:embed="rId1"/>
+          <a:blip r:embed="rId3"/>
           <a:stretch>
             <a:fillRect/>
           </a:stretch>
@@ -6516,7 +6680,7 @@
           <a:bodyPr wrap="square" lIns="0" tIns="0" rIns="0" bIns="0" rtlCol="0" anchor="ctr"/>
           <a:lstStyle/>
           <a:p>
-            <a:pPr indent="0" marL="0">
+            <a:pPr marL="0" indent="0">
               <a:buNone/>
             </a:pPr>
             <a:r>
@@ -6555,7 +6719,7 @@
           <a:bodyPr wrap="square" lIns="0" tIns="0" rIns="0" bIns="0" rtlCol="0" anchor="ctr"/>
           <a:lstStyle/>
           <a:p>
-            <a:pPr indent="0" marL="0">
+            <a:pPr marL="0" indent="0">
               <a:lnSpc>
                 <a:spcPct val="120000"/>
               </a:lnSpc>
@@ -6597,7 +6761,7 @@
           <a:bodyPr wrap="square" lIns="0" tIns="0" rIns="0" bIns="0" rtlCol="0" anchor="ctr"/>
           <a:lstStyle/>
           <a:p>
-            <a:pPr indent="0" marL="0">
+            <a:pPr marL="0" indent="0">
               <a:buNone/>
             </a:pPr>
             <a:r>
@@ -6636,7 +6800,7 @@
           <a:bodyPr wrap="square" lIns="0" tIns="0" rIns="0" bIns="0" rtlCol="0" anchor="ctr"/>
           <a:lstStyle/>
           <a:p>
-            <a:pPr indent="0" marL="0">
+            <a:pPr marL="0" indent="0">
               <a:lnSpc>
                 <a:spcPct val="120000"/>
               </a:lnSpc>
@@ -6683,6 +6847,13 @@
             <a:prstDash val="solid"/>
           </a:ln>
         </p:spPr>
+        <p:txBody>
+          <a:bodyPr/>
+          <a:lstStyle/>
+          <a:p>
+            <a:endParaRPr lang="en-US"/>
+          </a:p>
+        </p:txBody>
       </p:sp>
       <p:sp>
         <p:nvSpPr>
@@ -6705,7 +6876,7 @@
           <a:bodyPr wrap="square" lIns="0" tIns="0" rIns="0" bIns="0" rtlCol="0" anchor="ctr"/>
           <a:lstStyle/>
           <a:p>
-            <a:pPr indent="0" marL="0">
+            <a:pPr marL="0" indent="0">
               <a:buNone/>
             </a:pPr>
             <a:r>
@@ -6744,6 +6915,13 @@
           </a:solidFill>
           <a:ln/>
         </p:spPr>
+        <p:txBody>
+          <a:bodyPr/>
+          <a:lstStyle/>
+          <a:p>
+            <a:endParaRPr lang="en-US"/>
+          </a:p>
+        </p:txBody>
       </p:sp>
       <p:sp>
         <p:nvSpPr>
@@ -6766,7 +6944,7 @@
           <a:bodyPr wrap="square" lIns="0" tIns="0" rIns="0" bIns="0" rtlCol="0" anchor="ctr"/>
           <a:lstStyle/>
           <a:p>
-            <a:pPr indent="0" marL="0">
+            <a:pPr marL="0" indent="0">
               <a:buNone/>
             </a:pPr>
             <a:r>
@@ -6805,7 +6983,7 @@
           <a:bodyPr wrap="square" lIns="0" tIns="0" rIns="0" bIns="0" rtlCol="0" anchor="ctr"/>
           <a:lstStyle/>
           <a:p>
-            <a:pPr algn="r" indent="0" marL="0">
+            <a:pPr marL="0" indent="0" algn="r">
               <a:buNone/>
             </a:pPr>
             <a:r>
@@ -6844,7 +7022,7 @@
           <a:bodyPr wrap="square" lIns="0" tIns="0" rIns="0" bIns="0" rtlCol="0" anchor="ctr"/>
           <a:lstStyle/>
           <a:p>
-            <a:pPr indent="0" marL="0">
+            <a:pPr marL="0" indent="0">
               <a:lnSpc>
                 <a:spcPct val="110000"/>
               </a:lnSpc>
@@ -6886,6 +7064,13 @@
           </a:solidFill>
           <a:ln/>
         </p:spPr>
+        <p:txBody>
+          <a:bodyPr/>
+          <a:lstStyle/>
+          <a:p>
+            <a:endParaRPr lang="en-US"/>
+          </a:p>
+        </p:txBody>
       </p:sp>
       <p:sp>
         <p:nvSpPr>
@@ -6908,7 +7093,7 @@
           <a:bodyPr wrap="square" lIns="0" tIns="0" rIns="0" bIns="0" rtlCol="0" anchor="ctr"/>
           <a:lstStyle/>
           <a:p>
-            <a:pPr indent="0" marL="0">
+            <a:pPr marL="0" indent="0">
               <a:buNone/>
             </a:pPr>
             <a:r>
@@ -6947,7 +7132,7 @@
           <a:bodyPr wrap="square" lIns="0" tIns="0" rIns="0" bIns="0" rtlCol="0" anchor="ctr"/>
           <a:lstStyle/>
           <a:p>
-            <a:pPr algn="r" indent="0" marL="0">
+            <a:pPr marL="0" indent="0" algn="r">
               <a:buNone/>
             </a:pPr>
             <a:r>
@@ -6986,7 +7171,7 @@
           <a:bodyPr wrap="square" lIns="0" tIns="0" rIns="0" bIns="0" rtlCol="0" anchor="ctr"/>
           <a:lstStyle/>
           <a:p>
-            <a:pPr indent="0" marL="0">
+            <a:pPr marL="0" indent="0">
               <a:lnSpc>
                 <a:spcPct val="110000"/>
               </a:lnSpc>
@@ -7028,6 +7213,13 @@
           </a:solidFill>
           <a:ln/>
         </p:spPr>
+        <p:txBody>
+          <a:bodyPr/>
+          <a:lstStyle/>
+          <a:p>
+            <a:endParaRPr lang="en-US"/>
+          </a:p>
+        </p:txBody>
       </p:sp>
       <p:sp>
         <p:nvSpPr>
@@ -7050,7 +7242,7 @@
           <a:bodyPr wrap="square" lIns="0" tIns="0" rIns="0" bIns="0" rtlCol="0" anchor="ctr"/>
           <a:lstStyle/>
           <a:p>
-            <a:pPr indent="0" marL="0">
+            <a:pPr marL="0" indent="0">
               <a:buNone/>
             </a:pPr>
             <a:r>
@@ -7089,7 +7281,7 @@
           <a:bodyPr wrap="square" lIns="0" tIns="0" rIns="0" bIns="0" rtlCol="0" anchor="ctr"/>
           <a:lstStyle/>
           <a:p>
-            <a:pPr algn="r" indent="0" marL="0">
+            <a:pPr marL="0" indent="0" algn="r">
               <a:buNone/>
             </a:pPr>
             <a:r>
@@ -7128,7 +7320,7 @@
           <a:bodyPr wrap="square" lIns="0" tIns="0" rIns="0" bIns="0" rtlCol="0" anchor="ctr"/>
           <a:lstStyle/>
           <a:p>
-            <a:pPr indent="0" marL="0">
+            <a:pPr marL="0" indent="0">
               <a:lnSpc>
                 <a:spcPct val="110000"/>
               </a:lnSpc>
@@ -7170,6 +7362,13 @@
           </a:solidFill>
           <a:ln/>
         </p:spPr>
+        <p:txBody>
+          <a:bodyPr/>
+          <a:lstStyle/>
+          <a:p>
+            <a:endParaRPr lang="en-US"/>
+          </a:p>
+        </p:txBody>
       </p:sp>
       <p:sp>
         <p:nvSpPr>
@@ -7192,7 +7391,7 @@
           <a:bodyPr wrap="square" lIns="0" tIns="0" rIns="0" bIns="0" rtlCol="0" anchor="ctr"/>
           <a:lstStyle/>
           <a:p>
-            <a:pPr indent="0" marL="0">
+            <a:pPr marL="0" indent="0">
               <a:buNone/>
             </a:pPr>
             <a:r>
@@ -7231,7 +7430,7 @@
           <a:bodyPr wrap="square" lIns="0" tIns="0" rIns="0" bIns="0" rtlCol="0" anchor="ctr"/>
           <a:lstStyle/>
           <a:p>
-            <a:pPr algn="r" indent="0" marL="0">
+            <a:pPr marL="0" indent="0" algn="r">
               <a:buNone/>
             </a:pPr>
             <a:r>
@@ -7270,7 +7469,7 @@
           <a:bodyPr wrap="square" lIns="0" tIns="0" rIns="0" bIns="0" rtlCol="0" anchor="ctr"/>
           <a:lstStyle/>
           <a:p>
-            <a:pPr indent="0" marL="0">
+            <a:pPr marL="0" indent="0">
               <a:lnSpc>
                 <a:spcPct val="110000"/>
               </a:lnSpc>
@@ -7293,45 +7492,6 @@
       </p:sp>
       <p:sp>
         <p:nvSpPr>
-          <p:cNvPr id="29" name="Text 26"/>
-          <p:cNvSpPr/>
-          <p:nvPr/>
-        </p:nvSpPr>
-        <p:spPr>
-          <a:xfrm>
-            <a:off x="548640" y="6437376"/>
-            <a:ext cx="7315200" cy="274320"/>
-          </a:xfrm>
-          <a:prstGeom prst="rect">
-            <a:avLst/>
-          </a:prstGeom>
-          <a:noFill/>
-          <a:ln/>
-        </p:spPr>
-        <p:txBody>
-          <a:bodyPr wrap="square" rtlCol="0" anchor="ctr"/>
-          <a:lstStyle/>
-          <a:p>
-            <a:pPr algn="l" indent="0" marL="0">
-              <a:buNone/>
-            </a:pPr>
-            <a:r>
-              <a:rPr lang="en-US" sz="1050" dirty="0">
-                <a:solidFill>
-                  <a:srgbClr val="5B6485"/>
-                </a:solidFill>
-                <a:latin typeface="Calibri" pitchFamily="34" charset="0"/>
-                <a:ea typeface="Calibri" pitchFamily="34" charset="-122"/>
-                <a:cs typeface="Calibri" pitchFamily="34" charset="-120"/>
-              </a:rPr>
-              <a:t>Criptografía Avanzada — SSE asimétrico</a:t>
-            </a:r>
-            <a:endParaRPr lang="en-US" sz="1050" dirty="0"/>
-          </a:p>
-        </p:txBody>
-      </p:sp>
-      <p:sp>
-        <p:nvSpPr>
           <p:cNvPr id="30" name="Text 27"/>
           <p:cNvSpPr/>
           <p:nvPr/>
@@ -7351,7 +7511,7 @@
           <a:bodyPr wrap="square" rtlCol="0" anchor="ctr"/>
           <a:lstStyle/>
           <a:p>
-            <a:pPr algn="r" indent="0" marL="0">
+            <a:pPr marL="0" indent="0" algn="r">
               <a:buNone/>
             </a:pPr>
             <a:r>
@@ -7415,11 +7575,11 @@
           <a:bodyPr wrap="square" lIns="0" tIns="0" rIns="0" bIns="0" rtlCol="0" anchor="ctr"/>
           <a:lstStyle/>
           <a:p>
-            <a:pPr indent="0" marL="0">
-              <a:buNone/>
-            </a:pPr>
-            <a:r>
-              <a:rPr lang="en-US" sz="1250" b="1" spc="200" kern="0" dirty="0">
+            <a:pPr marL="0" indent="0">
+              <a:buNone/>
+            </a:pPr>
+            <a:r>
+              <a:rPr lang="en-US" sz="1250" b="1" kern="0" spc="200" dirty="0">
                 <a:solidFill>
                   <a:srgbClr val="6C6FD9"/>
                 </a:solidFill>
@@ -7454,7 +7614,7 @@
           <a:bodyPr wrap="square" lIns="0" tIns="0" rIns="0" bIns="0" rtlCol="0" anchor="ctr"/>
           <a:lstStyle/>
           <a:p>
-            <a:pPr indent="0" marL="0">
+            <a:pPr marL="0" indent="0">
               <a:buNone/>
             </a:pPr>
             <a:r>
@@ -7498,13 +7658,20 @@
             <a:prstDash val="solid"/>
           </a:ln>
           <a:effectLst>
-            <a:outerShdw sx="100000" sy="100000" kx="0" ky="0" algn="bl" rotWithShape="0" blurRad="101600" dist="38100" dir="5400000">
+            <a:outerShdw blurRad="101600" dist="38100" dir="5400000" algn="bl" rotWithShape="0">
               <a:srgbClr val="1B2340">
                 <a:alpha val="12000"/>
               </a:srgbClr>
             </a:outerShdw>
           </a:effectLst>
         </p:spPr>
+        <p:txBody>
+          <a:bodyPr/>
+          <a:lstStyle/>
+          <a:p>
+            <a:endParaRPr lang="en-US"/>
+          </a:p>
+        </p:txBody>
       </p:sp>
       <p:sp>
         <p:nvSpPr>
@@ -7525,17 +7692,24 @@
           </a:solidFill>
           <a:ln/>
         </p:spPr>
+        <p:txBody>
+          <a:bodyPr/>
+          <a:lstStyle/>
+          <a:p>
+            <a:endParaRPr lang="en-US"/>
+          </a:p>
+        </p:txBody>
       </p:sp>
       <p:pic>
         <p:nvPicPr>
-          <p:cNvPr id="6" name="Image 0" descr="/tmp/osa_pres/icons/shield_teal.png">    </p:cNvPr>
+          <p:cNvPr id="6" name="Image 0" descr="/tmp/osa_pres/icons/shield_teal.png"/>
           <p:cNvPicPr>
             <a:picLocks noChangeAspect="1"/>
           </p:cNvPicPr>
           <p:nvPr/>
         </p:nvPicPr>
         <p:blipFill>
-          <a:blip r:embed="rId1"/>
+          <a:blip r:embed="rId3"/>
           <a:stretch>
             <a:fillRect/>
           </a:stretch>
@@ -7571,7 +7745,7 @@
           <a:bodyPr wrap="square" lIns="0" tIns="0" rIns="0" bIns="0" rtlCol="0" anchor="ctr"/>
           <a:lstStyle/>
           <a:p>
-            <a:pPr indent="0" marL="0">
+            <a:pPr marL="0" indent="0">
               <a:buNone/>
             </a:pPr>
             <a:r>
@@ -7610,7 +7784,7 @@
           <a:bodyPr wrap="square" lIns="0" tIns="0" rIns="0" bIns="0" rtlCol="0" anchor="ctr"/>
           <a:lstStyle/>
           <a:p>
-            <a:pPr indent="0" marL="0">
+            <a:pPr marL="0" indent="0">
               <a:lnSpc>
                 <a:spcPct val="125000"/>
               </a:lnSpc>
@@ -7652,7 +7826,7 @@
           <a:bodyPr wrap="square" lIns="0" tIns="0" rIns="0" bIns="0" rtlCol="0" anchor="ctr"/>
           <a:lstStyle/>
           <a:p>
-            <a:pPr indent="0" marL="0">
+            <a:pPr marL="0" indent="0">
               <a:buNone/>
             </a:pPr>
             <a:r>
@@ -7696,13 +7870,20 @@
             <a:prstDash val="solid"/>
           </a:ln>
           <a:effectLst>
-            <a:outerShdw sx="100000" sy="100000" kx="0" ky="0" algn="bl" rotWithShape="0" blurRad="101600" dist="38100" dir="5400000">
+            <a:outerShdw blurRad="101600" dist="38100" dir="5400000" algn="bl" rotWithShape="0">
               <a:srgbClr val="1B2340">
                 <a:alpha val="12000"/>
               </a:srgbClr>
             </a:outerShdw>
           </a:effectLst>
         </p:spPr>
+        <p:txBody>
+          <a:bodyPr/>
+          <a:lstStyle/>
+          <a:p>
+            <a:endParaRPr lang="en-US"/>
+          </a:p>
+        </p:txBody>
       </p:sp>
       <p:sp>
         <p:nvSpPr>
@@ -7723,17 +7904,24 @@
           </a:solidFill>
           <a:ln/>
         </p:spPr>
+        <p:txBody>
+          <a:bodyPr/>
+          <a:lstStyle/>
+          <a:p>
+            <a:endParaRPr lang="en-US"/>
+          </a:p>
+        </p:txBody>
       </p:sp>
       <p:pic>
         <p:nvPicPr>
-          <p:cNvPr id="12" name="Image 1" descr="/tmp/osa_pres/icons/times_navy.png">    </p:cNvPr>
+          <p:cNvPr id="12" name="Image 1" descr="/tmp/osa_pres/icons/times_navy.png"/>
           <p:cNvPicPr>
             <a:picLocks noChangeAspect="1"/>
           </p:cNvPicPr>
           <p:nvPr/>
         </p:nvPicPr>
         <p:blipFill>
-          <a:blip r:embed="rId2"/>
+          <a:blip r:embed="rId4"/>
           <a:stretch>
             <a:fillRect/>
           </a:stretch>
@@ -7769,7 +7957,7 @@
           <a:bodyPr wrap="square" lIns="0" tIns="0" rIns="0" bIns="0" rtlCol="0" anchor="ctr"/>
           <a:lstStyle/>
           <a:p>
-            <a:pPr indent="0" marL="0">
+            <a:pPr marL="0" indent="0">
               <a:buNone/>
             </a:pPr>
             <a:r>
@@ -7808,7 +7996,7 @@
           <a:bodyPr wrap="square" lIns="0" tIns="0" rIns="0" bIns="0" rtlCol="0" anchor="ctr"/>
           <a:lstStyle/>
           <a:p>
-            <a:pPr indent="0" marL="0">
+            <a:pPr marL="0" indent="0">
               <a:lnSpc>
                 <a:spcPct val="122000"/>
               </a:lnSpc>
@@ -7855,6 +8043,13 @@
             <a:prstDash val="solid"/>
           </a:ln>
         </p:spPr>
+        <p:txBody>
+          <a:bodyPr/>
+          <a:lstStyle/>
+          <a:p>
+            <a:endParaRPr lang="en-US"/>
+          </a:p>
+        </p:txBody>
       </p:sp>
       <p:sp>
         <p:nvSpPr>
@@ -7877,7 +8072,7 @@
           <a:bodyPr wrap="square" lIns="0" tIns="0" rIns="0" bIns="0" rtlCol="0" anchor="ctr"/>
           <a:lstStyle/>
           <a:p>
-            <a:pPr indent="0" marL="0">
+            <a:pPr marL="0" indent="0">
               <a:buNone/>
             </a:pPr>
             <a:r>
@@ -7916,7 +8111,7 @@
           <a:bodyPr wrap="square" lIns="0" tIns="0" rIns="0" bIns="0" rtlCol="0" anchor="ctr"/>
           <a:lstStyle/>
           <a:p>
-            <a:pPr indent="0" marL="0">
+            <a:pPr marL="0" indent="0">
               <a:buNone/>
             </a:pPr>
             <a:r>
@@ -7931,45 +8126,6 @@
               <a:t>— Byun, Rhee, Park &amp; Lee, 2006</a:t>
             </a:r>
             <a:endParaRPr lang="en-US" sz="1200" dirty="0"/>
-          </a:p>
-        </p:txBody>
-      </p:sp>
-      <p:sp>
-        <p:nvSpPr>
-          <p:cNvPr id="18" name="Text 14"/>
-          <p:cNvSpPr/>
-          <p:nvPr/>
-        </p:nvSpPr>
-        <p:spPr>
-          <a:xfrm>
-            <a:off x="548640" y="6437376"/>
-            <a:ext cx="7315200" cy="274320"/>
-          </a:xfrm>
-          <a:prstGeom prst="rect">
-            <a:avLst/>
-          </a:prstGeom>
-          <a:noFill/>
-          <a:ln/>
-        </p:spPr>
-        <p:txBody>
-          <a:bodyPr wrap="square" rtlCol="0" anchor="ctr"/>
-          <a:lstStyle/>
-          <a:p>
-            <a:pPr algn="l" indent="0" marL="0">
-              <a:buNone/>
-            </a:pPr>
-            <a:r>
-              <a:rPr lang="en-US" sz="1050" dirty="0">
-                <a:solidFill>
-                  <a:srgbClr val="5B6485"/>
-                </a:solidFill>
-                <a:latin typeface="Calibri" pitchFamily="34" charset="0"/>
-                <a:ea typeface="Calibri" pitchFamily="34" charset="-122"/>
-                <a:cs typeface="Calibri" pitchFamily="34" charset="-120"/>
-              </a:rPr>
-              <a:t>Criptografía Avanzada — SSE asimétrico</a:t>
-            </a:r>
-            <a:endParaRPr lang="en-US" sz="1050" dirty="0"/>
           </a:p>
         </p:txBody>
       </p:sp>
@@ -7994,7 +8150,7 @@
           <a:bodyPr wrap="square" rtlCol="0" anchor="ctr"/>
           <a:lstStyle/>
           <a:p>
-            <a:pPr algn="r" indent="0" marL="0">
+            <a:pPr marL="0" indent="0" algn="r">
               <a:buNone/>
             </a:pPr>
             <a:r>
@@ -8058,11 +8214,11 @@
           <a:bodyPr wrap="square" lIns="0" tIns="0" rIns="0" bIns="0" rtlCol="0" anchor="ctr"/>
           <a:lstStyle/>
           <a:p>
-            <a:pPr indent="0" marL="0">
-              <a:buNone/>
-            </a:pPr>
-            <a:r>
-              <a:rPr lang="en-US" sz="1250" b="1" spc="200" kern="0" dirty="0">
+            <a:pPr marL="0" indent="0">
+              <a:buNone/>
+            </a:pPr>
+            <a:r>
+              <a:rPr lang="en-US" sz="1250" b="1" kern="0" spc="200" dirty="0">
                 <a:solidFill>
                   <a:srgbClr val="6C6FD9"/>
                 </a:solidFill>
@@ -8097,7 +8253,7 @@
           <a:bodyPr wrap="square" lIns="0" tIns="0" rIns="0" bIns="0" rtlCol="0" anchor="ctr"/>
           <a:lstStyle/>
           <a:p>
-            <a:pPr indent="0" marL="0">
+            <a:pPr marL="0" indent="0">
               <a:buNone/>
             </a:pPr>
             <a:r>
@@ -8134,6 +8290,13 @@
           </a:solidFill>
           <a:ln/>
         </p:spPr>
+        <p:txBody>
+          <a:bodyPr/>
+          <a:lstStyle/>
+          <a:p>
+            <a:endParaRPr lang="en-US"/>
+          </a:p>
+        </p:txBody>
       </p:sp>
       <p:sp>
         <p:nvSpPr>
@@ -8156,7 +8319,7 @@
           <a:bodyPr wrap="square" lIns="0" tIns="0" rIns="0" bIns="0" rtlCol="0" anchor="ctr"/>
           <a:lstStyle/>
           <a:p>
-            <a:pPr indent="0" marL="0">
+            <a:pPr marL="0" indent="0">
               <a:buNone/>
             </a:pPr>
             <a:r>
@@ -8195,7 +8358,7 @@
           <a:bodyPr wrap="square" lIns="0" tIns="0" rIns="0" bIns="0" rtlCol="0" anchor="ctr"/>
           <a:lstStyle/>
           <a:p>
-            <a:pPr indent="0" marL="0">
+            <a:pPr marL="0" indent="0">
               <a:buNone/>
             </a:pPr>
             <a:r>
@@ -8234,7 +8397,7 @@
           <a:bodyPr wrap="square" lIns="0" tIns="0" rIns="0" bIns="0" rtlCol="0" anchor="ctr"/>
           <a:lstStyle/>
           <a:p>
-            <a:pPr indent="0" marL="0">
+            <a:pPr marL="0" indent="0">
               <a:buNone/>
             </a:pPr>
             <a:r>
@@ -8271,6 +8434,13 @@
           </a:solidFill>
           <a:ln/>
         </p:spPr>
+        <p:txBody>
+          <a:bodyPr/>
+          <a:lstStyle/>
+          <a:p>
+            <a:endParaRPr lang="en-US"/>
+          </a:p>
+        </p:txBody>
       </p:sp>
       <p:sp>
         <p:nvSpPr>
@@ -8293,7 +8463,7 @@
           <a:bodyPr wrap="square" lIns="0" tIns="0" rIns="0" bIns="0" rtlCol="0" anchor="ctr"/>
           <a:lstStyle/>
           <a:p>
-            <a:pPr indent="0" marL="0">
+            <a:pPr marL="0" indent="0">
               <a:buNone/>
             </a:pPr>
             <a:r>
@@ -8332,7 +8502,7 @@
           <a:bodyPr wrap="square" lIns="0" tIns="0" rIns="0" bIns="0" rtlCol="0" anchor="ctr"/>
           <a:lstStyle/>
           <a:p>
-            <a:pPr indent="0" marL="0">
+            <a:pPr marL="0" indent="0">
               <a:buNone/>
             </a:pPr>
             <a:r>
@@ -8371,7 +8541,7 @@
           <a:bodyPr wrap="square" lIns="0" tIns="0" rIns="0" bIns="0" rtlCol="0" anchor="ctr"/>
           <a:lstStyle/>
           <a:p>
-            <a:pPr indent="0" marL="0">
+            <a:pPr marL="0" indent="0">
               <a:buNone/>
             </a:pPr>
             <a:r>
@@ -8408,6 +8578,13 @@
           </a:solidFill>
           <a:ln/>
         </p:spPr>
+        <p:txBody>
+          <a:bodyPr/>
+          <a:lstStyle/>
+          <a:p>
+            <a:endParaRPr lang="en-US"/>
+          </a:p>
+        </p:txBody>
       </p:sp>
       <p:sp>
         <p:nvSpPr>
@@ -8430,7 +8607,7 @@
           <a:bodyPr wrap="square" lIns="0" tIns="0" rIns="0" bIns="0" rtlCol="0" anchor="ctr"/>
           <a:lstStyle/>
           <a:p>
-            <a:pPr indent="0" marL="0">
+            <a:pPr marL="0" indent="0">
               <a:buNone/>
             </a:pPr>
             <a:r>
@@ -8469,7 +8646,7 @@
           <a:bodyPr wrap="square" lIns="0" tIns="0" rIns="0" bIns="0" rtlCol="0" anchor="ctr"/>
           <a:lstStyle/>
           <a:p>
-            <a:pPr indent="0" marL="0">
+            <a:pPr marL="0" indent="0">
               <a:buNone/>
             </a:pPr>
             <a:r>
@@ -8508,7 +8685,7 @@
           <a:bodyPr wrap="square" lIns="0" tIns="0" rIns="0" bIns="0" rtlCol="0" anchor="ctr"/>
           <a:lstStyle/>
           <a:p>
-            <a:pPr indent="0" marL="0">
+            <a:pPr marL="0" indent="0">
               <a:buNone/>
             </a:pPr>
             <a:r>
@@ -8545,6 +8722,13 @@
           </a:solidFill>
           <a:ln/>
         </p:spPr>
+        <p:txBody>
+          <a:bodyPr/>
+          <a:lstStyle/>
+          <a:p>
+            <a:endParaRPr lang="en-US"/>
+          </a:p>
+        </p:txBody>
       </p:sp>
       <p:sp>
         <p:nvSpPr>
@@ -8567,7 +8751,7 @@
           <a:bodyPr wrap="square" lIns="0" tIns="0" rIns="0" bIns="0" rtlCol="0" anchor="ctr"/>
           <a:lstStyle/>
           <a:p>
-            <a:pPr indent="0" marL="0">
+            <a:pPr marL="0" indent="0">
               <a:buNone/>
             </a:pPr>
             <a:r>
@@ -8606,7 +8790,7 @@
           <a:bodyPr wrap="square" lIns="0" tIns="0" rIns="0" bIns="0" rtlCol="0" anchor="ctr"/>
           <a:lstStyle/>
           <a:p>
-            <a:pPr indent="0" marL="0">
+            <a:pPr marL="0" indent="0">
               <a:buNone/>
             </a:pPr>
             <a:r>
@@ -8645,7 +8829,7 @@
           <a:bodyPr wrap="square" lIns="0" tIns="0" rIns="0" bIns="0" rtlCol="0" anchor="ctr"/>
           <a:lstStyle/>
           <a:p>
-            <a:pPr indent="0" marL="0">
+            <a:pPr marL="0" indent="0">
               <a:buNone/>
             </a:pPr>
             <a:r>
@@ -8682,6 +8866,13 @@
           </a:solidFill>
           <a:ln/>
         </p:spPr>
+        <p:txBody>
+          <a:bodyPr/>
+          <a:lstStyle/>
+          <a:p>
+            <a:endParaRPr lang="en-US"/>
+          </a:p>
+        </p:txBody>
       </p:sp>
       <p:sp>
         <p:nvSpPr>
@@ -8704,7 +8895,7 @@
           <a:bodyPr wrap="square" lIns="0" tIns="0" rIns="0" bIns="0" rtlCol="0" anchor="ctr"/>
           <a:lstStyle/>
           <a:p>
-            <a:pPr indent="0" marL="0">
+            <a:pPr marL="0" indent="0">
               <a:buNone/>
             </a:pPr>
             <a:r>
@@ -8743,7 +8934,7 @@
           <a:bodyPr wrap="square" lIns="0" tIns="0" rIns="0" bIns="0" rtlCol="0" anchor="ctr"/>
           <a:lstStyle/>
           <a:p>
-            <a:pPr indent="0" marL="0">
+            <a:pPr marL="0" indent="0">
               <a:buNone/>
             </a:pPr>
             <a:r>
@@ -8782,7 +8973,7 @@
           <a:bodyPr wrap="square" lIns="0" tIns="0" rIns="0" bIns="0" rtlCol="0" anchor="ctr"/>
           <a:lstStyle/>
           <a:p>
-            <a:pPr indent="0" marL="0">
+            <a:pPr marL="0" indent="0">
               <a:buNone/>
             </a:pPr>
             <a:r>
@@ -8819,6 +9010,13 @@
           </a:solidFill>
           <a:ln/>
         </p:spPr>
+        <p:txBody>
+          <a:bodyPr/>
+          <a:lstStyle/>
+          <a:p>
+            <a:endParaRPr lang="en-US"/>
+          </a:p>
+        </p:txBody>
       </p:sp>
       <p:sp>
         <p:nvSpPr>
@@ -8841,7 +9039,7 @@
           <a:bodyPr wrap="square" lIns="0" tIns="0" rIns="0" bIns="0" rtlCol="0" anchor="ctr"/>
           <a:lstStyle/>
           <a:p>
-            <a:pPr indent="0" marL="0">
+            <a:pPr marL="0" indent="0">
               <a:buNone/>
             </a:pPr>
             <a:r>
@@ -8880,7 +9078,7 @@
           <a:bodyPr wrap="square" lIns="0" tIns="0" rIns="0" bIns="0" rtlCol="0" anchor="ctr"/>
           <a:lstStyle/>
           <a:p>
-            <a:pPr indent="0" marL="0">
+            <a:pPr marL="0" indent="0">
               <a:buNone/>
             </a:pPr>
             <a:r>
@@ -8919,7 +9117,7 @@
           <a:bodyPr wrap="square" lIns="0" tIns="0" rIns="0" bIns="0" rtlCol="0" anchor="ctr"/>
           <a:lstStyle/>
           <a:p>
-            <a:pPr indent="0" marL="0">
+            <a:pPr marL="0" indent="0">
               <a:buNone/>
             </a:pPr>
             <a:r>
@@ -8956,6 +9154,13 @@
           </a:solidFill>
           <a:ln/>
         </p:spPr>
+        <p:txBody>
+          <a:bodyPr/>
+          <a:lstStyle/>
+          <a:p>
+            <a:endParaRPr lang="en-US"/>
+          </a:p>
+        </p:txBody>
       </p:sp>
       <p:sp>
         <p:nvSpPr>
@@ -8978,7 +9183,7 @@
           <a:bodyPr wrap="square" lIns="0" tIns="0" rIns="0" bIns="0" rtlCol="0" anchor="ctr"/>
           <a:lstStyle/>
           <a:p>
-            <a:pPr indent="0" marL="0">
+            <a:pPr marL="0" indent="0">
               <a:buNone/>
             </a:pPr>
             <a:r>
@@ -9017,7 +9222,7 @@
           <a:bodyPr wrap="square" lIns="0" tIns="0" rIns="0" bIns="0" rtlCol="0" anchor="ctr"/>
           <a:lstStyle/>
           <a:p>
-            <a:pPr indent="0" marL="0">
+            <a:pPr marL="0" indent="0">
               <a:buNone/>
             </a:pPr>
             <a:r>
@@ -9056,7 +9261,7 @@
           <a:bodyPr wrap="square" lIns="0" tIns="0" rIns="0" bIns="0" rtlCol="0" anchor="ctr"/>
           <a:lstStyle/>
           <a:p>
-            <a:pPr indent="0" marL="0">
+            <a:pPr marL="0" indent="0">
               <a:buNone/>
             </a:pPr>
             <a:r>
@@ -9100,6 +9305,13 @@
             <a:prstDash val="solid"/>
           </a:ln>
         </p:spPr>
+        <p:txBody>
+          <a:bodyPr/>
+          <a:lstStyle/>
+          <a:p>
+            <a:endParaRPr lang="en-US"/>
+          </a:p>
+        </p:txBody>
       </p:sp>
       <p:sp>
         <p:nvSpPr>
@@ -9122,7 +9334,7 @@
           <a:bodyPr wrap="square" lIns="0" tIns="0" rIns="0" bIns="0" rtlCol="0" anchor="ctr"/>
           <a:lstStyle/>
           <a:p>
-            <a:pPr indent="0" marL="0">
+            <a:pPr marL="0" indent="0">
               <a:buNone/>
             </a:pPr>
             <a:r>
@@ -9142,45 +9354,6 @@
       </p:sp>
       <p:sp>
         <p:nvSpPr>
-          <p:cNvPr id="34" name="Text 32"/>
-          <p:cNvSpPr/>
-          <p:nvPr/>
-        </p:nvSpPr>
-        <p:spPr>
-          <a:xfrm>
-            <a:off x="548640" y="6437376"/>
-            <a:ext cx="7315200" cy="274320"/>
-          </a:xfrm>
-          <a:prstGeom prst="rect">
-            <a:avLst/>
-          </a:prstGeom>
-          <a:noFill/>
-          <a:ln/>
-        </p:spPr>
-        <p:txBody>
-          <a:bodyPr wrap="square" rtlCol="0" anchor="ctr"/>
-          <a:lstStyle/>
-          <a:p>
-            <a:pPr algn="l" indent="0" marL="0">
-              <a:buNone/>
-            </a:pPr>
-            <a:r>
-              <a:rPr lang="en-US" sz="1050" dirty="0">
-                <a:solidFill>
-                  <a:srgbClr val="5B6485"/>
-                </a:solidFill>
-                <a:latin typeface="Calibri" pitchFamily="34" charset="0"/>
-                <a:ea typeface="Calibri" pitchFamily="34" charset="-122"/>
-                <a:cs typeface="Calibri" pitchFamily="34" charset="-120"/>
-              </a:rPr>
-              <a:t>Criptografía Avanzada — SSE asimétrico</a:t>
-            </a:r>
-            <a:endParaRPr lang="en-US" sz="1050" dirty="0"/>
-          </a:p>
-        </p:txBody>
-      </p:sp>
-      <p:sp>
-        <p:nvSpPr>
           <p:cNvPr id="35" name="Text 33"/>
           <p:cNvSpPr/>
           <p:nvPr/>
@@ -9200,7 +9373,7 @@
           <a:bodyPr wrap="square" rtlCol="0" anchor="ctr"/>
           <a:lstStyle/>
           <a:p>
-            <a:pPr algn="r" indent="0" marL="0">
+            <a:pPr marL="0" indent="0" algn="r">
               <a:buNone/>
             </a:pPr>
             <a:r>
@@ -9264,11 +9437,11 @@
           <a:bodyPr wrap="square" lIns="0" tIns="0" rIns="0" bIns="0" rtlCol="0" anchor="ctr"/>
           <a:lstStyle/>
           <a:p>
-            <a:pPr indent="0" marL="0">
-              <a:buNone/>
-            </a:pPr>
-            <a:r>
-              <a:rPr lang="en-US" sz="1250" b="1" spc="200" kern="0" dirty="0">
+            <a:pPr marL="0" indent="0">
+              <a:buNone/>
+            </a:pPr>
+            <a:r>
+              <a:rPr lang="en-US" sz="1250" b="1" kern="0" spc="200" dirty="0">
                 <a:solidFill>
                   <a:srgbClr val="6C6FD9"/>
                 </a:solidFill>
@@ -9303,7 +9476,7 @@
           <a:bodyPr wrap="square" lIns="0" tIns="0" rIns="0" bIns="0" rtlCol="0" anchor="ctr"/>
           <a:lstStyle/>
           <a:p>
-            <a:pPr indent="0" marL="0">
+            <a:pPr marL="0" indent="0">
               <a:buNone/>
             </a:pPr>
             <a:r>
@@ -9342,7 +9515,7 @@
           <a:bodyPr wrap="square" lIns="0" tIns="0" rIns="0" bIns="0" rtlCol="0" anchor="ctr"/>
           <a:lstStyle/>
           <a:p>
-            <a:pPr indent="0" marL="0">
+            <a:pPr marL="0" indent="0">
               <a:lnSpc>
                 <a:spcPct val="120000"/>
               </a:lnSpc>
@@ -9389,13 +9562,20 @@
             <a:prstDash val="solid"/>
           </a:ln>
           <a:effectLst>
-            <a:outerShdw sx="100000" sy="100000" kx="0" ky="0" algn="bl" rotWithShape="0" blurRad="101600" dist="38100" dir="5400000">
+            <a:outerShdw blurRad="101600" dist="38100" dir="5400000" algn="bl" rotWithShape="0">
               <a:srgbClr val="1B2340">
                 <a:alpha val="12000"/>
               </a:srgbClr>
             </a:outerShdw>
           </a:effectLst>
         </p:spPr>
+        <p:txBody>
+          <a:bodyPr/>
+          <a:lstStyle/>
+          <a:p>
+            <a:endParaRPr lang="en-US"/>
+          </a:p>
+        </p:txBody>
       </p:sp>
       <p:sp>
         <p:nvSpPr>
@@ -9416,17 +9596,24 @@
           </a:solidFill>
           <a:ln/>
         </p:spPr>
+        <p:txBody>
+          <a:bodyPr/>
+          <a:lstStyle/>
+          <a:p>
+            <a:endParaRPr lang="en-US"/>
+          </a:p>
+        </p:txBody>
       </p:sp>
       <p:pic>
         <p:nvPicPr>
-          <p:cNvPr id="7" name="Image 0" descr="/tmp/osa_pres/icons/key_teal.png">    </p:cNvPr>
+          <p:cNvPr id="7" name="Image 0" descr="/tmp/osa_pres/icons/key_teal.png"/>
           <p:cNvPicPr>
             <a:picLocks noChangeAspect="1"/>
           </p:cNvPicPr>
           <p:nvPr/>
         </p:nvPicPr>
         <p:blipFill>
-          <a:blip r:embed="rId1"/>
+          <a:blip r:embed="rId3"/>
           <a:stretch>
             <a:fillRect/>
           </a:stretch>
@@ -9462,7 +9649,7 @@
           <a:bodyPr wrap="square" lIns="0" tIns="0" rIns="0" bIns="0" rtlCol="0" anchor="ctr"/>
           <a:lstStyle/>
           <a:p>
-            <a:pPr algn="ctr" indent="0" marL="0">
+            <a:pPr marL="0" indent="0" algn="ctr">
               <a:lnSpc>
                 <a:spcPct val="105000"/>
               </a:lnSpc>
@@ -9504,7 +9691,7 @@
           <a:bodyPr wrap="square" lIns="0" tIns="0" rIns="0" bIns="0" rtlCol="0" anchor="ctr"/>
           <a:lstStyle/>
           <a:p>
-            <a:pPr algn="ctr" indent="0" marL="0">
+            <a:pPr marL="0" indent="0" algn="ctr">
               <a:buNone/>
             </a:pPr>
             <a:r>
@@ -9548,13 +9735,20 @@
             <a:prstDash val="solid"/>
           </a:ln>
           <a:effectLst>
-            <a:outerShdw sx="100000" sy="100000" kx="0" ky="0" algn="bl" rotWithShape="0" blurRad="101600" dist="38100" dir="5400000">
+            <a:outerShdw blurRad="101600" dist="38100" dir="5400000" algn="bl" rotWithShape="0">
               <a:srgbClr val="1B2340">
                 <a:alpha val="12000"/>
               </a:srgbClr>
             </a:outerShdw>
           </a:effectLst>
         </p:spPr>
+        <p:txBody>
+          <a:bodyPr/>
+          <a:lstStyle/>
+          <a:p>
+            <a:endParaRPr lang="en-US"/>
+          </a:p>
+        </p:txBody>
       </p:sp>
       <p:sp>
         <p:nvSpPr>
@@ -9575,17 +9769,24 @@
           </a:solidFill>
           <a:ln/>
         </p:spPr>
+        <p:txBody>
+          <a:bodyPr/>
+          <a:lstStyle/>
+          <a:p>
+            <a:endParaRPr lang="en-US"/>
+          </a:p>
+        </p:txBody>
       </p:sp>
       <p:pic>
         <p:nvPicPr>
-          <p:cNvPr id="12" name="Image 1" descr="/tmp/osa_pres/icons/exchange_navy.png">    </p:cNvPr>
+          <p:cNvPr id="12" name="Image 1" descr="/tmp/osa_pres/icons/exchange_navy.png"/>
           <p:cNvPicPr>
             <a:picLocks noChangeAspect="1"/>
           </p:cNvPicPr>
           <p:nvPr/>
         </p:nvPicPr>
         <p:blipFill>
-          <a:blip r:embed="rId2"/>
+          <a:blip r:embed="rId4"/>
           <a:stretch>
             <a:fillRect/>
           </a:stretch>
@@ -9621,7 +9822,7 @@
           <a:bodyPr wrap="square" lIns="0" tIns="0" rIns="0" bIns="0" rtlCol="0" anchor="ctr"/>
           <a:lstStyle/>
           <a:p>
-            <a:pPr algn="ctr" indent="0" marL="0">
+            <a:pPr marL="0" indent="0" algn="ctr">
               <a:lnSpc>
                 <a:spcPct val="105000"/>
               </a:lnSpc>
@@ -9641,7 +9842,7 @@
             <a:endParaRPr lang="en-US" sz="1150" dirty="0"/>
           </a:p>
           <a:p>
-            <a:pPr algn="ctr" indent="0" marL="0">
+            <a:pPr marL="0" indent="0" algn="ctr">
               <a:lnSpc>
                 <a:spcPct val="105000"/>
               </a:lnSpc>
@@ -9683,7 +9884,7 @@
           <a:bodyPr wrap="square" lIns="0" tIns="0" rIns="0" bIns="0" rtlCol="0" anchor="ctr"/>
           <a:lstStyle/>
           <a:p>
-            <a:pPr algn="ctr" indent="0" marL="0">
+            <a:pPr marL="0" indent="0" algn="ctr">
               <a:buNone/>
             </a:pPr>
             <a:r>
@@ -9727,13 +9928,20 @@
             <a:prstDash val="solid"/>
           </a:ln>
           <a:effectLst>
-            <a:outerShdw sx="100000" sy="100000" kx="0" ky="0" algn="bl" rotWithShape="0" blurRad="101600" dist="38100" dir="5400000">
+            <a:outerShdw blurRad="101600" dist="38100" dir="5400000" algn="bl" rotWithShape="0">
               <a:srgbClr val="1B2340">
                 <a:alpha val="12000"/>
               </a:srgbClr>
             </a:outerShdw>
           </a:effectLst>
         </p:spPr>
+        <p:txBody>
+          <a:bodyPr/>
+          <a:lstStyle/>
+          <a:p>
+            <a:endParaRPr lang="en-US"/>
+          </a:p>
+        </p:txBody>
       </p:sp>
       <p:sp>
         <p:nvSpPr>
@@ -9754,17 +9962,24 @@
           </a:solidFill>
           <a:ln/>
         </p:spPr>
+        <p:txBody>
+          <a:bodyPr/>
+          <a:lstStyle/>
+          <a:p>
+            <a:endParaRPr lang="en-US"/>
+          </a:p>
+        </p:txBody>
       </p:sp>
       <p:pic>
         <p:nvPicPr>
-          <p:cNvPr id="17" name="Image 2" descr="/tmp/osa_pres/icons/unlock_teal.png">    </p:cNvPr>
+          <p:cNvPr id="17" name="Image 2" descr="/tmp/osa_pres/icons/unlock_teal.png"/>
           <p:cNvPicPr>
             <a:picLocks noChangeAspect="1"/>
           </p:cNvPicPr>
           <p:nvPr/>
         </p:nvPicPr>
         <p:blipFill>
-          <a:blip r:embed="rId3"/>
+          <a:blip r:embed="rId5"/>
           <a:stretch>
             <a:fillRect/>
           </a:stretch>
@@ -9800,7 +10015,7 @@
           <a:bodyPr wrap="square" lIns="0" tIns="0" rIns="0" bIns="0" rtlCol="0" anchor="ctr"/>
           <a:lstStyle/>
           <a:p>
-            <a:pPr algn="ctr" indent="0" marL="0">
+            <a:pPr marL="0" indent="0" algn="ctr">
               <a:lnSpc>
                 <a:spcPct val="105000"/>
               </a:lnSpc>
@@ -9820,7 +10035,7 @@
             <a:endParaRPr lang="en-US" sz="1150" dirty="0"/>
           </a:p>
           <a:p>
-            <a:pPr algn="ctr" indent="0" marL="0">
+            <a:pPr marL="0" indent="0" algn="ctr">
               <a:lnSpc>
                 <a:spcPct val="105000"/>
               </a:lnSpc>
@@ -9862,7 +10077,7 @@
           <a:bodyPr wrap="square" lIns="0" tIns="0" rIns="0" bIns="0" rtlCol="0" anchor="ctr"/>
           <a:lstStyle/>
           <a:p>
-            <a:pPr algn="ctr" indent="0" marL="0">
+            <a:pPr marL="0" indent="0" algn="ctr">
               <a:buNone/>
             </a:pPr>
             <a:r>
@@ -9906,13 +10121,20 @@
             <a:prstDash val="solid"/>
           </a:ln>
           <a:effectLst>
-            <a:outerShdw sx="100000" sy="100000" kx="0" ky="0" algn="bl" rotWithShape="0" blurRad="101600" dist="38100" dir="5400000">
+            <a:outerShdw blurRad="101600" dist="38100" dir="5400000" algn="bl" rotWithShape="0">
               <a:srgbClr val="1B2340">
                 <a:alpha val="12000"/>
               </a:srgbClr>
             </a:outerShdw>
           </a:effectLst>
         </p:spPr>
+        <p:txBody>
+          <a:bodyPr/>
+          <a:lstStyle/>
+          <a:p>
+            <a:endParaRPr lang="en-US"/>
+          </a:p>
+        </p:txBody>
       </p:sp>
       <p:sp>
         <p:nvSpPr>
@@ -9933,17 +10155,24 @@
           </a:solidFill>
           <a:ln/>
         </p:spPr>
+        <p:txBody>
+          <a:bodyPr/>
+          <a:lstStyle/>
+          <a:p>
+            <a:endParaRPr lang="en-US"/>
+          </a:p>
+        </p:txBody>
       </p:sp>
       <p:pic>
         <p:nvPicPr>
-          <p:cNvPr id="22" name="Image 3" descr="/tmp/osa_pres/icons/lock_navy.png">    </p:cNvPr>
+          <p:cNvPr id="22" name="Image 3" descr="/tmp/osa_pres/icons/lock_navy.png"/>
           <p:cNvPicPr>
             <a:picLocks noChangeAspect="1"/>
           </p:cNvPicPr>
           <p:nvPr/>
         </p:nvPicPr>
         <p:blipFill>
-          <a:blip r:embed="rId4"/>
+          <a:blip r:embed="rId6"/>
           <a:stretch>
             <a:fillRect/>
           </a:stretch>
@@ -9979,7 +10208,7 @@
           <a:bodyPr wrap="square" lIns="0" tIns="0" rIns="0" bIns="0" rtlCol="0" anchor="ctr"/>
           <a:lstStyle/>
           <a:p>
-            <a:pPr algn="ctr" indent="0" marL="0">
+            <a:pPr marL="0" indent="0" algn="ctr">
               <a:lnSpc>
                 <a:spcPct val="105000"/>
               </a:lnSpc>
@@ -9999,7 +10228,7 @@
             <a:endParaRPr lang="en-US" sz="1150" dirty="0"/>
           </a:p>
           <a:p>
-            <a:pPr algn="ctr" indent="0" marL="0">
+            <a:pPr marL="0" indent="0" algn="ctr">
               <a:lnSpc>
                 <a:spcPct val="105000"/>
               </a:lnSpc>
@@ -10041,7 +10270,7 @@
           <a:bodyPr wrap="square" lIns="0" tIns="0" rIns="0" bIns="0" rtlCol="0" anchor="ctr"/>
           <a:lstStyle/>
           <a:p>
-            <a:pPr algn="ctr" indent="0" marL="0">
+            <a:pPr marL="0" indent="0" algn="ctr">
               <a:buNone/>
             </a:pPr>
             <a:r>
@@ -10085,13 +10314,20 @@
             <a:prstDash val="solid"/>
           </a:ln>
           <a:effectLst>
-            <a:outerShdw sx="100000" sy="100000" kx="0" ky="0" algn="bl" rotWithShape="0" blurRad="101600" dist="38100" dir="5400000">
+            <a:outerShdw blurRad="101600" dist="38100" dir="5400000" algn="bl" rotWithShape="0">
               <a:srgbClr val="1B2340">
                 <a:alpha val="12000"/>
               </a:srgbClr>
             </a:outerShdw>
           </a:effectLst>
         </p:spPr>
+        <p:txBody>
+          <a:bodyPr/>
+          <a:lstStyle/>
+          <a:p>
+            <a:endParaRPr lang="en-US"/>
+          </a:p>
+        </p:txBody>
       </p:sp>
       <p:sp>
         <p:nvSpPr>
@@ -10112,17 +10348,24 @@
           </a:solidFill>
           <a:ln/>
         </p:spPr>
+        <p:txBody>
+          <a:bodyPr/>
+          <a:lstStyle/>
+          <a:p>
+            <a:endParaRPr lang="en-US"/>
+          </a:p>
+        </p:txBody>
       </p:sp>
       <p:pic>
         <p:nvPicPr>
-          <p:cNvPr id="27" name="Image 4" descr="/tmp/osa_pres/icons/database_teal.png">    </p:cNvPr>
+          <p:cNvPr id="27" name="Image 4" descr="/tmp/osa_pres/icons/database_teal.png"/>
           <p:cNvPicPr>
             <a:picLocks noChangeAspect="1"/>
           </p:cNvPicPr>
           <p:nvPr/>
         </p:nvPicPr>
         <p:blipFill>
-          <a:blip r:embed="rId5"/>
+          <a:blip r:embed="rId7"/>
           <a:stretch>
             <a:fillRect/>
           </a:stretch>
@@ -10158,7 +10401,7 @@
           <a:bodyPr wrap="square" lIns="0" tIns="0" rIns="0" bIns="0" rtlCol="0" anchor="ctr"/>
           <a:lstStyle/>
           <a:p>
-            <a:pPr algn="ctr" indent="0" marL="0">
+            <a:pPr marL="0" indent="0" algn="ctr">
               <a:lnSpc>
                 <a:spcPct val="105000"/>
               </a:lnSpc>
@@ -10205,13 +10448,20 @@
             <a:prstDash val="solid"/>
           </a:ln>
           <a:effectLst>
-            <a:outerShdw sx="100000" sy="100000" kx="0" ky="0" algn="bl" rotWithShape="0" blurRad="101600" dist="38100" dir="5400000">
+            <a:outerShdw blurRad="101600" dist="38100" dir="5400000" algn="bl" rotWithShape="0">
               <a:srgbClr val="1B2340">
                 <a:alpha val="12000"/>
               </a:srgbClr>
             </a:outerShdw>
           </a:effectLst>
         </p:spPr>
+        <p:txBody>
+          <a:bodyPr/>
+          <a:lstStyle/>
+          <a:p>
+            <a:endParaRPr lang="en-US"/>
+          </a:p>
+        </p:txBody>
       </p:sp>
       <p:sp>
         <p:nvSpPr>
@@ -10234,7 +10484,7 @@
           <a:bodyPr wrap="square" lIns="0" tIns="0" rIns="0" bIns="0" rtlCol="0" anchor="ctr"/>
           <a:lstStyle/>
           <a:p>
-            <a:pPr indent="0" marL="0">
+            <a:pPr marL="0" indent="0">
               <a:buNone/>
             </a:pPr>
             <a:r>
@@ -10273,7 +10523,7 @@
           <a:bodyPr wrap="square" lIns="0" tIns="0" rIns="0" bIns="0" rtlCol="0" anchor="ctr"/>
           <a:lstStyle/>
           <a:p>
-            <a:pPr indent="0" marL="0">
+            <a:pPr marL="0" indent="0">
               <a:lnSpc>
                 <a:spcPct val="125000"/>
               </a:lnSpc>
@@ -10296,7 +10546,7 @@
             <a:endParaRPr lang="en-US" sz="1300" dirty="0"/>
           </a:p>
           <a:p>
-            <a:pPr indent="0" marL="0">
+            <a:pPr marL="0" indent="0">
               <a:lnSpc>
                 <a:spcPct val="125000"/>
               </a:lnSpc>
@@ -10319,7 +10569,7 @@
             <a:endParaRPr lang="en-US" sz="1300" dirty="0"/>
           </a:p>
           <a:p>
-            <a:pPr indent="0" marL="0">
+            <a:pPr marL="0" indent="0">
               <a:lnSpc>
                 <a:spcPct val="125000"/>
               </a:lnSpc>
@@ -10369,6 +10619,13 @@
             <a:prstDash val="solid"/>
           </a:ln>
         </p:spPr>
+        <p:txBody>
+          <a:bodyPr/>
+          <a:lstStyle/>
+          <a:p>
+            <a:endParaRPr lang="en-US"/>
+          </a:p>
+        </p:txBody>
       </p:sp>
       <p:sp>
         <p:nvSpPr>
@@ -10391,7 +10648,7 @@
           <a:bodyPr wrap="square" lIns="0" tIns="0" rIns="0" bIns="0" rtlCol="0" anchor="ctr"/>
           <a:lstStyle/>
           <a:p>
-            <a:pPr algn="ctr" indent="0" marL="0">
+            <a:pPr marL="0" indent="0" algn="ctr">
               <a:lnSpc>
                 <a:spcPct val="120000"/>
               </a:lnSpc>
@@ -10411,7 +10668,7 @@
             <a:endParaRPr lang="en-US" sz="1350" dirty="0"/>
           </a:p>
           <a:p>
-            <a:pPr algn="ctr" indent="0" marL="0">
+            <a:pPr marL="0" indent="0" algn="ctr">
               <a:lnSpc>
                 <a:spcPct val="120000"/>
               </a:lnSpc>
@@ -10431,7 +10688,7 @@
             <a:endParaRPr lang="en-US" sz="1350" dirty="0"/>
           </a:p>
           <a:p>
-            <a:pPr algn="ctr" indent="0" marL="0">
+            <a:pPr marL="0" indent="0" algn="ctr">
               <a:lnSpc>
                 <a:spcPct val="120000"/>
               </a:lnSpc>
@@ -10473,7 +10730,7 @@
           <a:bodyPr wrap="square" rtlCol="0" anchor="ctr"/>
           <a:lstStyle/>
           <a:p>
-            <a:pPr algn="l" indent="0" marL="0">
+            <a:pPr marL="0" indent="0" algn="l">
               <a:buNone/>
             </a:pPr>
             <a:r>
@@ -10512,7 +10769,7 @@
           <a:bodyPr wrap="square" rtlCol="0" anchor="ctr"/>
           <a:lstStyle/>
           <a:p>
-            <a:pPr algn="r" indent="0" marL="0">
+            <a:pPr marL="0" indent="0" algn="r">
               <a:buNone/>
             </a:pPr>
             <a:r>
@@ -10576,11 +10833,11 @@
           <a:bodyPr wrap="square" lIns="0" tIns="0" rIns="0" bIns="0" rtlCol="0" anchor="ctr"/>
           <a:lstStyle/>
           <a:p>
-            <a:pPr indent="0" marL="0">
-              <a:buNone/>
-            </a:pPr>
-            <a:r>
-              <a:rPr lang="en-US" sz="1250" b="1" spc="200" kern="0" dirty="0">
+            <a:pPr marL="0" indent="0">
+              <a:buNone/>
+            </a:pPr>
+            <a:r>
+              <a:rPr lang="en-US" sz="1250" b="1" kern="0" spc="200" dirty="0">
                 <a:solidFill>
                   <a:srgbClr val="6C6FD9"/>
                 </a:solidFill>
@@ -10615,11 +10872,11 @@
           <a:bodyPr wrap="square" lIns="0" tIns="0" rIns="0" bIns="0" rtlCol="0" anchor="ctr"/>
           <a:lstStyle/>
           <a:p>
-            <a:pPr indent="0" marL="0">
-              <a:buNone/>
-            </a:pPr>
-            <a:r>
-              <a:rPr lang="en-US" sz="3200" b="1" dirty="0">
+            <a:pPr marL="0" indent="0">
+              <a:buNone/>
+            </a:pPr>
+            <a:r>
+              <a:rPr lang="en-US" sz="3200" b="1" dirty="0" err="1">
                 <a:solidFill>
                   <a:srgbClr val="15213E"/>
                 </a:solidFill>
@@ -10627,7 +10884,18 @@
                 <a:ea typeface="Cambria" pitchFamily="34" charset="-122"/>
                 <a:cs typeface="Cambria" pitchFamily="34" charset="-120"/>
               </a:rPr>
-              <a:t>OSA — historia clínica zero-knowledge</a:t>
+              <a:t>historia</a:t>
+            </a:r>
+            <a:r>
+              <a:rPr lang="en-US" sz="3200" b="1" dirty="0">
+                <a:solidFill>
+                  <a:srgbClr val="15213E"/>
+                </a:solidFill>
+                <a:latin typeface="Cambria" pitchFamily="34" charset="0"/>
+                <a:ea typeface="Cambria" pitchFamily="34" charset="-122"/>
+                <a:cs typeface="Cambria" pitchFamily="34" charset="-120"/>
+              </a:rPr>
+              <a:t> clínica zero-knowledge</a:t>
             </a:r>
             <a:endParaRPr lang="en-US" sz="3200" dirty="0"/>
           </a:p>
@@ -10659,13 +10927,20 @@
             <a:prstDash val="solid"/>
           </a:ln>
           <a:effectLst>
-            <a:outerShdw sx="100000" sy="100000" kx="0" ky="0" algn="bl" rotWithShape="0" blurRad="101600" dist="38100" dir="5400000">
+            <a:outerShdw blurRad="101600" dist="38100" dir="5400000" algn="bl" rotWithShape="0">
               <a:srgbClr val="1B2340">
                 <a:alpha val="12000"/>
               </a:srgbClr>
             </a:outerShdw>
           </a:effectLst>
         </p:spPr>
+        <p:txBody>
+          <a:bodyPr/>
+          <a:lstStyle/>
+          <a:p>
+            <a:endParaRPr lang="en-US"/>
+          </a:p>
+        </p:txBody>
       </p:sp>
       <p:sp>
         <p:nvSpPr>
@@ -10686,17 +10961,24 @@
           </a:solidFill>
           <a:ln/>
         </p:spPr>
+        <p:txBody>
+          <a:bodyPr/>
+          <a:lstStyle/>
+          <a:p>
+            <a:endParaRPr lang="en-US"/>
+          </a:p>
+        </p:txBody>
       </p:sp>
       <p:pic>
         <p:nvPicPr>
-          <p:cNvPr id="6" name="Image 0" descr="/tmp/osa_pres/icons/hospital_teal.png">    </p:cNvPr>
+          <p:cNvPr id="6" name="Image 0" descr="/tmp/osa_pres/icons/hospital_teal.png"/>
           <p:cNvPicPr>
             <a:picLocks noChangeAspect="1"/>
           </p:cNvPicPr>
           <p:nvPr/>
         </p:nvPicPr>
         <p:blipFill>
-          <a:blip r:embed="rId1"/>
+          <a:blip r:embed="rId3"/>
           <a:stretch>
             <a:fillRect/>
           </a:stretch>
@@ -10732,11 +11014,11 @@
           <a:bodyPr wrap="square" lIns="0" tIns="0" rIns="0" bIns="0" rtlCol="0" anchor="ctr"/>
           <a:lstStyle/>
           <a:p>
-            <a:pPr indent="0" marL="0">
-              <a:buNone/>
-            </a:pPr>
-            <a:r>
-              <a:rPr lang="en-US" sz="1600" b="1" dirty="0">
+            <a:pPr marL="0" indent="0">
+              <a:buNone/>
+            </a:pPr>
+            <a:r>
+              <a:rPr lang="en-US" sz="1600" b="1" dirty="0" err="1">
                 <a:solidFill>
                   <a:srgbClr val="15213E"/>
                 </a:solidFill>
@@ -10744,7 +11026,18 @@
                 <a:ea typeface="Cambria" pitchFamily="34" charset="-122"/>
                 <a:cs typeface="Cambria" pitchFamily="34" charset="-120"/>
               </a:rPr>
-              <a:t>Qué es OSA</a:t>
+              <a:t>Qué</a:t>
+            </a:r>
+            <a:r>
+              <a:rPr lang="en-US" sz="1600" b="1" dirty="0">
+                <a:solidFill>
+                  <a:srgbClr val="15213E"/>
+                </a:solidFill>
+                <a:latin typeface="Cambria" pitchFamily="34" charset="0"/>
+                <a:ea typeface="Cambria" pitchFamily="34" charset="-122"/>
+                <a:cs typeface="Cambria" pitchFamily="34" charset="-120"/>
+              </a:rPr>
+              <a:t> es??</a:t>
             </a:r>
             <a:endParaRPr lang="en-US" sz="1600" dirty="0"/>
           </a:p>
@@ -10771,7 +11064,7 @@
           <a:bodyPr wrap="square" lIns="0" tIns="0" rIns="0" bIns="0" rtlCol="0" anchor="ctr"/>
           <a:lstStyle/>
           <a:p>
-            <a:pPr indent="0" marL="0">
+            <a:pPr marL="0" indent="0">
               <a:lnSpc>
                 <a:spcPct val="120000"/>
               </a:lnSpc>
@@ -10786,7 +11079,29 @@
                 <a:ea typeface="Calibri" pitchFamily="34" charset="-122"/>
                 <a:cs typeface="Calibri" pitchFamily="34" charset="-120"/>
               </a:rPr>
-              <a:t>MVP funcional de un portal médico paciente/doctor donde el servidor Go es un custodio ciego: nunca ve contenido clínico, claves de cifrado, ni las palabras que alguien busca.</a:t>
+              <a:t>MVP funcional de un portal médico paciente/doctor donde el </a:t>
+            </a:r>
+            <a:r>
+              <a:rPr lang="en-US" sz="1300" dirty="0" err="1">
+                <a:solidFill>
+                  <a:srgbClr val="1B2340"/>
+                </a:solidFill>
+                <a:latin typeface="Calibri" pitchFamily="34" charset="0"/>
+                <a:ea typeface="Calibri" pitchFamily="34" charset="-122"/>
+                <a:cs typeface="Calibri" pitchFamily="34" charset="-120"/>
+              </a:rPr>
+              <a:t>servidor</a:t>
+            </a:r>
+            <a:r>
+              <a:rPr lang="en-US" sz="1300" dirty="0">
+                <a:solidFill>
+                  <a:srgbClr val="1B2340"/>
+                </a:solidFill>
+                <a:latin typeface="Calibri" pitchFamily="34" charset="0"/>
+                <a:ea typeface="Calibri" pitchFamily="34" charset="-122"/>
+                <a:cs typeface="Calibri" pitchFamily="34" charset="-120"/>
+              </a:rPr>
+              <a:t> es un custodio ciego: nunca ve contenido clínico, claves de cifrado, ni las palabras que alguien busca.</a:t>
             </a:r>
             <a:endParaRPr lang="en-US" sz="1300" dirty="0"/>
           </a:p>
@@ -10811,6 +11126,13 @@
           </a:solidFill>
           <a:ln/>
         </p:spPr>
+        <p:txBody>
+          <a:bodyPr/>
+          <a:lstStyle/>
+          <a:p>
+            <a:endParaRPr lang="en-US"/>
+          </a:p>
+        </p:txBody>
       </p:sp>
       <p:sp>
         <p:nvSpPr>
@@ -10833,7 +11155,7 @@
           <a:bodyPr wrap="square" lIns="0" tIns="0" rIns="0" bIns="0" rtlCol="0" anchor="ctr"/>
           <a:lstStyle/>
           <a:p>
-            <a:pPr indent="0" marL="0">
+            <a:pPr marL="0" indent="0">
               <a:lnSpc>
                 <a:spcPct val="110000"/>
               </a:lnSpc>
@@ -10850,13 +11172,87 @@
               </a:rPr>
               <a:t>Argon2id  </a:t>
             </a:r>
-            <a:pPr indent="0" marL="0">
+            <a:r>
+              <a:rPr lang="en-US" sz="1200" dirty="0">
+                <a:solidFill>
+                  <a:srgbClr val="5B6485"/>
+                </a:solidFill>
+                <a:latin typeface="Calibri" pitchFamily="34" charset="0"/>
+                <a:ea typeface="Calibri" pitchFamily="34" charset="-122"/>
+                <a:cs typeface="Calibri" pitchFamily="34" charset="-120"/>
+              </a:rPr>
+              <a:t>deriva la semilla maestra desde password + salt</a:t>
+            </a:r>
+            <a:endParaRPr lang="en-US" sz="1200" dirty="0"/>
+          </a:p>
+        </p:txBody>
+      </p:sp>
+      <p:sp>
+        <p:nvSpPr>
+          <p:cNvPr id="11" name="Shape 8"/>
+          <p:cNvSpPr/>
+          <p:nvPr/>
+        </p:nvSpPr>
+        <p:spPr>
+          <a:xfrm>
+            <a:off x="868680" y="4398264"/>
+            <a:ext cx="109728" cy="109728"/>
+          </a:xfrm>
+          <a:prstGeom prst="ellipse">
+            <a:avLst/>
+          </a:prstGeom>
+          <a:solidFill>
+            <a:srgbClr val="17B8A6"/>
+          </a:solidFill>
+          <a:ln/>
+        </p:spPr>
+        <p:txBody>
+          <a:bodyPr/>
+          <a:lstStyle/>
+          <a:p>
+            <a:endParaRPr lang="en-US"/>
+          </a:p>
+        </p:txBody>
+      </p:sp>
+      <p:sp>
+        <p:nvSpPr>
+          <p:cNvPr id="12" name="Text 9"/>
+          <p:cNvSpPr txBox="1"/>
+          <p:nvPr/>
+        </p:nvSpPr>
+        <p:spPr>
+          <a:xfrm>
+            <a:off x="1097280" y="4270248"/>
+            <a:ext cx="3429000" cy="502920"/>
+          </a:xfrm>
+          <a:prstGeom prst="rect">
+            <a:avLst/>
+          </a:prstGeom>
+          <a:noFill/>
+          <a:ln/>
+        </p:spPr>
+        <p:txBody>
+          <a:bodyPr wrap="square" lIns="0" tIns="0" rIns="0" bIns="0" rtlCol="0" anchor="ctr"/>
+          <a:lstStyle/>
+          <a:p>
+            <a:pPr marL="0" indent="0">
               <a:lnSpc>
                 <a:spcPct val="110000"/>
               </a:lnSpc>
               <a:buNone/>
             </a:pPr>
             <a:r>
+              <a:rPr lang="en-US" sz="1200" b="1" dirty="0">
+                <a:solidFill>
+                  <a:srgbClr val="15213E"/>
+                </a:solidFill>
+                <a:latin typeface="Calibri" pitchFamily="34" charset="0"/>
+                <a:ea typeface="Calibri" pitchFamily="34" charset="-122"/>
+                <a:cs typeface="Calibri" pitchFamily="34" charset="-120"/>
+              </a:rPr>
+              <a:t>AES-256-GCM  </a:t>
+            </a:r>
+            <a:r>
               <a:rPr lang="en-US" sz="1200" dirty="0">
                 <a:solidFill>
                   <a:srgbClr val="5B6485"/>
@@ -10865,7 +11261,7 @@
                 <a:ea typeface="Calibri" pitchFamily="34" charset="-122"/>
                 <a:cs typeface="Calibri" pitchFamily="34" charset="-120"/>
               </a:rPr>
-              <a:t>deriva la semilla maestra desde password + salt</a:t>
+              <a:t>cifra contenido clínico</a:t>
             </a:r>
             <a:endParaRPr lang="en-US" sz="1200" dirty="0"/>
           </a:p>
@@ -10873,13 +11269,13 @@
       </p:sp>
       <p:sp>
         <p:nvSpPr>
-          <p:cNvPr id="11" name="Shape 8"/>
+          <p:cNvPr id="13" name="Shape 10"/>
           <p:cNvSpPr/>
           <p:nvPr/>
         </p:nvSpPr>
         <p:spPr>
           <a:xfrm>
-            <a:off x="868680" y="4398264"/>
+            <a:off x="868680" y="4992624"/>
             <a:ext cx="109728" cy="109728"/>
           </a:xfrm>
           <a:prstGeom prst="ellipse">
@@ -10890,16 +11286,23 @@
           </a:solidFill>
           <a:ln/>
         </p:spPr>
-      </p:sp>
-      <p:sp>
-        <p:nvSpPr>
-          <p:cNvPr id="12" name="Text 9"/>
-          <p:cNvSpPr txBox="1"/>
-          <p:nvPr/>
-        </p:nvSpPr>
-        <p:spPr>
-          <a:xfrm>
-            <a:off x="1097280" y="4270248"/>
+        <p:txBody>
+          <a:bodyPr/>
+          <a:lstStyle/>
+          <a:p>
+            <a:endParaRPr lang="en-US"/>
+          </a:p>
+        </p:txBody>
+      </p:sp>
+      <p:sp>
+        <p:nvSpPr>
+          <p:cNvPr id="14" name="Text 11"/>
+          <p:cNvSpPr txBox="1"/>
+          <p:nvPr/>
+        </p:nvSpPr>
+        <p:spPr>
+          <a:xfrm>
+            <a:off x="1097280" y="4864608"/>
             <a:ext cx="3429000" cy="502920"/>
           </a:xfrm>
           <a:prstGeom prst="rect">
@@ -10912,7 +11315,7 @@
           <a:bodyPr wrap="square" lIns="0" tIns="0" rIns="0" bIns="0" rtlCol="0" anchor="ctr"/>
           <a:lstStyle/>
           <a:p>
-            <a:pPr indent="0" marL="0">
+            <a:pPr marL="0" indent="0">
               <a:lnSpc>
                 <a:spcPct val="110000"/>
               </a:lnSpc>
@@ -10927,77 +11330,78 @@
                 <a:ea typeface="Calibri" pitchFamily="34" charset="-122"/>
                 <a:cs typeface="Calibri" pitchFamily="34" charset="-120"/>
               </a:rPr>
-              <a:t>AES-256-GCM  </a:t>
-            </a:r>
-            <a:pPr indent="0" marL="0">
+              <a:t>HMAC-SHA256  </a:t>
+            </a:r>
+            <a:r>
+              <a:rPr lang="en-US" sz="1200" dirty="0">
+                <a:solidFill>
+                  <a:srgbClr val="5B6485"/>
+                </a:solidFill>
+                <a:latin typeface="Calibri" pitchFamily="34" charset="0"/>
+                <a:ea typeface="Calibri" pitchFamily="34" charset="-122"/>
+                <a:cs typeface="Calibri" pitchFamily="34" charset="-120"/>
+              </a:rPr>
+              <a:t>genera trapdoors del índice SSE-2</a:t>
+            </a:r>
+            <a:endParaRPr lang="en-US" sz="1200" dirty="0"/>
+          </a:p>
+        </p:txBody>
+      </p:sp>
+      <p:sp>
+        <p:nvSpPr>
+          <p:cNvPr id="15" name="Shape 12"/>
+          <p:cNvSpPr/>
+          <p:nvPr/>
+        </p:nvSpPr>
+        <p:spPr>
+          <a:xfrm>
+            <a:off x="868680" y="5586984"/>
+            <a:ext cx="109728" cy="109728"/>
+          </a:xfrm>
+          <a:prstGeom prst="ellipse">
+            <a:avLst/>
+          </a:prstGeom>
+          <a:solidFill>
+            <a:srgbClr val="17B8A6"/>
+          </a:solidFill>
+          <a:ln/>
+        </p:spPr>
+        <p:txBody>
+          <a:bodyPr/>
+          <a:lstStyle/>
+          <a:p>
+            <a:endParaRPr lang="en-US"/>
+          </a:p>
+        </p:txBody>
+      </p:sp>
+      <p:sp>
+        <p:nvSpPr>
+          <p:cNvPr id="16" name="Text 13"/>
+          <p:cNvSpPr txBox="1"/>
+          <p:nvPr/>
+        </p:nvSpPr>
+        <p:spPr>
+          <a:xfrm>
+            <a:off x="1097280" y="5458968"/>
+            <a:ext cx="3429000" cy="502920"/>
+          </a:xfrm>
+          <a:prstGeom prst="rect">
+            <a:avLst/>
+          </a:prstGeom>
+          <a:noFill/>
+          <a:ln/>
+        </p:spPr>
+        <p:txBody>
+          <a:bodyPr wrap="square" lIns="0" tIns="0" rIns="0" bIns="0" rtlCol="0" anchor="ctr"/>
+          <a:lstStyle/>
+          <a:p>
+            <a:pPr marL="0" indent="0">
               <a:lnSpc>
                 <a:spcPct val="110000"/>
               </a:lnSpc>
               <a:buNone/>
             </a:pPr>
             <a:r>
-              <a:rPr lang="en-US" sz="1200" dirty="0">
-                <a:solidFill>
-                  <a:srgbClr val="5B6485"/>
-                </a:solidFill>
-                <a:latin typeface="Calibri" pitchFamily="34" charset="0"/>
-                <a:ea typeface="Calibri" pitchFamily="34" charset="-122"/>
-                <a:cs typeface="Calibri" pitchFamily="34" charset="-120"/>
-              </a:rPr>
-              <a:t>cifra contenido clínico</a:t>
-            </a:r>
-            <a:endParaRPr lang="en-US" sz="1200" dirty="0"/>
-          </a:p>
-        </p:txBody>
-      </p:sp>
-      <p:sp>
-        <p:nvSpPr>
-          <p:cNvPr id="13" name="Shape 10"/>
-          <p:cNvSpPr/>
-          <p:nvPr/>
-        </p:nvSpPr>
-        <p:spPr>
-          <a:xfrm>
-            <a:off x="868680" y="4992624"/>
-            <a:ext cx="109728" cy="109728"/>
-          </a:xfrm>
-          <a:prstGeom prst="ellipse">
-            <a:avLst/>
-          </a:prstGeom>
-          <a:solidFill>
-            <a:srgbClr val="17B8A6"/>
-          </a:solidFill>
-          <a:ln/>
-        </p:spPr>
-      </p:sp>
-      <p:sp>
-        <p:nvSpPr>
-          <p:cNvPr id="14" name="Text 11"/>
-          <p:cNvSpPr txBox="1"/>
-          <p:nvPr/>
-        </p:nvSpPr>
-        <p:spPr>
-          <a:xfrm>
-            <a:off x="1097280" y="4864608"/>
-            <a:ext cx="3429000" cy="502920"/>
-          </a:xfrm>
-          <a:prstGeom prst="rect">
-            <a:avLst/>
-          </a:prstGeom>
-          <a:noFill/>
-          <a:ln/>
-        </p:spPr>
-        <p:txBody>
-          <a:bodyPr wrap="square" lIns="0" tIns="0" rIns="0" bIns="0" rtlCol="0" anchor="ctr"/>
-          <a:lstStyle/>
-          <a:p>
-            <a:pPr indent="0" marL="0">
-              <a:lnSpc>
-                <a:spcPct val="110000"/>
-              </a:lnSpc>
-              <a:buNone/>
-            </a:pPr>
-            <a:r>
               <a:rPr lang="en-US" sz="1200" b="1" dirty="0">
                 <a:solidFill>
                   <a:srgbClr val="15213E"/>
@@ -11006,93 +11410,8 @@
                 <a:ea typeface="Calibri" pitchFamily="34" charset="-122"/>
                 <a:cs typeface="Calibri" pitchFamily="34" charset="-120"/>
               </a:rPr>
-              <a:t>HMAC-SHA256  </a:t>
-            </a:r>
-            <a:pPr indent="0" marL="0">
-              <a:lnSpc>
-                <a:spcPct val="110000"/>
-              </a:lnSpc>
-              <a:buNone/>
-            </a:pPr>
-            <a:r>
-              <a:rPr lang="en-US" sz="1200" dirty="0">
-                <a:solidFill>
-                  <a:srgbClr val="5B6485"/>
-                </a:solidFill>
-                <a:latin typeface="Calibri" pitchFamily="34" charset="0"/>
-                <a:ea typeface="Calibri" pitchFamily="34" charset="-122"/>
-                <a:cs typeface="Calibri" pitchFamily="34" charset="-120"/>
-              </a:rPr>
-              <a:t>genera trapdoors del índice SSE-2</a:t>
-            </a:r>
-            <a:endParaRPr lang="en-US" sz="1200" dirty="0"/>
-          </a:p>
-        </p:txBody>
-      </p:sp>
-      <p:sp>
-        <p:nvSpPr>
-          <p:cNvPr id="15" name="Shape 12"/>
-          <p:cNvSpPr/>
-          <p:nvPr/>
-        </p:nvSpPr>
-        <p:spPr>
-          <a:xfrm>
-            <a:off x="868680" y="5586984"/>
-            <a:ext cx="109728" cy="109728"/>
-          </a:xfrm>
-          <a:prstGeom prst="ellipse">
-            <a:avLst/>
-          </a:prstGeom>
-          <a:solidFill>
-            <a:srgbClr val="17B8A6"/>
-          </a:solidFill>
-          <a:ln/>
-        </p:spPr>
-      </p:sp>
-      <p:sp>
-        <p:nvSpPr>
-          <p:cNvPr id="16" name="Text 13"/>
-          <p:cNvSpPr txBox="1"/>
-          <p:nvPr/>
-        </p:nvSpPr>
-        <p:spPr>
-          <a:xfrm>
-            <a:off x="1097280" y="5458968"/>
-            <a:ext cx="3429000" cy="502920"/>
-          </a:xfrm>
-          <a:prstGeom prst="rect">
-            <a:avLst/>
-          </a:prstGeom>
-          <a:noFill/>
-          <a:ln/>
-        </p:spPr>
-        <p:txBody>
-          <a:bodyPr wrap="square" lIns="0" tIns="0" rIns="0" bIns="0" rtlCol="0" anchor="ctr"/>
-          <a:lstStyle/>
-          <a:p>
-            <a:pPr indent="0" marL="0">
-              <a:lnSpc>
-                <a:spcPct val="110000"/>
-              </a:lnSpc>
-              <a:buNone/>
-            </a:pPr>
-            <a:r>
-              <a:rPr lang="en-US" sz="1200" b="1" dirty="0">
-                <a:solidFill>
-                  <a:srgbClr val="15213E"/>
-                </a:solidFill>
-                <a:latin typeface="Calibri" pitchFamily="34" charset="0"/>
-                <a:ea typeface="Calibri" pitchFamily="34" charset="-122"/>
-                <a:cs typeface="Calibri" pitchFamily="34" charset="-120"/>
-              </a:rPr>
               <a:t>X25519 / Ed25519  </a:t>
             </a:r>
-            <a:pPr indent="0" marL="0">
-              <a:lnSpc>
-                <a:spcPct val="110000"/>
-              </a:lnSpc>
-              <a:buNone/>
-            </a:pPr>
             <a:r>
               <a:rPr lang="en-US" sz="1200" dirty="0">
                 <a:solidFill>
@@ -11134,6 +11453,13 @@
             <a:prstDash val="solid"/>
           </a:ln>
         </p:spPr>
+        <p:txBody>
+          <a:bodyPr/>
+          <a:lstStyle/>
+          <a:p>
+            <a:endParaRPr lang="en-US"/>
+          </a:p>
+        </p:txBody>
       </p:sp>
       <p:sp>
         <p:nvSpPr>
@@ -11156,7 +11482,7 @@
           <a:bodyPr wrap="square" lIns="0" tIns="0" rIns="0" bIns="0" rtlCol="0" anchor="ctr"/>
           <a:lstStyle/>
           <a:p>
-            <a:pPr indent="0" marL="0">
+            <a:pPr marL="0" indent="0">
               <a:buNone/>
             </a:pPr>
             <a:r>
@@ -11195,6 +11521,13 @@
           </a:solidFill>
           <a:ln/>
         </p:spPr>
+        <p:txBody>
+          <a:bodyPr/>
+          <a:lstStyle/>
+          <a:p>
+            <a:endParaRPr lang="en-US"/>
+          </a:p>
+        </p:txBody>
       </p:sp>
       <p:sp>
         <p:nvSpPr>
@@ -11217,7 +11550,7 @@
           <a:bodyPr wrap="square" lIns="0" tIns="0" rIns="0" bIns="0" rtlCol="0" anchor="ctr"/>
           <a:lstStyle/>
           <a:p>
-            <a:pPr algn="ctr" indent="0" marL="0">
+            <a:pPr marL="0" indent="0" algn="ctr">
               <a:buNone/>
             </a:pPr>
             <a:r>
@@ -11257,6 +11590,13 @@
             <a:prstDash val="solid"/>
           </a:ln>
         </p:spPr>
+        <p:txBody>
+          <a:bodyPr/>
+          <a:lstStyle/>
+          <a:p>
+            <a:endParaRPr lang="en-US"/>
+          </a:p>
+        </p:txBody>
       </p:sp>
       <p:sp>
         <p:nvSpPr>
@@ -11284,6 +11624,13 @@
             <a:prstDash val="solid"/>
           </a:ln>
         </p:spPr>
+        <p:txBody>
+          <a:bodyPr/>
+          <a:lstStyle/>
+          <a:p>
+            <a:endParaRPr lang="en-US"/>
+          </a:p>
+        </p:txBody>
       </p:sp>
       <p:sp>
         <p:nvSpPr>
@@ -11306,7 +11653,7 @@
           <a:bodyPr wrap="square" lIns="0" tIns="0" rIns="0" bIns="0" rtlCol="0" anchor="ctr"/>
           <a:lstStyle/>
           <a:p>
-            <a:pPr algn="ctr" indent="0" marL="0">
+            <a:pPr marL="0" indent="0" algn="ctr">
               <a:lnSpc>
                 <a:spcPct val="105000"/>
               </a:lnSpc>
@@ -11326,7 +11673,7 @@
             <a:endParaRPr lang="en-US" sz="1050" dirty="0"/>
           </a:p>
           <a:p>
-            <a:pPr algn="ctr" indent="0" marL="0">
+            <a:pPr marL="0" indent="0" algn="ctr">
               <a:lnSpc>
                 <a:spcPct val="105000"/>
               </a:lnSpc>
@@ -11369,6 +11716,13 @@
             <a:prstDash val="solid"/>
           </a:ln>
         </p:spPr>
+        <p:txBody>
+          <a:bodyPr/>
+          <a:lstStyle/>
+          <a:p>
+            <a:endParaRPr lang="en-US"/>
+          </a:p>
+        </p:txBody>
       </p:sp>
       <p:sp>
         <p:nvSpPr>
@@ -11396,6 +11750,13 @@
             <a:prstDash val="solid"/>
           </a:ln>
         </p:spPr>
+        <p:txBody>
+          <a:bodyPr/>
+          <a:lstStyle/>
+          <a:p>
+            <a:endParaRPr lang="en-US"/>
+          </a:p>
+        </p:txBody>
       </p:sp>
       <p:sp>
         <p:nvSpPr>
@@ -11418,7 +11779,7 @@
           <a:bodyPr wrap="square" lIns="0" tIns="0" rIns="0" bIns="0" rtlCol="0" anchor="ctr"/>
           <a:lstStyle/>
           <a:p>
-            <a:pPr algn="ctr" indent="0" marL="0">
+            <a:pPr marL="0" indent="0" algn="ctr">
               <a:lnSpc>
                 <a:spcPct val="105000"/>
               </a:lnSpc>
@@ -11438,7 +11799,7 @@
             <a:endParaRPr lang="en-US" sz="1050" dirty="0"/>
           </a:p>
           <a:p>
-            <a:pPr algn="ctr" indent="0" marL="0">
+            <a:pPr marL="0" indent="0" algn="ctr">
               <a:lnSpc>
                 <a:spcPct val="105000"/>
               </a:lnSpc>
@@ -11481,6 +11842,13 @@
             <a:prstDash val="solid"/>
           </a:ln>
         </p:spPr>
+        <p:txBody>
+          <a:bodyPr/>
+          <a:lstStyle/>
+          <a:p>
+            <a:endParaRPr lang="en-US"/>
+          </a:p>
+        </p:txBody>
       </p:sp>
       <p:sp>
         <p:nvSpPr>
@@ -11508,6 +11876,13 @@
             <a:prstDash val="solid"/>
           </a:ln>
         </p:spPr>
+        <p:txBody>
+          <a:bodyPr/>
+          <a:lstStyle/>
+          <a:p>
+            <a:endParaRPr lang="en-US"/>
+          </a:p>
+        </p:txBody>
       </p:sp>
       <p:sp>
         <p:nvSpPr>
@@ -11530,7 +11905,7 @@
           <a:bodyPr wrap="square" lIns="0" tIns="0" rIns="0" bIns="0" rtlCol="0" anchor="ctr"/>
           <a:lstStyle/>
           <a:p>
-            <a:pPr algn="ctr" indent="0" marL="0">
+            <a:pPr marL="0" indent="0" algn="ctr">
               <a:lnSpc>
                 <a:spcPct val="105000"/>
               </a:lnSpc>
@@ -11550,7 +11925,7 @@
             <a:endParaRPr lang="en-US" sz="1050" dirty="0"/>
           </a:p>
           <a:p>
-            <a:pPr algn="ctr" indent="0" marL="0">
+            <a:pPr marL="0" indent="0" algn="ctr">
               <a:lnSpc>
                 <a:spcPct val="105000"/>
               </a:lnSpc>
@@ -11593,6 +11968,13 @@
             <a:prstDash val="solid"/>
           </a:ln>
         </p:spPr>
+        <p:txBody>
+          <a:bodyPr/>
+          <a:lstStyle/>
+          <a:p>
+            <a:endParaRPr lang="en-US"/>
+          </a:p>
+        </p:txBody>
       </p:sp>
       <p:sp>
         <p:nvSpPr>
@@ -11620,6 +12002,13 @@
             <a:prstDash val="solid"/>
           </a:ln>
         </p:spPr>
+        <p:txBody>
+          <a:bodyPr/>
+          <a:lstStyle/>
+          <a:p>
+            <a:endParaRPr lang="en-US"/>
+          </a:p>
+        </p:txBody>
       </p:sp>
       <p:sp>
         <p:nvSpPr>
@@ -11642,7 +12031,7 @@
           <a:bodyPr wrap="square" lIns="0" tIns="0" rIns="0" bIns="0" rtlCol="0" anchor="ctr"/>
           <a:lstStyle/>
           <a:p>
-            <a:pPr algn="ctr" indent="0" marL="0">
+            <a:pPr marL="0" indent="0" algn="ctr">
               <a:lnSpc>
                 <a:spcPct val="105000"/>
               </a:lnSpc>
@@ -11662,7 +12051,7 @@
             <a:endParaRPr lang="en-US" sz="1050" dirty="0"/>
           </a:p>
           <a:p>
-            <a:pPr algn="ctr" indent="0" marL="0">
+            <a:pPr marL="0" indent="0" algn="ctr">
               <a:lnSpc>
                 <a:spcPct val="105000"/>
               </a:lnSpc>
@@ -11704,7 +12093,7 @@
           <a:bodyPr wrap="square" lIns="0" tIns="0" rIns="0" bIns="0" rtlCol="0" anchor="ctr"/>
           <a:lstStyle/>
           <a:p>
-            <a:pPr indent="0" marL="0">
+            <a:pPr marL="0" indent="0">
               <a:lnSpc>
                 <a:spcPct val="115000"/>
               </a:lnSpc>
@@ -11746,7 +12135,7 @@
           <a:bodyPr wrap="square" rtlCol="0" anchor="ctr"/>
           <a:lstStyle/>
           <a:p>
-            <a:pPr algn="l" indent="0" marL="0">
+            <a:pPr marL="0" indent="0" algn="l">
               <a:buNone/>
             </a:pPr>
             <a:r>
@@ -11785,7 +12174,7 @@
           <a:bodyPr wrap="square" rtlCol="0" anchor="ctr"/>
           <a:lstStyle/>
           <a:p>
-            <a:pPr algn="r" indent="0" marL="0">
+            <a:pPr marL="0" indent="0" algn="r">
               <a:buNone/>
             </a:pPr>
             <a:r>
@@ -11849,11 +12238,11 @@
           <a:bodyPr wrap="square" lIns="0" tIns="0" rIns="0" bIns="0" rtlCol="0" anchor="ctr"/>
           <a:lstStyle/>
           <a:p>
-            <a:pPr indent="0" marL="0">
-              <a:buNone/>
-            </a:pPr>
-            <a:r>
-              <a:rPr lang="en-US" sz="1250" b="1" spc="200" kern="0" dirty="0">
+            <a:pPr marL="0" indent="0">
+              <a:buNone/>
+            </a:pPr>
+            <a:r>
+              <a:rPr lang="en-US" sz="1250" b="1" kern="0" spc="200" dirty="0">
                 <a:solidFill>
                   <a:srgbClr val="6C6FD9"/>
                 </a:solidFill>
@@ -11888,7 +12277,7 @@
           <a:bodyPr wrap="square" lIns="0" tIns="0" rIns="0" bIns="0" rtlCol="0" anchor="ctr"/>
           <a:lstStyle/>
           <a:p>
-            <a:pPr indent="0" marL="0">
+            <a:pPr marL="0" indent="0">
               <a:buNone/>
             </a:pPr>
             <a:r>
@@ -11900,7 +12289,29 @@
                 <a:ea typeface="Cambria" pitchFamily="34" charset="-122"/>
                 <a:cs typeface="Cambria" pitchFamily="34" charset="-120"/>
               </a:rPr>
-              <a:t>Así lo hace OSA, en el navegador</a:t>
+              <a:t>Así lo </a:t>
+            </a:r>
+            <a:r>
+              <a:rPr lang="en-US" sz="3200" b="1" dirty="0" err="1">
+                <a:solidFill>
+                  <a:srgbClr val="15213E"/>
+                </a:solidFill>
+                <a:latin typeface="Cambria" pitchFamily="34" charset="0"/>
+                <a:ea typeface="Cambria" pitchFamily="34" charset="-122"/>
+                <a:cs typeface="Cambria" pitchFamily="34" charset="-120"/>
+              </a:rPr>
+              <a:t>hace</a:t>
+            </a:r>
+            <a:r>
+              <a:rPr lang="en-US" sz="3200" b="1" dirty="0">
+                <a:solidFill>
+                  <a:srgbClr val="15213E"/>
+                </a:solidFill>
+                <a:latin typeface="Cambria" pitchFamily="34" charset="0"/>
+                <a:ea typeface="Cambria" pitchFamily="34" charset="-122"/>
+                <a:cs typeface="Cambria" pitchFamily="34" charset="-120"/>
+              </a:rPr>
+              <a:t> en el navegador</a:t>
             </a:r>
             <a:endParaRPr lang="en-US" sz="3200" dirty="0"/>
           </a:p>
@@ -11932,13 +12343,20 @@
             <a:prstDash val="solid"/>
           </a:ln>
           <a:effectLst>
-            <a:outerShdw sx="100000" sy="100000" kx="0" ky="0" algn="bl" rotWithShape="0" blurRad="101600" dist="38100" dir="5400000">
+            <a:outerShdw blurRad="101600" dist="38100" dir="5400000" algn="bl" rotWithShape="0">
               <a:srgbClr val="1B2340">
                 <a:alpha val="12000"/>
               </a:srgbClr>
             </a:outerShdw>
           </a:effectLst>
         </p:spPr>
+        <p:txBody>
+          <a:bodyPr/>
+          <a:lstStyle/>
+          <a:p>
+            <a:endParaRPr lang="en-US"/>
+          </a:p>
+        </p:txBody>
       </p:sp>
       <p:sp>
         <p:nvSpPr>
@@ -11959,17 +12377,24 @@
           </a:solidFill>
           <a:ln/>
         </p:spPr>
+        <p:txBody>
+          <a:bodyPr/>
+          <a:lstStyle/>
+          <a:p>
+            <a:endParaRPr lang="en-US"/>
+          </a:p>
+        </p:txBody>
       </p:sp>
       <p:pic>
         <p:nvPicPr>
-          <p:cNvPr id="6" name="Image 0" descr="/tmp/osa_pres/icons/key_teal.png">    </p:cNvPr>
+          <p:cNvPr id="6" name="Image 0" descr="/tmp/osa_pres/icons/key_teal.png"/>
           <p:cNvPicPr>
             <a:picLocks noChangeAspect="1"/>
           </p:cNvPicPr>
           <p:nvPr/>
         </p:nvPicPr>
         <p:blipFill>
-          <a:blip r:embed="rId1"/>
+          <a:blip r:embed="rId3"/>
           <a:stretch>
             <a:fillRect/>
           </a:stretch>
@@ -12005,7 +12430,7 @@
           <a:bodyPr wrap="square" lIns="0" tIns="0" rIns="0" bIns="0" rtlCol="0" anchor="ctr"/>
           <a:lstStyle/>
           <a:p>
-            <a:pPr indent="0" marL="0">
+            <a:pPr marL="0" indent="0">
               <a:lnSpc>
                 <a:spcPct val="105000"/>
               </a:lnSpc>
@@ -12025,7 +12450,7 @@
             <a:endParaRPr lang="en-US" sz="1150" dirty="0"/>
           </a:p>
           <a:p>
-            <a:pPr indent="0" marL="0">
+            <a:pPr marL="0" indent="0">
               <a:lnSpc>
                 <a:spcPct val="105000"/>
               </a:lnSpc>
@@ -12067,7 +12492,7 @@
           <a:bodyPr wrap="square" lIns="0" tIns="0" rIns="0" bIns="0" rtlCol="0" anchor="ctr"/>
           <a:lstStyle/>
           <a:p>
-            <a:pPr algn="ctr" indent="0" marL="0">
+            <a:pPr marL="0" indent="0" algn="ctr">
               <a:buNone/>
             </a:pPr>
             <a:r>
@@ -12108,13 +12533,20 @@
             <a:prstDash val="solid"/>
           </a:ln>
           <a:effectLst>
-            <a:outerShdw sx="100000" sy="100000" kx="0" ky="0" algn="bl" rotWithShape="0" blurRad="101600" dist="38100" dir="5400000">
+            <a:outerShdw blurRad="101600" dist="38100" dir="5400000" algn="bl" rotWithShape="0">
               <a:srgbClr val="1B2340">
                 <a:alpha val="12000"/>
               </a:srgbClr>
             </a:outerShdw>
           </a:effectLst>
         </p:spPr>
+        <p:txBody>
+          <a:bodyPr/>
+          <a:lstStyle/>
+          <a:p>
+            <a:endParaRPr lang="en-US"/>
+          </a:p>
+        </p:txBody>
       </p:sp>
       <p:sp>
         <p:nvSpPr>
@@ -12135,17 +12567,24 @@
           </a:solidFill>
           <a:ln/>
         </p:spPr>
+        <p:txBody>
+          <a:bodyPr/>
+          <a:lstStyle/>
+          <a:p>
+            <a:endParaRPr lang="en-US"/>
+          </a:p>
+        </p:txBody>
       </p:sp>
       <p:pic>
         <p:nvPicPr>
-          <p:cNvPr id="11" name="Image 1" descr="/tmp/osa_pres/icons/exchange_navy.png">    </p:cNvPr>
+          <p:cNvPr id="11" name="Image 1" descr="/tmp/osa_pres/icons/exchange_navy.png"/>
           <p:cNvPicPr>
             <a:picLocks noChangeAspect="1"/>
           </p:cNvPicPr>
           <p:nvPr/>
         </p:nvPicPr>
         <p:blipFill>
-          <a:blip r:embed="rId2"/>
+          <a:blip r:embed="rId4"/>
           <a:stretch>
             <a:fillRect/>
           </a:stretch>
@@ -12181,7 +12620,7 @@
           <a:bodyPr wrap="square" lIns="0" tIns="0" rIns="0" bIns="0" rtlCol="0" anchor="ctr"/>
           <a:lstStyle/>
           <a:p>
-            <a:pPr indent="0" marL="0">
+            <a:pPr marL="0" indent="0">
               <a:lnSpc>
                 <a:spcPct val="105000"/>
               </a:lnSpc>
@@ -12201,7 +12640,7 @@
             <a:endParaRPr lang="en-US" sz="1150" dirty="0"/>
           </a:p>
           <a:p>
-            <a:pPr indent="0" marL="0">
+            <a:pPr marL="0" indent="0">
               <a:lnSpc>
                 <a:spcPct val="105000"/>
               </a:lnSpc>
@@ -12243,7 +12682,7 @@
           <a:bodyPr wrap="square" lIns="0" tIns="0" rIns="0" bIns="0" rtlCol="0" anchor="ctr"/>
           <a:lstStyle/>
           <a:p>
-            <a:pPr algn="ctr" indent="0" marL="0">
+            <a:pPr marL="0" indent="0" algn="ctr">
               <a:buNone/>
             </a:pPr>
             <a:r>
@@ -12284,13 +12723,20 @@
             <a:prstDash val="solid"/>
           </a:ln>
           <a:effectLst>
-            <a:outerShdw sx="100000" sy="100000" kx="0" ky="0" algn="bl" rotWithShape="0" blurRad="101600" dist="38100" dir="5400000">
+            <a:outerShdw blurRad="101600" dist="38100" dir="5400000" algn="bl" rotWithShape="0">
               <a:srgbClr val="1B2340">
                 <a:alpha val="12000"/>
               </a:srgbClr>
             </a:outerShdw>
           </a:effectLst>
         </p:spPr>
+        <p:txBody>
+          <a:bodyPr/>
+          <a:lstStyle/>
+          <a:p>
+            <a:endParaRPr lang="en-US"/>
+          </a:p>
+        </p:txBody>
       </p:sp>
       <p:sp>
         <p:nvSpPr>
@@ -12311,17 +12757,24 @@
           </a:solidFill>
           <a:ln/>
         </p:spPr>
+        <p:txBody>
+          <a:bodyPr/>
+          <a:lstStyle/>
+          <a:p>
+            <a:endParaRPr lang="en-US"/>
+          </a:p>
+        </p:txBody>
       </p:sp>
       <p:pic>
         <p:nvPicPr>
-          <p:cNvPr id="16" name="Image 2" descr="/tmp/osa_pres/icons/unlock_teal.png">    </p:cNvPr>
+          <p:cNvPr id="16" name="Image 2" descr="/tmp/osa_pres/icons/unlock_teal.png"/>
           <p:cNvPicPr>
             <a:picLocks noChangeAspect="1"/>
           </p:cNvPicPr>
           <p:nvPr/>
         </p:nvPicPr>
         <p:blipFill>
-          <a:blip r:embed="rId3"/>
+          <a:blip r:embed="rId5"/>
           <a:stretch>
             <a:fillRect/>
           </a:stretch>
@@ -12357,7 +12810,7 @@
           <a:bodyPr wrap="square" lIns="0" tIns="0" rIns="0" bIns="0" rtlCol="0" anchor="ctr"/>
           <a:lstStyle/>
           <a:p>
-            <a:pPr indent="0" marL="0">
+            <a:pPr marL="0" indent="0">
               <a:lnSpc>
                 <a:spcPct val="105000"/>
               </a:lnSpc>
@@ -12377,7 +12830,7 @@
             <a:endParaRPr lang="en-US" sz="1150" dirty="0"/>
           </a:p>
           <a:p>
-            <a:pPr indent="0" marL="0">
+            <a:pPr marL="0" indent="0">
               <a:lnSpc>
                 <a:spcPct val="105000"/>
               </a:lnSpc>
@@ -12419,7 +12872,7 @@
           <a:bodyPr wrap="square" lIns="0" tIns="0" rIns="0" bIns="0" rtlCol="0" anchor="ctr"/>
           <a:lstStyle/>
           <a:p>
-            <a:pPr algn="ctr" indent="0" marL="0">
+            <a:pPr marL="0" indent="0" algn="ctr">
               <a:buNone/>
             </a:pPr>
             <a:r>
@@ -12460,13 +12913,20 @@
             <a:prstDash val="solid"/>
           </a:ln>
           <a:effectLst>
-            <a:outerShdw sx="100000" sy="100000" kx="0" ky="0" algn="bl" rotWithShape="0" blurRad="101600" dist="38100" dir="5400000">
+            <a:outerShdw blurRad="101600" dist="38100" dir="5400000" algn="bl" rotWithShape="0">
               <a:srgbClr val="1B2340">
                 <a:alpha val="12000"/>
               </a:srgbClr>
             </a:outerShdw>
           </a:effectLst>
         </p:spPr>
+        <p:txBody>
+          <a:bodyPr/>
+          <a:lstStyle/>
+          <a:p>
+            <a:endParaRPr lang="en-US"/>
+          </a:p>
+        </p:txBody>
       </p:sp>
       <p:sp>
         <p:nvSpPr>
@@ -12487,17 +12947,24 @@
           </a:solidFill>
           <a:ln/>
         </p:spPr>
+        <p:txBody>
+          <a:bodyPr/>
+          <a:lstStyle/>
+          <a:p>
+            <a:endParaRPr lang="en-US"/>
+          </a:p>
+        </p:txBody>
       </p:sp>
       <p:pic>
         <p:nvPicPr>
-          <p:cNvPr id="21" name="Image 3" descr="/tmp/osa_pres/icons/lock_navy.png">    </p:cNvPr>
+          <p:cNvPr id="21" name="Image 3" descr="/tmp/osa_pres/icons/lock_navy.png"/>
           <p:cNvPicPr>
             <a:picLocks noChangeAspect="1"/>
           </p:cNvPicPr>
           <p:nvPr/>
         </p:nvPicPr>
         <p:blipFill>
-          <a:blip r:embed="rId4"/>
+          <a:blip r:embed="rId6"/>
           <a:stretch>
             <a:fillRect/>
           </a:stretch>
@@ -12533,7 +13000,7 @@
           <a:bodyPr wrap="square" lIns="0" tIns="0" rIns="0" bIns="0" rtlCol="0" anchor="ctr"/>
           <a:lstStyle/>
           <a:p>
-            <a:pPr indent="0" marL="0">
+            <a:pPr marL="0" indent="0">
               <a:lnSpc>
                 <a:spcPct val="105000"/>
               </a:lnSpc>
@@ -12553,7 +13020,7 @@
             <a:endParaRPr lang="en-US" sz="1150" dirty="0"/>
           </a:p>
           <a:p>
-            <a:pPr indent="0" marL="0">
+            <a:pPr marL="0" indent="0">
               <a:lnSpc>
                 <a:spcPct val="105000"/>
               </a:lnSpc>
@@ -12595,7 +13062,7 @@
           <a:bodyPr wrap="square" lIns="0" tIns="0" rIns="0" bIns="0" rtlCol="0" anchor="ctr"/>
           <a:lstStyle/>
           <a:p>
-            <a:pPr algn="ctr" indent="0" marL="0">
+            <a:pPr marL="0" indent="0" algn="ctr">
               <a:buNone/>
             </a:pPr>
             <a:r>
@@ -12639,6 +13106,13 @@
             <a:prstDash val="solid"/>
           </a:ln>
         </p:spPr>
+        <p:txBody>
+          <a:bodyPr/>
+          <a:lstStyle/>
+          <a:p>
+            <a:endParaRPr lang="en-US"/>
+          </a:p>
+        </p:txBody>
       </p:sp>
       <p:sp>
         <p:nvSpPr>
@@ -12661,7 +13135,7 @@
           <a:bodyPr wrap="square" lIns="0" tIns="0" rIns="0" bIns="0" rtlCol="0" anchor="ctr"/>
           <a:lstStyle/>
           <a:p>
-            <a:pPr indent="0" marL="0">
+            <a:pPr marL="0" indent="0">
               <a:buNone/>
             </a:pPr>
             <a:r>
@@ -12698,6 +13172,13 @@
           </a:solidFill>
           <a:ln/>
         </p:spPr>
+        <p:txBody>
+          <a:bodyPr/>
+          <a:lstStyle/>
+          <a:p>
+            <a:endParaRPr lang="en-US"/>
+          </a:p>
+        </p:txBody>
       </p:sp>
       <p:sp>
         <p:nvSpPr>
@@ -12720,7 +13201,7 @@
           <a:bodyPr wrap="square" lIns="0" tIns="0" rIns="0" bIns="0" rtlCol="0" anchor="ctr"/>
           <a:lstStyle/>
           <a:p>
-            <a:pPr algn="ctr" indent="0" marL="0">
+            <a:pPr marL="0" indent="0" algn="ctr">
               <a:buNone/>
             </a:pPr>
             <a:r>
@@ -12759,7 +13240,7 @@
           <a:bodyPr wrap="square" lIns="0" tIns="0" rIns="0" bIns="0" rtlCol="0" anchor="ctr"/>
           <a:lstStyle/>
           <a:p>
-            <a:pPr indent="0" marL="0">
+            <a:pPr marL="0" indent="0">
               <a:lnSpc>
                 <a:spcPct val="110000"/>
               </a:lnSpc>
@@ -12799,6 +13280,13 @@
           </a:solidFill>
           <a:ln/>
         </p:spPr>
+        <p:txBody>
+          <a:bodyPr/>
+          <a:lstStyle/>
+          <a:p>
+            <a:endParaRPr lang="en-US"/>
+          </a:p>
+        </p:txBody>
       </p:sp>
       <p:sp>
         <p:nvSpPr>
@@ -12821,7 +13309,7 @@
           <a:bodyPr wrap="square" lIns="0" tIns="0" rIns="0" bIns="0" rtlCol="0" anchor="ctr"/>
           <a:lstStyle/>
           <a:p>
-            <a:pPr algn="ctr" indent="0" marL="0">
+            <a:pPr marL="0" indent="0" algn="ctr">
               <a:buNone/>
             </a:pPr>
             <a:r>
@@ -12860,7 +13348,7 @@
           <a:bodyPr wrap="square" lIns="0" tIns="0" rIns="0" bIns="0" rtlCol="0" anchor="ctr"/>
           <a:lstStyle/>
           <a:p>
-            <a:pPr indent="0" marL="0">
+            <a:pPr marL="0" indent="0">
               <a:lnSpc>
                 <a:spcPct val="110000"/>
               </a:lnSpc>
@@ -12900,6 +13388,13 @@
           </a:solidFill>
           <a:ln/>
         </p:spPr>
+        <p:txBody>
+          <a:bodyPr/>
+          <a:lstStyle/>
+          <a:p>
+            <a:endParaRPr lang="en-US"/>
+          </a:p>
+        </p:txBody>
       </p:sp>
       <p:sp>
         <p:nvSpPr>
@@ -12922,7 +13417,7 @@
           <a:bodyPr wrap="square" lIns="0" tIns="0" rIns="0" bIns="0" rtlCol="0" anchor="ctr"/>
           <a:lstStyle/>
           <a:p>
-            <a:pPr algn="ctr" indent="0" marL="0">
+            <a:pPr marL="0" indent="0" algn="ctr">
               <a:buNone/>
             </a:pPr>
             <a:r>
@@ -12961,7 +13456,7 @@
           <a:bodyPr wrap="square" lIns="0" tIns="0" rIns="0" bIns="0" rtlCol="0" anchor="ctr"/>
           <a:lstStyle/>
           <a:p>
-            <a:pPr indent="0" marL="0">
+            <a:pPr marL="0" indent="0">
               <a:lnSpc>
                 <a:spcPct val="110000"/>
               </a:lnSpc>
@@ -13001,6 +13496,13 @@
           </a:solidFill>
           <a:ln/>
         </p:spPr>
+        <p:txBody>
+          <a:bodyPr/>
+          <a:lstStyle/>
+          <a:p>
+            <a:endParaRPr lang="en-US"/>
+          </a:p>
+        </p:txBody>
       </p:sp>
       <p:sp>
         <p:nvSpPr>
@@ -13023,7 +13525,7 @@
           <a:bodyPr wrap="square" lIns="0" tIns="0" rIns="0" bIns="0" rtlCol="0" anchor="ctr"/>
           <a:lstStyle/>
           <a:p>
-            <a:pPr algn="ctr" indent="0" marL="0">
+            <a:pPr marL="0" indent="0" algn="ctr">
               <a:buNone/>
             </a:pPr>
             <a:r>
@@ -13062,7 +13564,7 @@
           <a:bodyPr wrap="square" lIns="0" tIns="0" rIns="0" bIns="0" rtlCol="0" anchor="ctr"/>
           <a:lstStyle/>
           <a:p>
-            <a:pPr indent="0" marL="0">
+            <a:pPr marL="0" indent="0">
               <a:lnSpc>
                 <a:spcPct val="110000"/>
               </a:lnSpc>
@@ -13109,13 +13611,20 @@
             <a:prstDash val="solid"/>
           </a:ln>
           <a:effectLst>
-            <a:outerShdw sx="100000" sy="100000" kx="0" ky="0" algn="bl" rotWithShape="0" blurRad="101600" dist="38100" dir="5400000">
+            <a:outerShdw blurRad="101600" dist="38100" dir="5400000" algn="bl" rotWithShape="0">
               <a:srgbClr val="1B2340">
                 <a:alpha val="12000"/>
               </a:srgbClr>
             </a:outerShdw>
           </a:effectLst>
         </p:spPr>
+        <p:txBody>
+          <a:bodyPr/>
+          <a:lstStyle/>
+          <a:p>
+            <a:endParaRPr lang="en-US"/>
+          </a:p>
+        </p:txBody>
       </p:sp>
       <p:sp>
         <p:nvSpPr>
@@ -13138,7 +13647,7 @@
           <a:bodyPr wrap="square" lIns="0" tIns="0" rIns="0" bIns="0" rtlCol="0" anchor="ctr"/>
           <a:lstStyle/>
           <a:p>
-            <a:pPr indent="0" marL="0">
+            <a:pPr marL="0" indent="0">
               <a:lnSpc>
                 <a:spcPct val="110000"/>
               </a:lnSpc>
@@ -13180,7 +13689,7 @@
           <a:bodyPr wrap="square" lIns="0" tIns="0" rIns="0" bIns="0" rtlCol="0" anchor="ctr"/>
           <a:lstStyle/>
           <a:p>
-            <a:pPr indent="0" marL="0">
+            <a:pPr marL="0" indent="0">
               <a:lnSpc>
                 <a:spcPct val="125000"/>
               </a:lnSpc>
@@ -13203,45 +13712,6 @@
       </p:sp>
       <p:sp>
         <p:nvSpPr>
-          <p:cNvPr id="41" name="Text 35"/>
-          <p:cNvSpPr/>
-          <p:nvPr/>
-        </p:nvSpPr>
-        <p:spPr>
-          <a:xfrm>
-            <a:off x="548640" y="6437376"/>
-            <a:ext cx="7315200" cy="274320"/>
-          </a:xfrm>
-          <a:prstGeom prst="rect">
-            <a:avLst/>
-          </a:prstGeom>
-          <a:noFill/>
-          <a:ln/>
-        </p:spPr>
-        <p:txBody>
-          <a:bodyPr wrap="square" rtlCol="0" anchor="ctr"/>
-          <a:lstStyle/>
-          <a:p>
-            <a:pPr algn="l" indent="0" marL="0">
-              <a:buNone/>
-            </a:pPr>
-            <a:r>
-              <a:rPr lang="en-US" sz="1050" dirty="0">
-                <a:solidFill>
-                  <a:srgbClr val="5B6485"/>
-                </a:solidFill>
-                <a:latin typeface="Calibri" pitchFamily="34" charset="0"/>
-                <a:ea typeface="Calibri" pitchFamily="34" charset="-122"/>
-                <a:cs typeface="Calibri" pitchFamily="34" charset="-120"/>
-              </a:rPr>
-              <a:t>Criptografía Avanzada — SSE asimétrico</a:t>
-            </a:r>
-            <a:endParaRPr lang="en-US" sz="1050" dirty="0"/>
-          </a:p>
-        </p:txBody>
-      </p:sp>
-      <p:sp>
-        <p:nvSpPr>
           <p:cNvPr id="42" name="Text 36"/>
           <p:cNvSpPr/>
           <p:nvPr/>
@@ -13261,7 +13731,7 @@
           <a:bodyPr wrap="square" rtlCol="0" anchor="ctr"/>
           <a:lstStyle/>
           <a:p>
-            <a:pPr algn="r" indent="0" marL="0">
+            <a:pPr marL="0" indent="0" algn="r">
               <a:buNone/>
             </a:pPr>
             <a:r>
@@ -13580,4 +14050,319 @@
     </a:ext>
   </a:extLst>
 </a:theme>
+</file>
+
+<file path=ppt/theme/theme2.xml><?xml version="1.0" encoding="utf-8"?>
+<a:theme xmlns:a="http://schemas.openxmlformats.org/drawingml/2006/main" name="Office Theme">
+  <a:themeElements>
+    <a:clrScheme name="Office">
+      <a:dk1>
+        <a:sysClr val="windowText" lastClr="000000"/>
+      </a:dk1>
+      <a:lt1>
+        <a:sysClr val="window" lastClr="FFFFFF"/>
+      </a:lt1>
+      <a:dk2>
+        <a:srgbClr val="0E2841"/>
+      </a:dk2>
+      <a:lt2>
+        <a:srgbClr val="E8E8E8"/>
+      </a:lt2>
+      <a:accent1>
+        <a:srgbClr val="156082"/>
+      </a:accent1>
+      <a:accent2>
+        <a:srgbClr val="E97132"/>
+      </a:accent2>
+      <a:accent3>
+        <a:srgbClr val="196B24"/>
+      </a:accent3>
+      <a:accent4>
+        <a:srgbClr val="0F9ED5"/>
+      </a:accent4>
+      <a:accent5>
+        <a:srgbClr val="A02B93"/>
+      </a:accent5>
+      <a:accent6>
+        <a:srgbClr val="4EA72E"/>
+      </a:accent6>
+      <a:hlink>
+        <a:srgbClr val="467886"/>
+      </a:hlink>
+      <a:folHlink>
+        <a:srgbClr val="96607D"/>
+      </a:folHlink>
+    </a:clrScheme>
+    <a:fontScheme name="Office">
+      <a:majorFont>
+        <a:latin typeface="Aptos Display" panose="02110004020202020204"/>
+        <a:ea typeface=""/>
+        <a:cs typeface=""/>
+        <a:font script="Jpan" typeface="游ゴシック Light"/>
+        <a:font script="Hang" typeface="맑은 고딕"/>
+        <a:font script="Hans" typeface="等线 Light"/>
+        <a:font script="Hant" typeface="新細明體"/>
+        <a:font script="Arab" typeface="Times New Roman"/>
+        <a:font script="Hebr" typeface="Times New Roman"/>
+        <a:font script="Thai" typeface="Angsana New"/>
+        <a:font script="Ethi" typeface="Nyala"/>
+        <a:font script="Beng" typeface="Vrinda"/>
+        <a:font script="Gujr" typeface="Shruti"/>
+        <a:font script="Khmr" typeface="MoolBoran"/>
+        <a:font script="Knda" typeface="Tunga"/>
+        <a:font script="Guru" typeface="Raavi"/>
+        <a:font script="Cans" typeface="Euphemia"/>
+        <a:font script="Cher" typeface="Plantagenet Cherokee"/>
+        <a:font script="Yiii" typeface="Microsoft Yi Baiti"/>
+        <a:font script="Tibt" typeface="Microsoft Himalaya"/>
+        <a:font script="Thaa" typeface="MV Boli"/>
+        <a:font script="Deva" typeface="Mangal"/>
+        <a:font script="Telu" typeface="Gautami"/>
+        <a:font script="Taml" typeface="Latha"/>
+        <a:font script="Syrc" typeface="Estrangelo Edessa"/>
+        <a:font script="Orya" typeface="Kalinga"/>
+        <a:font script="Mlym" typeface="Kartika"/>
+        <a:font script="Laoo" typeface="DokChampa"/>
+        <a:font script="Sinh" typeface="Iskoola Pota"/>
+        <a:font script="Mong" typeface="Mongolian Baiti"/>
+        <a:font script="Viet" typeface="Times New Roman"/>
+        <a:font script="Uigh" typeface="Microsoft Uighur"/>
+        <a:font script="Geor" typeface="Sylfaen"/>
+        <a:font script="Armn" typeface="Arial"/>
+        <a:font script="Bugi" typeface="Leelawadee UI"/>
+        <a:font script="Bopo" typeface="Microsoft JhengHei"/>
+        <a:font script="Java" typeface="Javanese Text"/>
+        <a:font script="Lisu" typeface="Segoe UI"/>
+        <a:font script="Mymr" typeface="Myanmar Text"/>
+        <a:font script="Nkoo" typeface="Ebrima"/>
+        <a:font script="Olck" typeface="Nirmala UI"/>
+        <a:font script="Osma" typeface="Ebrima"/>
+        <a:font script="Phag" typeface="Phagspa"/>
+        <a:font script="Syrn" typeface="Estrangelo Edessa"/>
+        <a:font script="Syrj" typeface="Estrangelo Edessa"/>
+        <a:font script="Syre" typeface="Estrangelo Edessa"/>
+        <a:font script="Sora" typeface="Nirmala UI"/>
+        <a:font script="Tale" typeface="Microsoft Tai Le"/>
+        <a:font script="Talu" typeface="Microsoft New Tai Lue"/>
+        <a:font script="Tfng" typeface="Ebrima"/>
+      </a:majorFont>
+      <a:minorFont>
+        <a:latin typeface="Aptos" panose="02110004020202020204"/>
+        <a:ea typeface=""/>
+        <a:cs typeface=""/>
+        <a:font script="Jpan" typeface="游ゴシック"/>
+        <a:font script="Hang" typeface="맑은 고딕"/>
+        <a:font script="Hans" typeface="等线"/>
+        <a:font script="Hant" typeface="新細明體"/>
+        <a:font script="Arab" typeface="Arial"/>
+        <a:font script="Hebr" typeface="Arial"/>
+        <a:font script="Thai" typeface="Cordia New"/>
+        <a:font script="Ethi" typeface="Nyala"/>
+        <a:font script="Beng" typeface="Vrinda"/>
+        <a:font script="Gujr" typeface="Shruti"/>
+        <a:font script="Khmr" typeface="DaunPenh"/>
+        <a:font script="Knda" typeface="Tunga"/>
+        <a:font script="Guru" typeface="Raavi"/>
+        <a:font script="Cans" typeface="Euphemia"/>
+        <a:font script="Cher" typeface="Plantagenet Cherokee"/>
+        <a:font script="Yiii" typeface="Microsoft Yi Baiti"/>
+        <a:font script="Tibt" typeface="Microsoft Himalaya"/>
+        <a:font script="Thaa" typeface="MV Boli"/>
+        <a:font script="Deva" typeface="Mangal"/>
+        <a:font script="Telu" typeface="Gautami"/>
+        <a:font script="Taml" typeface="Latha"/>
+        <a:font script="Syrc" typeface="Estrangelo Edessa"/>
+        <a:font script="Orya" typeface="Kalinga"/>
+        <a:font script="Mlym" typeface="Kartika"/>
+        <a:font script="Laoo" typeface="DokChampa"/>
+        <a:font script="Sinh" typeface="Iskoola Pota"/>
+        <a:font script="Mong" typeface="Mongolian Baiti"/>
+        <a:font script="Viet" typeface="Arial"/>
+        <a:font script="Uigh" typeface="Microsoft Uighur"/>
+        <a:font script="Geor" typeface="Sylfaen"/>
+        <a:font script="Armn" typeface="Arial"/>
+        <a:font script="Bugi" typeface="Leelawadee UI"/>
+        <a:font script="Bopo" typeface="Microsoft JhengHei"/>
+        <a:font script="Java" typeface="Javanese Text"/>
+        <a:font script="Lisu" typeface="Segoe UI"/>
+        <a:font script="Mymr" typeface="Myanmar Text"/>
+        <a:font script="Nkoo" typeface="Ebrima"/>
+        <a:font script="Olck" typeface="Nirmala UI"/>
+        <a:font script="Osma" typeface="Ebrima"/>
+        <a:font script="Phag" typeface="Phagspa"/>
+        <a:font script="Syrn" typeface="Estrangelo Edessa"/>
+        <a:font script="Syrj" typeface="Estrangelo Edessa"/>
+        <a:font script="Syre" typeface="Estrangelo Edessa"/>
+        <a:font script="Sora" typeface="Nirmala UI"/>
+        <a:font script="Tale" typeface="Microsoft Tai Le"/>
+        <a:font script="Talu" typeface="Microsoft New Tai Lue"/>
+        <a:font script="Tfng" typeface="Ebrima"/>
+      </a:minorFont>
+    </a:fontScheme>
+    <a:fmtScheme name="Office">
+      <a:fillStyleLst>
+        <a:solidFill>
+          <a:schemeClr val="phClr"/>
+        </a:solidFill>
+        <a:gradFill rotWithShape="1">
+          <a:gsLst>
+            <a:gs pos="0">
+              <a:schemeClr val="phClr">
+                <a:lumMod val="110000"/>
+                <a:satMod val="105000"/>
+                <a:tint val="67000"/>
+              </a:schemeClr>
+            </a:gs>
+            <a:gs pos="50000">
+              <a:schemeClr val="phClr">
+                <a:lumMod val="105000"/>
+                <a:satMod val="103000"/>
+                <a:tint val="73000"/>
+              </a:schemeClr>
+            </a:gs>
+            <a:gs pos="100000">
+              <a:schemeClr val="phClr">
+                <a:lumMod val="105000"/>
+                <a:satMod val="109000"/>
+                <a:tint val="81000"/>
+              </a:schemeClr>
+            </a:gs>
+          </a:gsLst>
+          <a:lin ang="5400000" scaled="0"/>
+        </a:gradFill>
+        <a:gradFill rotWithShape="1">
+          <a:gsLst>
+            <a:gs pos="0">
+              <a:schemeClr val="phClr">
+                <a:satMod val="103000"/>
+                <a:lumMod val="102000"/>
+                <a:tint val="94000"/>
+              </a:schemeClr>
+            </a:gs>
+            <a:gs pos="50000">
+              <a:schemeClr val="phClr">
+                <a:satMod val="110000"/>
+                <a:lumMod val="100000"/>
+                <a:shade val="100000"/>
+              </a:schemeClr>
+            </a:gs>
+            <a:gs pos="100000">
+              <a:schemeClr val="phClr">
+                <a:lumMod val="99000"/>
+                <a:satMod val="120000"/>
+                <a:shade val="78000"/>
+              </a:schemeClr>
+            </a:gs>
+          </a:gsLst>
+          <a:lin ang="5400000" scaled="0"/>
+        </a:gradFill>
+      </a:fillStyleLst>
+      <a:lnStyleLst>
+        <a:ln w="12700" cap="flat" cmpd="sng" algn="ctr">
+          <a:solidFill>
+            <a:schemeClr val="phClr"/>
+          </a:solidFill>
+          <a:prstDash val="solid"/>
+          <a:miter lim="800000"/>
+        </a:ln>
+        <a:ln w="19050" cap="flat" cmpd="sng" algn="ctr">
+          <a:solidFill>
+            <a:schemeClr val="phClr"/>
+          </a:solidFill>
+          <a:prstDash val="solid"/>
+          <a:miter lim="800000"/>
+        </a:ln>
+        <a:ln w="25400" cap="flat" cmpd="sng" algn="ctr">
+          <a:solidFill>
+            <a:schemeClr val="phClr"/>
+          </a:solidFill>
+          <a:prstDash val="solid"/>
+          <a:miter lim="800000"/>
+        </a:ln>
+      </a:lnStyleLst>
+      <a:effectStyleLst>
+        <a:effectStyle>
+          <a:effectLst/>
+        </a:effectStyle>
+        <a:effectStyle>
+          <a:effectLst/>
+        </a:effectStyle>
+        <a:effectStyle>
+          <a:effectLst>
+            <a:outerShdw blurRad="57150" dist="19050" dir="5400000" algn="ctr" rotWithShape="0">
+              <a:srgbClr val="000000">
+                <a:alpha val="63000"/>
+              </a:srgbClr>
+            </a:outerShdw>
+          </a:effectLst>
+        </a:effectStyle>
+      </a:effectStyleLst>
+      <a:bgFillStyleLst>
+        <a:solidFill>
+          <a:schemeClr val="phClr"/>
+        </a:solidFill>
+        <a:solidFill>
+          <a:schemeClr val="phClr">
+            <a:tint val="95000"/>
+            <a:satMod val="170000"/>
+          </a:schemeClr>
+        </a:solidFill>
+        <a:gradFill rotWithShape="1">
+          <a:gsLst>
+            <a:gs pos="0">
+              <a:schemeClr val="phClr">
+                <a:tint val="93000"/>
+                <a:satMod val="150000"/>
+                <a:shade val="98000"/>
+                <a:lumMod val="102000"/>
+              </a:schemeClr>
+            </a:gs>
+            <a:gs pos="50000">
+              <a:schemeClr val="phClr">
+                <a:tint val="98000"/>
+                <a:satMod val="130000"/>
+                <a:shade val="90000"/>
+                <a:lumMod val="103000"/>
+              </a:schemeClr>
+            </a:gs>
+            <a:gs pos="100000">
+              <a:schemeClr val="phClr">
+                <a:shade val="63000"/>
+                <a:satMod val="120000"/>
+              </a:schemeClr>
+            </a:gs>
+          </a:gsLst>
+          <a:lin ang="5400000" scaled="0"/>
+        </a:gradFill>
+      </a:bgFillStyleLst>
+    </a:fmtScheme>
+  </a:themeElements>
+  <a:objectDefaults>
+    <a:lnDef>
+      <a:spPr/>
+      <a:bodyPr/>
+      <a:lstStyle/>
+      <a:style>
+        <a:lnRef idx="2">
+          <a:schemeClr val="accent1"/>
+        </a:lnRef>
+        <a:fillRef idx="0">
+          <a:schemeClr val="accent1"/>
+        </a:fillRef>
+        <a:effectRef idx="1">
+          <a:schemeClr val="accent1"/>
+        </a:effectRef>
+        <a:fontRef idx="minor">
+          <a:schemeClr val="tx1"/>
+        </a:fontRef>
+      </a:style>
+    </a:lnDef>
+  </a:objectDefaults>
+  <a:extraClrSchemeLst/>
+  <a:extLst>
+    <a:ext uri="{05A4C25C-085E-4340-85A3-A5531E510DB2}">
+      <thm15:themeFamily xmlns:thm15="http://schemas.microsoft.com/office/thememl/2012/main" name="Office Theme" id="{2E142A2C-CD16-42D6-873A-C26D2A0506FA}" vid="{1BDDFF52-6CD6-40A5-AB3C-68EB2F1E4D0A}"/>
+    </a:ext>
+  </a:extLst>
+</a:theme>
 </file>
--- a/Criptografia Avanzada/sse_cifrado_asimetrico.pptx
+++ b/Criptografia Avanzada/sse_cifrado_asimetrico.pptx
@@ -5,7 +5,7 @@
     <p:sldMasterId id="2147483648" r:id="rId1"/>
   </p:sldMasterIdLst>
   <p:notesMasterIdLst>
-    <p:notesMasterId r:id="rId14"/>
+    <p:notesMasterId r:id="rId12"/>
   </p:notesMasterIdLst>
   <p:sldIdLst>
     <p:sldId id="256" r:id="rId2"/>
@@ -16,10 +16,8 @@
     <p:sldId id="261" r:id="rId7"/>
     <p:sldId id="262" r:id="rId8"/>
     <p:sldId id="263" r:id="rId9"/>
-    <p:sldId id="264" r:id="rId10"/>
-    <p:sldId id="265" r:id="rId11"/>
-    <p:sldId id="266" r:id="rId12"/>
-    <p:sldId id="267" r:id="rId13"/>
+    <p:sldId id="265" r:id="rId10"/>
+    <p:sldId id="267" r:id="rId11"/>
   </p:sldIdLst>
   <p:sldSz cx="12192000" cy="6858000"/>
   <p:notesSz cx="6858000" cy="12192000"/>
@@ -704,7 +702,7 @@
           <a:p>
             <a:r>
               <a:rPr lang="en-US" dirty="0"/>
-              <a:t>Ed25519 aporta lo que ECIES por sí solo no da: no repudio. El paciente firma el ticket completo — no repudio, y cualquiera puede verificar con su clave pública que fue efectivamente el paciente quien autorizó esa delegación con ese alcance y ese vencimiento. El servidor valida la firma y el TTL, pero el contenido cifrado (las claves de búsqueda y descifrado) permanece opaco para él en todo momento. El callout de abajo es uno de los bugs reales que documentamos al implementar esto: el pseudocódigo original sólo envolvía la clave del documento para la clave pública del paciente, así que un médico con una delegación activa podía ejecutar búsquedas SSE-2 y encontrar coincidencias, pero nunca tenía la clave privada del paciente para abrir el documento en sí.</a:t>
+              <a:t>Para cerrar: la parte asimétrica de SSE no reemplaza a la simétrica, la complementa exactamente donde la simétrica no puede llegar sola — repartir capacidades entre partes que no comparten un secreto de antemano. PEKS es la prueba de que esto es posible en teoría; el diseño híbrido KEM/DEM es la forma en que se usa en la práctica; y OSA es la evidencia de que, incluso con la teoría clara, hacerlo sin romper el modelo zero-knowledge requiere una revisión de seguridad tan rigurosa como el diseño criptográfico en sí. Muchas gracias, quedo a disposición para preguntas.</a:t>
             </a:r>
           </a:p>
         </p:txBody>
@@ -727,180 +725,6 @@
             <a:fld id="{F7021451-1387-4CA6-816F-3879F97B5CBC}" type="slidenum">
               <a:rPr lang="en-US"/>
               <a:t>10</a:t>
-            </a:fld>
-            <a:endParaRPr lang="en-US"/>
-          </a:p>
-        </p:txBody>
-      </p:sp>
-    </p:spTree>
-    <p:extLst>
-      <p:ext uri="{BB962C8B-B14F-4D97-AF65-F5344CB8AC3E}">
-        <p14:creationId xmlns:p14="http://schemas.microsoft.com/office/powerpoint/2010/main" val="1024086991"/>
-      </p:ext>
-    </p:extLst>
-  </p:cSld>
-  <p:clrMapOvr>
-    <a:masterClrMapping/>
-  </p:clrMapOvr>
-</p:notes>
-</file>
-
-<file path=ppt/notesSlides/notesSlide11.xml><?xml version="1.0" encoding="utf-8"?>
-<p:notes xmlns:a="http://schemas.openxmlformats.org/drawingml/2006/main" xmlns:r="http://schemas.openxmlformats.org/officeDocument/2006/relationships" xmlns:p="http://schemas.openxmlformats.org/presentationml/2006/main">
-  <p:cSld>
-    <p:spTree>
-      <p:nvGrpSpPr>
-        <p:cNvPr id="1" name=""/>
-        <p:cNvGrpSpPr/>
-        <p:nvPr/>
-      </p:nvGrpSpPr>
-      <p:grpSpPr>
-        <a:xfrm>
-          <a:off x="0" y="0"/>
-          <a:ext cx="0" cy="0"/>
-          <a:chOff x="0" y="0"/>
-          <a:chExt cx="0" cy="0"/>
-        </a:xfrm>
-      </p:grpSpPr>
-      <p:sp>
-        <p:nvSpPr>
-          <p:cNvPr id="2" name="Slide Image Placeholder 1"/>
-          <p:cNvSpPr>
-            <a:spLocks noGrp="1" noRot="1" noChangeAspect="1"/>
-          </p:cNvSpPr>
-          <p:nvPr>
-            <p:ph type="sldImg"/>
-          </p:nvPr>
-        </p:nvSpPr>
-        <p:spPr/>
-      </p:sp>
-      <p:sp>
-        <p:nvSpPr>
-          <p:cNvPr id="3" name="Notes Placeholder 2"/>
-          <p:cNvSpPr>
-            <a:spLocks noGrp="1"/>
-          </p:cNvSpPr>
-          <p:nvPr>
-            <p:ph type="body" idx="1"/>
-          </p:nvPr>
-        </p:nvSpPr>
-        <p:spPr/>
-        <p:txBody>
-          <a:bodyPr/>
-          <a:lstStyle/>
-          <a:p>
-            <a:r>
-              <a:rPr lang="en-US" dirty="0"/>
-              <a:t>Estos tres son, para mí, los bugs más interesantes de toda la implementación — documentados con detalle en la adenda de seguridad del proyecto, junto con otras 17 correcciones. Ninguno es un error de sintaxis: los tres son fallas de diseño zero-knowledge que sólo aparecen cuando el pseudocódigo de la especificación se convierte en un sistema real con un test de integración de punta a punta corriendo contra Postgres.</a:t>
-            </a:r>
-          </a:p>
-        </p:txBody>
-      </p:sp>
-      <p:sp>
-        <p:nvSpPr>
-          <p:cNvPr id="4" name="Slide Number Placeholder 3"/>
-          <p:cNvSpPr>
-            <a:spLocks noGrp="1"/>
-          </p:cNvSpPr>
-          <p:nvPr>
-            <p:ph type="sldNum" sz="quarter" idx="10"/>
-          </p:nvPr>
-        </p:nvSpPr>
-        <p:spPr/>
-        <p:txBody>
-          <a:bodyPr/>
-          <a:lstStyle/>
-          <a:p>
-            <a:fld id="{F7021451-1387-4CA6-816F-3879F97B5CBC}" type="slidenum">
-              <a:rPr lang="en-US"/>
-              <a:t>11</a:t>
-            </a:fld>
-            <a:endParaRPr lang="en-US"/>
-          </a:p>
-        </p:txBody>
-      </p:sp>
-    </p:spTree>
-    <p:extLst>
-      <p:ext uri="{BB962C8B-B14F-4D97-AF65-F5344CB8AC3E}">
-        <p14:creationId xmlns:p14="http://schemas.microsoft.com/office/powerpoint/2010/main" val="1024086991"/>
-      </p:ext>
-    </p:extLst>
-  </p:cSld>
-  <p:clrMapOvr>
-    <a:masterClrMapping/>
-  </p:clrMapOvr>
-</p:notes>
-</file>
-
-<file path=ppt/notesSlides/notesSlide12.xml><?xml version="1.0" encoding="utf-8"?>
-<p:notes xmlns:a="http://schemas.openxmlformats.org/drawingml/2006/main" xmlns:r="http://schemas.openxmlformats.org/officeDocument/2006/relationships" xmlns:p="http://schemas.openxmlformats.org/presentationml/2006/main">
-  <p:cSld>
-    <p:spTree>
-      <p:nvGrpSpPr>
-        <p:cNvPr id="1" name=""/>
-        <p:cNvGrpSpPr/>
-        <p:nvPr/>
-      </p:nvGrpSpPr>
-      <p:grpSpPr>
-        <a:xfrm>
-          <a:off x="0" y="0"/>
-          <a:ext cx="0" cy="0"/>
-          <a:chOff x="0" y="0"/>
-          <a:chExt cx="0" cy="0"/>
-        </a:xfrm>
-      </p:grpSpPr>
-      <p:sp>
-        <p:nvSpPr>
-          <p:cNvPr id="2" name="Slide Image Placeholder 1"/>
-          <p:cNvSpPr>
-            <a:spLocks noGrp="1" noRot="1" noChangeAspect="1"/>
-          </p:cNvSpPr>
-          <p:nvPr>
-            <p:ph type="sldImg"/>
-          </p:nvPr>
-        </p:nvSpPr>
-        <p:spPr/>
-      </p:sp>
-      <p:sp>
-        <p:nvSpPr>
-          <p:cNvPr id="3" name="Notes Placeholder 2"/>
-          <p:cNvSpPr>
-            <a:spLocks noGrp="1"/>
-          </p:cNvSpPr>
-          <p:nvPr>
-            <p:ph type="body" idx="1"/>
-          </p:nvPr>
-        </p:nvSpPr>
-        <p:spPr/>
-        <p:txBody>
-          <a:bodyPr/>
-          <a:lstStyle/>
-          <a:p>
-            <a:r>
-              <a:rPr lang="en-US" dirty="0"/>
-              <a:t>Para cerrar: la parte asimétrica de SSE no reemplaza a la simétrica, la complementa exactamente donde la simétrica no puede llegar sola — repartir capacidades entre partes que no comparten un secreto de antemano. PEKS es la prueba de que esto es posible en teoría; el diseño híbrido KEM/DEM es la forma en que se usa en la práctica; y OSA es la evidencia de que, incluso con la teoría clara, hacerlo sin romper el modelo zero-knowledge requiere una revisión de seguridad tan rigurosa como el diseño criptográfico en sí. Muchas gracias, quedo a disposición para preguntas.</a:t>
-            </a:r>
-          </a:p>
-        </p:txBody>
-      </p:sp>
-      <p:sp>
-        <p:nvSpPr>
-          <p:cNvPr id="4" name="Slide Number Placeholder 3"/>
-          <p:cNvSpPr>
-            <a:spLocks noGrp="1"/>
-          </p:cNvSpPr>
-          <p:nvPr>
-            <p:ph type="sldNum" sz="quarter" idx="10"/>
-          </p:nvPr>
-        </p:nvSpPr>
-        <p:spPr/>
-        <p:txBody>
-          <a:bodyPr/>
-          <a:lstStyle/>
-          <a:p>
-            <a:fld id="{F7021451-1387-4CA6-816F-3879F97B5CBC}" type="slidenum">
-              <a:rPr lang="en-US"/>
-              <a:t>12</a:t>
             </a:fld>
             <a:endParaRPr lang="en-US"/>
           </a:p>
@@ -1574,7 +1398,7 @@
           <a:p>
             <a:r>
               <a:rPr lang="en-US" dirty="0"/>
-              <a:t>Esta función es el KEM+DEM de la filmina anterior, tal cual corre en el navegador del médico y del paciente. Genera un par X25519 efímero por cada sobre, deriva el secreto ECDH, lo pasa por HKDF con un 'info' que separa dominios de uso — así el mismo secreto compartido nunca se reutiliza entre, por ejemplo, el sobre de K_doc y el sobre de una delegación — y cifra con AES-256-GCM. La corrección documentada en la adenda de seguridad fue justamente reemplazar el ECDH con P-256 de WebCrypto del pseudocódigo original por esta implementación consistente en X25519.</a:t>
+              <a:t>Ed25519 aporta lo que ECIES por sí solo no da: no repudio. El paciente firma el ticket completo — no repudio, y cualquiera puede verificar con su clave pública que fue efectivamente el paciente quien autorizó esa delegación con ese alcance y ese vencimiento. El servidor valida la firma y el TTL, pero el contenido cifrado (las claves de búsqueda y descifrado) permanece opaco para él en todo momento. El callout de abajo es uno de los bugs reales que documentamos al implementar esto: el pseudocódigo original sólo envolvía la clave del documento para la clave pública del paciente, así que un médico con una delegación activa podía ejecutar búsquedas SSE-2 y encontrar coincidencias, pero nunca tenía la clave privada del paciente para abrir el documento en sí.</a:t>
             </a:r>
           </a:p>
         </p:txBody>
@@ -2319,1853 +2143,6 @@
 
 <file path=ppt/slides/slide10.xml><?xml version="1.0" encoding="utf-8"?>
 <p:sld xmlns:a="http://schemas.openxmlformats.org/drawingml/2006/main" xmlns:r="http://schemas.openxmlformats.org/officeDocument/2006/relationships" xmlns:p="http://schemas.openxmlformats.org/presentationml/2006/main">
-  <p:cSld name="Slide 10">
-    <p:spTree>
-      <p:nvGrpSpPr>
-        <p:cNvPr id="1" name=""/>
-        <p:cNvGrpSpPr/>
-        <p:nvPr/>
-      </p:nvGrpSpPr>
-      <p:grpSpPr>
-        <a:xfrm>
-          <a:off x="0" y="0"/>
-          <a:ext cx="0" cy="0"/>
-          <a:chOff x="0" y="0"/>
-          <a:chExt cx="0" cy="0"/>
-        </a:xfrm>
-      </p:grpSpPr>
-      <p:sp>
-        <p:nvSpPr>
-          <p:cNvPr id="2" name="Text 0"/>
-          <p:cNvSpPr txBox="1"/>
-          <p:nvPr/>
-        </p:nvSpPr>
-        <p:spPr>
-          <a:xfrm>
-            <a:off x="548640" y="256032"/>
-            <a:ext cx="11094415" cy="274320"/>
-          </a:xfrm>
-          <a:prstGeom prst="rect">
-            <a:avLst/>
-          </a:prstGeom>
-          <a:noFill/>
-          <a:ln/>
-        </p:spPr>
-        <p:txBody>
-          <a:bodyPr wrap="square" lIns="0" tIns="0" rIns="0" bIns="0" rtlCol="0" anchor="ctr"/>
-          <a:lstStyle/>
-          <a:p>
-            <a:pPr marL="0" indent="0">
-              <a:buNone/>
-            </a:pPr>
-            <a:r>
-              <a:rPr lang="en-US" sz="1250" b="1" kern="0" spc="200" dirty="0">
-                <a:solidFill>
-                  <a:srgbClr val="6C6FD9"/>
-                </a:solidFill>
-                <a:latin typeface="Calibri" pitchFamily="34" charset="0"/>
-                <a:ea typeface="Calibri" pitchFamily="34" charset="-122"/>
-                <a:cs typeface="Calibri" pitchFamily="34" charset="-120"/>
-              </a:rPr>
-              <a:t>FIRMA Y NO REPUDIO</a:t>
-            </a:r>
-            <a:endParaRPr lang="en-US" sz="1250" dirty="0"/>
-          </a:p>
-        </p:txBody>
-      </p:sp>
-      <p:sp>
-        <p:nvSpPr>
-          <p:cNvPr id="3" name="Text 1"/>
-          <p:cNvSpPr txBox="1"/>
-          <p:nvPr/>
-        </p:nvSpPr>
-        <p:spPr>
-          <a:xfrm>
-            <a:off x="548640" y="457200"/>
-            <a:ext cx="11094415" cy="822960"/>
-          </a:xfrm>
-          <a:prstGeom prst="rect">
-            <a:avLst/>
-          </a:prstGeom>
-          <a:noFill/>
-          <a:ln/>
-        </p:spPr>
-        <p:txBody>
-          <a:bodyPr wrap="square" lIns="0" tIns="0" rIns="0" bIns="0" rtlCol="0" anchor="ctr"/>
-          <a:lstStyle/>
-          <a:p>
-            <a:pPr marL="0" indent="0">
-              <a:buNone/>
-            </a:pPr>
-            <a:r>
-              <a:rPr lang="en-US" sz="3200" b="1" dirty="0">
-                <a:solidFill>
-                  <a:srgbClr val="15213E"/>
-                </a:solidFill>
-                <a:latin typeface="Cambria" pitchFamily="34" charset="0"/>
-                <a:ea typeface="Cambria" pitchFamily="34" charset="-122"/>
-                <a:cs typeface="Cambria" pitchFamily="34" charset="-120"/>
-              </a:rPr>
-              <a:t>El ticket de delegación temporal</a:t>
-            </a:r>
-            <a:endParaRPr lang="en-US" sz="3200" dirty="0"/>
-          </a:p>
-        </p:txBody>
-      </p:sp>
-      <p:sp>
-        <p:nvSpPr>
-          <p:cNvPr id="4" name="Shape 2"/>
-          <p:cNvSpPr/>
-          <p:nvPr/>
-        </p:nvSpPr>
-        <p:spPr>
-          <a:xfrm>
-            <a:off x="548640" y="1417320"/>
-            <a:ext cx="3520440" cy="502920"/>
-          </a:xfrm>
-          <a:prstGeom prst="roundRect">
-            <a:avLst>
-              <a:gd name="adj" fmla="val 14545"/>
-            </a:avLst>
-          </a:prstGeom>
-          <a:solidFill>
-            <a:srgbClr val="15213E"/>
-          </a:solidFill>
-          <a:ln/>
-        </p:spPr>
-        <p:txBody>
-          <a:bodyPr/>
-          <a:lstStyle/>
-          <a:p>
-            <a:endParaRPr lang="en-US"/>
-          </a:p>
-        </p:txBody>
-      </p:sp>
-      <p:sp>
-        <p:nvSpPr>
-          <p:cNvPr id="5" name="Shape 3"/>
-          <p:cNvSpPr/>
-          <p:nvPr/>
-        </p:nvSpPr>
-        <p:spPr>
-          <a:xfrm>
-            <a:off x="640080" y="1472184"/>
-            <a:ext cx="384048" cy="384048"/>
-          </a:xfrm>
-          <a:prstGeom prst="ellipse">
-            <a:avLst/>
-          </a:prstGeom>
-          <a:solidFill>
-            <a:srgbClr val="17B8A6"/>
-          </a:solidFill>
-          <a:ln/>
-        </p:spPr>
-        <p:txBody>
-          <a:bodyPr/>
-          <a:lstStyle/>
-          <a:p>
-            <a:endParaRPr lang="en-US"/>
-          </a:p>
-        </p:txBody>
-      </p:sp>
-      <p:pic>
-        <p:nvPicPr>
-          <p:cNvPr id="6" name="Image 0" descr="/tmp/osa_pres/icons/user_navy.png"/>
-          <p:cNvPicPr>
-            <a:picLocks noChangeAspect="1"/>
-          </p:cNvPicPr>
-          <p:nvPr/>
-        </p:nvPicPr>
-        <p:blipFill>
-          <a:blip r:embed="rId3"/>
-          <a:stretch>
-            <a:fillRect/>
-          </a:stretch>
-        </p:blipFill>
-        <p:spPr>
-          <a:xfrm>
-            <a:off x="690006" y="1522110"/>
-            <a:ext cx="284196" cy="284196"/>
-          </a:xfrm>
-          <a:prstGeom prst="rect">
-            <a:avLst/>
-          </a:prstGeom>
-        </p:spPr>
-      </p:pic>
-      <p:sp>
-        <p:nvSpPr>
-          <p:cNvPr id="7" name="Text 4"/>
-          <p:cNvSpPr txBox="1"/>
-          <p:nvPr/>
-        </p:nvSpPr>
-        <p:spPr>
-          <a:xfrm>
-            <a:off x="1097280" y="1417320"/>
-            <a:ext cx="2880360" cy="502920"/>
-          </a:xfrm>
-          <a:prstGeom prst="rect">
-            <a:avLst/>
-          </a:prstGeom>
-          <a:noFill/>
-          <a:ln/>
-        </p:spPr>
-        <p:txBody>
-          <a:bodyPr wrap="square" lIns="0" tIns="0" rIns="0" bIns="0" rtlCol="0" anchor="ctr"/>
-          <a:lstStyle/>
-          <a:p>
-            <a:pPr marL="0" indent="0">
-              <a:buNone/>
-            </a:pPr>
-            <a:r>
-              <a:rPr lang="en-US" sz="1250" b="1" dirty="0">
-                <a:solidFill>
-                  <a:srgbClr val="FFFFFF"/>
-                </a:solidFill>
-                <a:latin typeface="Calibri" pitchFamily="34" charset="0"/>
-                <a:ea typeface="Calibri" pitchFamily="34" charset="-122"/>
-                <a:cs typeface="Calibri" pitchFamily="34" charset="-120"/>
-              </a:rPr>
-              <a:t>Paciente</a:t>
-            </a:r>
-            <a:endParaRPr lang="en-US" sz="1250" dirty="0"/>
-          </a:p>
-        </p:txBody>
-      </p:sp>
-      <p:sp>
-        <p:nvSpPr>
-          <p:cNvPr id="8" name="Shape 5"/>
-          <p:cNvSpPr/>
-          <p:nvPr/>
-        </p:nvSpPr>
-        <p:spPr>
-          <a:xfrm>
-            <a:off x="2308860" y="1920240"/>
-            <a:ext cx="0" cy="3977640"/>
-          </a:xfrm>
-          <a:prstGeom prst="line">
-            <a:avLst/>
-          </a:prstGeom>
-          <a:noFill/>
-          <a:ln w="12700">
-            <a:solidFill>
-              <a:srgbClr val="E2E5F0"/>
-            </a:solidFill>
-            <a:prstDash val="dash"/>
-          </a:ln>
-        </p:spPr>
-        <p:txBody>
-          <a:bodyPr/>
-          <a:lstStyle/>
-          <a:p>
-            <a:endParaRPr lang="en-US"/>
-          </a:p>
-        </p:txBody>
-      </p:sp>
-      <p:sp>
-        <p:nvSpPr>
-          <p:cNvPr id="9" name="Shape 6"/>
-          <p:cNvSpPr/>
-          <p:nvPr/>
-        </p:nvSpPr>
-        <p:spPr>
-          <a:xfrm>
-            <a:off x="4334256" y="1417320"/>
-            <a:ext cx="3520440" cy="502920"/>
-          </a:xfrm>
-          <a:prstGeom prst="roundRect">
-            <a:avLst>
-              <a:gd name="adj" fmla="val 14545"/>
-            </a:avLst>
-          </a:prstGeom>
-          <a:solidFill>
-            <a:srgbClr val="15213E"/>
-          </a:solidFill>
-          <a:ln/>
-        </p:spPr>
-        <p:txBody>
-          <a:bodyPr/>
-          <a:lstStyle/>
-          <a:p>
-            <a:endParaRPr lang="en-US"/>
-          </a:p>
-        </p:txBody>
-      </p:sp>
-      <p:sp>
-        <p:nvSpPr>
-          <p:cNvPr id="10" name="Shape 7"/>
-          <p:cNvSpPr/>
-          <p:nvPr/>
-        </p:nvSpPr>
-        <p:spPr>
-          <a:xfrm>
-            <a:off x="4425696" y="1472184"/>
-            <a:ext cx="384048" cy="384048"/>
-          </a:xfrm>
-          <a:prstGeom prst="ellipse">
-            <a:avLst/>
-          </a:prstGeom>
-          <a:solidFill>
-            <a:srgbClr val="17B8A6"/>
-          </a:solidFill>
-          <a:ln/>
-        </p:spPr>
-        <p:txBody>
-          <a:bodyPr/>
-          <a:lstStyle/>
-          <a:p>
-            <a:endParaRPr lang="en-US"/>
-          </a:p>
-        </p:txBody>
-      </p:sp>
-      <p:pic>
-        <p:nvPicPr>
-          <p:cNvPr id="11" name="Image 1" descr="/tmp/osa_pres/icons/database_navy.png"/>
-          <p:cNvPicPr>
-            <a:picLocks noChangeAspect="1"/>
-          </p:cNvPicPr>
-          <p:nvPr/>
-        </p:nvPicPr>
-        <p:blipFill>
-          <a:blip r:embed="rId4"/>
-          <a:stretch>
-            <a:fillRect/>
-          </a:stretch>
-        </p:blipFill>
-        <p:spPr>
-          <a:xfrm>
-            <a:off x="4475622" y="1522110"/>
-            <a:ext cx="284196" cy="284196"/>
-          </a:xfrm>
-          <a:prstGeom prst="rect">
-            <a:avLst/>
-          </a:prstGeom>
-        </p:spPr>
-      </p:pic>
-      <p:sp>
-        <p:nvSpPr>
-          <p:cNvPr id="12" name="Text 8"/>
-          <p:cNvSpPr txBox="1"/>
-          <p:nvPr/>
-        </p:nvSpPr>
-        <p:spPr>
-          <a:xfrm>
-            <a:off x="4882896" y="1417320"/>
-            <a:ext cx="2880360" cy="502920"/>
-          </a:xfrm>
-          <a:prstGeom prst="rect">
-            <a:avLst/>
-          </a:prstGeom>
-          <a:noFill/>
-          <a:ln/>
-        </p:spPr>
-        <p:txBody>
-          <a:bodyPr wrap="square" lIns="0" tIns="0" rIns="0" bIns="0" rtlCol="0" anchor="ctr"/>
-          <a:lstStyle/>
-          <a:p>
-            <a:pPr marL="0" indent="0">
-              <a:buNone/>
-            </a:pPr>
-            <a:r>
-              <a:rPr lang="en-US" sz="1250" b="1" dirty="0" err="1">
-                <a:solidFill>
-                  <a:srgbClr val="FFFFFF"/>
-                </a:solidFill>
-                <a:latin typeface="Calibri" pitchFamily="34" charset="0"/>
-                <a:ea typeface="Calibri" pitchFamily="34" charset="-122"/>
-                <a:cs typeface="Calibri" pitchFamily="34" charset="-120"/>
-              </a:rPr>
-              <a:t>Servidor</a:t>
-            </a:r>
-            <a:r>
-              <a:rPr lang="en-US" sz="1250" b="1" dirty="0">
-                <a:solidFill>
-                  <a:srgbClr val="FFFFFF"/>
-                </a:solidFill>
-                <a:latin typeface="Calibri" pitchFamily="34" charset="0"/>
-                <a:ea typeface="Calibri" pitchFamily="34" charset="-122"/>
-                <a:cs typeface="Calibri" pitchFamily="34" charset="-120"/>
-              </a:rPr>
-              <a:t> (custodio ciego)</a:t>
-            </a:r>
-            <a:endParaRPr lang="en-US" sz="1250" dirty="0"/>
-          </a:p>
-        </p:txBody>
-      </p:sp>
-      <p:sp>
-        <p:nvSpPr>
-          <p:cNvPr id="13" name="Shape 9"/>
-          <p:cNvSpPr/>
-          <p:nvPr/>
-        </p:nvSpPr>
-        <p:spPr>
-          <a:xfrm>
-            <a:off x="6094476" y="1920240"/>
-            <a:ext cx="0" cy="3977640"/>
-          </a:xfrm>
-          <a:prstGeom prst="line">
-            <a:avLst/>
-          </a:prstGeom>
-          <a:noFill/>
-          <a:ln w="12700">
-            <a:solidFill>
-              <a:srgbClr val="E2E5F0"/>
-            </a:solidFill>
-            <a:prstDash val="dash"/>
-          </a:ln>
-        </p:spPr>
-        <p:txBody>
-          <a:bodyPr/>
-          <a:lstStyle/>
-          <a:p>
-            <a:endParaRPr lang="en-US"/>
-          </a:p>
-        </p:txBody>
-      </p:sp>
-      <p:sp>
-        <p:nvSpPr>
-          <p:cNvPr id="14" name="Shape 10"/>
-          <p:cNvSpPr/>
-          <p:nvPr/>
-        </p:nvSpPr>
-        <p:spPr>
-          <a:xfrm>
-            <a:off x="8119872" y="1417320"/>
-            <a:ext cx="3520440" cy="502920"/>
-          </a:xfrm>
-          <a:prstGeom prst="roundRect">
-            <a:avLst>
-              <a:gd name="adj" fmla="val 14545"/>
-            </a:avLst>
-          </a:prstGeom>
-          <a:solidFill>
-            <a:srgbClr val="15213E"/>
-          </a:solidFill>
-          <a:ln/>
-        </p:spPr>
-        <p:txBody>
-          <a:bodyPr/>
-          <a:lstStyle/>
-          <a:p>
-            <a:endParaRPr lang="en-US"/>
-          </a:p>
-        </p:txBody>
-      </p:sp>
-      <p:sp>
-        <p:nvSpPr>
-          <p:cNvPr id="15" name="Shape 11"/>
-          <p:cNvSpPr/>
-          <p:nvPr/>
-        </p:nvSpPr>
-        <p:spPr>
-          <a:xfrm>
-            <a:off x="8211312" y="1472184"/>
-            <a:ext cx="384048" cy="384048"/>
-          </a:xfrm>
-          <a:prstGeom prst="ellipse">
-            <a:avLst/>
-          </a:prstGeom>
-          <a:solidFill>
-            <a:srgbClr val="17B8A6"/>
-          </a:solidFill>
-          <a:ln/>
-        </p:spPr>
-        <p:txBody>
-          <a:bodyPr/>
-          <a:lstStyle/>
-          <a:p>
-            <a:endParaRPr lang="en-US"/>
-          </a:p>
-        </p:txBody>
-      </p:sp>
-      <p:pic>
-        <p:nvPicPr>
-          <p:cNvPr id="16" name="Image 2" descr="/tmp/osa_pres/icons/userMd_navy.png"/>
-          <p:cNvPicPr>
-            <a:picLocks noChangeAspect="1"/>
-          </p:cNvPicPr>
-          <p:nvPr/>
-        </p:nvPicPr>
-        <p:blipFill>
-          <a:blip r:embed="rId5"/>
-          <a:stretch>
-            <a:fillRect/>
-          </a:stretch>
-        </p:blipFill>
-        <p:spPr>
-          <a:xfrm>
-            <a:off x="8261238" y="1522110"/>
-            <a:ext cx="284196" cy="284196"/>
-          </a:xfrm>
-          <a:prstGeom prst="rect">
-            <a:avLst/>
-          </a:prstGeom>
-        </p:spPr>
-      </p:pic>
-      <p:sp>
-        <p:nvSpPr>
-          <p:cNvPr id="17" name="Text 12"/>
-          <p:cNvSpPr txBox="1"/>
-          <p:nvPr/>
-        </p:nvSpPr>
-        <p:spPr>
-          <a:xfrm>
-            <a:off x="8668512" y="1417320"/>
-            <a:ext cx="2880360" cy="502920"/>
-          </a:xfrm>
-          <a:prstGeom prst="rect">
-            <a:avLst/>
-          </a:prstGeom>
-          <a:noFill/>
-          <a:ln/>
-        </p:spPr>
-        <p:txBody>
-          <a:bodyPr wrap="square" lIns="0" tIns="0" rIns="0" bIns="0" rtlCol="0" anchor="ctr"/>
-          <a:lstStyle/>
-          <a:p>
-            <a:pPr marL="0" indent="0">
-              <a:buNone/>
-            </a:pPr>
-            <a:r>
-              <a:rPr lang="en-US" sz="1250" b="1" dirty="0">
-                <a:solidFill>
-                  <a:srgbClr val="FFFFFF"/>
-                </a:solidFill>
-                <a:latin typeface="Calibri" pitchFamily="34" charset="0"/>
-                <a:ea typeface="Calibri" pitchFamily="34" charset="-122"/>
-                <a:cs typeface="Calibri" pitchFamily="34" charset="-120"/>
-              </a:rPr>
-              <a:t>Médico</a:t>
-            </a:r>
-            <a:endParaRPr lang="en-US" sz="1250" dirty="0"/>
-          </a:p>
-        </p:txBody>
-      </p:sp>
-      <p:sp>
-        <p:nvSpPr>
-          <p:cNvPr id="18" name="Shape 13"/>
-          <p:cNvSpPr/>
-          <p:nvPr/>
-        </p:nvSpPr>
-        <p:spPr>
-          <a:xfrm>
-            <a:off x="9880092" y="1920240"/>
-            <a:ext cx="0" cy="3977640"/>
-          </a:xfrm>
-          <a:prstGeom prst="line">
-            <a:avLst/>
-          </a:prstGeom>
-          <a:noFill/>
-          <a:ln w="12700">
-            <a:solidFill>
-              <a:srgbClr val="E2E5F0"/>
-            </a:solidFill>
-            <a:prstDash val="dash"/>
-          </a:ln>
-        </p:spPr>
-        <p:txBody>
-          <a:bodyPr/>
-          <a:lstStyle/>
-          <a:p>
-            <a:endParaRPr lang="en-US"/>
-          </a:p>
-        </p:txBody>
-      </p:sp>
-      <p:sp>
-        <p:nvSpPr>
-          <p:cNvPr id="19" name="Shape 14"/>
-          <p:cNvSpPr/>
-          <p:nvPr/>
-        </p:nvSpPr>
-        <p:spPr>
-          <a:xfrm>
-            <a:off x="2208276" y="2194560"/>
-            <a:ext cx="201168" cy="201168"/>
-          </a:xfrm>
-          <a:prstGeom prst="ellipse">
-            <a:avLst/>
-          </a:prstGeom>
-          <a:solidFill>
-            <a:srgbClr val="17B8A6"/>
-          </a:solidFill>
-          <a:ln w="19050">
-            <a:solidFill>
-              <a:srgbClr val="FFFFFF"/>
-            </a:solidFill>
-            <a:prstDash val="solid"/>
-          </a:ln>
-        </p:spPr>
-        <p:txBody>
-          <a:bodyPr/>
-          <a:lstStyle/>
-          <a:p>
-            <a:endParaRPr lang="en-US"/>
-          </a:p>
-        </p:txBody>
-      </p:sp>
-      <p:sp>
-        <p:nvSpPr>
-          <p:cNvPr id="20" name="Shape 15"/>
-          <p:cNvSpPr/>
-          <p:nvPr/>
-        </p:nvSpPr>
-        <p:spPr>
-          <a:xfrm>
-            <a:off x="548640" y="2514600"/>
-            <a:ext cx="4160520" cy="868680"/>
-          </a:xfrm>
-          <a:prstGeom prst="roundRect">
-            <a:avLst>
-              <a:gd name="adj" fmla="val 8421"/>
-            </a:avLst>
-          </a:prstGeom>
-          <a:solidFill>
-            <a:srgbClr val="FFFFFF"/>
-          </a:solidFill>
-          <a:ln w="12700">
-            <a:solidFill>
-              <a:srgbClr val="E2E5F0"/>
-            </a:solidFill>
-            <a:prstDash val="solid"/>
-          </a:ln>
-          <a:effectLst>
-            <a:outerShdw blurRad="101600" dist="38100" dir="5400000" algn="bl" rotWithShape="0">
-              <a:srgbClr val="1B2340">
-                <a:alpha val="12000"/>
-              </a:srgbClr>
-            </a:outerShdw>
-          </a:effectLst>
-        </p:spPr>
-        <p:txBody>
-          <a:bodyPr/>
-          <a:lstStyle/>
-          <a:p>
-            <a:endParaRPr lang="en-US"/>
-          </a:p>
-        </p:txBody>
-      </p:sp>
-      <p:sp>
-        <p:nvSpPr>
-          <p:cNvPr id="21" name="Text 16"/>
-          <p:cNvSpPr txBox="1"/>
-          <p:nvPr/>
-        </p:nvSpPr>
-        <p:spPr>
-          <a:xfrm>
-            <a:off x="749808" y="2514600"/>
-            <a:ext cx="3758184" cy="868680"/>
-          </a:xfrm>
-          <a:prstGeom prst="rect">
-            <a:avLst/>
-          </a:prstGeom>
-          <a:noFill/>
-          <a:ln/>
-        </p:spPr>
-        <p:txBody>
-          <a:bodyPr wrap="square" lIns="0" tIns="0" rIns="0" bIns="0" rtlCol="0" anchor="ctr"/>
-          <a:lstStyle/>
-          <a:p>
-            <a:pPr marL="0" indent="0">
-              <a:lnSpc>
-                <a:spcPct val="115000"/>
-              </a:lnSpc>
-              <a:buNone/>
-            </a:pPr>
-            <a:r>
-              <a:rPr lang="en-US" sz="1200" dirty="0">
-                <a:solidFill>
-                  <a:srgbClr val="1B2340"/>
-                </a:solidFill>
-                <a:latin typeface="Calibri" pitchFamily="34" charset="0"/>
-                <a:ea typeface="Calibri" pitchFamily="34" charset="-122"/>
-                <a:cs typeface="Calibri" pitchFamily="34" charset="-120"/>
-              </a:rPr>
-              <a:t>Junta sus claves de búsqueda y lectura, las cifra para que solo el médico las pueda abrir, y firma todo el paquete.</a:t>
-            </a:r>
-            <a:endParaRPr lang="en-US" sz="1200" dirty="0"/>
-          </a:p>
-        </p:txBody>
-      </p:sp>
-      <p:sp>
-        <p:nvSpPr>
-          <p:cNvPr id="22" name="Shape 17"/>
-          <p:cNvSpPr/>
-          <p:nvPr/>
-        </p:nvSpPr>
-        <p:spPr>
-          <a:xfrm>
-            <a:off x="5993892" y="3246120"/>
-            <a:ext cx="201168" cy="201168"/>
-          </a:xfrm>
-          <a:prstGeom prst="ellipse">
-            <a:avLst/>
-          </a:prstGeom>
-          <a:solidFill>
-            <a:srgbClr val="17B8A6"/>
-          </a:solidFill>
-          <a:ln w="19050">
-            <a:solidFill>
-              <a:srgbClr val="FFFFFF"/>
-            </a:solidFill>
-            <a:prstDash val="solid"/>
-          </a:ln>
-        </p:spPr>
-        <p:txBody>
-          <a:bodyPr/>
-          <a:lstStyle/>
-          <a:p>
-            <a:endParaRPr lang="en-US"/>
-          </a:p>
-        </p:txBody>
-      </p:sp>
-      <p:sp>
-        <p:nvSpPr>
-          <p:cNvPr id="23" name="Shape 18"/>
-          <p:cNvSpPr/>
-          <p:nvPr/>
-        </p:nvSpPr>
-        <p:spPr>
-          <a:xfrm>
-            <a:off x="4014216" y="3566160"/>
-            <a:ext cx="4160520" cy="868680"/>
-          </a:xfrm>
-          <a:prstGeom prst="roundRect">
-            <a:avLst>
-              <a:gd name="adj" fmla="val 8421"/>
-            </a:avLst>
-          </a:prstGeom>
-          <a:solidFill>
-            <a:srgbClr val="FFFFFF"/>
-          </a:solidFill>
-          <a:ln w="12700">
-            <a:solidFill>
-              <a:srgbClr val="E2E5F0"/>
-            </a:solidFill>
-            <a:prstDash val="solid"/>
-          </a:ln>
-          <a:effectLst>
-            <a:outerShdw blurRad="101600" dist="38100" dir="5400000" algn="bl" rotWithShape="0">
-              <a:srgbClr val="1B2340">
-                <a:alpha val="12000"/>
-              </a:srgbClr>
-            </a:outerShdw>
-          </a:effectLst>
-        </p:spPr>
-        <p:txBody>
-          <a:bodyPr/>
-          <a:lstStyle/>
-          <a:p>
-            <a:endParaRPr lang="en-US"/>
-          </a:p>
-        </p:txBody>
-      </p:sp>
-      <p:sp>
-        <p:nvSpPr>
-          <p:cNvPr id="24" name="Text 19"/>
-          <p:cNvSpPr txBox="1"/>
-          <p:nvPr/>
-        </p:nvSpPr>
-        <p:spPr>
-          <a:xfrm>
-            <a:off x="4215384" y="3566160"/>
-            <a:ext cx="3758184" cy="868680"/>
-          </a:xfrm>
-          <a:prstGeom prst="rect">
-            <a:avLst/>
-          </a:prstGeom>
-          <a:noFill/>
-          <a:ln/>
-        </p:spPr>
-        <p:txBody>
-          <a:bodyPr wrap="square" lIns="0" tIns="0" rIns="0" bIns="0" rtlCol="0" anchor="ctr"/>
-          <a:lstStyle/>
-          <a:p>
-            <a:pPr marL="0" indent="0">
-              <a:lnSpc>
-                <a:spcPct val="115000"/>
-              </a:lnSpc>
-              <a:buNone/>
-            </a:pPr>
-            <a:r>
-              <a:rPr lang="en-US" sz="1200" dirty="0">
-                <a:solidFill>
-                  <a:srgbClr val="1B2340"/>
-                </a:solidFill>
-                <a:latin typeface="Calibri" pitchFamily="34" charset="0"/>
-                <a:ea typeface="Calibri" pitchFamily="34" charset="-122"/>
-                <a:cs typeface="Calibri" pitchFamily="34" charset="-120"/>
-              </a:rPr>
-              <a:t>Guarda el paquete firmado. Revisa la firma y que no haya vencido (máximo 120 min). Nunca puede abrirlo: no tiene la clave del médico.</a:t>
-            </a:r>
-            <a:endParaRPr lang="en-US" sz="1200" dirty="0"/>
-          </a:p>
-        </p:txBody>
-      </p:sp>
-      <p:sp>
-        <p:nvSpPr>
-          <p:cNvPr id="25" name="Shape 20"/>
-          <p:cNvSpPr/>
-          <p:nvPr/>
-        </p:nvSpPr>
-        <p:spPr>
-          <a:xfrm>
-            <a:off x="9779508" y="4297680"/>
-            <a:ext cx="201168" cy="201168"/>
-          </a:xfrm>
-          <a:prstGeom prst="ellipse">
-            <a:avLst/>
-          </a:prstGeom>
-          <a:solidFill>
-            <a:srgbClr val="17B8A6"/>
-          </a:solidFill>
-          <a:ln w="19050">
-            <a:solidFill>
-              <a:srgbClr val="FFFFFF"/>
-            </a:solidFill>
-            <a:prstDash val="solid"/>
-          </a:ln>
-        </p:spPr>
-        <p:txBody>
-          <a:bodyPr/>
-          <a:lstStyle/>
-          <a:p>
-            <a:endParaRPr lang="en-US"/>
-          </a:p>
-        </p:txBody>
-      </p:sp>
-      <p:sp>
-        <p:nvSpPr>
-          <p:cNvPr id="26" name="Shape 21"/>
-          <p:cNvSpPr/>
-          <p:nvPr/>
-        </p:nvSpPr>
-        <p:spPr>
-          <a:xfrm>
-            <a:off x="7479792" y="4617720"/>
-            <a:ext cx="4160520" cy="868680"/>
-          </a:xfrm>
-          <a:prstGeom prst="roundRect">
-            <a:avLst>
-              <a:gd name="adj" fmla="val 8421"/>
-            </a:avLst>
-          </a:prstGeom>
-          <a:solidFill>
-            <a:srgbClr val="FFFFFF"/>
-          </a:solidFill>
-          <a:ln w="12700">
-            <a:solidFill>
-              <a:srgbClr val="E2E5F0"/>
-            </a:solidFill>
-            <a:prstDash val="solid"/>
-          </a:ln>
-          <a:effectLst>
-            <a:outerShdw blurRad="101600" dist="38100" dir="5400000" algn="bl" rotWithShape="0">
-              <a:srgbClr val="1B2340">
-                <a:alpha val="12000"/>
-              </a:srgbClr>
-            </a:outerShdw>
-          </a:effectLst>
-        </p:spPr>
-        <p:txBody>
-          <a:bodyPr/>
-          <a:lstStyle/>
-          <a:p>
-            <a:endParaRPr lang="en-US"/>
-          </a:p>
-        </p:txBody>
-      </p:sp>
-      <p:sp>
-        <p:nvSpPr>
-          <p:cNvPr id="27" name="Text 22"/>
-          <p:cNvSpPr txBox="1"/>
-          <p:nvPr/>
-        </p:nvSpPr>
-        <p:spPr>
-          <a:xfrm>
-            <a:off x="7680960" y="4617720"/>
-            <a:ext cx="3758184" cy="868680"/>
-          </a:xfrm>
-          <a:prstGeom prst="rect">
-            <a:avLst/>
-          </a:prstGeom>
-          <a:noFill/>
-          <a:ln/>
-        </p:spPr>
-        <p:txBody>
-          <a:bodyPr wrap="square" lIns="0" tIns="0" rIns="0" bIns="0" rtlCol="0" anchor="ctr"/>
-          <a:lstStyle/>
-          <a:p>
-            <a:pPr marL="0" indent="0">
-              <a:lnSpc>
-                <a:spcPct val="115000"/>
-              </a:lnSpc>
-              <a:buNone/>
-            </a:pPr>
-            <a:r>
-              <a:rPr lang="en-US" sz="1200" dirty="0">
-                <a:solidFill>
-                  <a:srgbClr val="1B2340"/>
-                </a:solidFill>
-                <a:latin typeface="Calibri" pitchFamily="34" charset="0"/>
-                <a:ea typeface="Calibri" pitchFamily="34" charset="-122"/>
-                <a:cs typeface="Calibri" pitchFamily="34" charset="-120"/>
-              </a:rPr>
-              <a:t>Descarga el paquete, lo abre con su propia clave privada, y busca en su propia computadora.</a:t>
-            </a:r>
-            <a:endParaRPr lang="en-US" sz="1200" dirty="0"/>
-          </a:p>
-        </p:txBody>
-      </p:sp>
-      <p:sp>
-        <p:nvSpPr>
-          <p:cNvPr id="31" name="Text 26"/>
-          <p:cNvSpPr/>
-          <p:nvPr/>
-        </p:nvSpPr>
-        <p:spPr>
-          <a:xfrm>
-            <a:off x="11185855" y="6437376"/>
-            <a:ext cx="457200" cy="274320"/>
-          </a:xfrm>
-          <a:prstGeom prst="rect">
-            <a:avLst/>
-          </a:prstGeom>
-          <a:noFill/>
-          <a:ln/>
-        </p:spPr>
-        <p:txBody>
-          <a:bodyPr wrap="square" rtlCol="0" anchor="ctr"/>
-          <a:lstStyle/>
-          <a:p>
-            <a:pPr marL="0" indent="0" algn="r">
-              <a:buNone/>
-            </a:pPr>
-            <a:r>
-              <a:rPr lang="en-US" sz="1050" dirty="0">
-                <a:solidFill>
-                  <a:srgbClr val="5B6485"/>
-                </a:solidFill>
-                <a:latin typeface="Calibri" pitchFamily="34" charset="0"/>
-                <a:ea typeface="Calibri" pitchFamily="34" charset="-122"/>
-                <a:cs typeface="Calibri" pitchFamily="34" charset="-120"/>
-              </a:rPr>
-              <a:t>10</a:t>
-            </a:r>
-            <a:endParaRPr lang="en-US" sz="1050" dirty="0"/>
-          </a:p>
-        </p:txBody>
-      </p:sp>
-    </p:spTree>
-  </p:cSld>
-  <p:clrMapOvr>
-    <a:masterClrMapping/>
-  </p:clrMapOvr>
-</p:sld>
-</file>
-
-<file path=ppt/slides/slide11.xml><?xml version="1.0" encoding="utf-8"?>
-<p:sld xmlns:a="http://schemas.openxmlformats.org/drawingml/2006/main" xmlns:r="http://schemas.openxmlformats.org/officeDocument/2006/relationships" xmlns:p="http://schemas.openxmlformats.org/presentationml/2006/main">
-  <p:cSld name="Slide 11">
-    <p:spTree>
-      <p:nvGrpSpPr>
-        <p:cNvPr id="1" name=""/>
-        <p:cNvGrpSpPr/>
-        <p:nvPr/>
-      </p:nvGrpSpPr>
-      <p:grpSpPr>
-        <a:xfrm>
-          <a:off x="0" y="0"/>
-          <a:ext cx="0" cy="0"/>
-          <a:chOff x="0" y="0"/>
-          <a:chExt cx="0" cy="0"/>
-        </a:xfrm>
-      </p:grpSpPr>
-      <p:sp>
-        <p:nvSpPr>
-          <p:cNvPr id="2" name="Text 0"/>
-          <p:cNvSpPr txBox="1"/>
-          <p:nvPr/>
-        </p:nvSpPr>
-        <p:spPr>
-          <a:xfrm>
-            <a:off x="548640" y="256032"/>
-            <a:ext cx="11094415" cy="274320"/>
-          </a:xfrm>
-          <a:prstGeom prst="rect">
-            <a:avLst/>
-          </a:prstGeom>
-          <a:noFill/>
-          <a:ln/>
-        </p:spPr>
-        <p:txBody>
-          <a:bodyPr wrap="square" lIns="0" tIns="0" rIns="0" bIns="0" rtlCol="0" anchor="ctr"/>
-          <a:lstStyle/>
-          <a:p>
-            <a:pPr marL="0" indent="0">
-              <a:buNone/>
-            </a:pPr>
-            <a:r>
-              <a:rPr lang="en-US" sz="1250" b="1" kern="0" spc="200" dirty="0">
-                <a:solidFill>
-                  <a:srgbClr val="6C6FD9"/>
-                </a:solidFill>
-                <a:latin typeface="Calibri" pitchFamily="34" charset="0"/>
-                <a:ea typeface="Calibri" pitchFamily="34" charset="-122"/>
-                <a:cs typeface="Calibri" pitchFamily="34" charset="-120"/>
-              </a:rPr>
-              <a:t>DEL DISEÑO EN PAPEL AL CÓDIGO REAL</a:t>
-            </a:r>
-            <a:endParaRPr lang="en-US" sz="1250" dirty="0"/>
-          </a:p>
-        </p:txBody>
-      </p:sp>
-      <p:sp>
-        <p:nvSpPr>
-          <p:cNvPr id="3" name="Text 1"/>
-          <p:cNvSpPr txBox="1"/>
-          <p:nvPr/>
-        </p:nvSpPr>
-        <p:spPr>
-          <a:xfrm>
-            <a:off x="548640" y="457200"/>
-            <a:ext cx="11094415" cy="822960"/>
-          </a:xfrm>
-          <a:prstGeom prst="rect">
-            <a:avLst/>
-          </a:prstGeom>
-          <a:noFill/>
-          <a:ln/>
-        </p:spPr>
-        <p:txBody>
-          <a:bodyPr wrap="square" lIns="0" tIns="0" rIns="0" bIns="0" rtlCol="0" anchor="ctr"/>
-          <a:lstStyle/>
-          <a:p>
-            <a:pPr marL="0" indent="0">
-              <a:buNone/>
-            </a:pPr>
-            <a:r>
-              <a:rPr lang="en-US" sz="3200" b="1" dirty="0">
-                <a:solidFill>
-                  <a:srgbClr val="15213E"/>
-                </a:solidFill>
-                <a:latin typeface="Cambria" pitchFamily="34" charset="0"/>
-                <a:ea typeface="Cambria" pitchFamily="34" charset="-122"/>
-                <a:cs typeface="Cambria" pitchFamily="34" charset="-120"/>
-              </a:rPr>
-              <a:t>Tres cosas que solo aparecieron al construirlo</a:t>
-            </a:r>
-            <a:endParaRPr lang="en-US" sz="3200" dirty="0"/>
-          </a:p>
-        </p:txBody>
-      </p:sp>
-      <p:sp>
-        <p:nvSpPr>
-          <p:cNvPr id="4" name="Shape 2"/>
-          <p:cNvSpPr/>
-          <p:nvPr/>
-        </p:nvSpPr>
-        <p:spPr>
-          <a:xfrm>
-            <a:off x="548640" y="1463040"/>
-            <a:ext cx="3520440" cy="2880360"/>
-          </a:xfrm>
-          <a:prstGeom prst="roundRect">
-            <a:avLst>
-              <a:gd name="adj" fmla="val 2540"/>
-            </a:avLst>
-          </a:prstGeom>
-          <a:solidFill>
-            <a:srgbClr val="FFFFFF"/>
-          </a:solidFill>
-          <a:ln w="12700">
-            <a:solidFill>
-              <a:srgbClr val="E2E5F0"/>
-            </a:solidFill>
-            <a:prstDash val="solid"/>
-          </a:ln>
-          <a:effectLst>
-            <a:outerShdw blurRad="101600" dist="38100" dir="5400000" algn="bl" rotWithShape="0">
-              <a:srgbClr val="1B2340">
-                <a:alpha val="12000"/>
-              </a:srgbClr>
-            </a:outerShdw>
-          </a:effectLst>
-        </p:spPr>
-        <p:txBody>
-          <a:bodyPr/>
-          <a:lstStyle/>
-          <a:p>
-            <a:endParaRPr lang="en-US"/>
-          </a:p>
-        </p:txBody>
-      </p:sp>
-      <p:sp>
-        <p:nvSpPr>
-          <p:cNvPr id="5" name="Shape 3"/>
-          <p:cNvSpPr/>
-          <p:nvPr/>
-        </p:nvSpPr>
-        <p:spPr>
-          <a:xfrm>
-            <a:off x="804672" y="1719072"/>
-            <a:ext cx="566928" cy="566928"/>
-          </a:xfrm>
-          <a:prstGeom prst="ellipse">
-            <a:avLst/>
-          </a:prstGeom>
-          <a:solidFill>
-            <a:srgbClr val="15213E"/>
-          </a:solidFill>
-          <a:ln/>
-        </p:spPr>
-        <p:txBody>
-          <a:bodyPr/>
-          <a:lstStyle/>
-          <a:p>
-            <a:endParaRPr lang="en-US"/>
-          </a:p>
-        </p:txBody>
-      </p:sp>
-      <p:pic>
-        <p:nvPicPr>
-          <p:cNvPr id="6" name="Image 0" descr="/tmp/osa_pres/icons/eyeSlash_teal.png"/>
-          <p:cNvPicPr>
-            <a:picLocks noChangeAspect="1"/>
-          </p:cNvPicPr>
-          <p:nvPr/>
-        </p:nvPicPr>
-        <p:blipFill>
-          <a:blip r:embed="rId3"/>
-          <a:stretch>
-            <a:fillRect/>
-          </a:stretch>
-        </p:blipFill>
-        <p:spPr>
-          <a:xfrm>
-            <a:off x="878373" y="1792773"/>
-            <a:ext cx="419527" cy="419527"/>
-          </a:xfrm>
-          <a:prstGeom prst="rect">
-            <a:avLst/>
-          </a:prstGeom>
-        </p:spPr>
-      </p:pic>
-      <p:sp>
-        <p:nvSpPr>
-          <p:cNvPr id="7" name="Text 4"/>
-          <p:cNvSpPr txBox="1"/>
-          <p:nvPr/>
-        </p:nvSpPr>
-        <p:spPr>
-          <a:xfrm>
-            <a:off x="3474720" y="1691640"/>
-            <a:ext cx="411480" cy="411480"/>
-          </a:xfrm>
-          <a:prstGeom prst="rect">
-            <a:avLst/>
-          </a:prstGeom>
-          <a:noFill/>
-          <a:ln/>
-        </p:spPr>
-        <p:txBody>
-          <a:bodyPr wrap="square" lIns="0" tIns="0" rIns="0" bIns="0" rtlCol="0" anchor="ctr"/>
-          <a:lstStyle/>
-          <a:p>
-            <a:pPr marL="0" indent="0" algn="ctr">
-              <a:buNone/>
-            </a:pPr>
-            <a:r>
-              <a:rPr lang="en-US" sz="1600" b="1" dirty="0">
-                <a:solidFill>
-                  <a:srgbClr val="6C6FD9"/>
-                </a:solidFill>
-                <a:latin typeface="Cambria" pitchFamily="34" charset="0"/>
-                <a:ea typeface="Cambria" pitchFamily="34" charset="-122"/>
-                <a:cs typeface="Cambria" pitchFamily="34" charset="-120"/>
-              </a:rPr>
-              <a:t>1</a:t>
-            </a:r>
-            <a:endParaRPr lang="en-US" sz="1600" dirty="0"/>
-          </a:p>
-        </p:txBody>
-      </p:sp>
-      <p:sp>
-        <p:nvSpPr>
-          <p:cNvPr id="8" name="Text 5"/>
-          <p:cNvSpPr txBox="1"/>
-          <p:nvPr/>
-        </p:nvSpPr>
-        <p:spPr>
-          <a:xfrm>
-            <a:off x="804672" y="2468880"/>
-            <a:ext cx="3008376" cy="822960"/>
-          </a:xfrm>
-          <a:prstGeom prst="rect">
-            <a:avLst/>
-          </a:prstGeom>
-          <a:noFill/>
-          <a:ln/>
-        </p:spPr>
-        <p:txBody>
-          <a:bodyPr wrap="square" lIns="0" tIns="0" rIns="0" bIns="0" rtlCol="0" anchor="ctr"/>
-          <a:lstStyle/>
-          <a:p>
-            <a:pPr marL="0" indent="0">
-              <a:lnSpc>
-                <a:spcPct val="110000"/>
-              </a:lnSpc>
-              <a:buNone/>
-            </a:pPr>
-            <a:r>
-              <a:rPr lang="en-US" sz="1400" b="1" dirty="0">
-                <a:solidFill>
-                  <a:srgbClr val="15213E"/>
-                </a:solidFill>
-                <a:latin typeface="Cambria" pitchFamily="34" charset="0"/>
-                <a:ea typeface="Cambria" pitchFamily="34" charset="-122"/>
-                <a:cs typeface="Cambria" pitchFamily="34" charset="-120"/>
-              </a:rPr>
-              <a:t>Los resultados nunca se abren en el servidor</a:t>
-            </a:r>
-            <a:endParaRPr lang="en-US" sz="1400" dirty="0"/>
-          </a:p>
-        </p:txBody>
-      </p:sp>
-      <p:sp>
-        <p:nvSpPr>
-          <p:cNvPr id="9" name="Text 6"/>
-          <p:cNvSpPr txBox="1"/>
-          <p:nvPr/>
-        </p:nvSpPr>
-        <p:spPr>
-          <a:xfrm>
-            <a:off x="804672" y="3291840"/>
-            <a:ext cx="3008376" cy="914400"/>
-          </a:xfrm>
-          <a:prstGeom prst="rect">
-            <a:avLst/>
-          </a:prstGeom>
-          <a:noFill/>
-          <a:ln/>
-        </p:spPr>
-        <p:txBody>
-          <a:bodyPr wrap="square" lIns="0" tIns="0" rIns="0" bIns="0" rtlCol="0" anchor="ctr"/>
-          <a:lstStyle/>
-          <a:p>
-            <a:pPr marL="0" indent="0">
-              <a:lnSpc>
-                <a:spcPct val="118000"/>
-              </a:lnSpc>
-              <a:buNone/>
-            </a:pPr>
-            <a:r>
-              <a:rPr lang="en-US" sz="1200" dirty="0">
-                <a:solidFill>
-                  <a:srgbClr val="5B6485"/>
-                </a:solidFill>
-                <a:latin typeface="Calibri" pitchFamily="34" charset="0"/>
-                <a:ea typeface="Calibri" pitchFamily="34" charset="-122"/>
-                <a:cs typeface="Calibri" pitchFamily="34" charset="-120"/>
-              </a:rPr>
-              <a:t>Viajan cifrados; quien busca los abre en su propia computadora. El control de acceso real pasa cuando se pide cada documento, uno por uno.</a:t>
-            </a:r>
-            <a:endParaRPr lang="en-US" sz="1200" dirty="0"/>
-          </a:p>
-        </p:txBody>
-      </p:sp>
-      <p:sp>
-        <p:nvSpPr>
-          <p:cNvPr id="10" name="Shape 7"/>
-          <p:cNvSpPr/>
-          <p:nvPr/>
-        </p:nvSpPr>
-        <p:spPr>
-          <a:xfrm>
-            <a:off x="4343400" y="1463040"/>
-            <a:ext cx="3520440" cy="2880360"/>
-          </a:xfrm>
-          <a:prstGeom prst="roundRect">
-            <a:avLst>
-              <a:gd name="adj" fmla="val 2540"/>
-            </a:avLst>
-          </a:prstGeom>
-          <a:solidFill>
-            <a:srgbClr val="FFFFFF"/>
-          </a:solidFill>
-          <a:ln w="12700">
-            <a:solidFill>
-              <a:srgbClr val="E2E5F0"/>
-            </a:solidFill>
-            <a:prstDash val="solid"/>
-          </a:ln>
-          <a:effectLst>
-            <a:outerShdw blurRad="101600" dist="38100" dir="5400000" algn="bl" rotWithShape="0">
-              <a:srgbClr val="1B2340">
-                <a:alpha val="12000"/>
-              </a:srgbClr>
-            </a:outerShdw>
-          </a:effectLst>
-        </p:spPr>
-        <p:txBody>
-          <a:bodyPr/>
-          <a:lstStyle/>
-          <a:p>
-            <a:endParaRPr lang="en-US"/>
-          </a:p>
-        </p:txBody>
-      </p:sp>
-      <p:sp>
-        <p:nvSpPr>
-          <p:cNvPr id="11" name="Shape 8"/>
-          <p:cNvSpPr/>
-          <p:nvPr/>
-        </p:nvSpPr>
-        <p:spPr>
-          <a:xfrm>
-            <a:off x="4599432" y="1719072"/>
-            <a:ext cx="566928" cy="566928"/>
-          </a:xfrm>
-          <a:prstGeom prst="ellipse">
-            <a:avLst/>
-          </a:prstGeom>
-          <a:solidFill>
-            <a:srgbClr val="15213E"/>
-          </a:solidFill>
-          <a:ln/>
-        </p:spPr>
-        <p:txBody>
-          <a:bodyPr/>
-          <a:lstStyle/>
-          <a:p>
-            <a:endParaRPr lang="en-US"/>
-          </a:p>
-        </p:txBody>
-      </p:sp>
-      <p:pic>
-        <p:nvPicPr>
-          <p:cNvPr id="12" name="Image 1" descr="/tmp/osa_pres/icons/unlock_teal.png"/>
-          <p:cNvPicPr>
-            <a:picLocks noChangeAspect="1"/>
-          </p:cNvPicPr>
-          <p:nvPr/>
-        </p:nvPicPr>
-        <p:blipFill>
-          <a:blip r:embed="rId4"/>
-          <a:stretch>
-            <a:fillRect/>
-          </a:stretch>
-        </p:blipFill>
-        <p:spPr>
-          <a:xfrm>
-            <a:off x="4673133" y="1792773"/>
-            <a:ext cx="419527" cy="419527"/>
-          </a:xfrm>
-          <a:prstGeom prst="rect">
-            <a:avLst/>
-          </a:prstGeom>
-        </p:spPr>
-      </p:pic>
-      <p:sp>
-        <p:nvSpPr>
-          <p:cNvPr id="13" name="Text 9"/>
-          <p:cNvSpPr txBox="1"/>
-          <p:nvPr/>
-        </p:nvSpPr>
-        <p:spPr>
-          <a:xfrm>
-            <a:off x="7269480" y="1691640"/>
-            <a:ext cx="411480" cy="411480"/>
-          </a:xfrm>
-          <a:prstGeom prst="rect">
-            <a:avLst/>
-          </a:prstGeom>
-          <a:noFill/>
-          <a:ln/>
-        </p:spPr>
-        <p:txBody>
-          <a:bodyPr wrap="square" lIns="0" tIns="0" rIns="0" bIns="0" rtlCol="0" anchor="ctr"/>
-          <a:lstStyle/>
-          <a:p>
-            <a:pPr marL="0" indent="0" algn="ctr">
-              <a:buNone/>
-            </a:pPr>
-            <a:r>
-              <a:rPr lang="en-US" sz="1600" b="1" dirty="0">
-                <a:solidFill>
-                  <a:srgbClr val="6C6FD9"/>
-                </a:solidFill>
-                <a:latin typeface="Cambria" pitchFamily="34" charset="0"/>
-                <a:ea typeface="Cambria" pitchFamily="34" charset="-122"/>
-                <a:cs typeface="Cambria" pitchFamily="34" charset="-120"/>
-              </a:rPr>
-              <a:t>2</a:t>
-            </a:r>
-            <a:endParaRPr lang="en-US" sz="1600" dirty="0"/>
-          </a:p>
-        </p:txBody>
-      </p:sp>
-      <p:sp>
-        <p:nvSpPr>
-          <p:cNvPr id="14" name="Text 10"/>
-          <p:cNvSpPr txBox="1"/>
-          <p:nvPr/>
-        </p:nvSpPr>
-        <p:spPr>
-          <a:xfrm>
-            <a:off x="4599432" y="2468880"/>
-            <a:ext cx="3008376" cy="822960"/>
-          </a:xfrm>
-          <a:prstGeom prst="rect">
-            <a:avLst/>
-          </a:prstGeom>
-          <a:noFill/>
-          <a:ln/>
-        </p:spPr>
-        <p:txBody>
-          <a:bodyPr wrap="square" lIns="0" tIns="0" rIns="0" bIns="0" rtlCol="0" anchor="ctr"/>
-          <a:lstStyle/>
-          <a:p>
-            <a:pPr marL="0" indent="0">
-              <a:lnSpc>
-                <a:spcPct val="110000"/>
-              </a:lnSpc>
-              <a:buNone/>
-            </a:pPr>
-            <a:r>
-              <a:rPr lang="en-US" sz="1400" b="1" dirty="0">
-                <a:solidFill>
-                  <a:srgbClr val="15213E"/>
-                </a:solidFill>
-                <a:latin typeface="Cambria" pitchFamily="34" charset="0"/>
-                <a:ea typeface="Cambria" pitchFamily="34" charset="-122"/>
-                <a:cs typeface="Cambria" pitchFamily="34" charset="-120"/>
-              </a:rPr>
-              <a:t>Cambiar la clave maestra sin volver a envolver cada documento</a:t>
-            </a:r>
-            <a:endParaRPr lang="en-US" sz="1400" dirty="0"/>
-          </a:p>
-        </p:txBody>
-      </p:sp>
-      <p:sp>
-        <p:nvSpPr>
-          <p:cNvPr id="15" name="Text 11"/>
-          <p:cNvSpPr txBox="1"/>
-          <p:nvPr/>
-        </p:nvSpPr>
-        <p:spPr>
-          <a:xfrm>
-            <a:off x="4599432" y="3291840"/>
-            <a:ext cx="3008376" cy="914400"/>
-          </a:xfrm>
-          <a:prstGeom prst="rect">
-            <a:avLst/>
-          </a:prstGeom>
-          <a:noFill/>
-          <a:ln/>
-        </p:spPr>
-        <p:txBody>
-          <a:bodyPr wrap="square" lIns="0" tIns="0" rIns="0" bIns="0" rtlCol="0" anchor="ctr"/>
-          <a:lstStyle/>
-          <a:p>
-            <a:pPr marL="0" indent="0">
-              <a:lnSpc>
-                <a:spcPct val="118000"/>
-              </a:lnSpc>
-              <a:buNone/>
-            </a:pPr>
-            <a:r>
-              <a:rPr lang="en-US" sz="1200" dirty="0">
-                <a:solidFill>
-                  <a:srgbClr val="5B6485"/>
-                </a:solidFill>
-                <a:latin typeface="Calibri" pitchFamily="34" charset="0"/>
-                <a:ea typeface="Calibri" pitchFamily="34" charset="-122"/>
-                <a:cs typeface="Calibri" pitchFamily="34" charset="-120"/>
-              </a:rPr>
-              <a:t>…deja TODO el historial anterior imposible de leer. No es que el sistema falle: es que los datos se pierden para siempre.</a:t>
-            </a:r>
-            <a:endParaRPr lang="en-US" sz="1200" dirty="0"/>
-          </a:p>
-        </p:txBody>
-      </p:sp>
-      <p:sp>
-        <p:nvSpPr>
-          <p:cNvPr id="16" name="Shape 12"/>
-          <p:cNvSpPr/>
-          <p:nvPr/>
-        </p:nvSpPr>
-        <p:spPr>
-          <a:xfrm>
-            <a:off x="8138160" y="1463040"/>
-            <a:ext cx="3520440" cy="2880360"/>
-          </a:xfrm>
-          <a:prstGeom prst="roundRect">
-            <a:avLst>
-              <a:gd name="adj" fmla="val 2540"/>
-            </a:avLst>
-          </a:prstGeom>
-          <a:solidFill>
-            <a:srgbClr val="FFFFFF"/>
-          </a:solidFill>
-          <a:ln w="12700">
-            <a:solidFill>
-              <a:srgbClr val="E2E5F0"/>
-            </a:solidFill>
-            <a:prstDash val="solid"/>
-          </a:ln>
-          <a:effectLst>
-            <a:outerShdw blurRad="101600" dist="38100" dir="5400000" algn="bl" rotWithShape="0">
-              <a:srgbClr val="1B2340">
-                <a:alpha val="12000"/>
-              </a:srgbClr>
-            </a:outerShdw>
-          </a:effectLst>
-        </p:spPr>
-        <p:txBody>
-          <a:bodyPr/>
-          <a:lstStyle/>
-          <a:p>
-            <a:endParaRPr lang="en-US"/>
-          </a:p>
-        </p:txBody>
-      </p:sp>
-      <p:sp>
-        <p:nvSpPr>
-          <p:cNvPr id="17" name="Shape 13"/>
-          <p:cNvSpPr/>
-          <p:nvPr/>
-        </p:nvSpPr>
-        <p:spPr>
-          <a:xfrm>
-            <a:off x="8394192" y="1719072"/>
-            <a:ext cx="566928" cy="566928"/>
-          </a:xfrm>
-          <a:prstGeom prst="ellipse">
-            <a:avLst/>
-          </a:prstGeom>
-          <a:solidFill>
-            <a:srgbClr val="15213E"/>
-          </a:solidFill>
-          <a:ln/>
-        </p:spPr>
-        <p:txBody>
-          <a:bodyPr/>
-          <a:lstStyle/>
-          <a:p>
-            <a:endParaRPr lang="en-US"/>
-          </a:p>
-        </p:txBody>
-      </p:sp>
-      <p:pic>
-        <p:nvPicPr>
-          <p:cNvPr id="18" name="Image 2" descr="/tmp/osa_pres/icons/lock_teal.png"/>
-          <p:cNvPicPr>
-            <a:picLocks noChangeAspect="1"/>
-          </p:cNvPicPr>
-          <p:nvPr/>
-        </p:nvPicPr>
-        <p:blipFill>
-          <a:blip r:embed="rId5"/>
-          <a:stretch>
-            <a:fillRect/>
-          </a:stretch>
-        </p:blipFill>
-        <p:spPr>
-          <a:xfrm>
-            <a:off x="8467893" y="1792773"/>
-            <a:ext cx="419527" cy="419527"/>
-          </a:xfrm>
-          <a:prstGeom prst="rect">
-            <a:avLst/>
-          </a:prstGeom>
-        </p:spPr>
-      </p:pic>
-      <p:sp>
-        <p:nvSpPr>
-          <p:cNvPr id="19" name="Text 14"/>
-          <p:cNvSpPr txBox="1"/>
-          <p:nvPr/>
-        </p:nvSpPr>
-        <p:spPr>
-          <a:xfrm>
-            <a:off x="11064240" y="1691640"/>
-            <a:ext cx="411480" cy="411480"/>
-          </a:xfrm>
-          <a:prstGeom prst="rect">
-            <a:avLst/>
-          </a:prstGeom>
-          <a:noFill/>
-          <a:ln/>
-        </p:spPr>
-        <p:txBody>
-          <a:bodyPr wrap="square" lIns="0" tIns="0" rIns="0" bIns="0" rtlCol="0" anchor="ctr"/>
-          <a:lstStyle/>
-          <a:p>
-            <a:pPr marL="0" indent="0" algn="ctr">
-              <a:buNone/>
-            </a:pPr>
-            <a:r>
-              <a:rPr lang="en-US" sz="1600" b="1" dirty="0">
-                <a:solidFill>
-                  <a:srgbClr val="6C6FD9"/>
-                </a:solidFill>
-                <a:latin typeface="Cambria" pitchFamily="34" charset="0"/>
-                <a:ea typeface="Cambria" pitchFamily="34" charset="-122"/>
-                <a:cs typeface="Cambria" pitchFamily="34" charset="-120"/>
-              </a:rPr>
-              <a:t>3</a:t>
-            </a:r>
-            <a:endParaRPr lang="en-US" sz="1600" dirty="0"/>
-          </a:p>
-        </p:txBody>
-      </p:sp>
-      <p:sp>
-        <p:nvSpPr>
-          <p:cNvPr id="20" name="Text 15"/>
-          <p:cNvSpPr txBox="1"/>
-          <p:nvPr/>
-        </p:nvSpPr>
-        <p:spPr>
-          <a:xfrm>
-            <a:off x="8394192" y="2468880"/>
-            <a:ext cx="3008376" cy="822960"/>
-          </a:xfrm>
-          <a:prstGeom prst="rect">
-            <a:avLst/>
-          </a:prstGeom>
-          <a:noFill/>
-          <a:ln/>
-        </p:spPr>
-        <p:txBody>
-          <a:bodyPr wrap="square" lIns="0" tIns="0" rIns="0" bIns="0" rtlCol="0" anchor="ctr"/>
-          <a:lstStyle/>
-          <a:p>
-            <a:pPr marL="0" indent="0">
-              <a:lnSpc>
-                <a:spcPct val="110000"/>
-              </a:lnSpc>
-              <a:buNone/>
-            </a:pPr>
-            <a:r>
-              <a:rPr lang="en-US" sz="1400" b="1" dirty="0">
-                <a:solidFill>
-                  <a:srgbClr val="15213E"/>
-                </a:solidFill>
-                <a:latin typeface="Cambria" pitchFamily="34" charset="0"/>
-                <a:ea typeface="Cambria" pitchFamily="34" charset="-122"/>
-                <a:cs typeface="Cambria" pitchFamily="34" charset="-120"/>
-              </a:rPr>
-              <a:t>El relleno anti-tamaño debe ir al final</a:t>
-            </a:r>
-            <a:endParaRPr lang="en-US" sz="1400" dirty="0"/>
-          </a:p>
-        </p:txBody>
-      </p:sp>
-      <p:sp>
-        <p:nvSpPr>
-          <p:cNvPr id="21" name="Text 16"/>
-          <p:cNvSpPr txBox="1"/>
-          <p:nvPr/>
-        </p:nvSpPr>
-        <p:spPr>
-          <a:xfrm>
-            <a:off x="8394192" y="3291840"/>
-            <a:ext cx="3008376" cy="914400"/>
-          </a:xfrm>
-          <a:prstGeom prst="rect">
-            <a:avLst/>
-          </a:prstGeom>
-          <a:noFill/>
-          <a:ln/>
-        </p:spPr>
-        <p:txBody>
-          <a:bodyPr wrap="square" lIns="0" tIns="0" rIns="0" bIns="0" rtlCol="0" anchor="ctr"/>
-          <a:lstStyle/>
-          <a:p>
-            <a:pPr marL="0" indent="0">
-              <a:lnSpc>
-                <a:spcPct val="118000"/>
-              </a:lnSpc>
-              <a:buNone/>
-            </a:pPr>
-            <a:r>
-              <a:rPr lang="en-US" sz="1200" dirty="0">
-                <a:solidFill>
-                  <a:srgbClr val="5B6485"/>
-                </a:solidFill>
-                <a:latin typeface="Calibri" pitchFamily="34" charset="0"/>
-                <a:ea typeface="Calibri" pitchFamily="34" charset="-122"/>
-                <a:cs typeface="Calibri" pitchFamily="34" charset="-120"/>
-              </a:rPr>
-              <a:t>Tiene que calcularse sobre el paquete ya cifrado, no sobre el texto original — si no, el servidor rechaza cada archivo que se sube.</a:t>
-            </a:r>
-            <a:endParaRPr lang="en-US" sz="1200" dirty="0"/>
-          </a:p>
-        </p:txBody>
-      </p:sp>
-      <p:sp>
-        <p:nvSpPr>
-          <p:cNvPr id="22" name="Shape 17"/>
-          <p:cNvSpPr/>
-          <p:nvPr/>
-        </p:nvSpPr>
-        <p:spPr>
-          <a:xfrm>
-            <a:off x="548640" y="4617720"/>
-            <a:ext cx="11091672" cy="1691640"/>
-          </a:xfrm>
-          <a:prstGeom prst="roundRect">
-            <a:avLst>
-              <a:gd name="adj" fmla="val 4324"/>
-            </a:avLst>
-          </a:prstGeom>
-          <a:solidFill>
-            <a:srgbClr val="15213E"/>
-          </a:solidFill>
-          <a:ln w="12700">
-            <a:solidFill>
-              <a:srgbClr val="E2E5F0"/>
-            </a:solidFill>
-            <a:prstDash val="solid"/>
-          </a:ln>
-        </p:spPr>
-        <p:txBody>
-          <a:bodyPr/>
-          <a:lstStyle/>
-          <a:p>
-            <a:endParaRPr lang="en-US"/>
-          </a:p>
-        </p:txBody>
-      </p:sp>
-      <p:sp>
-        <p:nvSpPr>
-          <p:cNvPr id="23" name="Text 18"/>
-          <p:cNvSpPr txBox="1"/>
-          <p:nvPr/>
-        </p:nvSpPr>
-        <p:spPr>
-          <a:xfrm>
-            <a:off x="914400" y="4800600"/>
-            <a:ext cx="10332720" cy="365760"/>
-          </a:xfrm>
-          <a:prstGeom prst="rect">
-            <a:avLst/>
-          </a:prstGeom>
-          <a:noFill/>
-          <a:ln/>
-        </p:spPr>
-        <p:txBody>
-          <a:bodyPr wrap="square" lIns="0" tIns="0" rIns="0" bIns="0" rtlCol="0" anchor="ctr"/>
-          <a:lstStyle/>
-          <a:p>
-            <a:pPr marL="0" indent="0">
-              <a:buNone/>
-            </a:pPr>
-            <a:r>
-              <a:rPr lang="en-US" sz="1500" b="1" dirty="0">
-                <a:solidFill>
-                  <a:srgbClr val="17B8A6"/>
-                </a:solidFill>
-                <a:latin typeface="Cambria" pitchFamily="34" charset="0"/>
-                <a:ea typeface="Cambria" pitchFamily="34" charset="-122"/>
-                <a:cs typeface="Cambria" pitchFamily="34" charset="-120"/>
-              </a:rPr>
-              <a:t>Fuera de alcance de este MVP (a propósito)</a:t>
-            </a:r>
-            <a:endParaRPr lang="en-US" sz="1500" dirty="0"/>
-          </a:p>
-        </p:txBody>
-      </p:sp>
-      <p:sp>
-        <p:nvSpPr>
-          <p:cNvPr id="24" name="Text 19"/>
-          <p:cNvSpPr txBox="1"/>
-          <p:nvPr/>
-        </p:nvSpPr>
-        <p:spPr>
-          <a:xfrm>
-            <a:off x="914400" y="5212080"/>
-            <a:ext cx="10332720" cy="914400"/>
-          </a:xfrm>
-          <a:prstGeom prst="rect">
-            <a:avLst/>
-          </a:prstGeom>
-          <a:noFill/>
-          <a:ln/>
-        </p:spPr>
-        <p:txBody>
-          <a:bodyPr wrap="square" lIns="0" tIns="0" rIns="0" bIns="0" rtlCol="0" anchor="ctr"/>
-          <a:lstStyle/>
-          <a:p>
-            <a:pPr marL="0" indent="0">
-              <a:lnSpc>
-                <a:spcPct val="125000"/>
-              </a:lnSpc>
-              <a:buNone/>
-            </a:pPr>
-            <a:r>
-              <a:rPr lang="en-US" sz="1350" dirty="0">
-                <a:solidFill>
-                  <a:srgbClr val="AEB6D6"/>
-                </a:solidFill>
-                <a:latin typeface="Calibri" pitchFamily="34" charset="0"/>
-                <a:ea typeface="Calibri" pitchFamily="34" charset="-122"/>
-                <a:cs typeface="Calibri" pitchFamily="34" charset="-120"/>
-              </a:rPr>
-              <a:t>Acceso de emergencia (“break-glass”) · cifrado transparente de disco en Postgres · verificación real de matrícula médica contra un colegio · exportación FHIR.</a:t>
-            </a:r>
-            <a:endParaRPr lang="en-US" sz="1350" dirty="0"/>
-          </a:p>
-        </p:txBody>
-      </p:sp>
-      <p:sp>
-        <p:nvSpPr>
-          <p:cNvPr id="26" name="Text 21"/>
-          <p:cNvSpPr/>
-          <p:nvPr/>
-        </p:nvSpPr>
-        <p:spPr>
-          <a:xfrm>
-            <a:off x="11185855" y="6437376"/>
-            <a:ext cx="457200" cy="274320"/>
-          </a:xfrm>
-          <a:prstGeom prst="rect">
-            <a:avLst/>
-          </a:prstGeom>
-          <a:noFill/>
-          <a:ln/>
-        </p:spPr>
-        <p:txBody>
-          <a:bodyPr wrap="square" rtlCol="0" anchor="ctr"/>
-          <a:lstStyle/>
-          <a:p>
-            <a:pPr marL="0" indent="0" algn="r">
-              <a:buNone/>
-            </a:pPr>
-            <a:r>
-              <a:rPr lang="en-US" sz="1050" dirty="0">
-                <a:solidFill>
-                  <a:srgbClr val="5B6485"/>
-                </a:solidFill>
-                <a:latin typeface="Calibri" pitchFamily="34" charset="0"/>
-                <a:ea typeface="Calibri" pitchFamily="34" charset="-122"/>
-                <a:cs typeface="Calibri" pitchFamily="34" charset="-120"/>
-              </a:rPr>
-              <a:t>11</a:t>
-            </a:r>
-            <a:endParaRPr lang="en-US" sz="1050" dirty="0"/>
-          </a:p>
-        </p:txBody>
-      </p:sp>
-    </p:spTree>
-  </p:cSld>
-  <p:clrMapOvr>
-    <a:masterClrMapping/>
-  </p:clrMapOvr>
-</p:sld>
-</file>
-
-<file path=ppt/slides/slide12.xml><?xml version="1.0" encoding="utf-8"?>
-<p:sld xmlns:a="http://schemas.openxmlformats.org/drawingml/2006/main" xmlns:r="http://schemas.openxmlformats.org/officeDocument/2006/relationships" xmlns:p="http://schemas.openxmlformats.org/presentationml/2006/main">
   <p:cSld name="Slide 12">
     <p:bg>
       <p:bgPr>
@@ -4619,169 +2596,6 @@
                 <a:cs typeface="Calibri" pitchFamily="34" charset="-120"/>
               </a:rPr>
               <a:t>asimétrico para transportar claves y firmar; simétrico para todo el volumen — KEM/DEM.</a:t>
-            </a:r>
-            <a:endParaRPr lang="en-US" sz="1500" dirty="0"/>
-          </a:p>
-        </p:txBody>
-      </p:sp>
-      <p:sp>
-        <p:nvSpPr>
-          <p:cNvPr id="13" name="Shape 11"/>
-          <p:cNvSpPr/>
-          <p:nvPr/>
-        </p:nvSpPr>
-        <p:spPr>
-          <a:xfrm>
-            <a:off x="548640" y="4663440"/>
-            <a:ext cx="502920" cy="502920"/>
-          </a:xfrm>
-          <a:prstGeom prst="ellipse">
-            <a:avLst/>
-          </a:prstGeom>
-          <a:solidFill>
-            <a:srgbClr val="17B8A6"/>
-          </a:solidFill>
-          <a:ln/>
-        </p:spPr>
-        <p:txBody>
-          <a:bodyPr/>
-          <a:lstStyle/>
-          <a:p>
-            <a:endParaRPr lang="en-US"/>
-          </a:p>
-        </p:txBody>
-      </p:sp>
-      <p:sp>
-        <p:nvSpPr>
-          <p:cNvPr id="14" name="Text 12"/>
-          <p:cNvSpPr txBox="1"/>
-          <p:nvPr/>
-        </p:nvSpPr>
-        <p:spPr>
-          <a:xfrm>
-            <a:off x="548640" y="4663440"/>
-            <a:ext cx="502920" cy="502920"/>
-          </a:xfrm>
-          <a:prstGeom prst="rect">
-            <a:avLst/>
-          </a:prstGeom>
-          <a:noFill/>
-          <a:ln/>
-        </p:spPr>
-        <p:txBody>
-          <a:bodyPr wrap="square" lIns="0" tIns="0" rIns="0" bIns="0" rtlCol="0" anchor="ctr"/>
-          <a:lstStyle/>
-          <a:p>
-            <a:pPr marL="0" indent="0" algn="ctr">
-              <a:buNone/>
-            </a:pPr>
-            <a:r>
-              <a:rPr lang="en-US" sz="1800" b="1" dirty="0">
-                <a:solidFill>
-                  <a:srgbClr val="15213E"/>
-                </a:solidFill>
-                <a:latin typeface="Cambria" pitchFamily="34" charset="0"/>
-                <a:ea typeface="Cambria" pitchFamily="34" charset="-122"/>
-                <a:cs typeface="Cambria" pitchFamily="34" charset="-120"/>
-              </a:rPr>
-              <a:t>4</a:t>
-            </a:r>
-            <a:endParaRPr lang="en-US" sz="1800" dirty="0"/>
-          </a:p>
-        </p:txBody>
-      </p:sp>
-      <p:sp>
-        <p:nvSpPr>
-          <p:cNvPr id="15" name="Text 13"/>
-          <p:cNvSpPr txBox="1"/>
-          <p:nvPr/>
-        </p:nvSpPr>
-        <p:spPr>
-          <a:xfrm>
-            <a:off x="1234440" y="4457700"/>
-            <a:ext cx="10241280" cy="914400"/>
-          </a:xfrm>
-          <a:prstGeom prst="rect">
-            <a:avLst/>
-          </a:prstGeom>
-          <a:noFill/>
-          <a:ln/>
-        </p:spPr>
-        <p:txBody>
-          <a:bodyPr wrap="square" lIns="0" tIns="0" rIns="0" bIns="0" rtlCol="0" anchor="ctr"/>
-          <a:lstStyle/>
-          <a:p>
-            <a:pPr marL="0" indent="0">
-              <a:lnSpc>
-                <a:spcPct val="120000"/>
-              </a:lnSpc>
-              <a:buNone/>
-            </a:pPr>
-            <a:r>
-              <a:rPr lang="en-US" sz="1500" b="1" dirty="0">
-                <a:solidFill>
-                  <a:srgbClr val="FFFFFF"/>
-                </a:solidFill>
-                <a:latin typeface="Calibri" pitchFamily="34" charset="0"/>
-                <a:ea typeface="Calibri" pitchFamily="34" charset="-122"/>
-                <a:cs typeface="Calibri" pitchFamily="34" charset="-120"/>
-              </a:rPr>
-              <a:t>Implementarlo en serio expone bugs invisibles en el pseudocódigo — </a:t>
-            </a:r>
-            <a:r>
-              <a:rPr lang="en-US" sz="1500" dirty="0">
-                <a:solidFill>
-                  <a:srgbClr val="AEB6D6"/>
-                </a:solidFill>
-                <a:latin typeface="Calibri" pitchFamily="34" charset="0"/>
-                <a:ea typeface="Calibri" pitchFamily="34" charset="-122"/>
-                <a:cs typeface="Calibri" pitchFamily="34" charset="-120"/>
-              </a:rPr>
-              <a:t>20 correcciones de </a:t>
-            </a:r>
-            <a:r>
-              <a:rPr lang="en-US" sz="1500" dirty="0" err="1">
-                <a:solidFill>
-                  <a:srgbClr val="AEB6D6"/>
-                </a:solidFill>
-                <a:latin typeface="Calibri" pitchFamily="34" charset="0"/>
-                <a:ea typeface="Calibri" pitchFamily="34" charset="-122"/>
-                <a:cs typeface="Calibri" pitchFamily="34" charset="-120"/>
-              </a:rPr>
-              <a:t>seguridad</a:t>
-            </a:r>
-            <a:r>
-              <a:rPr lang="en-US" sz="1500" dirty="0">
-                <a:solidFill>
-                  <a:srgbClr val="AEB6D6"/>
-                </a:solidFill>
-                <a:latin typeface="Calibri" pitchFamily="34" charset="0"/>
-                <a:ea typeface="Calibri" pitchFamily="34" charset="-122"/>
-                <a:cs typeface="Calibri" pitchFamily="34" charset="-120"/>
-              </a:rPr>
-              <a:t> </a:t>
-            </a:r>
-            <a:r>
-              <a:rPr lang="en-US" sz="1500" dirty="0" err="1">
-                <a:solidFill>
-                  <a:srgbClr val="AEB6D6"/>
-                </a:solidFill>
-                <a:latin typeface="Calibri" pitchFamily="34" charset="0"/>
-                <a:ea typeface="Calibri" pitchFamily="34" charset="-122"/>
-                <a:cs typeface="Calibri" pitchFamily="34" charset="-120"/>
-              </a:rPr>
-              <a:t>documentadas</a:t>
-            </a:r>
-            <a:r>
-              <a:rPr lang="en-US" sz="1500" dirty="0">
-                <a:solidFill>
-                  <a:srgbClr val="AEB6D6"/>
-                </a:solidFill>
-                <a:latin typeface="Calibri" pitchFamily="34" charset="0"/>
-                <a:ea typeface="Calibri" pitchFamily="34" charset="-122"/>
-                <a:cs typeface="Calibri" pitchFamily="34" charset="-120"/>
-              </a:rPr>
-              <a:t>.</a:t>
             </a:r>
             <a:endParaRPr lang="en-US" sz="1500" dirty="0"/>
           </a:p>
@@ -10488,7 +8302,7 @@
               <a:buNone/>
             </a:pPr>
             <a:r>
-              <a:rPr lang="en-US" sz="1350" b="1" dirty="0">
+              <a:rPr lang="en-US" sz="1350" b="1" dirty="0" err="1">
                 <a:solidFill>
                   <a:srgbClr val="15213E"/>
                 </a:solidFill>
@@ -10496,7 +8310,18 @@
                 <a:ea typeface="Cambria" pitchFamily="34" charset="-122"/>
                 <a:cs typeface="Cambria" pitchFamily="34" charset="-120"/>
               </a:rPr>
-              <a:t>En criollo:</a:t>
+              <a:t>Simplificando</a:t>
+            </a:r>
+            <a:r>
+              <a:rPr lang="en-US" sz="1350" b="1" dirty="0">
+                <a:solidFill>
+                  <a:srgbClr val="15213E"/>
+                </a:solidFill>
+                <a:latin typeface="Cambria" pitchFamily="34" charset="0"/>
+                <a:ea typeface="Cambria" pitchFamily="34" charset="-122"/>
+                <a:cs typeface="Cambria" pitchFamily="34" charset="-120"/>
+              </a:rPr>
+              <a:t>:</a:t>
             </a:r>
             <a:endParaRPr lang="en-US" sz="1350" dirty="0"/>
           </a:p>
@@ -10876,7 +8701,7 @@
               <a:buNone/>
             </a:pPr>
             <a:r>
-              <a:rPr lang="en-US" sz="3200" b="1" dirty="0" err="1">
+              <a:rPr lang="en-US" sz="3200" b="1" dirty="0">
                 <a:solidFill>
                   <a:srgbClr val="15213E"/>
                 </a:solidFill>
@@ -10884,18 +8709,7 @@
                 <a:ea typeface="Cambria" pitchFamily="34" charset="-122"/>
                 <a:cs typeface="Cambria" pitchFamily="34" charset="-120"/>
               </a:rPr>
-              <a:t>historia</a:t>
-            </a:r>
-            <a:r>
-              <a:rPr lang="en-US" sz="3200" b="1" dirty="0">
-                <a:solidFill>
-                  <a:srgbClr val="15213E"/>
-                </a:solidFill>
-                <a:latin typeface="Cambria" pitchFamily="34" charset="0"/>
-                <a:ea typeface="Cambria" pitchFamily="34" charset="-122"/>
-                <a:cs typeface="Cambria" pitchFamily="34" charset="-120"/>
-              </a:rPr>
-              <a:t> clínica zero-knowledge</a:t>
+              <a:t>Historia clínica zero-knowledge</a:t>
             </a:r>
             <a:endParaRPr lang="en-US" sz="3200" dirty="0"/>
           </a:p>
@@ -12202,7 +10016,7 @@
 
 <file path=ppt/slides/slide9.xml><?xml version="1.0" encoding="utf-8"?>
 <p:sld xmlns:a="http://schemas.openxmlformats.org/drawingml/2006/main" xmlns:r="http://schemas.openxmlformats.org/officeDocument/2006/relationships" xmlns:p="http://schemas.openxmlformats.org/presentationml/2006/main">
-  <p:cSld name="Slide 9">
+  <p:cSld name="Slide 10">
     <p:spTree>
       <p:nvGrpSpPr>
         <p:cNvPr id="1" name=""/>
@@ -12250,7 +10064,7 @@
                 <a:ea typeface="Calibri" pitchFamily="34" charset="-122"/>
                 <a:cs typeface="Calibri" pitchFamily="34" charset="-120"/>
               </a:rPr>
-              <a:t>LO MISMO, PERO EN LA APLICACIÓN REAL</a:t>
+              <a:t>FIRMA Y NO REPUDIO</a:t>
             </a:r>
             <a:endParaRPr lang="en-US" sz="1250" dirty="0"/>
           </a:p>
@@ -12289,29 +10103,7 @@
                 <a:ea typeface="Cambria" pitchFamily="34" charset="-122"/>
                 <a:cs typeface="Cambria" pitchFamily="34" charset="-120"/>
               </a:rPr>
-              <a:t>Así lo </a:t>
-            </a:r>
-            <a:r>
-              <a:rPr lang="en-US" sz="3200" b="1" dirty="0" err="1">
-                <a:solidFill>
-                  <a:srgbClr val="15213E"/>
-                </a:solidFill>
-                <a:latin typeface="Cambria" pitchFamily="34" charset="0"/>
-                <a:ea typeface="Cambria" pitchFamily="34" charset="-122"/>
-                <a:cs typeface="Cambria" pitchFamily="34" charset="-120"/>
-              </a:rPr>
-              <a:t>hace</a:t>
-            </a:r>
-            <a:r>
-              <a:rPr lang="en-US" sz="3200" b="1" dirty="0">
-                <a:solidFill>
-                  <a:srgbClr val="15213E"/>
-                </a:solidFill>
-                <a:latin typeface="Cambria" pitchFamily="34" charset="0"/>
-                <a:ea typeface="Cambria" pitchFamily="34" charset="-122"/>
-                <a:cs typeface="Cambria" pitchFamily="34" charset="-120"/>
-              </a:rPr>
-              <a:t> en el navegador</a:t>
+              <a:t>El ticket de delegación temporal</a:t>
             </a:r>
             <a:endParaRPr lang="en-US" sz="3200" dirty="0"/>
           </a:p>
@@ -12325,12 +10117,502 @@
         </p:nvSpPr>
         <p:spPr>
           <a:xfrm>
-            <a:off x="548640" y="1463040"/>
-            <a:ext cx="2514600" cy="1234440"/>
+            <a:off x="548640" y="1417320"/>
+            <a:ext cx="3520440" cy="502920"/>
           </a:xfrm>
           <a:prstGeom prst="roundRect">
             <a:avLst>
-              <a:gd name="adj" fmla="val 5926"/>
+              <a:gd name="adj" fmla="val 14545"/>
+            </a:avLst>
+          </a:prstGeom>
+          <a:solidFill>
+            <a:srgbClr val="15213E"/>
+          </a:solidFill>
+          <a:ln/>
+        </p:spPr>
+        <p:txBody>
+          <a:bodyPr/>
+          <a:lstStyle/>
+          <a:p>
+            <a:endParaRPr lang="en-US"/>
+          </a:p>
+        </p:txBody>
+      </p:sp>
+      <p:sp>
+        <p:nvSpPr>
+          <p:cNvPr id="5" name="Shape 3"/>
+          <p:cNvSpPr/>
+          <p:nvPr/>
+        </p:nvSpPr>
+        <p:spPr>
+          <a:xfrm>
+            <a:off x="640080" y="1472184"/>
+            <a:ext cx="384048" cy="384048"/>
+          </a:xfrm>
+          <a:prstGeom prst="ellipse">
+            <a:avLst/>
+          </a:prstGeom>
+          <a:solidFill>
+            <a:srgbClr val="17B8A6"/>
+          </a:solidFill>
+          <a:ln/>
+        </p:spPr>
+        <p:txBody>
+          <a:bodyPr/>
+          <a:lstStyle/>
+          <a:p>
+            <a:endParaRPr lang="en-US"/>
+          </a:p>
+        </p:txBody>
+      </p:sp>
+      <p:pic>
+        <p:nvPicPr>
+          <p:cNvPr id="6" name="Image 0" descr="/tmp/osa_pres/icons/user_navy.png"/>
+          <p:cNvPicPr>
+            <a:picLocks noChangeAspect="1"/>
+          </p:cNvPicPr>
+          <p:nvPr/>
+        </p:nvPicPr>
+        <p:blipFill>
+          <a:blip r:embed="rId3"/>
+          <a:stretch>
+            <a:fillRect/>
+          </a:stretch>
+        </p:blipFill>
+        <p:spPr>
+          <a:xfrm>
+            <a:off x="690006" y="1522110"/>
+            <a:ext cx="284196" cy="284196"/>
+          </a:xfrm>
+          <a:prstGeom prst="rect">
+            <a:avLst/>
+          </a:prstGeom>
+        </p:spPr>
+      </p:pic>
+      <p:sp>
+        <p:nvSpPr>
+          <p:cNvPr id="7" name="Text 4"/>
+          <p:cNvSpPr txBox="1"/>
+          <p:nvPr/>
+        </p:nvSpPr>
+        <p:spPr>
+          <a:xfrm>
+            <a:off x="1097280" y="1417320"/>
+            <a:ext cx="2880360" cy="502920"/>
+          </a:xfrm>
+          <a:prstGeom prst="rect">
+            <a:avLst/>
+          </a:prstGeom>
+          <a:noFill/>
+          <a:ln/>
+        </p:spPr>
+        <p:txBody>
+          <a:bodyPr wrap="square" lIns="0" tIns="0" rIns="0" bIns="0" rtlCol="0" anchor="ctr"/>
+          <a:lstStyle/>
+          <a:p>
+            <a:pPr marL="0" indent="0">
+              <a:buNone/>
+            </a:pPr>
+            <a:r>
+              <a:rPr lang="en-US" sz="1250" b="1" dirty="0">
+                <a:solidFill>
+                  <a:srgbClr val="FFFFFF"/>
+                </a:solidFill>
+                <a:latin typeface="Calibri" pitchFamily="34" charset="0"/>
+                <a:ea typeface="Calibri" pitchFamily="34" charset="-122"/>
+                <a:cs typeface="Calibri" pitchFamily="34" charset="-120"/>
+              </a:rPr>
+              <a:t>Paciente</a:t>
+            </a:r>
+            <a:endParaRPr lang="en-US" sz="1250" dirty="0"/>
+          </a:p>
+        </p:txBody>
+      </p:sp>
+      <p:sp>
+        <p:nvSpPr>
+          <p:cNvPr id="8" name="Shape 5"/>
+          <p:cNvSpPr/>
+          <p:nvPr/>
+        </p:nvSpPr>
+        <p:spPr>
+          <a:xfrm>
+            <a:off x="2308860" y="1920240"/>
+            <a:ext cx="0" cy="3977640"/>
+          </a:xfrm>
+          <a:prstGeom prst="line">
+            <a:avLst/>
+          </a:prstGeom>
+          <a:noFill/>
+          <a:ln w="12700">
+            <a:solidFill>
+              <a:srgbClr val="E2E5F0"/>
+            </a:solidFill>
+            <a:prstDash val="dash"/>
+          </a:ln>
+        </p:spPr>
+        <p:txBody>
+          <a:bodyPr/>
+          <a:lstStyle/>
+          <a:p>
+            <a:endParaRPr lang="en-US"/>
+          </a:p>
+        </p:txBody>
+      </p:sp>
+      <p:sp>
+        <p:nvSpPr>
+          <p:cNvPr id="9" name="Shape 6"/>
+          <p:cNvSpPr/>
+          <p:nvPr/>
+        </p:nvSpPr>
+        <p:spPr>
+          <a:xfrm>
+            <a:off x="4334256" y="1417320"/>
+            <a:ext cx="3520440" cy="502920"/>
+          </a:xfrm>
+          <a:prstGeom prst="roundRect">
+            <a:avLst>
+              <a:gd name="adj" fmla="val 14545"/>
+            </a:avLst>
+          </a:prstGeom>
+          <a:solidFill>
+            <a:srgbClr val="15213E"/>
+          </a:solidFill>
+          <a:ln/>
+        </p:spPr>
+        <p:txBody>
+          <a:bodyPr/>
+          <a:lstStyle/>
+          <a:p>
+            <a:endParaRPr lang="en-US"/>
+          </a:p>
+        </p:txBody>
+      </p:sp>
+      <p:sp>
+        <p:nvSpPr>
+          <p:cNvPr id="10" name="Shape 7"/>
+          <p:cNvSpPr/>
+          <p:nvPr/>
+        </p:nvSpPr>
+        <p:spPr>
+          <a:xfrm>
+            <a:off x="4425696" y="1472184"/>
+            <a:ext cx="384048" cy="384048"/>
+          </a:xfrm>
+          <a:prstGeom prst="ellipse">
+            <a:avLst/>
+          </a:prstGeom>
+          <a:solidFill>
+            <a:srgbClr val="17B8A6"/>
+          </a:solidFill>
+          <a:ln/>
+        </p:spPr>
+        <p:txBody>
+          <a:bodyPr/>
+          <a:lstStyle/>
+          <a:p>
+            <a:endParaRPr lang="en-US"/>
+          </a:p>
+        </p:txBody>
+      </p:sp>
+      <p:pic>
+        <p:nvPicPr>
+          <p:cNvPr id="11" name="Image 1" descr="/tmp/osa_pres/icons/database_navy.png"/>
+          <p:cNvPicPr>
+            <a:picLocks noChangeAspect="1"/>
+          </p:cNvPicPr>
+          <p:nvPr/>
+        </p:nvPicPr>
+        <p:blipFill>
+          <a:blip r:embed="rId4"/>
+          <a:stretch>
+            <a:fillRect/>
+          </a:stretch>
+        </p:blipFill>
+        <p:spPr>
+          <a:xfrm>
+            <a:off x="4475622" y="1522110"/>
+            <a:ext cx="284196" cy="284196"/>
+          </a:xfrm>
+          <a:prstGeom prst="rect">
+            <a:avLst/>
+          </a:prstGeom>
+        </p:spPr>
+      </p:pic>
+      <p:sp>
+        <p:nvSpPr>
+          <p:cNvPr id="12" name="Text 8"/>
+          <p:cNvSpPr txBox="1"/>
+          <p:nvPr/>
+        </p:nvSpPr>
+        <p:spPr>
+          <a:xfrm>
+            <a:off x="4882896" y="1417320"/>
+            <a:ext cx="2880360" cy="502920"/>
+          </a:xfrm>
+          <a:prstGeom prst="rect">
+            <a:avLst/>
+          </a:prstGeom>
+          <a:noFill/>
+          <a:ln/>
+        </p:spPr>
+        <p:txBody>
+          <a:bodyPr wrap="square" lIns="0" tIns="0" rIns="0" bIns="0" rtlCol="0" anchor="ctr"/>
+          <a:lstStyle/>
+          <a:p>
+            <a:pPr marL="0" indent="0">
+              <a:buNone/>
+            </a:pPr>
+            <a:r>
+              <a:rPr lang="en-US" sz="1250" b="1" dirty="0" err="1">
+                <a:solidFill>
+                  <a:srgbClr val="FFFFFF"/>
+                </a:solidFill>
+                <a:latin typeface="Calibri" pitchFamily="34" charset="0"/>
+                <a:ea typeface="Calibri" pitchFamily="34" charset="-122"/>
+                <a:cs typeface="Calibri" pitchFamily="34" charset="-120"/>
+              </a:rPr>
+              <a:t>Servidor</a:t>
+            </a:r>
+            <a:r>
+              <a:rPr lang="en-US" sz="1250" b="1" dirty="0">
+                <a:solidFill>
+                  <a:srgbClr val="FFFFFF"/>
+                </a:solidFill>
+                <a:latin typeface="Calibri" pitchFamily="34" charset="0"/>
+                <a:ea typeface="Calibri" pitchFamily="34" charset="-122"/>
+                <a:cs typeface="Calibri" pitchFamily="34" charset="-120"/>
+              </a:rPr>
+              <a:t> (custodio ciego)</a:t>
+            </a:r>
+            <a:endParaRPr lang="en-US" sz="1250" dirty="0"/>
+          </a:p>
+        </p:txBody>
+      </p:sp>
+      <p:sp>
+        <p:nvSpPr>
+          <p:cNvPr id="13" name="Shape 9"/>
+          <p:cNvSpPr/>
+          <p:nvPr/>
+        </p:nvSpPr>
+        <p:spPr>
+          <a:xfrm>
+            <a:off x="6094476" y="1920240"/>
+            <a:ext cx="0" cy="3977640"/>
+          </a:xfrm>
+          <a:prstGeom prst="line">
+            <a:avLst/>
+          </a:prstGeom>
+          <a:noFill/>
+          <a:ln w="12700">
+            <a:solidFill>
+              <a:srgbClr val="E2E5F0"/>
+            </a:solidFill>
+            <a:prstDash val="dash"/>
+          </a:ln>
+        </p:spPr>
+        <p:txBody>
+          <a:bodyPr/>
+          <a:lstStyle/>
+          <a:p>
+            <a:endParaRPr lang="en-US"/>
+          </a:p>
+        </p:txBody>
+      </p:sp>
+      <p:sp>
+        <p:nvSpPr>
+          <p:cNvPr id="14" name="Shape 10"/>
+          <p:cNvSpPr/>
+          <p:nvPr/>
+        </p:nvSpPr>
+        <p:spPr>
+          <a:xfrm>
+            <a:off x="8119872" y="1417320"/>
+            <a:ext cx="3520440" cy="502920"/>
+          </a:xfrm>
+          <a:prstGeom prst="roundRect">
+            <a:avLst>
+              <a:gd name="adj" fmla="val 14545"/>
+            </a:avLst>
+          </a:prstGeom>
+          <a:solidFill>
+            <a:srgbClr val="15213E"/>
+          </a:solidFill>
+          <a:ln/>
+        </p:spPr>
+        <p:txBody>
+          <a:bodyPr/>
+          <a:lstStyle/>
+          <a:p>
+            <a:endParaRPr lang="en-US"/>
+          </a:p>
+        </p:txBody>
+      </p:sp>
+      <p:sp>
+        <p:nvSpPr>
+          <p:cNvPr id="15" name="Shape 11"/>
+          <p:cNvSpPr/>
+          <p:nvPr/>
+        </p:nvSpPr>
+        <p:spPr>
+          <a:xfrm>
+            <a:off x="8211312" y="1472184"/>
+            <a:ext cx="384048" cy="384048"/>
+          </a:xfrm>
+          <a:prstGeom prst="ellipse">
+            <a:avLst/>
+          </a:prstGeom>
+          <a:solidFill>
+            <a:srgbClr val="17B8A6"/>
+          </a:solidFill>
+          <a:ln/>
+        </p:spPr>
+        <p:txBody>
+          <a:bodyPr/>
+          <a:lstStyle/>
+          <a:p>
+            <a:endParaRPr lang="en-US"/>
+          </a:p>
+        </p:txBody>
+      </p:sp>
+      <p:pic>
+        <p:nvPicPr>
+          <p:cNvPr id="16" name="Image 2" descr="/tmp/osa_pres/icons/userMd_navy.png"/>
+          <p:cNvPicPr>
+            <a:picLocks noChangeAspect="1"/>
+          </p:cNvPicPr>
+          <p:nvPr/>
+        </p:nvPicPr>
+        <p:blipFill>
+          <a:blip r:embed="rId5"/>
+          <a:stretch>
+            <a:fillRect/>
+          </a:stretch>
+        </p:blipFill>
+        <p:spPr>
+          <a:xfrm>
+            <a:off x="8261238" y="1522110"/>
+            <a:ext cx="284196" cy="284196"/>
+          </a:xfrm>
+          <a:prstGeom prst="rect">
+            <a:avLst/>
+          </a:prstGeom>
+        </p:spPr>
+      </p:pic>
+      <p:sp>
+        <p:nvSpPr>
+          <p:cNvPr id="17" name="Text 12"/>
+          <p:cNvSpPr txBox="1"/>
+          <p:nvPr/>
+        </p:nvSpPr>
+        <p:spPr>
+          <a:xfrm>
+            <a:off x="8668512" y="1417320"/>
+            <a:ext cx="2880360" cy="502920"/>
+          </a:xfrm>
+          <a:prstGeom prst="rect">
+            <a:avLst/>
+          </a:prstGeom>
+          <a:noFill/>
+          <a:ln/>
+        </p:spPr>
+        <p:txBody>
+          <a:bodyPr wrap="square" lIns="0" tIns="0" rIns="0" bIns="0" rtlCol="0" anchor="ctr"/>
+          <a:lstStyle/>
+          <a:p>
+            <a:pPr marL="0" indent="0">
+              <a:buNone/>
+            </a:pPr>
+            <a:r>
+              <a:rPr lang="en-US" sz="1250" b="1" dirty="0">
+                <a:solidFill>
+                  <a:srgbClr val="FFFFFF"/>
+                </a:solidFill>
+                <a:latin typeface="Calibri" pitchFamily="34" charset="0"/>
+                <a:ea typeface="Calibri" pitchFamily="34" charset="-122"/>
+                <a:cs typeface="Calibri" pitchFamily="34" charset="-120"/>
+              </a:rPr>
+              <a:t>Médico</a:t>
+            </a:r>
+            <a:endParaRPr lang="en-US" sz="1250" dirty="0"/>
+          </a:p>
+        </p:txBody>
+      </p:sp>
+      <p:sp>
+        <p:nvSpPr>
+          <p:cNvPr id="18" name="Shape 13"/>
+          <p:cNvSpPr/>
+          <p:nvPr/>
+        </p:nvSpPr>
+        <p:spPr>
+          <a:xfrm>
+            <a:off x="9880092" y="1920240"/>
+            <a:ext cx="0" cy="3977640"/>
+          </a:xfrm>
+          <a:prstGeom prst="line">
+            <a:avLst/>
+          </a:prstGeom>
+          <a:noFill/>
+          <a:ln w="12700">
+            <a:solidFill>
+              <a:srgbClr val="E2E5F0"/>
+            </a:solidFill>
+            <a:prstDash val="dash"/>
+          </a:ln>
+        </p:spPr>
+        <p:txBody>
+          <a:bodyPr/>
+          <a:lstStyle/>
+          <a:p>
+            <a:endParaRPr lang="en-US"/>
+          </a:p>
+        </p:txBody>
+      </p:sp>
+      <p:sp>
+        <p:nvSpPr>
+          <p:cNvPr id="19" name="Shape 14"/>
+          <p:cNvSpPr/>
+          <p:nvPr/>
+        </p:nvSpPr>
+        <p:spPr>
+          <a:xfrm>
+            <a:off x="2208276" y="2194560"/>
+            <a:ext cx="201168" cy="201168"/>
+          </a:xfrm>
+          <a:prstGeom prst="ellipse">
+            <a:avLst/>
+          </a:prstGeom>
+          <a:solidFill>
+            <a:srgbClr val="17B8A6"/>
+          </a:solidFill>
+          <a:ln w="19050">
+            <a:solidFill>
+              <a:srgbClr val="FFFFFF"/>
+            </a:solidFill>
+            <a:prstDash val="solid"/>
+          </a:ln>
+        </p:spPr>
+        <p:txBody>
+          <a:bodyPr/>
+          <a:lstStyle/>
+          <a:p>
+            <a:endParaRPr lang="en-US"/>
+          </a:p>
+        </p:txBody>
+      </p:sp>
+      <p:sp>
+        <p:nvSpPr>
+          <p:cNvPr id="20" name="Shape 15"/>
+          <p:cNvSpPr/>
+          <p:nvPr/>
+        </p:nvSpPr>
+        <p:spPr>
+          <a:xfrm>
+            <a:off x="548640" y="2514600"/>
+            <a:ext cx="4160520" cy="868680"/>
+          </a:xfrm>
+          <a:prstGeom prst="roundRect">
+            <a:avLst>
+              <a:gd name="adj" fmla="val 8421"/>
             </a:avLst>
           </a:prstGeom>
           <a:solidFill>
@@ -12360,65 +10642,14 @@
       </p:sp>
       <p:sp>
         <p:nvSpPr>
-          <p:cNvPr id="5" name="Shape 3"/>
-          <p:cNvSpPr/>
-          <p:nvPr/>
-        </p:nvSpPr>
-        <p:spPr>
-          <a:xfrm>
-            <a:off x="731520" y="1719072"/>
-            <a:ext cx="566928" cy="566928"/>
-          </a:xfrm>
-          <a:prstGeom prst="ellipse">
-            <a:avLst/>
-          </a:prstGeom>
-          <a:solidFill>
-            <a:srgbClr val="15213E"/>
-          </a:solidFill>
-          <a:ln/>
-        </p:spPr>
-        <p:txBody>
-          <a:bodyPr/>
-          <a:lstStyle/>
-          <a:p>
-            <a:endParaRPr lang="en-US"/>
-          </a:p>
-        </p:txBody>
-      </p:sp>
-      <p:pic>
-        <p:nvPicPr>
-          <p:cNvPr id="6" name="Image 0" descr="/tmp/osa_pres/icons/key_teal.png"/>
-          <p:cNvPicPr>
-            <a:picLocks noChangeAspect="1"/>
-          </p:cNvPicPr>
-          <p:nvPr/>
-        </p:nvPicPr>
-        <p:blipFill>
-          <a:blip r:embed="rId3"/>
-          <a:stretch>
-            <a:fillRect/>
-          </a:stretch>
-        </p:blipFill>
-        <p:spPr>
-          <a:xfrm>
-            <a:off x="805221" y="1792773"/>
-            <a:ext cx="419527" cy="419527"/>
-          </a:xfrm>
-          <a:prstGeom prst="rect">
-            <a:avLst/>
-          </a:prstGeom>
-        </p:spPr>
-      </p:pic>
-      <p:sp>
-        <p:nvSpPr>
-          <p:cNvPr id="7" name="Text 4"/>
-          <p:cNvSpPr txBox="1"/>
-          <p:nvPr/>
-        </p:nvSpPr>
-        <p:spPr>
-          <a:xfrm>
-            <a:off x="1417320" y="1463040"/>
-            <a:ext cx="1508760" cy="1234440"/>
+          <p:cNvPr id="21" name="Text 16"/>
+          <p:cNvSpPr txBox="1"/>
+          <p:nvPr/>
+        </p:nvSpPr>
+        <p:spPr>
+          <a:xfrm>
+            <a:off x="749808" y="2514600"/>
+            <a:ext cx="3758184" cy="868680"/>
           </a:xfrm>
           <a:prstGeom prst="rect">
             <a:avLst/>
@@ -12432,113 +10663,48 @@
           <a:p>
             <a:pPr marL="0" indent="0">
               <a:lnSpc>
-                <a:spcPct val="105000"/>
+                <a:spcPct val="115000"/>
               </a:lnSpc>
               <a:buNone/>
             </a:pPr>
             <a:r>
-              <a:rPr lang="en-US" sz="1150" b="1" dirty="0">
-                <a:solidFill>
-                  <a:srgbClr val="15213E"/>
-                </a:solidFill>
-                <a:latin typeface="Calibri" pitchFamily="34" charset="0"/>
-                <a:ea typeface="Calibri" pitchFamily="34" charset="-122"/>
-                <a:cs typeface="Calibri" pitchFamily="34" charset="-120"/>
-              </a:rPr>
-              <a:t>Clave de</a:t>
-            </a:r>
-            <a:endParaRPr lang="en-US" sz="1150" dirty="0"/>
-          </a:p>
-          <a:p>
-            <a:pPr marL="0" indent="0">
-              <a:lnSpc>
-                <a:spcPct val="105000"/>
-              </a:lnSpc>
-              <a:buNone/>
-            </a:pPr>
-            <a:r>
-              <a:rPr lang="en-US" sz="1150" b="1" dirty="0">
-                <a:solidFill>
-                  <a:srgbClr val="15213E"/>
-                </a:solidFill>
-                <a:latin typeface="Calibri" pitchFamily="34" charset="0"/>
-                <a:ea typeface="Calibri" pitchFamily="34" charset="-122"/>
-                <a:cs typeface="Calibri" pitchFamily="34" charset="-120"/>
-              </a:rPr>
-              <a:t>un solo uso</a:t>
-            </a:r>
-            <a:endParaRPr lang="en-US" sz="1150" dirty="0"/>
-          </a:p>
-        </p:txBody>
-      </p:sp>
-      <p:sp>
-        <p:nvSpPr>
-          <p:cNvPr id="8" name="Text 5"/>
-          <p:cNvSpPr txBox="1"/>
-          <p:nvPr/>
-        </p:nvSpPr>
-        <p:spPr>
-          <a:xfrm>
-            <a:off x="3063240" y="1463040"/>
-            <a:ext cx="344424" cy="1234440"/>
-          </a:xfrm>
-          <a:prstGeom prst="rect">
-            <a:avLst/>
-          </a:prstGeom>
-          <a:noFill/>
-          <a:ln/>
-        </p:spPr>
-        <p:txBody>
-          <a:bodyPr wrap="square" lIns="0" tIns="0" rIns="0" bIns="0" rtlCol="0" anchor="ctr"/>
-          <a:lstStyle/>
-          <a:p>
-            <a:pPr marL="0" indent="0" algn="ctr">
-              <a:buNone/>
-            </a:pPr>
-            <a:r>
-              <a:rPr lang="en-US" sz="2000" b="1" dirty="0">
-                <a:solidFill>
-                  <a:srgbClr val="5B6485"/>
-                </a:solidFill>
-              </a:rPr>
-              <a:t>→</a:t>
-            </a:r>
-            <a:endParaRPr lang="en-US" sz="2000" dirty="0"/>
-          </a:p>
-        </p:txBody>
-      </p:sp>
-      <p:sp>
-        <p:nvSpPr>
-          <p:cNvPr id="9" name="Shape 6"/>
+              <a:rPr lang="en-US" sz="1200" dirty="0">
+                <a:solidFill>
+                  <a:srgbClr val="1B2340"/>
+                </a:solidFill>
+                <a:latin typeface="Calibri" pitchFamily="34" charset="0"/>
+                <a:ea typeface="Calibri" pitchFamily="34" charset="-122"/>
+                <a:cs typeface="Calibri" pitchFamily="34" charset="-120"/>
+              </a:rPr>
+              <a:t>Junta sus claves de búsqueda y lectura, las cifra para que solo el médico las pueda abrir, y firma todo el paquete.</a:t>
+            </a:r>
+            <a:endParaRPr lang="en-US" sz="1200" dirty="0"/>
+          </a:p>
+        </p:txBody>
+      </p:sp>
+      <p:sp>
+        <p:nvSpPr>
+          <p:cNvPr id="22" name="Shape 17"/>
           <p:cNvSpPr/>
           <p:nvPr/>
         </p:nvSpPr>
         <p:spPr>
           <a:xfrm>
-            <a:off x="3407664" y="1463040"/>
-            <a:ext cx="2514600" cy="1234440"/>
-          </a:xfrm>
-          <a:prstGeom prst="roundRect">
-            <a:avLst>
-              <a:gd name="adj" fmla="val 5926"/>
-            </a:avLst>
+            <a:off x="5993892" y="3246120"/>
+            <a:ext cx="201168" cy="201168"/>
+          </a:xfrm>
+          <a:prstGeom prst="ellipse">
+            <a:avLst/>
           </a:prstGeom>
           <a:solidFill>
-            <a:srgbClr val="15213E"/>
+            <a:srgbClr val="17B8A6"/>
           </a:solidFill>
-          <a:ln w="12700">
+          <a:ln w="19050">
             <a:solidFill>
-              <a:srgbClr val="E2E5F0"/>
+              <a:srgbClr val="FFFFFF"/>
             </a:solidFill>
             <a:prstDash val="solid"/>
           </a:ln>
-          <a:effectLst>
-            <a:outerShdw blurRad="101600" dist="38100" dir="5400000" algn="bl" rotWithShape="0">
-              <a:srgbClr val="1B2340">
-                <a:alpha val="12000"/>
-              </a:srgbClr>
-            </a:outerShdw>
-          </a:effectLst>
         </p:spPr>
         <p:txBody>
           <a:bodyPr/>
@@ -12550,167 +10716,18 @@
       </p:sp>
       <p:sp>
         <p:nvSpPr>
-          <p:cNvPr id="10" name="Shape 7"/>
+          <p:cNvPr id="23" name="Shape 18"/>
           <p:cNvSpPr/>
           <p:nvPr/>
         </p:nvSpPr>
         <p:spPr>
           <a:xfrm>
-            <a:off x="3590544" y="1719072"/>
-            <a:ext cx="566928" cy="566928"/>
-          </a:xfrm>
-          <a:prstGeom prst="ellipse">
-            <a:avLst/>
-          </a:prstGeom>
-          <a:solidFill>
-            <a:srgbClr val="17B8A6"/>
-          </a:solidFill>
-          <a:ln/>
-        </p:spPr>
-        <p:txBody>
-          <a:bodyPr/>
-          <a:lstStyle/>
-          <a:p>
-            <a:endParaRPr lang="en-US"/>
-          </a:p>
-        </p:txBody>
-      </p:sp>
-      <p:pic>
-        <p:nvPicPr>
-          <p:cNvPr id="11" name="Image 1" descr="/tmp/osa_pres/icons/exchange_navy.png"/>
-          <p:cNvPicPr>
-            <a:picLocks noChangeAspect="1"/>
-          </p:cNvPicPr>
-          <p:nvPr/>
-        </p:nvPicPr>
-        <p:blipFill>
-          <a:blip r:embed="rId4"/>
-          <a:stretch>
-            <a:fillRect/>
-          </a:stretch>
-        </p:blipFill>
-        <p:spPr>
-          <a:xfrm>
-            <a:off x="3664245" y="1792773"/>
-            <a:ext cx="419527" cy="419527"/>
-          </a:xfrm>
-          <a:prstGeom prst="rect">
-            <a:avLst/>
-          </a:prstGeom>
-        </p:spPr>
-      </p:pic>
-      <p:sp>
-        <p:nvSpPr>
-          <p:cNvPr id="12" name="Text 8"/>
-          <p:cNvSpPr txBox="1"/>
-          <p:nvPr/>
-        </p:nvSpPr>
-        <p:spPr>
-          <a:xfrm>
-            <a:off x="4276344" y="1463040"/>
-            <a:ext cx="1508760" cy="1234440"/>
-          </a:xfrm>
-          <a:prstGeom prst="rect">
-            <a:avLst/>
-          </a:prstGeom>
-          <a:noFill/>
-          <a:ln/>
-        </p:spPr>
-        <p:txBody>
-          <a:bodyPr wrap="square" lIns="0" tIns="0" rIns="0" bIns="0" rtlCol="0" anchor="ctr"/>
-          <a:lstStyle/>
-          <a:p>
-            <a:pPr marL="0" indent="0">
-              <a:lnSpc>
-                <a:spcPct val="105000"/>
-              </a:lnSpc>
-              <a:buNone/>
-            </a:pPr>
-            <a:r>
-              <a:rPr lang="en-US" sz="1150" b="1" dirty="0">
-                <a:solidFill>
-                  <a:srgbClr val="FFFFFF"/>
-                </a:solidFill>
-                <a:latin typeface="Calibri" pitchFamily="34" charset="0"/>
-                <a:ea typeface="Calibri" pitchFamily="34" charset="-122"/>
-                <a:cs typeface="Calibri" pitchFamily="34" charset="-120"/>
-              </a:rPr>
-              <a:t>Se combina con</a:t>
-            </a:r>
-            <a:endParaRPr lang="en-US" sz="1150" dirty="0"/>
-          </a:p>
-          <a:p>
-            <a:pPr marL="0" indent="0">
-              <a:lnSpc>
-                <a:spcPct val="105000"/>
-              </a:lnSpc>
-              <a:buNone/>
-            </a:pPr>
-            <a:r>
-              <a:rPr lang="en-US" sz="1150" b="1" dirty="0">
-                <a:solidFill>
-                  <a:srgbClr val="FFFFFF"/>
-                </a:solidFill>
-                <a:latin typeface="Calibri" pitchFamily="34" charset="0"/>
-                <a:ea typeface="Calibri" pitchFamily="34" charset="-122"/>
-                <a:cs typeface="Calibri" pitchFamily="34" charset="-120"/>
-              </a:rPr>
-              <a:t>la clave del destino</a:t>
-            </a:r>
-            <a:endParaRPr lang="en-US" sz="1150" dirty="0"/>
-          </a:p>
-        </p:txBody>
-      </p:sp>
-      <p:sp>
-        <p:nvSpPr>
-          <p:cNvPr id="13" name="Text 9"/>
-          <p:cNvSpPr txBox="1"/>
-          <p:nvPr/>
-        </p:nvSpPr>
-        <p:spPr>
-          <a:xfrm>
-            <a:off x="5922264" y="1463040"/>
-            <a:ext cx="344424" cy="1234440"/>
-          </a:xfrm>
-          <a:prstGeom prst="rect">
-            <a:avLst/>
-          </a:prstGeom>
-          <a:noFill/>
-          <a:ln/>
-        </p:spPr>
-        <p:txBody>
-          <a:bodyPr wrap="square" lIns="0" tIns="0" rIns="0" bIns="0" rtlCol="0" anchor="ctr"/>
-          <a:lstStyle/>
-          <a:p>
-            <a:pPr marL="0" indent="0" algn="ctr">
-              <a:buNone/>
-            </a:pPr>
-            <a:r>
-              <a:rPr lang="en-US" sz="2000" b="1" dirty="0">
-                <a:solidFill>
-                  <a:srgbClr val="5B6485"/>
-                </a:solidFill>
-              </a:rPr>
-              <a:t>→</a:t>
-            </a:r>
-            <a:endParaRPr lang="en-US" sz="2000" dirty="0"/>
-          </a:p>
-        </p:txBody>
-      </p:sp>
-      <p:sp>
-        <p:nvSpPr>
-          <p:cNvPr id="14" name="Shape 10"/>
-          <p:cNvSpPr/>
-          <p:nvPr/>
-        </p:nvSpPr>
-        <p:spPr>
-          <a:xfrm>
-            <a:off x="6266688" y="1463040"/>
-            <a:ext cx="2514600" cy="1234440"/>
+            <a:off x="4014216" y="3566160"/>
+            <a:ext cx="4160520" cy="868680"/>
           </a:xfrm>
           <a:prstGeom prst="roundRect">
             <a:avLst>
-              <a:gd name="adj" fmla="val 5926"/>
+              <a:gd name="adj" fmla="val 8421"/>
             </a:avLst>
           </a:prstGeom>
           <a:solidFill>
@@ -12740,65 +10757,14 @@
       </p:sp>
       <p:sp>
         <p:nvSpPr>
-          <p:cNvPr id="15" name="Shape 11"/>
-          <p:cNvSpPr/>
-          <p:nvPr/>
-        </p:nvSpPr>
-        <p:spPr>
-          <a:xfrm>
-            <a:off x="6449568" y="1719072"/>
-            <a:ext cx="566928" cy="566928"/>
-          </a:xfrm>
-          <a:prstGeom prst="ellipse">
-            <a:avLst/>
-          </a:prstGeom>
-          <a:solidFill>
-            <a:srgbClr val="15213E"/>
-          </a:solidFill>
-          <a:ln/>
-        </p:spPr>
-        <p:txBody>
-          <a:bodyPr/>
-          <a:lstStyle/>
-          <a:p>
-            <a:endParaRPr lang="en-US"/>
-          </a:p>
-        </p:txBody>
-      </p:sp>
-      <p:pic>
-        <p:nvPicPr>
-          <p:cNvPr id="16" name="Image 2" descr="/tmp/osa_pres/icons/unlock_teal.png"/>
-          <p:cNvPicPr>
-            <a:picLocks noChangeAspect="1"/>
-          </p:cNvPicPr>
-          <p:nvPr/>
-        </p:nvPicPr>
-        <p:blipFill>
-          <a:blip r:embed="rId5"/>
-          <a:stretch>
-            <a:fillRect/>
-          </a:stretch>
-        </p:blipFill>
-        <p:spPr>
-          <a:xfrm>
-            <a:off x="6523269" y="1792773"/>
-            <a:ext cx="419527" cy="419527"/>
-          </a:xfrm>
-          <a:prstGeom prst="rect">
-            <a:avLst/>
-          </a:prstGeom>
-        </p:spPr>
-      </p:pic>
-      <p:sp>
-        <p:nvSpPr>
-          <p:cNvPr id="17" name="Text 12"/>
-          <p:cNvSpPr txBox="1"/>
-          <p:nvPr/>
-        </p:nvSpPr>
-        <p:spPr>
-          <a:xfrm>
-            <a:off x="7135368" y="1463040"/>
-            <a:ext cx="1508760" cy="1234440"/>
+          <p:cNvPr id="24" name="Text 19"/>
+          <p:cNvSpPr txBox="1"/>
+          <p:nvPr/>
+        </p:nvSpPr>
+        <p:spPr>
+          <a:xfrm>
+            <a:off x="4215384" y="3566160"/>
+            <a:ext cx="3758184" cy="868680"/>
           </a:xfrm>
           <a:prstGeom prst="rect">
             <a:avLst/>
@@ -12812,99 +10778,75 @@
           <a:p>
             <a:pPr marL="0" indent="0">
               <a:lnSpc>
-                <a:spcPct val="105000"/>
+                <a:spcPct val="115000"/>
               </a:lnSpc>
               <a:buNone/>
             </a:pPr>
             <a:r>
-              <a:rPr lang="en-US" sz="1150" b="1" dirty="0">
-                <a:solidFill>
-                  <a:srgbClr val="15213E"/>
-                </a:solidFill>
-                <a:latin typeface="Calibri" pitchFamily="34" charset="0"/>
-                <a:ea typeface="Calibri" pitchFamily="34" charset="-122"/>
-                <a:cs typeface="Calibri" pitchFamily="34" charset="-120"/>
-              </a:rPr>
-              <a:t>Se deriva</a:t>
-            </a:r>
-            <a:endParaRPr lang="en-US" sz="1150" dirty="0"/>
-          </a:p>
-          <a:p>
-            <a:pPr marL="0" indent="0">
-              <a:lnSpc>
-                <a:spcPct val="105000"/>
-              </a:lnSpc>
-              <a:buNone/>
-            </a:pPr>
-            <a:r>
-              <a:rPr lang="en-US" sz="1150" b="1" dirty="0">
-                <a:solidFill>
-                  <a:srgbClr val="15213E"/>
-                </a:solidFill>
-                <a:latin typeface="Calibri" pitchFamily="34" charset="0"/>
-                <a:ea typeface="Calibri" pitchFamily="34" charset="-122"/>
-                <a:cs typeface="Calibri" pitchFamily="34" charset="-120"/>
-              </a:rPr>
-              <a:t>una clave AES</a:t>
-            </a:r>
-            <a:endParaRPr lang="en-US" sz="1150" dirty="0"/>
-          </a:p>
-        </p:txBody>
-      </p:sp>
-      <p:sp>
-        <p:nvSpPr>
-          <p:cNvPr id="18" name="Text 13"/>
-          <p:cNvSpPr txBox="1"/>
-          <p:nvPr/>
-        </p:nvSpPr>
-        <p:spPr>
-          <a:xfrm>
-            <a:off x="8781288" y="1463040"/>
-            <a:ext cx="344424" cy="1234440"/>
-          </a:xfrm>
-          <a:prstGeom prst="rect">
-            <a:avLst/>
-          </a:prstGeom>
-          <a:noFill/>
-          <a:ln/>
-        </p:spPr>
-        <p:txBody>
-          <a:bodyPr wrap="square" lIns="0" tIns="0" rIns="0" bIns="0" rtlCol="0" anchor="ctr"/>
-          <a:lstStyle/>
-          <a:p>
-            <a:pPr marL="0" indent="0" algn="ctr">
-              <a:buNone/>
-            </a:pPr>
-            <a:r>
-              <a:rPr lang="en-US" sz="2000" b="1" dirty="0">
-                <a:solidFill>
-                  <a:srgbClr val="5B6485"/>
-                </a:solidFill>
-              </a:rPr>
-              <a:t>→</a:t>
-            </a:r>
-            <a:endParaRPr lang="en-US" sz="2000" dirty="0"/>
-          </a:p>
-        </p:txBody>
-      </p:sp>
-      <p:sp>
-        <p:nvSpPr>
-          <p:cNvPr id="19" name="Shape 14"/>
+              <a:rPr lang="en-US" sz="1200" dirty="0">
+                <a:solidFill>
+                  <a:srgbClr val="1B2340"/>
+                </a:solidFill>
+                <a:latin typeface="Calibri" pitchFamily="34" charset="0"/>
+                <a:ea typeface="Calibri" pitchFamily="34" charset="-122"/>
+                <a:cs typeface="Calibri" pitchFamily="34" charset="-120"/>
+              </a:rPr>
+              <a:t>Guarda el paquete firmado. Revisa la firma y que no haya vencido (máximo 120 min). Nunca puede abrirlo: no tiene la clave del médico.</a:t>
+            </a:r>
+            <a:endParaRPr lang="en-US" sz="1200" dirty="0"/>
+          </a:p>
+        </p:txBody>
+      </p:sp>
+      <p:sp>
+        <p:nvSpPr>
+          <p:cNvPr id="25" name="Shape 20"/>
           <p:cNvSpPr/>
           <p:nvPr/>
         </p:nvSpPr>
         <p:spPr>
           <a:xfrm>
-            <a:off x="9125712" y="1463040"/>
-            <a:ext cx="2514600" cy="1234440"/>
+            <a:off x="9779508" y="4297680"/>
+            <a:ext cx="201168" cy="201168"/>
+          </a:xfrm>
+          <a:prstGeom prst="ellipse">
+            <a:avLst/>
+          </a:prstGeom>
+          <a:solidFill>
+            <a:srgbClr val="17B8A6"/>
+          </a:solidFill>
+          <a:ln w="19050">
+            <a:solidFill>
+              <a:srgbClr val="FFFFFF"/>
+            </a:solidFill>
+            <a:prstDash val="solid"/>
+          </a:ln>
+        </p:spPr>
+        <p:txBody>
+          <a:bodyPr/>
+          <a:lstStyle/>
+          <a:p>
+            <a:endParaRPr lang="en-US"/>
+          </a:p>
+        </p:txBody>
+      </p:sp>
+      <p:sp>
+        <p:nvSpPr>
+          <p:cNvPr id="26" name="Shape 21"/>
+          <p:cNvSpPr/>
+          <p:nvPr/>
+        </p:nvSpPr>
+        <p:spPr>
+          <a:xfrm>
+            <a:off x="7479792" y="4617720"/>
+            <a:ext cx="4160520" cy="868680"/>
           </a:xfrm>
           <a:prstGeom prst="roundRect">
             <a:avLst>
-              <a:gd name="adj" fmla="val 5926"/>
+              <a:gd name="adj" fmla="val 8421"/>
             </a:avLst>
           </a:prstGeom>
           <a:solidFill>
-            <a:srgbClr val="15213E"/>
+            <a:srgbClr val="FFFFFF"/>
           </a:solidFill>
           <a:ln w="12700">
             <a:solidFill>
@@ -12930,65 +10872,14 @@
       </p:sp>
       <p:sp>
         <p:nvSpPr>
-          <p:cNvPr id="20" name="Shape 15"/>
-          <p:cNvSpPr/>
-          <p:nvPr/>
-        </p:nvSpPr>
-        <p:spPr>
-          <a:xfrm>
-            <a:off x="9308592" y="1719072"/>
-            <a:ext cx="566928" cy="566928"/>
-          </a:xfrm>
-          <a:prstGeom prst="ellipse">
-            <a:avLst/>
-          </a:prstGeom>
-          <a:solidFill>
-            <a:srgbClr val="17B8A6"/>
-          </a:solidFill>
-          <a:ln/>
-        </p:spPr>
-        <p:txBody>
-          <a:bodyPr/>
-          <a:lstStyle/>
-          <a:p>
-            <a:endParaRPr lang="en-US"/>
-          </a:p>
-        </p:txBody>
-      </p:sp>
-      <p:pic>
-        <p:nvPicPr>
-          <p:cNvPr id="21" name="Image 3" descr="/tmp/osa_pres/icons/lock_navy.png"/>
-          <p:cNvPicPr>
-            <a:picLocks noChangeAspect="1"/>
-          </p:cNvPicPr>
-          <p:nvPr/>
-        </p:nvPicPr>
-        <p:blipFill>
-          <a:blip r:embed="rId6"/>
-          <a:stretch>
-            <a:fillRect/>
-          </a:stretch>
-        </p:blipFill>
-        <p:spPr>
-          <a:xfrm>
-            <a:off x="9382293" y="1792773"/>
-            <a:ext cx="419527" cy="419527"/>
-          </a:xfrm>
-          <a:prstGeom prst="rect">
-            <a:avLst/>
-          </a:prstGeom>
-        </p:spPr>
-      </p:pic>
-      <p:sp>
-        <p:nvSpPr>
-          <p:cNvPr id="22" name="Text 16"/>
-          <p:cNvSpPr txBox="1"/>
-          <p:nvPr/>
-        </p:nvSpPr>
-        <p:spPr>
-          <a:xfrm>
-            <a:off x="9994392" y="1463040"/>
-            <a:ext cx="1508760" cy="1234440"/>
+          <p:cNvPr id="27" name="Text 22"/>
+          <p:cNvSpPr txBox="1"/>
+          <p:nvPr/>
+        </p:nvSpPr>
+        <p:spPr>
+          <a:xfrm>
+            <a:off x="7680960" y="4617720"/>
+            <a:ext cx="3758184" cy="868680"/>
           </a:xfrm>
           <a:prstGeom prst="rect">
             <a:avLst/>
@@ -13002,701 +10893,12 @@
           <a:p>
             <a:pPr marL="0" indent="0">
               <a:lnSpc>
-                <a:spcPct val="105000"/>
+                <a:spcPct val="115000"/>
               </a:lnSpc>
               <a:buNone/>
             </a:pPr>
             <a:r>
-              <a:rPr lang="en-US" sz="1150" b="1" dirty="0">
-                <a:solidFill>
-                  <a:srgbClr val="FFFFFF"/>
-                </a:solidFill>
-                <a:latin typeface="Calibri" pitchFamily="34" charset="0"/>
-                <a:ea typeface="Calibri" pitchFamily="34" charset="-122"/>
-                <a:cs typeface="Calibri" pitchFamily="34" charset="-120"/>
-              </a:rPr>
-              <a:t>Se cifra</a:t>
-            </a:r>
-            <a:endParaRPr lang="en-US" sz="1150" dirty="0"/>
-          </a:p>
-          <a:p>
-            <a:pPr marL="0" indent="0">
-              <a:lnSpc>
-                <a:spcPct val="105000"/>
-              </a:lnSpc>
-              <a:buNone/>
-            </a:pPr>
-            <a:r>
-              <a:rPr lang="en-US" sz="1150" b="1" dirty="0">
-                <a:solidFill>
-                  <a:srgbClr val="FFFFFF"/>
-                </a:solidFill>
-                <a:latin typeface="Calibri" pitchFamily="34" charset="0"/>
-                <a:ea typeface="Calibri" pitchFamily="34" charset="-122"/>
-                <a:cs typeface="Calibri" pitchFamily="34" charset="-120"/>
-              </a:rPr>
-              <a:t>el contenido</a:t>
-            </a:r>
-            <a:endParaRPr lang="en-US" sz="1150" dirty="0"/>
-          </a:p>
-        </p:txBody>
-      </p:sp>
-      <p:sp>
-        <p:nvSpPr>
-          <p:cNvPr id="23" name="Text 17"/>
-          <p:cNvSpPr txBox="1"/>
-          <p:nvPr/>
-        </p:nvSpPr>
-        <p:spPr>
-          <a:xfrm>
-            <a:off x="548640" y="2834640"/>
-            <a:ext cx="11091672" cy="365760"/>
-          </a:xfrm>
-          <a:prstGeom prst="rect">
-            <a:avLst/>
-          </a:prstGeom>
-          <a:noFill/>
-          <a:ln/>
-        </p:spPr>
-        <p:txBody>
-          <a:bodyPr wrap="square" lIns="0" tIns="0" rIns="0" bIns="0" rtlCol="0" anchor="ctr"/>
-          <a:lstStyle/>
-          <a:p>
-            <a:pPr marL="0" indent="0" algn="ctr">
-              <a:buNone/>
-            </a:pPr>
-            <a:r>
-              <a:rPr lang="en-US" sz="1300" i="1" dirty="0">
-                <a:solidFill>
-                  <a:srgbClr val="5B6485"/>
-                </a:solidFill>
-                <a:latin typeface="Calibri" pitchFamily="34" charset="0"/>
-                <a:ea typeface="Calibri" pitchFamily="34" charset="-122"/>
-                <a:cs typeface="Calibri" pitchFamily="34" charset="-120"/>
-              </a:rPr>
-              <a:t>El resultado final viaja como un solo paquete: clave de un solo uso + contenido cifrado — nada más.</a:t>
-            </a:r>
-            <a:endParaRPr lang="en-US" sz="1300" dirty="0"/>
-          </a:p>
-        </p:txBody>
-      </p:sp>
-      <p:sp>
-        <p:nvSpPr>
-          <p:cNvPr id="24" name="Shape 18"/>
-          <p:cNvSpPr/>
-          <p:nvPr/>
-        </p:nvSpPr>
-        <p:spPr>
-          <a:xfrm>
-            <a:off x="548640" y="3200400"/>
-            <a:ext cx="6400800" cy="3154680"/>
-          </a:xfrm>
-          <a:prstGeom prst="roundRect">
-            <a:avLst>
-              <a:gd name="adj" fmla="val 2319"/>
-            </a:avLst>
-          </a:prstGeom>
-          <a:solidFill>
-            <a:srgbClr val="15213E"/>
-          </a:solidFill>
-          <a:ln w="12700">
-            <a:solidFill>
-              <a:srgbClr val="E2E5F0"/>
-            </a:solidFill>
-            <a:prstDash val="solid"/>
-          </a:ln>
-        </p:spPr>
-        <p:txBody>
-          <a:bodyPr/>
-          <a:lstStyle/>
-          <a:p>
-            <a:endParaRPr lang="en-US"/>
-          </a:p>
-        </p:txBody>
-      </p:sp>
-      <p:sp>
-        <p:nvSpPr>
-          <p:cNvPr id="25" name="Text 19"/>
-          <p:cNvSpPr txBox="1"/>
-          <p:nvPr/>
-        </p:nvSpPr>
-        <p:spPr>
-          <a:xfrm>
-            <a:off x="822960" y="3383280"/>
-            <a:ext cx="5852160" cy="411480"/>
-          </a:xfrm>
-          <a:prstGeom prst="rect">
-            <a:avLst/>
-          </a:prstGeom>
-          <a:noFill/>
-          <a:ln/>
-        </p:spPr>
-        <p:txBody>
-          <a:bodyPr wrap="square" lIns="0" tIns="0" rIns="0" bIns="0" rtlCol="0" anchor="ctr"/>
-          <a:lstStyle/>
-          <a:p>
-            <a:pPr marL="0" indent="0">
-              <a:buNone/>
-            </a:pPr>
-            <a:r>
-              <a:rPr lang="en-US" sz="1500" b="1" dirty="0">
-                <a:solidFill>
-                  <a:srgbClr val="FFFFFF"/>
-                </a:solidFill>
-                <a:latin typeface="Cambria" pitchFamily="34" charset="0"/>
-                <a:ea typeface="Cambria" pitchFamily="34" charset="-122"/>
-                <a:cs typeface="Cambria" pitchFamily="34" charset="-120"/>
-              </a:rPr>
-              <a:t>Paso a paso, en la aplicación</a:t>
-            </a:r>
-            <a:endParaRPr lang="en-US" sz="1500" dirty="0"/>
-          </a:p>
-        </p:txBody>
-      </p:sp>
-      <p:sp>
-        <p:nvSpPr>
-          <p:cNvPr id="26" name="Shape 20"/>
-          <p:cNvSpPr/>
-          <p:nvPr/>
-        </p:nvSpPr>
-        <p:spPr>
-          <a:xfrm>
-            <a:off x="822960" y="3931920"/>
-            <a:ext cx="365760" cy="365760"/>
-          </a:xfrm>
-          <a:prstGeom prst="ellipse">
-            <a:avLst/>
-          </a:prstGeom>
-          <a:solidFill>
-            <a:srgbClr val="17B8A6"/>
-          </a:solidFill>
-          <a:ln/>
-        </p:spPr>
-        <p:txBody>
-          <a:bodyPr/>
-          <a:lstStyle/>
-          <a:p>
-            <a:endParaRPr lang="en-US"/>
-          </a:p>
-        </p:txBody>
-      </p:sp>
-      <p:sp>
-        <p:nvSpPr>
-          <p:cNvPr id="27" name="Text 21"/>
-          <p:cNvSpPr txBox="1"/>
-          <p:nvPr/>
-        </p:nvSpPr>
-        <p:spPr>
-          <a:xfrm>
-            <a:off x="822960" y="3931920"/>
-            <a:ext cx="365760" cy="365760"/>
-          </a:xfrm>
-          <a:prstGeom prst="rect">
-            <a:avLst/>
-          </a:prstGeom>
-          <a:noFill/>
-          <a:ln/>
-        </p:spPr>
-        <p:txBody>
-          <a:bodyPr wrap="square" lIns="0" tIns="0" rIns="0" bIns="0" rtlCol="0" anchor="ctr"/>
-          <a:lstStyle/>
-          <a:p>
-            <a:pPr marL="0" indent="0" algn="ctr">
-              <a:buNone/>
-            </a:pPr>
-            <a:r>
-              <a:rPr lang="en-US" sz="1300" b="1" dirty="0">
-                <a:solidFill>
-                  <a:srgbClr val="15213E"/>
-                </a:solidFill>
-                <a:latin typeface="Calibri" pitchFamily="34" charset="0"/>
-                <a:ea typeface="Calibri" pitchFamily="34" charset="-122"/>
-                <a:cs typeface="Calibri" pitchFamily="34" charset="-120"/>
-              </a:rPr>
-              <a:t>1</a:t>
-            </a:r>
-            <a:endParaRPr lang="en-US" sz="1300" dirty="0"/>
-          </a:p>
-        </p:txBody>
-      </p:sp>
-      <p:sp>
-        <p:nvSpPr>
-          <p:cNvPr id="28" name="Text 22"/>
-          <p:cNvSpPr txBox="1"/>
-          <p:nvPr/>
-        </p:nvSpPr>
-        <p:spPr>
-          <a:xfrm>
-            <a:off x="1325880" y="3895344"/>
-            <a:ext cx="5394960" cy="548640"/>
-          </a:xfrm>
-          <a:prstGeom prst="rect">
-            <a:avLst/>
-          </a:prstGeom>
-          <a:noFill/>
-          <a:ln/>
-        </p:spPr>
-        <p:txBody>
-          <a:bodyPr wrap="square" lIns="0" tIns="0" rIns="0" bIns="0" rtlCol="0" anchor="ctr"/>
-          <a:lstStyle/>
-          <a:p>
-            <a:pPr marL="0" indent="0">
-              <a:lnSpc>
-                <a:spcPct val="110000"/>
-              </a:lnSpc>
-              <a:buNone/>
-            </a:pPr>
-            <a:r>
-              <a:rPr lang="en-US" sz="1150" dirty="0">
-                <a:solidFill>
-                  <a:srgbClr val="AEB6D6"/>
-                </a:solidFill>
-                <a:latin typeface="Calibri" pitchFamily="34" charset="0"/>
-                <a:ea typeface="Calibri" pitchFamily="34" charset="-122"/>
-                <a:cs typeface="Calibri" pitchFamily="34" charset="-120"/>
-              </a:rPr>
-              <a:t>El navegador crea un par de claves que se usa una sola vez (una clave “efímera”, de un solo uso).</a:t>
-            </a:r>
-            <a:endParaRPr lang="en-US" sz="1150" dirty="0"/>
-          </a:p>
-        </p:txBody>
-      </p:sp>
-      <p:sp>
-        <p:nvSpPr>
-          <p:cNvPr id="29" name="Shape 23"/>
-          <p:cNvSpPr/>
-          <p:nvPr/>
-        </p:nvSpPr>
-        <p:spPr>
-          <a:xfrm>
-            <a:off x="822960" y="4535424"/>
-            <a:ext cx="365760" cy="365760"/>
-          </a:xfrm>
-          <a:prstGeom prst="ellipse">
-            <a:avLst/>
-          </a:prstGeom>
-          <a:solidFill>
-            <a:srgbClr val="17B8A6"/>
-          </a:solidFill>
-          <a:ln/>
-        </p:spPr>
-        <p:txBody>
-          <a:bodyPr/>
-          <a:lstStyle/>
-          <a:p>
-            <a:endParaRPr lang="en-US"/>
-          </a:p>
-        </p:txBody>
-      </p:sp>
-      <p:sp>
-        <p:nvSpPr>
-          <p:cNvPr id="30" name="Text 24"/>
-          <p:cNvSpPr txBox="1"/>
-          <p:nvPr/>
-        </p:nvSpPr>
-        <p:spPr>
-          <a:xfrm>
-            <a:off x="822960" y="4535424"/>
-            <a:ext cx="365760" cy="365760"/>
-          </a:xfrm>
-          <a:prstGeom prst="rect">
-            <a:avLst/>
-          </a:prstGeom>
-          <a:noFill/>
-          <a:ln/>
-        </p:spPr>
-        <p:txBody>
-          <a:bodyPr wrap="square" lIns="0" tIns="0" rIns="0" bIns="0" rtlCol="0" anchor="ctr"/>
-          <a:lstStyle/>
-          <a:p>
-            <a:pPr marL="0" indent="0" algn="ctr">
-              <a:buNone/>
-            </a:pPr>
-            <a:r>
-              <a:rPr lang="en-US" sz="1300" b="1" dirty="0">
-                <a:solidFill>
-                  <a:srgbClr val="15213E"/>
-                </a:solidFill>
-                <a:latin typeface="Calibri" pitchFamily="34" charset="0"/>
-                <a:ea typeface="Calibri" pitchFamily="34" charset="-122"/>
-                <a:cs typeface="Calibri" pitchFamily="34" charset="-120"/>
-              </a:rPr>
-              <a:t>2</a:t>
-            </a:r>
-            <a:endParaRPr lang="en-US" sz="1300" dirty="0"/>
-          </a:p>
-        </p:txBody>
-      </p:sp>
-      <p:sp>
-        <p:nvSpPr>
-          <p:cNvPr id="31" name="Text 25"/>
-          <p:cNvSpPr txBox="1"/>
-          <p:nvPr/>
-        </p:nvSpPr>
-        <p:spPr>
-          <a:xfrm>
-            <a:off x="1325880" y="4498848"/>
-            <a:ext cx="5394960" cy="548640"/>
-          </a:xfrm>
-          <a:prstGeom prst="rect">
-            <a:avLst/>
-          </a:prstGeom>
-          <a:noFill/>
-          <a:ln/>
-        </p:spPr>
-        <p:txBody>
-          <a:bodyPr wrap="square" lIns="0" tIns="0" rIns="0" bIns="0" rtlCol="0" anchor="ctr"/>
-          <a:lstStyle/>
-          <a:p>
-            <a:pPr marL="0" indent="0">
-              <a:lnSpc>
-                <a:spcPct val="110000"/>
-              </a:lnSpc>
-              <a:buNone/>
-            </a:pPr>
-            <a:r>
-              <a:rPr lang="en-US" sz="1150" dirty="0">
-                <a:solidFill>
-                  <a:srgbClr val="AEB6D6"/>
-                </a:solidFill>
-                <a:latin typeface="Calibri" pitchFamily="34" charset="0"/>
-                <a:ea typeface="Calibri" pitchFamily="34" charset="-122"/>
-                <a:cs typeface="Calibri" pitchFamily="34" charset="-120"/>
-              </a:rPr>
-              <a:t>La combina con la clave pública del destinatario (ECDH) y obtiene un secreto compartido — solo esas dos partes pueden calcularlo.</a:t>
-            </a:r>
-            <a:endParaRPr lang="en-US" sz="1150" dirty="0"/>
-          </a:p>
-        </p:txBody>
-      </p:sp>
-      <p:sp>
-        <p:nvSpPr>
-          <p:cNvPr id="32" name="Shape 26"/>
-          <p:cNvSpPr/>
-          <p:nvPr/>
-        </p:nvSpPr>
-        <p:spPr>
-          <a:xfrm>
-            <a:off x="822960" y="5138928"/>
-            <a:ext cx="365760" cy="365760"/>
-          </a:xfrm>
-          <a:prstGeom prst="ellipse">
-            <a:avLst/>
-          </a:prstGeom>
-          <a:solidFill>
-            <a:srgbClr val="17B8A6"/>
-          </a:solidFill>
-          <a:ln/>
-        </p:spPr>
-        <p:txBody>
-          <a:bodyPr/>
-          <a:lstStyle/>
-          <a:p>
-            <a:endParaRPr lang="en-US"/>
-          </a:p>
-        </p:txBody>
-      </p:sp>
-      <p:sp>
-        <p:nvSpPr>
-          <p:cNvPr id="33" name="Text 27"/>
-          <p:cNvSpPr txBox="1"/>
-          <p:nvPr/>
-        </p:nvSpPr>
-        <p:spPr>
-          <a:xfrm>
-            <a:off x="822960" y="5138928"/>
-            <a:ext cx="365760" cy="365760"/>
-          </a:xfrm>
-          <a:prstGeom prst="rect">
-            <a:avLst/>
-          </a:prstGeom>
-          <a:noFill/>
-          <a:ln/>
-        </p:spPr>
-        <p:txBody>
-          <a:bodyPr wrap="square" lIns="0" tIns="0" rIns="0" bIns="0" rtlCol="0" anchor="ctr"/>
-          <a:lstStyle/>
-          <a:p>
-            <a:pPr marL="0" indent="0" algn="ctr">
-              <a:buNone/>
-            </a:pPr>
-            <a:r>
-              <a:rPr lang="en-US" sz="1300" b="1" dirty="0">
-                <a:solidFill>
-                  <a:srgbClr val="15213E"/>
-                </a:solidFill>
-                <a:latin typeface="Calibri" pitchFamily="34" charset="0"/>
-                <a:ea typeface="Calibri" pitchFamily="34" charset="-122"/>
-                <a:cs typeface="Calibri" pitchFamily="34" charset="-120"/>
-              </a:rPr>
-              <a:t>3</a:t>
-            </a:r>
-            <a:endParaRPr lang="en-US" sz="1300" dirty="0"/>
-          </a:p>
-        </p:txBody>
-      </p:sp>
-      <p:sp>
-        <p:nvSpPr>
-          <p:cNvPr id="34" name="Text 28"/>
-          <p:cNvSpPr txBox="1"/>
-          <p:nvPr/>
-        </p:nvSpPr>
-        <p:spPr>
-          <a:xfrm>
-            <a:off x="1325880" y="5102352"/>
-            <a:ext cx="5394960" cy="548640"/>
-          </a:xfrm>
-          <a:prstGeom prst="rect">
-            <a:avLst/>
-          </a:prstGeom>
-          <a:noFill/>
-          <a:ln/>
-        </p:spPr>
-        <p:txBody>
-          <a:bodyPr wrap="square" lIns="0" tIns="0" rIns="0" bIns="0" rtlCol="0" anchor="ctr"/>
-          <a:lstStyle/>
-          <a:p>
-            <a:pPr marL="0" indent="0">
-              <a:lnSpc>
-                <a:spcPct val="110000"/>
-              </a:lnSpc>
-              <a:buNone/>
-            </a:pPr>
-            <a:r>
-              <a:rPr lang="en-US" sz="1150" dirty="0">
-                <a:solidFill>
-                  <a:srgbClr val="AEB6D6"/>
-                </a:solidFill>
-                <a:latin typeface="Calibri" pitchFamily="34" charset="0"/>
-                <a:ea typeface="Calibri" pitchFamily="34" charset="-122"/>
-                <a:cs typeface="Calibri" pitchFamily="34" charset="-120"/>
-              </a:rPr>
-              <a:t>Ese secreto pasa por una función (HKDF) que lo convierte en una clave AES lista para usar.</a:t>
-            </a:r>
-            <a:endParaRPr lang="en-US" sz="1150" dirty="0"/>
-          </a:p>
-        </p:txBody>
-      </p:sp>
-      <p:sp>
-        <p:nvSpPr>
-          <p:cNvPr id="35" name="Shape 29"/>
-          <p:cNvSpPr/>
-          <p:nvPr/>
-        </p:nvSpPr>
-        <p:spPr>
-          <a:xfrm>
-            <a:off x="822960" y="5742432"/>
-            <a:ext cx="365760" cy="365760"/>
-          </a:xfrm>
-          <a:prstGeom prst="ellipse">
-            <a:avLst/>
-          </a:prstGeom>
-          <a:solidFill>
-            <a:srgbClr val="17B8A6"/>
-          </a:solidFill>
-          <a:ln/>
-        </p:spPr>
-        <p:txBody>
-          <a:bodyPr/>
-          <a:lstStyle/>
-          <a:p>
-            <a:endParaRPr lang="en-US"/>
-          </a:p>
-        </p:txBody>
-      </p:sp>
-      <p:sp>
-        <p:nvSpPr>
-          <p:cNvPr id="36" name="Text 30"/>
-          <p:cNvSpPr txBox="1"/>
-          <p:nvPr/>
-        </p:nvSpPr>
-        <p:spPr>
-          <a:xfrm>
-            <a:off x="822960" y="5742432"/>
-            <a:ext cx="365760" cy="365760"/>
-          </a:xfrm>
-          <a:prstGeom prst="rect">
-            <a:avLst/>
-          </a:prstGeom>
-          <a:noFill/>
-          <a:ln/>
-        </p:spPr>
-        <p:txBody>
-          <a:bodyPr wrap="square" lIns="0" tIns="0" rIns="0" bIns="0" rtlCol="0" anchor="ctr"/>
-          <a:lstStyle/>
-          <a:p>
-            <a:pPr marL="0" indent="0" algn="ctr">
-              <a:buNone/>
-            </a:pPr>
-            <a:r>
-              <a:rPr lang="en-US" sz="1300" b="1" dirty="0">
-                <a:solidFill>
-                  <a:srgbClr val="15213E"/>
-                </a:solidFill>
-                <a:latin typeface="Calibri" pitchFamily="34" charset="0"/>
-                <a:ea typeface="Calibri" pitchFamily="34" charset="-122"/>
-                <a:cs typeface="Calibri" pitchFamily="34" charset="-120"/>
-              </a:rPr>
-              <a:t>4</a:t>
-            </a:r>
-            <a:endParaRPr lang="en-US" sz="1300" dirty="0"/>
-          </a:p>
-        </p:txBody>
-      </p:sp>
-      <p:sp>
-        <p:nvSpPr>
-          <p:cNvPr id="37" name="Text 31"/>
-          <p:cNvSpPr txBox="1"/>
-          <p:nvPr/>
-        </p:nvSpPr>
-        <p:spPr>
-          <a:xfrm>
-            <a:off x="1325880" y="5705856"/>
-            <a:ext cx="5394960" cy="548640"/>
-          </a:xfrm>
-          <a:prstGeom prst="rect">
-            <a:avLst/>
-          </a:prstGeom>
-          <a:noFill/>
-          <a:ln/>
-        </p:spPr>
-        <p:txBody>
-          <a:bodyPr wrap="square" lIns="0" tIns="0" rIns="0" bIns="0" rtlCol="0" anchor="ctr"/>
-          <a:lstStyle/>
-          <a:p>
-            <a:pPr marL="0" indent="0">
-              <a:lnSpc>
-                <a:spcPct val="110000"/>
-              </a:lnSpc>
-              <a:buNone/>
-            </a:pPr>
-            <a:r>
-              <a:rPr lang="en-US" sz="1150" dirty="0">
-                <a:solidFill>
-                  <a:srgbClr val="AEB6D6"/>
-                </a:solidFill>
-                <a:latin typeface="Calibri" pitchFamily="34" charset="0"/>
-                <a:ea typeface="Calibri" pitchFamily="34" charset="-122"/>
-                <a:cs typeface="Calibri" pitchFamily="34" charset="-120"/>
-              </a:rPr>
-              <a:t>Con esa clave AES se cifra el contenido real, de forma rápida.</a:t>
-            </a:r>
-            <a:endParaRPr lang="en-US" sz="1150" dirty="0"/>
-          </a:p>
-        </p:txBody>
-      </p:sp>
-      <p:sp>
-        <p:nvSpPr>
-          <p:cNvPr id="38" name="Shape 32"/>
-          <p:cNvSpPr/>
-          <p:nvPr/>
-        </p:nvSpPr>
-        <p:spPr>
-          <a:xfrm>
-            <a:off x="7178040" y="3200400"/>
-            <a:ext cx="4462272" cy="3154680"/>
-          </a:xfrm>
-          <a:prstGeom prst="roundRect">
-            <a:avLst>
-              <a:gd name="adj" fmla="val 2319"/>
-            </a:avLst>
-          </a:prstGeom>
-          <a:solidFill>
-            <a:srgbClr val="F7F8FC"/>
-          </a:solidFill>
-          <a:ln w="12700">
-            <a:solidFill>
-              <a:srgbClr val="E2E5F0"/>
-            </a:solidFill>
-            <a:prstDash val="solid"/>
-          </a:ln>
-          <a:effectLst>
-            <a:outerShdw blurRad="101600" dist="38100" dir="5400000" algn="bl" rotWithShape="0">
-              <a:srgbClr val="1B2340">
-                <a:alpha val="12000"/>
-              </a:srgbClr>
-            </a:outerShdw>
-          </a:effectLst>
-        </p:spPr>
-        <p:txBody>
-          <a:bodyPr/>
-          <a:lstStyle/>
-          <a:p>
-            <a:endParaRPr lang="en-US"/>
-          </a:p>
-        </p:txBody>
-      </p:sp>
-      <p:sp>
-        <p:nvSpPr>
-          <p:cNvPr id="39" name="Text 33"/>
-          <p:cNvSpPr txBox="1"/>
-          <p:nvPr/>
-        </p:nvSpPr>
-        <p:spPr>
-          <a:xfrm>
-            <a:off x="7406640" y="3401568"/>
-            <a:ext cx="4023360" cy="731520"/>
-          </a:xfrm>
-          <a:prstGeom prst="rect">
-            <a:avLst/>
-          </a:prstGeom>
-          <a:noFill/>
-          <a:ln/>
-        </p:spPr>
-        <p:txBody>
-          <a:bodyPr wrap="square" lIns="0" tIns="0" rIns="0" bIns="0" rtlCol="0" anchor="ctr"/>
-          <a:lstStyle/>
-          <a:p>
-            <a:pPr marL="0" indent="0">
-              <a:lnSpc>
-                <a:spcPct val="110000"/>
-              </a:lnSpc>
-              <a:buNone/>
-            </a:pPr>
-            <a:r>
-              <a:rPr lang="en-US" sz="1350" b="1" dirty="0">
-                <a:solidFill>
-                  <a:srgbClr val="15213E"/>
-                </a:solidFill>
-                <a:latin typeface="Cambria" pitchFamily="34" charset="0"/>
-                <a:ea typeface="Cambria" pitchFamily="34" charset="-122"/>
-                <a:cs typeface="Cambria" pitchFamily="34" charset="-120"/>
-              </a:rPr>
-              <a:t>¿Por qué no usar directamente lo que trae el navegador?</a:t>
-            </a:r>
-            <a:endParaRPr lang="en-US" sz="1350" dirty="0"/>
-          </a:p>
-        </p:txBody>
-      </p:sp>
-      <p:sp>
-        <p:nvSpPr>
-          <p:cNvPr id="40" name="Text 34"/>
-          <p:cNvSpPr txBox="1"/>
-          <p:nvPr/>
-        </p:nvSpPr>
-        <p:spPr>
-          <a:xfrm>
-            <a:off x="7406640" y="4160520"/>
-            <a:ext cx="4023360" cy="2011680"/>
-          </a:xfrm>
-          <a:prstGeom prst="rect">
-            <a:avLst/>
-          </a:prstGeom>
-          <a:noFill/>
-          <a:ln/>
-        </p:spPr>
-        <p:txBody>
-          <a:bodyPr wrap="square" lIns="0" tIns="0" rIns="0" bIns="0" rtlCol="0" anchor="ctr"/>
-          <a:lstStyle/>
-          <a:p>
-            <a:pPr marL="0" indent="0">
-              <a:lnSpc>
-                <a:spcPct val="125000"/>
-              </a:lnSpc>
-              <a:buNone/>
-            </a:pPr>
-            <a:r>
-              <a:rPr lang="en-US" sz="1250" dirty="0">
+              <a:rPr lang="en-US" sz="1200" dirty="0">
                 <a:solidFill>
                   <a:srgbClr val="1B2340"/>
                 </a:solidFill>
@@ -13704,15 +10906,15 @@
                 <a:ea typeface="Calibri" pitchFamily="34" charset="-122"/>
                 <a:cs typeface="Calibri" pitchFamily="34" charset="-120"/>
               </a:rPr>
-              <a:t>El sistema de cripto que trae el navegador (WebCrypto) no soporta esta curva (X25519) de forma pareja en todos los navegadores. Por eso se usa una librería aparte, ya revisada por otros, y así el navegador y el servidor hablan exactamente el mismo idioma criptográfico.</a:t>
-            </a:r>
-            <a:endParaRPr lang="en-US" sz="1250" dirty="0"/>
-          </a:p>
-        </p:txBody>
-      </p:sp>
-      <p:sp>
-        <p:nvSpPr>
-          <p:cNvPr id="42" name="Text 36"/>
+              <a:t>Descarga el paquete, lo abre con su propia clave privada, y busca en su propia computadora.</a:t>
+            </a:r>
+            <a:endParaRPr lang="en-US" sz="1200" dirty="0"/>
+          </a:p>
+        </p:txBody>
+      </p:sp>
+      <p:sp>
+        <p:nvSpPr>
+          <p:cNvPr id="31" name="Text 26"/>
           <p:cNvSpPr/>
           <p:nvPr/>
         </p:nvSpPr>
@@ -13743,7 +10945,7 @@
                 <a:ea typeface="Calibri" pitchFamily="34" charset="-122"/>
                 <a:cs typeface="Calibri" pitchFamily="34" charset="-120"/>
               </a:rPr>
-              <a:t>9</a:t>
+              <a:t>10</a:t>
             </a:r>
             <a:endParaRPr lang="en-US" sz="1050" dirty="0"/>
           </a:p>
